--- a/materials/B2/B2_6B-2_Music_to_my_ears.pptx
+++ b/materials/B2/B2_6B-2_Music_to_my_ears.pptx
@@ -2651,7 +2651,7 @@
           </a:solidFill>
           <a:ln w="28575">
             <a:solidFill>
-              <a:srgbClr val="FFFFFF"/>
+              <a:srgbClr val="F7A6C4"/>
             </a:solidFill>
           </a:ln>
           <a:effectLst>
@@ -3454,7 +3454,7 @@
           </a:solidFill>
           <a:ln w="28575">
             <a:solidFill>
-              <a:srgbClr val="FFFFFF"/>
+              <a:srgbClr val="A8E5BE"/>
             </a:solidFill>
           </a:ln>
           <a:effectLst>
@@ -3760,7 +3760,7 @@
           </a:solidFill>
           <a:ln w="28575">
             <a:solidFill>
-              <a:srgbClr val="C9D3E2"/>
+              <a:srgbClr val="A9D3F5"/>
             </a:solidFill>
           </a:ln>
         </p:spPr>
@@ -3809,7 +3809,7 @@
           </a:solidFill>
           <a:ln w="28575">
             <a:solidFill>
-              <a:srgbClr val="D9CCF5"/>
+              <a:srgbClr val="CDBFF3"/>
             </a:solidFill>
           </a:ln>
         </p:spPr>
@@ -4168,7 +4168,7 @@
           </a:solidFill>
           <a:ln w="28575">
             <a:solidFill>
-              <a:srgbClr val="FFFFFF"/>
+              <a:srgbClr val="A9D3F5"/>
             </a:solidFill>
           </a:ln>
           <a:effectLst>
@@ -4555,7 +4555,7 @@
           </a:solidFill>
           <a:ln w="28575">
             <a:solidFill>
-              <a:srgbClr val="C9D3E2"/>
+              <a:srgbClr val="A9D3F5"/>
             </a:solidFill>
           </a:ln>
         </p:spPr>
@@ -4604,7 +4604,7 @@
           </a:solidFill>
           <a:ln w="28575">
             <a:solidFill>
-              <a:srgbClr val="D9CCF5"/>
+              <a:srgbClr val="CDBFF3"/>
             </a:solidFill>
           </a:ln>
         </p:spPr>
@@ -4728,7 +4728,7 @@
           </a:solidFill>
           <a:ln w="28575">
             <a:solidFill>
-              <a:srgbClr val="FFFFFF"/>
+              <a:srgbClr val="F7A6C4"/>
             </a:solidFill>
           </a:ln>
           <a:effectLst>
@@ -4878,7 +4878,7 @@
           </a:solidFill>
           <a:ln w="28575">
             <a:solidFill>
-              <a:srgbClr val="FFFFFF"/>
+              <a:srgbClr val="A9D3F5"/>
             </a:solidFill>
           </a:ln>
           <a:effectLst>
@@ -5028,7 +5028,7 @@
           </a:solidFill>
           <a:ln w="28575">
             <a:solidFill>
-              <a:srgbClr val="FFFFFF"/>
+              <a:srgbClr val="A8E5BE"/>
             </a:solidFill>
           </a:ln>
           <a:effectLst>
@@ -5178,7 +5178,7 @@
           </a:solidFill>
           <a:ln w="28575">
             <a:solidFill>
-              <a:srgbClr val="FFFFFF"/>
+              <a:srgbClr val="FFE07A"/>
             </a:solidFill>
           </a:ln>
           <a:effectLst>
@@ -5328,7 +5328,7 @@
           </a:solidFill>
           <a:ln w="28575">
             <a:solidFill>
-              <a:srgbClr val="FFFFFF"/>
+              <a:srgbClr val="F7A6C4"/>
             </a:solidFill>
           </a:ln>
           <a:effectLst>
@@ -5478,7 +5478,7 @@
           </a:solidFill>
           <a:ln w="28575">
             <a:solidFill>
-              <a:srgbClr val="FFFFFF"/>
+              <a:srgbClr val="A9D3F5"/>
             </a:solidFill>
           </a:ln>
           <a:effectLst>
@@ -5628,7 +5628,7 @@
           </a:solidFill>
           <a:ln w="28575">
             <a:solidFill>
-              <a:srgbClr val="FFFFFF"/>
+              <a:srgbClr val="A8E5BE"/>
             </a:solidFill>
           </a:ln>
           <a:effectLst>
@@ -5778,7 +5778,7 @@
           </a:solidFill>
           <a:ln w="28575">
             <a:solidFill>
-              <a:srgbClr val="FFFFFF"/>
+              <a:srgbClr val="FFE07A"/>
             </a:solidFill>
           </a:ln>
           <a:effectLst>
@@ -6424,7 +6424,7 @@
           </a:solidFill>
           <a:ln w="28575">
             <a:solidFill>
-              <a:srgbClr val="FFFFFF"/>
+              <a:srgbClr val="A8E5BE"/>
             </a:solidFill>
           </a:ln>
           <a:effectLst>
@@ -6730,7 +6730,7 @@
           </a:solidFill>
           <a:ln w="28575">
             <a:solidFill>
-              <a:srgbClr val="C9D3E2"/>
+              <a:srgbClr val="A9D3F5"/>
             </a:solidFill>
           </a:ln>
         </p:spPr>
@@ -6779,7 +6779,7 @@
           </a:solidFill>
           <a:ln w="28575">
             <a:solidFill>
-              <a:srgbClr val="D9CCF5"/>
+              <a:srgbClr val="CDBFF3"/>
             </a:solidFill>
           </a:ln>
         </p:spPr>
@@ -6903,7 +6903,7 @@
           </a:solidFill>
           <a:ln w="28575">
             <a:solidFill>
-              <a:srgbClr val="FFFFFF"/>
+              <a:srgbClr val="F7A6C4"/>
             </a:solidFill>
           </a:ln>
           <a:effectLst>
@@ -7084,7 +7084,7 @@
           </a:solidFill>
           <a:ln w="28575">
             <a:solidFill>
-              <a:srgbClr val="FFFFFF"/>
+              <a:srgbClr val="A9D3F5"/>
             </a:solidFill>
           </a:ln>
           <a:effectLst>
@@ -7265,7 +7265,7 @@
           </a:solidFill>
           <a:ln w="28575">
             <a:solidFill>
-              <a:srgbClr val="FFFFFF"/>
+              <a:srgbClr val="A8E5BE"/>
             </a:solidFill>
           </a:ln>
           <a:effectLst>
@@ -7446,7 +7446,7 @@
           </a:solidFill>
           <a:ln w="28575">
             <a:solidFill>
-              <a:srgbClr val="FFFFFF"/>
+              <a:srgbClr val="FFE07A"/>
             </a:solidFill>
           </a:ln>
           <a:effectLst>
@@ -7627,7 +7627,7 @@
           </a:solidFill>
           <a:ln w="28575">
             <a:solidFill>
-              <a:srgbClr val="FFFFFF"/>
+              <a:srgbClr val="F7A6C4"/>
             </a:solidFill>
           </a:ln>
           <a:effectLst>
@@ -7808,7 +7808,7 @@
           </a:solidFill>
           <a:ln w="28575">
             <a:solidFill>
-              <a:srgbClr val="FFFFFF"/>
+              <a:srgbClr val="A9D3F5"/>
             </a:solidFill>
           </a:ln>
           <a:effectLst>
@@ -8410,7 +8410,7 @@
           </a:solidFill>
           <a:ln w="28575">
             <a:solidFill>
-              <a:srgbClr val="FFFFFF"/>
+              <a:srgbClr val="F7A6C4"/>
             </a:solidFill>
           </a:ln>
           <a:effectLst>
@@ -8797,7 +8797,7 @@
           </a:solidFill>
           <a:ln w="28575">
             <a:solidFill>
-              <a:srgbClr val="C9D3E2"/>
+              <a:srgbClr val="A9D3F5"/>
             </a:solidFill>
           </a:ln>
         </p:spPr>
@@ -8846,7 +8846,7 @@
           </a:solidFill>
           <a:ln w="28575">
             <a:solidFill>
-              <a:srgbClr val="D9CCF5"/>
+              <a:srgbClr val="CDBFF3"/>
             </a:solidFill>
           </a:ln>
         </p:spPr>
@@ -9220,7 +9220,7 @@
           </a:solidFill>
           <a:ln w="28575">
             <a:solidFill>
-              <a:srgbClr val="FFFFFF"/>
+              <a:srgbClr val="F7A6C4"/>
             </a:solidFill>
           </a:ln>
           <a:effectLst>
@@ -9345,7 +9345,7 @@
           </a:solidFill>
           <a:ln w="28575">
             <a:solidFill>
-              <a:srgbClr val="FFFFFF"/>
+              <a:srgbClr val="A9D3F5"/>
             </a:solidFill>
           </a:ln>
           <a:effectLst>
@@ -9470,7 +9470,7 @@
           </a:solidFill>
           <a:ln w="28575">
             <a:solidFill>
-              <a:srgbClr val="FFFFFF"/>
+              <a:srgbClr val="A8E5BE"/>
             </a:solidFill>
           </a:ln>
           <a:effectLst>
@@ -9595,7 +9595,7 @@
           </a:solidFill>
           <a:ln w="28575">
             <a:solidFill>
-              <a:srgbClr val="FFFFFF"/>
+              <a:srgbClr val="FFE07A"/>
             </a:solidFill>
           </a:ln>
           <a:effectLst>
@@ -10144,7 +10144,7 @@
           </a:solidFill>
           <a:ln w="28575">
             <a:solidFill>
-              <a:srgbClr val="FFFFFF"/>
+              <a:srgbClr val="F7A6C4"/>
             </a:solidFill>
           </a:ln>
           <a:effectLst>
@@ -10450,7 +10450,7 @@
           </a:solidFill>
           <a:ln w="28575">
             <a:solidFill>
-              <a:srgbClr val="C9D3E2"/>
+              <a:srgbClr val="A9D3F5"/>
             </a:solidFill>
           </a:ln>
         </p:spPr>
@@ -10499,7 +10499,7 @@
           </a:solidFill>
           <a:ln w="28575">
             <a:solidFill>
-              <a:srgbClr val="D9CCF5"/>
+              <a:srgbClr val="CDBFF3"/>
             </a:solidFill>
           </a:ln>
         </p:spPr>
@@ -10897,7 +10897,7 @@
           </a:solidFill>
           <a:ln w="28575">
             <a:solidFill>
-              <a:srgbClr val="FFFFFF"/>
+              <a:srgbClr val="F7A6C4"/>
             </a:solidFill>
           </a:ln>
           <a:effectLst>
@@ -11022,7 +11022,7 @@
           </a:solidFill>
           <a:ln w="28575">
             <a:solidFill>
-              <a:srgbClr val="FFFFFF"/>
+              <a:srgbClr val="A9D3F5"/>
             </a:solidFill>
           </a:ln>
           <a:effectLst>
@@ -11147,7 +11147,7 @@
           </a:solidFill>
           <a:ln w="28575">
             <a:solidFill>
-              <a:srgbClr val="FFFFFF"/>
+              <a:srgbClr val="A8E5BE"/>
             </a:solidFill>
           </a:ln>
           <a:effectLst>
@@ -11272,7 +11272,7 @@
           </a:solidFill>
           <a:ln w="28575">
             <a:solidFill>
-              <a:srgbClr val="FFFFFF"/>
+              <a:srgbClr val="FFE07A"/>
             </a:solidFill>
           </a:ln>
           <a:effectLst>
@@ -11397,7 +11397,7 @@
           </a:solidFill>
           <a:ln w="28575">
             <a:solidFill>
-              <a:srgbClr val="FFFFFF"/>
+              <a:srgbClr val="F7A6C4"/>
             </a:solidFill>
           </a:ln>
           <a:effectLst>
@@ -12034,7 +12034,7 @@
           </a:solidFill>
           <a:ln w="28575">
             <a:solidFill>
-              <a:srgbClr val="FFFFFF"/>
+              <a:srgbClr val="CDBFF3"/>
             </a:solidFill>
           </a:ln>
           <a:effectLst>
@@ -12421,7 +12421,7 @@
           </a:solidFill>
           <a:ln w="28575">
             <a:solidFill>
-              <a:srgbClr val="C9D3E2"/>
+              <a:srgbClr val="A9D3F5"/>
             </a:solidFill>
           </a:ln>
         </p:spPr>
@@ -12470,7 +12470,7 @@
           </a:solidFill>
           <a:ln w="28575">
             <a:solidFill>
-              <a:srgbClr val="D9CCF5"/>
+              <a:srgbClr val="CDBFF3"/>
             </a:solidFill>
           </a:ln>
         </p:spPr>
@@ -12765,12 +12765,11 @@
           </a:bodyPr>
           <a:lstStyle/>
           <a:p>
-            <a:pPr marL="152400" indent="-152400">
+            <a:pPr indent="0" marL="0">
               <a:spcAft>
                 <a:spcPts val="200"/>
               </a:spcAft>
-              <a:buSzPct val="100000"/>
-              <a:buChar char="•"/>
+              <a:buNone/>
             </a:pPr>
             <a:r>
               <a:rPr lang="en-US" sz="1150" dirty="0">
@@ -12786,15 +12785,14 @@
             <a:endParaRPr lang="en-US" sz="1150" dirty="0"/>
           </a:p>
           <a:p>
-            <a:pPr marL="152400" indent="-152400">
+            <a:pPr indent="0" marL="0">
               <a:spcBef>
                 <a:spcPts val="600"/>
               </a:spcBef>
               <a:spcAft>
                 <a:spcPts val="200"/>
               </a:spcAft>
-              <a:buSzPct val="100000"/>
-              <a:buChar char="•"/>
+              <a:buNone/>
             </a:pPr>
             <a:r>
               <a:rPr lang="en-US" sz="1150" dirty="0">
@@ -12810,15 +12808,14 @@
             <a:endParaRPr lang="en-US" sz="1150" dirty="0"/>
           </a:p>
           <a:p>
-            <a:pPr marL="152400" indent="-152400">
+            <a:pPr indent="0" marL="0">
               <a:spcBef>
                 <a:spcPts val="600"/>
               </a:spcBef>
               <a:spcAft>
                 <a:spcPts val="200"/>
               </a:spcAft>
-              <a:buSzPct val="100000"/>
-              <a:buChar char="•"/>
+              <a:buNone/>
             </a:pPr>
             <a:r>
               <a:rPr lang="en-US" sz="1150" dirty="0">
@@ -12834,15 +12831,14 @@
             <a:endParaRPr lang="en-US" sz="1150" dirty="0"/>
           </a:p>
           <a:p>
-            <a:pPr marL="152400" indent="-152400">
+            <a:pPr indent="0" marL="0">
               <a:spcBef>
                 <a:spcPts val="600"/>
               </a:spcBef>
               <a:spcAft>
                 <a:spcPts val="200"/>
               </a:spcAft>
-              <a:buSzPct val="100000"/>
-              <a:buChar char="•"/>
+              <a:buNone/>
             </a:pPr>
             <a:r>
               <a:rPr lang="en-US" sz="1150" dirty="0">
@@ -12858,15 +12854,14 @@
             <a:endParaRPr lang="en-US" sz="1150" dirty="0"/>
           </a:p>
           <a:p>
-            <a:pPr marL="152400" indent="-152400">
+            <a:pPr indent="0" marL="0">
               <a:spcBef>
                 <a:spcPts val="600"/>
               </a:spcBef>
               <a:spcAft>
                 <a:spcPts val="200"/>
               </a:spcAft>
-              <a:buSzPct val="100000"/>
-              <a:buChar char="•"/>
+              <a:buNone/>
             </a:pPr>
             <a:r>
               <a:rPr lang="en-US" sz="1150" dirty="0">
@@ -12902,7 +12897,7 @@
           </a:solidFill>
           <a:ln w="28575">
             <a:solidFill>
-              <a:srgbClr val="FFFFFF"/>
+              <a:srgbClr val="F7A6C4"/>
             </a:solidFill>
           </a:ln>
           <a:effectLst>
@@ -13087,7 +13082,7 @@
           </a:solidFill>
           <a:ln w="28575">
             <a:solidFill>
-              <a:srgbClr val="FFFFFF"/>
+              <a:srgbClr val="A9D3F5"/>
             </a:solidFill>
           </a:ln>
           <a:effectLst>
@@ -13303,7 +13298,7 @@
           </a:solidFill>
           <a:ln w="28575">
             <a:solidFill>
-              <a:srgbClr val="FFFFFF"/>
+              <a:srgbClr val="A8E5BE"/>
             </a:solidFill>
           </a:ln>
           <a:effectLst>
@@ -13488,7 +13483,7 @@
           </a:solidFill>
           <a:ln w="28575">
             <a:solidFill>
-              <a:srgbClr val="FFFFFF"/>
+              <a:srgbClr val="FFE07A"/>
             </a:solidFill>
           </a:ln>
           <a:effectLst>
@@ -13673,7 +13668,7 @@
           </a:solidFill>
           <a:ln w="28575">
             <a:solidFill>
-              <a:srgbClr val="FFFFFF"/>
+              <a:srgbClr val="F7A6C4"/>
             </a:solidFill>
           </a:ln>
           <a:effectLst>
@@ -13827,7 +13822,7 @@
           </a:solidFill>
           <a:ln w="28575">
             <a:solidFill>
-              <a:srgbClr val="FFFFFF"/>
+              <a:srgbClr val="A9D3F5"/>
             </a:solidFill>
           </a:ln>
           <a:effectLst>
@@ -14581,7 +14576,7 @@
           </a:solidFill>
           <a:ln w="28575">
             <a:solidFill>
-              <a:srgbClr val="FFFFFF"/>
+              <a:srgbClr val="CDBFF3"/>
             </a:solidFill>
           </a:ln>
           <a:effectLst>
@@ -14887,7 +14882,7 @@
           </a:solidFill>
           <a:ln w="28575">
             <a:solidFill>
-              <a:srgbClr val="C9D3E2"/>
+              <a:srgbClr val="A9D3F5"/>
             </a:solidFill>
           </a:ln>
         </p:spPr>
@@ -14936,7 +14931,7 @@
           </a:solidFill>
           <a:ln w="28575">
             <a:solidFill>
-              <a:srgbClr val="D9CCF5"/>
+              <a:srgbClr val="CDBFF3"/>
             </a:solidFill>
           </a:ln>
         </p:spPr>
@@ -15060,7 +15055,7 @@
           </a:solidFill>
           <a:ln w="28575">
             <a:solidFill>
-              <a:srgbClr val="FFFFFF"/>
+              <a:srgbClr val="F7A6C4"/>
             </a:solidFill>
           </a:ln>
           <a:effectLst>
@@ -15166,7 +15161,7 @@
           </a:solidFill>
           <a:ln w="28575">
             <a:solidFill>
-              <a:srgbClr val="FFFFFF"/>
+              <a:srgbClr val="A9D3F5"/>
             </a:solidFill>
           </a:ln>
           <a:effectLst>
@@ -15272,7 +15267,7 @@
           </a:solidFill>
           <a:ln w="28575">
             <a:solidFill>
-              <a:srgbClr val="FFFFFF"/>
+              <a:srgbClr val="A8E5BE"/>
             </a:solidFill>
           </a:ln>
           <a:effectLst>
@@ -15378,7 +15373,7 @@
           </a:solidFill>
           <a:ln w="28575">
             <a:solidFill>
-              <a:srgbClr val="FFFFFF"/>
+              <a:srgbClr val="FFE07A"/>
             </a:solidFill>
           </a:ln>
           <a:effectLst>
@@ -15484,7 +15479,7 @@
           </a:solidFill>
           <a:ln w="28575">
             <a:solidFill>
-              <a:srgbClr val="FFFFFF"/>
+              <a:srgbClr val="F7A6C4"/>
             </a:solidFill>
           </a:ln>
           <a:effectLst>
@@ -15590,7 +15585,7 @@
           </a:solidFill>
           <a:ln w="28575">
             <a:solidFill>
-              <a:srgbClr val="FFFFFF"/>
+              <a:srgbClr val="A9D3F5"/>
             </a:solidFill>
           </a:ln>
           <a:effectLst>
@@ -16296,7 +16291,7 @@
           </a:solidFill>
           <a:ln w="28575">
             <a:solidFill>
-              <a:srgbClr val="FFFFFF"/>
+              <a:srgbClr val="F7A6C4"/>
             </a:solidFill>
           </a:ln>
           <a:effectLst>
@@ -16602,7 +16597,7 @@
           </a:solidFill>
           <a:ln w="28575">
             <a:solidFill>
-              <a:srgbClr val="C9D3E2"/>
+              <a:srgbClr val="A9D3F5"/>
             </a:solidFill>
           </a:ln>
         </p:spPr>
@@ -16651,7 +16646,7 @@
           </a:solidFill>
           <a:ln w="28575">
             <a:solidFill>
-              <a:srgbClr val="D9CCF5"/>
+              <a:srgbClr val="CDBFF3"/>
             </a:solidFill>
           </a:ln>
         </p:spPr>
@@ -17072,7 +17067,7 @@
           </a:solidFill>
           <a:ln w="28575">
             <a:solidFill>
-              <a:srgbClr val="FFFFFF"/>
+              <a:srgbClr val="F7A6C4"/>
             </a:solidFill>
           </a:ln>
           <a:effectLst>
@@ -17222,7 +17217,7 @@
           </a:solidFill>
           <a:ln w="28575">
             <a:solidFill>
-              <a:srgbClr val="FFFFFF"/>
+              <a:srgbClr val="A9D3F5"/>
             </a:solidFill>
           </a:ln>
           <a:effectLst>
@@ -17372,7 +17367,7 @@
           </a:solidFill>
           <a:ln w="28575">
             <a:solidFill>
-              <a:srgbClr val="FFFFFF"/>
+              <a:srgbClr val="A8E5BE"/>
             </a:solidFill>
           </a:ln>
           <a:effectLst>
@@ -17522,7 +17517,7 @@
           </a:solidFill>
           <a:ln w="28575">
             <a:solidFill>
-              <a:srgbClr val="FFFFFF"/>
+              <a:srgbClr val="FFE07A"/>
             </a:solidFill>
           </a:ln>
           <a:effectLst>
@@ -17956,7 +17951,7 @@
           </a:solidFill>
           <a:ln w="28575">
             <a:solidFill>
-              <a:srgbClr val="FFFFFF"/>
+              <a:srgbClr val="A9D3F5"/>
             </a:solidFill>
           </a:ln>
           <a:effectLst>
@@ -18181,7 +18176,7 @@
           </a:solidFill>
           <a:ln w="28575">
             <a:solidFill>
-              <a:srgbClr val="C9D3E2"/>
+              <a:srgbClr val="A9D3F5"/>
             </a:solidFill>
           </a:ln>
         </p:spPr>
@@ -18230,7 +18225,7 @@
           </a:solidFill>
           <a:ln w="28575">
             <a:solidFill>
-              <a:srgbClr val="D9CCF5"/>
+              <a:srgbClr val="CDBFF3"/>
             </a:solidFill>
           </a:ln>
         </p:spPr>
@@ -18354,7 +18349,7 @@
           </a:solidFill>
           <a:ln w="28575">
             <a:solidFill>
-              <a:srgbClr val="FFFFFF"/>
+              <a:srgbClr val="F7A6C4"/>
             </a:solidFill>
           </a:ln>
           <a:effectLst>
@@ -18462,7 +18457,7 @@
           </a:solidFill>
           <a:ln w="28575">
             <a:solidFill>
-              <a:srgbClr val="FFFFFF"/>
+              <a:srgbClr val="A9D3F5"/>
             </a:solidFill>
           </a:ln>
           <a:effectLst>
@@ -18570,7 +18565,7 @@
           </a:solidFill>
           <a:ln w="28575">
             <a:solidFill>
-              <a:srgbClr val="FFFFFF"/>
+              <a:srgbClr val="A8E5BE"/>
             </a:solidFill>
           </a:ln>
           <a:effectLst>
@@ -18952,7 +18947,7 @@
           </a:solidFill>
           <a:ln w="28575">
             <a:solidFill>
-              <a:srgbClr val="FFFFFF"/>
+              <a:srgbClr val="A8E5BE"/>
             </a:solidFill>
           </a:ln>
           <a:effectLst>
@@ -19258,7 +19253,7 @@
           </a:solidFill>
           <a:ln w="28575">
             <a:solidFill>
-              <a:srgbClr val="C9D3E2"/>
+              <a:srgbClr val="A9D3F5"/>
             </a:solidFill>
           </a:ln>
         </p:spPr>
@@ -19307,7 +19302,7 @@
           </a:solidFill>
           <a:ln w="28575">
             <a:solidFill>
-              <a:srgbClr val="D9CCF5"/>
+              <a:srgbClr val="CDBFF3"/>
             </a:solidFill>
           </a:ln>
         </p:spPr>
@@ -20591,7 +20586,7 @@
           </a:solidFill>
           <a:ln w="28575">
             <a:solidFill>
-              <a:srgbClr val="FFFFFF"/>
+              <a:srgbClr val="F7A6C4"/>
             </a:solidFill>
           </a:ln>
           <a:effectLst>
@@ -20897,7 +20892,7 @@
           </a:solidFill>
           <a:ln w="28575">
             <a:solidFill>
-              <a:srgbClr val="C9D3E2"/>
+              <a:srgbClr val="A9D3F5"/>
             </a:solidFill>
           </a:ln>
         </p:spPr>
@@ -20946,7 +20941,7 @@
           </a:solidFill>
           <a:ln w="28575">
             <a:solidFill>
-              <a:srgbClr val="D9CCF5"/>
+              <a:srgbClr val="CDBFF3"/>
             </a:solidFill>
           </a:ln>
         </p:spPr>
@@ -21343,7 +21338,7 @@
           </a:solidFill>
           <a:ln w="28575">
             <a:solidFill>
-              <a:srgbClr val="FFFFFF"/>
+              <a:srgbClr val="F7A6C4"/>
             </a:solidFill>
           </a:ln>
           <a:effectLst>
@@ -21493,7 +21488,7 @@
           </a:solidFill>
           <a:ln w="28575">
             <a:solidFill>
-              <a:srgbClr val="FFFFFF"/>
+              <a:srgbClr val="A9D3F5"/>
             </a:solidFill>
           </a:ln>
           <a:effectLst>
@@ -21643,7 +21638,7 @@
           </a:solidFill>
           <a:ln w="28575">
             <a:solidFill>
-              <a:srgbClr val="FFFFFF"/>
+              <a:srgbClr val="A8E5BE"/>
             </a:solidFill>
           </a:ln>
           <a:effectLst>
@@ -21793,7 +21788,7 @@
           </a:solidFill>
           <a:ln w="28575">
             <a:solidFill>
-              <a:srgbClr val="FFFFFF"/>
+              <a:srgbClr val="FFE07A"/>
             </a:solidFill>
           </a:ln>
           <a:effectLst>
@@ -21943,7 +21938,7 @@
           </a:solidFill>
           <a:ln w="28575">
             <a:solidFill>
-              <a:srgbClr val="FFFFFF"/>
+              <a:srgbClr val="F7A6C4"/>
             </a:solidFill>
           </a:ln>
           <a:effectLst>
@@ -22093,7 +22088,7 @@
           </a:solidFill>
           <a:ln w="28575">
             <a:solidFill>
-              <a:srgbClr val="FFFFFF"/>
+              <a:srgbClr val="A9D3F5"/>
             </a:solidFill>
           </a:ln>
           <a:effectLst>
@@ -22633,7 +22628,7 @@
           </a:solidFill>
           <a:ln w="28575">
             <a:solidFill>
-              <a:srgbClr val="FFFFFF"/>
+              <a:srgbClr val="F7A6C4"/>
             </a:solidFill>
           </a:ln>
           <a:effectLst>
@@ -22939,7 +22934,7 @@
           </a:solidFill>
           <a:ln w="28575">
             <a:solidFill>
-              <a:srgbClr val="C9D3E2"/>
+              <a:srgbClr val="A9D3F5"/>
             </a:solidFill>
           </a:ln>
         </p:spPr>
@@ -22988,7 +22983,7 @@
           </a:solidFill>
           <a:ln w="28575">
             <a:solidFill>
-              <a:srgbClr val="D9CCF5"/>
+              <a:srgbClr val="CDBFF3"/>
             </a:solidFill>
           </a:ln>
         </p:spPr>
@@ -23392,7 +23387,7 @@
           </a:solidFill>
           <a:ln w="28575">
             <a:solidFill>
-              <a:srgbClr val="FFFFFF"/>
+              <a:srgbClr val="F7A6C4"/>
             </a:solidFill>
           </a:ln>
           <a:effectLst>
@@ -23517,7 +23512,7 @@
           </a:solidFill>
           <a:ln w="28575">
             <a:solidFill>
-              <a:srgbClr val="FFFFFF"/>
+              <a:srgbClr val="A9D3F5"/>
             </a:solidFill>
           </a:ln>
           <a:effectLst>
@@ -23642,7 +23637,7 @@
           </a:solidFill>
           <a:ln w="28575">
             <a:solidFill>
-              <a:srgbClr val="FFFFFF"/>
+              <a:srgbClr val="A8E5BE"/>
             </a:solidFill>
           </a:ln>
           <a:effectLst>
@@ -23767,7 +23762,7 @@
           </a:solidFill>
           <a:ln w="28575">
             <a:solidFill>
-              <a:srgbClr val="FFFFFF"/>
+              <a:srgbClr val="FFE07A"/>
             </a:solidFill>
           </a:ln>
           <a:effectLst>
@@ -23892,7 +23887,7 @@
           </a:solidFill>
           <a:ln w="28575">
             <a:solidFill>
-              <a:srgbClr val="FFFFFF"/>
+              <a:srgbClr val="F7A6C4"/>
             </a:solidFill>
           </a:ln>
           <a:effectLst>
@@ -24529,7 +24524,7 @@
           </a:solidFill>
           <a:ln w="28575">
             <a:solidFill>
-              <a:srgbClr val="FFFFFF"/>
+              <a:srgbClr val="F7A6C4"/>
             </a:solidFill>
           </a:ln>
           <a:effectLst>
@@ -24835,7 +24830,7 @@
           </a:solidFill>
           <a:ln w="28575">
             <a:solidFill>
-              <a:srgbClr val="C9D3E2"/>
+              <a:srgbClr val="A9D3F5"/>
             </a:solidFill>
           </a:ln>
         </p:spPr>
@@ -24884,7 +24879,7 @@
           </a:solidFill>
           <a:ln w="28575">
             <a:solidFill>
-              <a:srgbClr val="D9CCF5"/>
+              <a:srgbClr val="CDBFF3"/>
             </a:solidFill>
           </a:ln>
         </p:spPr>
@@ -25258,7 +25253,7 @@
           </a:solidFill>
           <a:ln w="28575">
             <a:solidFill>
-              <a:srgbClr val="FFFFFF"/>
+              <a:srgbClr val="F7A6C4"/>
             </a:solidFill>
           </a:ln>
           <a:effectLst>
@@ -25383,7 +25378,7 @@
           </a:solidFill>
           <a:ln w="28575">
             <a:solidFill>
-              <a:srgbClr val="FFFFFF"/>
+              <a:srgbClr val="A9D3F5"/>
             </a:solidFill>
           </a:ln>
           <a:effectLst>
@@ -25508,7 +25503,7 @@
           </a:solidFill>
           <a:ln w="28575">
             <a:solidFill>
-              <a:srgbClr val="FFFFFF"/>
+              <a:srgbClr val="A8E5BE"/>
             </a:solidFill>
           </a:ln>
           <a:effectLst>
@@ -25633,7 +25628,7 @@
           </a:solidFill>
           <a:ln w="28575">
             <a:solidFill>
-              <a:srgbClr val="FFFFFF"/>
+              <a:srgbClr val="FFE07A"/>
             </a:solidFill>
           </a:ln>
           <a:effectLst>
@@ -26182,7 +26177,7 @@
           </a:solidFill>
           <a:ln w="28575">
             <a:solidFill>
-              <a:srgbClr val="FFFFFF"/>
+              <a:srgbClr val="A8E5BE"/>
             </a:solidFill>
           </a:ln>
           <a:effectLst>
@@ -26488,7 +26483,7 @@
           </a:solidFill>
           <a:ln w="28575">
             <a:solidFill>
-              <a:srgbClr val="C9D3E2"/>
+              <a:srgbClr val="A9D3F5"/>
             </a:solidFill>
           </a:ln>
         </p:spPr>
@@ -26537,7 +26532,7 @@
           </a:solidFill>
           <a:ln w="28575">
             <a:solidFill>
-              <a:srgbClr val="D9CCF5"/>
+              <a:srgbClr val="CDBFF3"/>
             </a:solidFill>
           </a:ln>
         </p:spPr>
@@ -29304,7 +29299,7 @@
           </a:solidFill>
           <a:ln w="28575">
             <a:solidFill>
-              <a:srgbClr val="FFFFFF"/>
+              <a:srgbClr val="A8E5BE"/>
             </a:solidFill>
           </a:ln>
           <a:effectLst>
@@ -29691,7 +29686,7 @@
           </a:solidFill>
           <a:ln w="28575">
             <a:solidFill>
-              <a:srgbClr val="C9D3E2"/>
+              <a:srgbClr val="A9D3F5"/>
             </a:solidFill>
           </a:ln>
         </p:spPr>
@@ -29740,7 +29735,7 @@
           </a:solidFill>
           <a:ln w="28575">
             <a:solidFill>
-              <a:srgbClr val="D9CCF5"/>
+              <a:srgbClr val="CDBFF3"/>
             </a:solidFill>
           </a:ln>
         </p:spPr>
@@ -30117,7 +30112,7 @@
           </a:solidFill>
           <a:ln w="28575">
             <a:solidFill>
-              <a:srgbClr val="FFFFFF"/>
+              <a:srgbClr val="A8E5BE"/>
             </a:solidFill>
           </a:ln>
           <a:effectLst>
@@ -30423,7 +30418,7 @@
           </a:solidFill>
           <a:ln w="28575">
             <a:solidFill>
-              <a:srgbClr val="C9D3E2"/>
+              <a:srgbClr val="A9D3F5"/>
             </a:solidFill>
           </a:ln>
         </p:spPr>
@@ -30472,7 +30467,7 @@
           </a:solidFill>
           <a:ln w="28575">
             <a:solidFill>
-              <a:srgbClr val="D9CCF5"/>
+              <a:srgbClr val="CDBFF3"/>
             </a:solidFill>
           </a:ln>
         </p:spPr>
@@ -31357,7 +31352,7 @@
           </a:solidFill>
           <a:ln w="28575">
             <a:solidFill>
-              <a:srgbClr val="FFFFFF"/>
+              <a:srgbClr val="A8E5BE"/>
             </a:solidFill>
           </a:ln>
           <a:effectLst>
@@ -31744,7 +31739,7 @@
           </a:solidFill>
           <a:ln w="28575">
             <a:solidFill>
-              <a:srgbClr val="C9D3E2"/>
+              <a:srgbClr val="A9D3F5"/>
             </a:solidFill>
           </a:ln>
         </p:spPr>
@@ -31793,7 +31788,7 @@
           </a:solidFill>
           <a:ln w="28575">
             <a:solidFill>
-              <a:srgbClr val="D9CCF5"/>
+              <a:srgbClr val="CDBFF3"/>
             </a:solidFill>
           </a:ln>
         </p:spPr>
@@ -34187,7 +34182,7 @@
           </a:solidFill>
           <a:ln w="28575">
             <a:solidFill>
-              <a:srgbClr val="FFFFFF"/>
+              <a:srgbClr val="F7A6C4"/>
             </a:solidFill>
           </a:ln>
           <a:effectLst>
@@ -34288,7 +34283,7 @@
           </a:solidFill>
           <a:ln w="28575">
             <a:solidFill>
-              <a:srgbClr val="FFFFFF"/>
+              <a:srgbClr val="A9D3F5"/>
             </a:solidFill>
           </a:ln>
           <a:effectLst>
@@ -34389,7 +34384,7 @@
           </a:solidFill>
           <a:ln w="28575">
             <a:solidFill>
-              <a:srgbClr val="FFFFFF"/>
+              <a:srgbClr val="A8E5BE"/>
             </a:solidFill>
           </a:ln>
           <a:effectLst>
@@ -34490,7 +34485,7 @@
           </a:solidFill>
           <a:ln w="28575">
             <a:solidFill>
-              <a:srgbClr val="FFFFFF"/>
+              <a:srgbClr val="FFE07A"/>
             </a:solidFill>
           </a:ln>
           <a:effectLst>
@@ -34591,7 +34586,7 @@
           </a:solidFill>
           <a:ln w="28575">
             <a:solidFill>
-              <a:srgbClr val="FFFFFF"/>
+              <a:srgbClr val="F7A6C4"/>
             </a:solidFill>
           </a:ln>
           <a:effectLst>
@@ -34692,7 +34687,7 @@
           </a:solidFill>
           <a:ln w="28575">
             <a:solidFill>
-              <a:srgbClr val="FFFFFF"/>
+              <a:srgbClr val="A9D3F5"/>
             </a:solidFill>
           </a:ln>
           <a:effectLst>
@@ -35130,7 +35125,7 @@
           </a:solidFill>
           <a:ln w="28575">
             <a:solidFill>
-              <a:srgbClr val="FFFFFF"/>
+              <a:srgbClr val="F7A6C4"/>
             </a:solidFill>
           </a:ln>
           <a:effectLst>
@@ -35517,7 +35512,7 @@
           </a:solidFill>
           <a:ln w="28575">
             <a:solidFill>
-              <a:srgbClr val="C9D3E2"/>
+              <a:srgbClr val="A9D3F5"/>
             </a:solidFill>
           </a:ln>
         </p:spPr>
@@ -35566,7 +35561,7 @@
           </a:solidFill>
           <a:ln w="28575">
             <a:solidFill>
-              <a:srgbClr val="D9CCF5"/>
+              <a:srgbClr val="CDBFF3"/>
             </a:solidFill>
           </a:ln>
         </p:spPr>
@@ -35974,7 +35969,7 @@
           </a:solidFill>
           <a:ln w="28575">
             <a:solidFill>
-              <a:srgbClr val="FFFFFF"/>
+              <a:srgbClr val="F7A6C4"/>
             </a:solidFill>
           </a:ln>
           <a:effectLst>
@@ -36099,7 +36094,7 @@
           </a:solidFill>
           <a:ln w="28575">
             <a:solidFill>
-              <a:srgbClr val="FFFFFF"/>
+              <a:srgbClr val="A9D3F5"/>
             </a:solidFill>
           </a:ln>
           <a:effectLst>
@@ -36224,7 +36219,7 @@
           </a:solidFill>
           <a:ln w="28575">
             <a:solidFill>
-              <a:srgbClr val="FFFFFF"/>
+              <a:srgbClr val="A8E5BE"/>
             </a:solidFill>
           </a:ln>
           <a:effectLst>
@@ -36685,7 +36680,7 @@
           </a:solidFill>
           <a:ln w="28575">
             <a:solidFill>
-              <a:srgbClr val="FFFFFF"/>
+              <a:srgbClr val="A8E5BE"/>
             </a:solidFill>
           </a:ln>
           <a:effectLst>
@@ -36991,7 +36986,7 @@
           </a:solidFill>
           <a:ln w="28575">
             <a:solidFill>
-              <a:srgbClr val="C9D3E2"/>
+              <a:srgbClr val="A9D3F5"/>
             </a:solidFill>
           </a:ln>
         </p:spPr>
@@ -37040,7 +37035,7 @@
           </a:solidFill>
           <a:ln w="28575">
             <a:solidFill>
-              <a:srgbClr val="D9CCF5"/>
+              <a:srgbClr val="CDBFF3"/>
             </a:solidFill>
           </a:ln>
         </p:spPr>

--- a/materials/B2/B2_6B-2_Music_to_my_ears.pptx
+++ b/materials/B2/B2_6B-2_Music_to_my_ears.pptx
@@ -3128,12 +3128,12 @@
         </p:nvSpPr>
         <p:spPr>
           <a:xfrm rot="90000">
-            <a:off x="4846320" y="777240"/>
-            <a:ext cx="3977640" cy="3200400"/>
+            <a:off x="4846320" y="1167433"/>
+            <a:ext cx="3977640" cy="2420013"/>
           </a:xfrm>
           <a:prstGeom prst="roundRect">
             <a:avLst>
-              <a:gd name="adj" fmla="val 4857"/>
+              <a:gd name="adj" fmla="val 6423"/>
             </a:avLst>
           </a:prstGeom>
           <a:solidFill>
@@ -3156,7 +3156,7 @@
       </p:sp>
       <p:pic>
         <p:nvPicPr>
-          <p:cNvPr id="15" name="ph_13" descr="/home/claude/lls-course/v2/cache/b2_6b_pianist_jpg_935x748_31.png">    </p:cNvPr>
+          <p:cNvPr id="15" name="ph_13" descr="/home/claude/lls-course/v2/cache/b2_6b_pianist_jpg_935x560_31.png">    </p:cNvPr>
           <p:cNvPicPr>
             <a:picLocks noChangeAspect="1"/>
           </p:cNvPicPr>
@@ -3170,8 +3170,8 @@
         </p:blipFill>
         <p:spPr>
           <a:xfrm rot="90000">
-            <a:off x="4892040" y="822960"/>
-            <a:ext cx="3886200" cy="3108960"/>
+            <a:off x="4892040" y="1213153"/>
+            <a:ext cx="3886200" cy="2328573"/>
           </a:xfrm>
           <a:prstGeom prst="rect">
             <a:avLst/>
@@ -3437,7 +3437,7 @@
       </p:grpSpPr>
       <p:sp>
         <p:nvSpPr>
-          <p:cNvPr id="3" name="bd_232"/>
+          <p:cNvPr id="3" name="bd_229"/>
           <p:cNvSpPr/>
           <p:nvPr/>
         </p:nvSpPr>
@@ -3489,7 +3489,7 @@
       </p:sp>
       <p:pic>
         <p:nvPicPr>
-          <p:cNvPr id="4" name="brY_233" descr="/home/claude/lls-course/v2/assets/brush-yellow.png">    </p:cNvPr>
+          <p:cNvPr id="4" name="brY_230" descr="/home/claude/lls-course/v2/assets/brush-yellow.png">    </p:cNvPr>
           <p:cNvPicPr>
             <a:picLocks noChangeAspect="1"/>
           </p:cNvPicPr>
@@ -3513,7 +3513,7 @@
       </p:pic>
       <p:sp>
         <p:nvSpPr>
-          <p:cNvPr id="5" name="title_234"/>
+          <p:cNvPr id="5" name="title_231"/>
           <p:cNvSpPr/>
           <p:nvPr/>
         </p:nvSpPr>
@@ -3554,7 +3554,7 @@
       </p:sp>
       <p:pic>
         <p:nvPicPr>
-          <p:cNvPr id="6" name="brP_235" descr="/home/claude/lls-course/v2/assets/brush-pink.png">    </p:cNvPr>
+          <p:cNvPr id="6" name="brP_232" descr="/home/claude/lls-course/v2/assets/brush-pink.png">    </p:cNvPr>
           <p:cNvPicPr>
             <a:picLocks noChangeAspect="1"/>
           </p:cNvPicPr>
@@ -3578,7 +3578,7 @@
       </p:pic>
       <p:sp>
         <p:nvSpPr>
-          <p:cNvPr id="7" name="ins_236"/>
+          <p:cNvPr id="7" name="ins_233"/>
           <p:cNvSpPr/>
           <p:nvPr/>
         </p:nvSpPr>
@@ -3619,7 +3619,7 @@
       </p:sp>
       <p:sp>
         <p:nvSpPr>
-          <p:cNvPr id="8" name="insIT_237"/>
+          <p:cNvPr id="8" name="insIT_234"/>
           <p:cNvSpPr/>
           <p:nvPr/>
         </p:nvSpPr>
@@ -3660,7 +3660,7 @@
       </p:sp>
       <p:sp>
         <p:nvSpPr>
-          <p:cNvPr id="9" name="cmd_238"/>
+          <p:cNvPr id="9" name="cmd_235"/>
           <p:cNvSpPr/>
           <p:nvPr/>
         </p:nvSpPr>
@@ -3691,12 +3691,12 @@
           </a:effectLst>
         </p:spPr>
         <p:txBody>
-          <a:bodyPr wrap="square" lIns="101600" tIns="0" rIns="101600" bIns="0" rtlCol="0" anchor="ctr">
+          <a:bodyPr wrap="square" lIns="76200" tIns="0" rIns="76200" bIns="0" rtlCol="0" anchor="ctr">
             <a:normAutofit/>
           </a:bodyPr>
           <a:lstStyle/>
           <a:p>
-            <a:pPr indent="0" marL="0">
+            <a:pPr algn="ctr" indent="0" marL="0">
               <a:buNone/>
             </a:pPr>
             <a:r>
@@ -3707,7 +3707,7 @@
               </a:rPr>
               <a:t>👀 </a:t>
             </a:r>
-            <a:pPr indent="0" marL="0">
+            <a:pPr algn="ctr" indent="0" marL="0">
               <a:buNone/>
             </a:pPr>
             <a:r>
@@ -3721,7 +3721,7 @@
               </a:rPr>
               <a:t>READ</a:t>
             </a:r>
-            <a:pPr indent="0" marL="0">
+            <a:pPr algn="ctr" indent="0" marL="0">
               <a:buNone/>
             </a:pPr>
             <a:r>
@@ -3741,13 +3741,13 @@
       </p:sp>
       <p:sp>
         <p:nvSpPr>
-          <p:cNvPr id="10" name="meta_239"/>
-          <p:cNvSpPr/>
-          <p:nvPr/>
-        </p:nvSpPr>
-        <p:spPr>
-          <a:xfrm>
-            <a:off x="6510528" y="493776"/>
+          <p:cNvPr id="10" name="meta_236"/>
+          <p:cNvSpPr/>
+          <p:nvPr/>
+        </p:nvSpPr>
+        <p:spPr>
+          <a:xfrm>
+            <a:off x="6510528" y="548640"/>
             <a:ext cx="1901952" cy="274320"/>
           </a:xfrm>
           <a:prstGeom prst="roundRect">
@@ -3790,13 +3790,13 @@
       </p:sp>
       <p:sp>
         <p:nvSpPr>
-          <p:cNvPr id="11" name="tag_240"/>
-          <p:cNvSpPr/>
-          <p:nvPr/>
-        </p:nvSpPr>
-        <p:spPr>
-          <a:xfrm>
-            <a:off x="6510528" y="804672"/>
+          <p:cNvPr id="11" name="tag_237"/>
+          <p:cNvSpPr/>
+          <p:nvPr/>
+        </p:nvSpPr>
+        <p:spPr>
+          <a:xfrm>
+            <a:off x="6510528" y="914400"/>
             <a:ext cx="1901952" cy="274320"/>
           </a:xfrm>
           <a:prstGeom prst="roundRect">
@@ -3853,7 +3853,7 @@
       </p:sp>
       <p:pic>
         <p:nvPicPr>
-          <p:cNvPr id="12" name="logo_241" descr="/home/claude/lls-course/v2/img/logo.png">    </p:cNvPr>
+          <p:cNvPr id="12" name="logo_238" descr="/home/claude/lls-course/v2/img/logo.png">    </p:cNvPr>
           <p:cNvPicPr>
             <a:picLocks noChangeAspect="1"/>
           </p:cNvPicPr>
@@ -3877,7 +3877,7 @@
       </p:pic>
       <p:sp>
         <p:nvSpPr>
-          <p:cNvPr id="13" name="foot_242"/>
+          <p:cNvPr id="13" name="foot_239"/>
           <p:cNvSpPr/>
           <p:nvPr/>
         </p:nvSpPr>
@@ -3916,7 +3916,7 @@
       </p:sp>
       <p:sp>
         <p:nvSpPr>
-          <p:cNvPr id="14" name="cd_243"/>
+          <p:cNvPr id="14" name="cd_240"/>
           <p:cNvSpPr/>
           <p:nvPr/>
         </p:nvSpPr>
@@ -3950,7 +3950,7 @@
       </p:sp>
       <p:sp>
         <p:nvSpPr>
-          <p:cNvPr id="15" name="rd_244"/>
+          <p:cNvPr id="15" name="rd_241"/>
           <p:cNvSpPr/>
           <p:nvPr/>
         </p:nvSpPr>
@@ -4018,7 +4018,7 @@
       </p:sp>
       <p:sp>
         <p:nvSpPr>
-          <p:cNvPr id="16" name="rd_245"/>
+          <p:cNvPr id="16" name="rd_242"/>
           <p:cNvSpPr/>
           <p:nvPr/>
         </p:nvSpPr>
@@ -4086,7 +4086,7 @@
       </p:sp>
       <p:sp>
         <p:nvSpPr>
-          <p:cNvPr id="17" name="rdl_246"/>
+          <p:cNvPr id="17" name="rdl_243"/>
           <p:cNvSpPr/>
           <p:nvPr/>
         </p:nvSpPr>
@@ -4151,7 +4151,7 @@
       </p:grpSpPr>
       <p:sp>
         <p:nvSpPr>
-          <p:cNvPr id="3" name="bd_247"/>
+          <p:cNvPr id="3" name="bd_244"/>
           <p:cNvSpPr/>
           <p:nvPr/>
         </p:nvSpPr>
@@ -4203,7 +4203,7 @@
       </p:sp>
       <p:pic>
         <p:nvPicPr>
-          <p:cNvPr id="4" name="brY_248" descr="/home/claude/lls-course/v2/assets/brush-yellow.png">    </p:cNvPr>
+          <p:cNvPr id="4" name="brY_245" descr="/home/claude/lls-course/v2/assets/brush-yellow.png">    </p:cNvPr>
           <p:cNvPicPr>
             <a:picLocks noChangeAspect="1"/>
           </p:cNvPicPr>
@@ -4227,7 +4227,7 @@
       </p:pic>
       <p:sp>
         <p:nvSpPr>
-          <p:cNvPr id="5" name="title_249"/>
+          <p:cNvPr id="5" name="title_246"/>
           <p:cNvSpPr/>
           <p:nvPr/>
         </p:nvSpPr>
@@ -4268,7 +4268,7 @@
       </p:sp>
       <p:pic>
         <p:nvPicPr>
-          <p:cNvPr id="6" name="brP_250" descr="/home/claude/lls-course/v2/assets/brush-pink.png">    </p:cNvPr>
+          <p:cNvPr id="6" name="brP_247" descr="/home/claude/lls-course/v2/assets/brush-pink.png">    </p:cNvPr>
           <p:cNvPicPr>
             <a:picLocks noChangeAspect="1"/>
           </p:cNvPicPr>
@@ -4292,7 +4292,7 @@
       </p:pic>
       <p:sp>
         <p:nvSpPr>
-          <p:cNvPr id="7" name="ins_251"/>
+          <p:cNvPr id="7" name="ins_248"/>
           <p:cNvSpPr/>
           <p:nvPr/>
         </p:nvSpPr>
@@ -4333,7 +4333,7 @@
       </p:sp>
       <p:sp>
         <p:nvSpPr>
-          <p:cNvPr id="8" name="insIT_252"/>
+          <p:cNvPr id="8" name="insIT_249"/>
           <p:cNvSpPr/>
           <p:nvPr/>
         </p:nvSpPr>
@@ -4374,7 +4374,7 @@
       </p:sp>
       <p:sp>
         <p:nvSpPr>
-          <p:cNvPr id="9" name="cmd_253"/>
+          <p:cNvPr id="9" name="cmd_250"/>
           <p:cNvSpPr/>
           <p:nvPr/>
         </p:nvSpPr>
@@ -4405,12 +4405,12 @@
           </a:effectLst>
         </p:spPr>
         <p:txBody>
-          <a:bodyPr wrap="square" lIns="101600" tIns="0" rIns="101600" bIns="0" rtlCol="0" anchor="ctr">
+          <a:bodyPr wrap="square" lIns="76200" tIns="0" rIns="76200" bIns="0" rtlCol="0" anchor="ctr">
             <a:normAutofit/>
           </a:bodyPr>
           <a:lstStyle/>
           <a:p>
-            <a:pPr indent="0" marL="0">
+            <a:pPr algn="ctr" indent="0" marL="0">
               <a:buNone/>
             </a:pPr>
             <a:r>
@@ -4421,7 +4421,7 @@
               </a:rPr>
               <a:t>👀 </a:t>
             </a:r>
-            <a:pPr indent="0" marL="0">
+            <a:pPr algn="ctr" indent="0" marL="0">
               <a:buNone/>
             </a:pPr>
             <a:r>
@@ -4435,7 +4435,7 @@
               </a:rPr>
               <a:t>READ</a:t>
             </a:r>
-            <a:pPr indent="0" marL="0">
+            <a:pPr algn="ctr" indent="0" marL="0">
               <a:buNone/>
             </a:pPr>
             <a:r>
@@ -4447,51 +4447,9 @@
                 <a:ea typeface="Segoe UI Semibold" pitchFamily="34" charset="-122"/>
                 <a:cs typeface="Segoe UI Semibold" pitchFamily="34" charset="-120"/>
               </a:rPr>
-              <a:t>  LEGGI</a:t>
-            </a:r>
-            <a:endParaRPr lang="en-US" sz="950" dirty="0"/>
-          </a:p>
-        </p:txBody>
-      </p:sp>
-      <p:sp>
-        <p:nvSpPr>
-          <p:cNvPr id="10" name="cmd_254"/>
-          <p:cNvSpPr/>
-          <p:nvPr/>
-        </p:nvSpPr>
-        <p:spPr>
-          <a:xfrm>
-            <a:off x="6510528" y="493776"/>
-            <a:ext cx="1901952" cy="274320"/>
-          </a:xfrm>
-          <a:prstGeom prst="roundRect">
-            <a:avLst>
-              <a:gd name="adj" fmla="val 50000"/>
-            </a:avLst>
-          </a:prstGeom>
-          <a:solidFill>
-            <a:srgbClr val="FFFFFF"/>
-          </a:solidFill>
-          <a:ln w="28575">
-            <a:solidFill>
-              <a:srgbClr val="A8E5BE"/>
-            </a:solidFill>
-          </a:ln>
-          <a:effectLst>
-            <a:outerShdw sx="100000" sy="100000" kx="0" ky="0" algn="bl" rotWithShape="0" blurRad="88900" dist="31750" dir="5400000">
-              <a:srgbClr val="1B2559">
-                <a:alpha val="8000"/>
-              </a:srgbClr>
-            </a:outerShdw>
-          </a:effectLst>
-        </p:spPr>
-        <p:txBody>
-          <a:bodyPr wrap="square" lIns="101600" tIns="0" rIns="101600" bIns="0" rtlCol="0" anchor="ctr">
-            <a:normAutofit/>
-          </a:bodyPr>
-          <a:lstStyle/>
-          <a:p>
-            <a:pPr indent="0" marL="0">
+              <a:t>  →  </a:t>
+            </a:r>
+            <a:pPr algn="ctr" indent="0" marL="0">
               <a:buNone/>
             </a:pPr>
             <a:r>
@@ -4502,7 +4460,7 @@
               </a:rPr>
               <a:t>🔗 </a:t>
             </a:r>
-            <a:pPr indent="0" marL="0">
+            <a:pPr algn="ctr" indent="0" marL="0">
               <a:buNone/>
             </a:pPr>
             <a:r>
@@ -4516,33 +4474,19 @@
               </a:rPr>
               <a:t>MATCH</a:t>
             </a:r>
-            <a:pPr indent="0" marL="0">
-              <a:buNone/>
-            </a:pPr>
-            <a:r>
-              <a:rPr lang="en-US" sz="950" dirty="0">
-                <a:solidFill>
-                  <a:srgbClr val="5B6785"/>
-                </a:solidFill>
-                <a:latin typeface="Segoe UI Semibold" pitchFamily="34" charset="0"/>
-                <a:ea typeface="Segoe UI Semibold" pitchFamily="34" charset="-122"/>
-                <a:cs typeface="Segoe UI Semibold" pitchFamily="34" charset="-120"/>
-              </a:rPr>
-              <a:t>  ABBINA</a:t>
-            </a:r>
             <a:endParaRPr lang="en-US" sz="950" dirty="0"/>
           </a:p>
         </p:txBody>
       </p:sp>
       <p:sp>
         <p:nvSpPr>
-          <p:cNvPr id="11" name="meta_255"/>
-          <p:cNvSpPr/>
-          <p:nvPr/>
-        </p:nvSpPr>
-        <p:spPr>
-          <a:xfrm>
-            <a:off x="6510528" y="804672"/>
+          <p:cNvPr id="10" name="meta_251"/>
+          <p:cNvSpPr/>
+          <p:nvPr/>
+        </p:nvSpPr>
+        <p:spPr>
+          <a:xfrm>
+            <a:off x="6510528" y="548640"/>
             <a:ext cx="1901952" cy="274320"/>
           </a:xfrm>
           <a:prstGeom prst="roundRect">
@@ -4585,13 +4529,13 @@
       </p:sp>
       <p:sp>
         <p:nvSpPr>
-          <p:cNvPr id="12" name="tag_256"/>
-          <p:cNvSpPr/>
-          <p:nvPr/>
-        </p:nvSpPr>
-        <p:spPr>
-          <a:xfrm>
-            <a:off x="6510528" y="1115568"/>
+          <p:cNvPr id="11" name="tag_252"/>
+          <p:cNvSpPr/>
+          <p:nvPr/>
+        </p:nvSpPr>
+        <p:spPr>
+          <a:xfrm>
+            <a:off x="6510528" y="914400"/>
             <a:ext cx="1901952" cy="274320"/>
           </a:xfrm>
           <a:prstGeom prst="roundRect">
@@ -4648,7 +4592,7 @@
       </p:sp>
       <p:pic>
         <p:nvPicPr>
-          <p:cNvPr id="13" name="logo_257" descr="/home/claude/lls-course/v2/img/logo.png">    </p:cNvPr>
+          <p:cNvPr id="12" name="logo_253" descr="/home/claude/lls-course/v2/img/logo.png">    </p:cNvPr>
           <p:cNvPicPr>
             <a:picLocks noChangeAspect="1"/>
           </p:cNvPicPr>
@@ -4672,7 +4616,7 @@
       </p:pic>
       <p:sp>
         <p:nvSpPr>
-          <p:cNvPr id="14" name="foot_258"/>
+          <p:cNvPr id="13" name="foot_254"/>
           <p:cNvSpPr/>
           <p:nvPr/>
         </p:nvSpPr>
@@ -4711,7 +4655,7 @@
       </p:sp>
       <p:sp>
         <p:nvSpPr>
-          <p:cNvPr id="15" name="bd_259"/>
+          <p:cNvPr id="14" name="bd_255"/>
           <p:cNvSpPr/>
           <p:nvPr/>
         </p:nvSpPr>
@@ -4763,7 +4707,7 @@
       </p:sp>
       <p:sp>
         <p:nvSpPr>
-          <p:cNvPr id="16" name="q_260"/>
+          <p:cNvPr id="15" name="q_256"/>
           <p:cNvSpPr/>
           <p:nvPr/>
         </p:nvSpPr>
@@ -4812,7 +4756,7 @@
       </p:sp>
       <p:sp>
         <p:nvSpPr>
-          <p:cNvPr id="17" name="R1_chip261"/>
+          <p:cNvPr id="16" name="R1_chip257"/>
           <p:cNvSpPr/>
           <p:nvPr/>
         </p:nvSpPr>
@@ -4861,7 +4805,7 @@
       </p:sp>
       <p:sp>
         <p:nvSpPr>
-          <p:cNvPr id="18" name="bd_262"/>
+          <p:cNvPr id="17" name="bd_258"/>
           <p:cNvSpPr/>
           <p:nvPr/>
         </p:nvSpPr>
@@ -4913,7 +4857,7 @@
       </p:sp>
       <p:sp>
         <p:nvSpPr>
-          <p:cNvPr id="19" name="q_263"/>
+          <p:cNvPr id="18" name="q_259"/>
           <p:cNvSpPr/>
           <p:nvPr/>
         </p:nvSpPr>
@@ -4962,7 +4906,7 @@
       </p:sp>
       <p:sp>
         <p:nvSpPr>
-          <p:cNvPr id="20" name="R2_chip264"/>
+          <p:cNvPr id="19" name="R2_chip260"/>
           <p:cNvSpPr/>
           <p:nvPr/>
         </p:nvSpPr>
@@ -5011,7 +4955,7 @@
       </p:sp>
       <p:sp>
         <p:nvSpPr>
-          <p:cNvPr id="21" name="bd_265"/>
+          <p:cNvPr id="20" name="bd_261"/>
           <p:cNvSpPr/>
           <p:nvPr/>
         </p:nvSpPr>
@@ -5063,7 +5007,7 @@
       </p:sp>
       <p:sp>
         <p:nvSpPr>
-          <p:cNvPr id="22" name="q_266"/>
+          <p:cNvPr id="21" name="q_262"/>
           <p:cNvSpPr/>
           <p:nvPr/>
         </p:nvSpPr>
@@ -5112,7 +5056,7 @@
       </p:sp>
       <p:sp>
         <p:nvSpPr>
-          <p:cNvPr id="23" name="R3_chip267"/>
+          <p:cNvPr id="22" name="R3_chip263"/>
           <p:cNvSpPr/>
           <p:nvPr/>
         </p:nvSpPr>
@@ -5161,7 +5105,7 @@
       </p:sp>
       <p:sp>
         <p:nvSpPr>
-          <p:cNvPr id="24" name="bd_268"/>
+          <p:cNvPr id="23" name="bd_264"/>
           <p:cNvSpPr/>
           <p:nvPr/>
         </p:nvSpPr>
@@ -5213,7 +5157,7 @@
       </p:sp>
       <p:sp>
         <p:nvSpPr>
-          <p:cNvPr id="25" name="q_269"/>
+          <p:cNvPr id="24" name="q_265"/>
           <p:cNvSpPr/>
           <p:nvPr/>
         </p:nvSpPr>
@@ -5262,7 +5206,7 @@
       </p:sp>
       <p:sp>
         <p:nvSpPr>
-          <p:cNvPr id="26" name="R4_chip270"/>
+          <p:cNvPr id="25" name="R4_chip266"/>
           <p:cNvSpPr/>
           <p:nvPr/>
         </p:nvSpPr>
@@ -5311,7 +5255,7 @@
       </p:sp>
       <p:sp>
         <p:nvSpPr>
-          <p:cNvPr id="27" name="bd_271"/>
+          <p:cNvPr id="26" name="bd_267"/>
           <p:cNvSpPr/>
           <p:nvPr/>
         </p:nvSpPr>
@@ -5363,7 +5307,7 @@
       </p:sp>
       <p:sp>
         <p:nvSpPr>
-          <p:cNvPr id="28" name="q_272"/>
+          <p:cNvPr id="27" name="q_268"/>
           <p:cNvSpPr/>
           <p:nvPr/>
         </p:nvSpPr>
@@ -5412,7 +5356,7 @@
       </p:sp>
       <p:sp>
         <p:nvSpPr>
-          <p:cNvPr id="29" name="R5_chip273"/>
+          <p:cNvPr id="28" name="R5_chip269"/>
           <p:cNvSpPr/>
           <p:nvPr/>
         </p:nvSpPr>
@@ -5461,7 +5405,7 @@
       </p:sp>
       <p:sp>
         <p:nvSpPr>
-          <p:cNvPr id="30" name="bd_274"/>
+          <p:cNvPr id="29" name="bd_270"/>
           <p:cNvSpPr/>
           <p:nvPr/>
         </p:nvSpPr>
@@ -5513,7 +5457,7 @@
       </p:sp>
       <p:sp>
         <p:nvSpPr>
-          <p:cNvPr id="31" name="q_275"/>
+          <p:cNvPr id="30" name="q_271"/>
           <p:cNvSpPr/>
           <p:nvPr/>
         </p:nvSpPr>
@@ -5562,7 +5506,7 @@
       </p:sp>
       <p:sp>
         <p:nvSpPr>
-          <p:cNvPr id="32" name="R6_chip276"/>
+          <p:cNvPr id="31" name="R6_chip272"/>
           <p:cNvSpPr/>
           <p:nvPr/>
         </p:nvSpPr>
@@ -5611,7 +5555,7 @@
       </p:sp>
       <p:sp>
         <p:nvSpPr>
-          <p:cNvPr id="33" name="bd_277"/>
+          <p:cNvPr id="32" name="bd_273"/>
           <p:cNvSpPr/>
           <p:nvPr/>
         </p:nvSpPr>
@@ -5663,7 +5607,7 @@
       </p:sp>
       <p:sp>
         <p:nvSpPr>
-          <p:cNvPr id="34" name="q_278"/>
+          <p:cNvPr id="33" name="q_274"/>
           <p:cNvSpPr/>
           <p:nvPr/>
         </p:nvSpPr>
@@ -5712,7 +5656,7 @@
       </p:sp>
       <p:sp>
         <p:nvSpPr>
-          <p:cNvPr id="35" name="R7_chip279"/>
+          <p:cNvPr id="34" name="R7_chip275"/>
           <p:cNvSpPr/>
           <p:nvPr/>
         </p:nvSpPr>
@@ -5761,7 +5705,7 @@
       </p:sp>
       <p:sp>
         <p:nvSpPr>
-          <p:cNvPr id="36" name="bd_280"/>
+          <p:cNvPr id="35" name="bd_276"/>
           <p:cNvSpPr/>
           <p:nvPr/>
         </p:nvSpPr>
@@ -5813,7 +5757,7 @@
       </p:sp>
       <p:sp>
         <p:nvSpPr>
-          <p:cNvPr id="37" name="q_281"/>
+          <p:cNvPr id="36" name="q_277"/>
           <p:cNvSpPr/>
           <p:nvPr/>
         </p:nvSpPr>
@@ -5862,7 +5806,7 @@
       </p:sp>
       <p:sp>
         <p:nvSpPr>
-          <p:cNvPr id="38" name="R8_chip282"/>
+          <p:cNvPr id="37" name="R8_chip278"/>
           <p:cNvSpPr/>
           <p:nvPr/>
         </p:nvSpPr>
@@ -5951,7 +5895,7 @@
                                           </p:stCondLst>
                                         </p:cTn>
                                         <p:tgtEl>
-                                          <p:spTgt spid="17"/>
+                                          <p:spTgt spid="16"/>
                                         </p:tgtEl>
                                         <p:attrNameLst>
                                           <p:attrName>style.visibility</p:attrName>
@@ -5965,7 +5909,7 @@
                                       <p:cBhvr>
                                         <p:cTn id="7" dur="400"/>
                                         <p:tgtEl>
-                                          <p:spTgt spid="17"/>
+                                          <p:spTgt spid="16"/>
                                         </p:tgtEl>
                                       </p:cBhvr>
                                     </p:animEffect>
@@ -6004,7 +5948,7 @@
                                           </p:stCondLst>
                                         </p:cTn>
                                         <p:tgtEl>
-                                          <p:spTgt spid="20"/>
+                                          <p:spTgt spid="19"/>
                                         </p:tgtEl>
                                         <p:attrNameLst>
                                           <p:attrName>style.visibility</p:attrName>
@@ -6018,7 +5962,7 @@
                                       <p:cBhvr>
                                         <p:cTn id="12" dur="400"/>
                                         <p:tgtEl>
-                                          <p:spTgt spid="20"/>
+                                          <p:spTgt spid="19"/>
                                         </p:tgtEl>
                                       </p:cBhvr>
                                     </p:animEffect>
@@ -6057,7 +6001,7 @@
                                           </p:stCondLst>
                                         </p:cTn>
                                         <p:tgtEl>
-                                          <p:spTgt spid="23"/>
+                                          <p:spTgt spid="22"/>
                                         </p:tgtEl>
                                         <p:attrNameLst>
                                           <p:attrName>style.visibility</p:attrName>
@@ -6071,7 +6015,7 @@
                                       <p:cBhvr>
                                         <p:cTn id="17" dur="400"/>
                                         <p:tgtEl>
-                                          <p:spTgt spid="23"/>
+                                          <p:spTgt spid="22"/>
                                         </p:tgtEl>
                                       </p:cBhvr>
                                     </p:animEffect>
@@ -6110,7 +6054,7 @@
                                           </p:stCondLst>
                                         </p:cTn>
                                         <p:tgtEl>
-                                          <p:spTgt spid="26"/>
+                                          <p:spTgt spid="25"/>
                                         </p:tgtEl>
                                         <p:attrNameLst>
                                           <p:attrName>style.visibility</p:attrName>
@@ -6124,7 +6068,7 @@
                                       <p:cBhvr>
                                         <p:cTn id="22" dur="400"/>
                                         <p:tgtEl>
-                                          <p:spTgt spid="26"/>
+                                          <p:spTgt spid="25"/>
                                         </p:tgtEl>
                                       </p:cBhvr>
                                     </p:animEffect>
@@ -6163,7 +6107,7 @@
                                           </p:stCondLst>
                                         </p:cTn>
                                         <p:tgtEl>
-                                          <p:spTgt spid="29"/>
+                                          <p:spTgt spid="28"/>
                                         </p:tgtEl>
                                         <p:attrNameLst>
                                           <p:attrName>style.visibility</p:attrName>
@@ -6177,7 +6121,7 @@
                                       <p:cBhvr>
                                         <p:cTn id="27" dur="400"/>
                                         <p:tgtEl>
-                                          <p:spTgt spid="29"/>
+                                          <p:spTgt spid="28"/>
                                         </p:tgtEl>
                                       </p:cBhvr>
                                     </p:animEffect>
@@ -6216,7 +6160,7 @@
                                           </p:stCondLst>
                                         </p:cTn>
                                         <p:tgtEl>
-                                          <p:spTgt spid="32"/>
+                                          <p:spTgt spid="31"/>
                                         </p:tgtEl>
                                         <p:attrNameLst>
                                           <p:attrName>style.visibility</p:attrName>
@@ -6230,7 +6174,7 @@
                                       <p:cBhvr>
                                         <p:cTn id="32" dur="400"/>
                                         <p:tgtEl>
-                                          <p:spTgt spid="32"/>
+                                          <p:spTgt spid="31"/>
                                         </p:tgtEl>
                                       </p:cBhvr>
                                     </p:animEffect>
@@ -6269,7 +6213,7 @@
                                           </p:stCondLst>
                                         </p:cTn>
                                         <p:tgtEl>
-                                          <p:spTgt spid="35"/>
+                                          <p:spTgt spid="34"/>
                                         </p:tgtEl>
                                         <p:attrNameLst>
                                           <p:attrName>style.visibility</p:attrName>
@@ -6283,7 +6227,7 @@
                                       <p:cBhvr>
                                         <p:cTn id="37" dur="400"/>
                                         <p:tgtEl>
-                                          <p:spTgt spid="35"/>
+                                          <p:spTgt spid="34"/>
                                         </p:tgtEl>
                                       </p:cBhvr>
                                     </p:animEffect>
@@ -6322,7 +6266,7 @@
                                           </p:stCondLst>
                                         </p:cTn>
                                         <p:tgtEl>
-                                          <p:spTgt spid="38"/>
+                                          <p:spTgt spid="37"/>
                                         </p:tgtEl>
                                         <p:attrNameLst>
                                           <p:attrName>style.visibility</p:attrName>
@@ -6336,7 +6280,7 @@
                                       <p:cBhvr>
                                         <p:cTn id="42" dur="400"/>
                                         <p:tgtEl>
-                                          <p:spTgt spid="38"/>
+                                          <p:spTgt spid="37"/>
                                         </p:tgtEl>
                                       </p:cBhvr>
                                     </p:animEffect>
@@ -6407,7 +6351,7 @@
       </p:grpSpPr>
       <p:sp>
         <p:nvSpPr>
-          <p:cNvPr id="3" name="bd_283"/>
+          <p:cNvPr id="3" name="bd_279"/>
           <p:cNvSpPr/>
           <p:nvPr/>
         </p:nvSpPr>
@@ -6459,7 +6403,7 @@
       </p:sp>
       <p:pic>
         <p:nvPicPr>
-          <p:cNvPr id="4" name="brY_284" descr="/home/claude/lls-course/v2/assets/brush-yellow.png">    </p:cNvPr>
+          <p:cNvPr id="4" name="brY_280" descr="/home/claude/lls-course/v2/assets/brush-yellow.png">    </p:cNvPr>
           <p:cNvPicPr>
             <a:picLocks noChangeAspect="1"/>
           </p:cNvPicPr>
@@ -6483,7 +6427,7 @@
       </p:pic>
       <p:sp>
         <p:nvSpPr>
-          <p:cNvPr id="5" name="title_285"/>
+          <p:cNvPr id="5" name="title_281"/>
           <p:cNvSpPr/>
           <p:nvPr/>
         </p:nvSpPr>
@@ -6524,7 +6468,7 @@
       </p:sp>
       <p:pic>
         <p:nvPicPr>
-          <p:cNvPr id="6" name="brP_286" descr="/home/claude/lls-course/v2/assets/brush-pink.png">    </p:cNvPr>
+          <p:cNvPr id="6" name="brP_282" descr="/home/claude/lls-course/v2/assets/brush-pink.png">    </p:cNvPr>
           <p:cNvPicPr>
             <a:picLocks noChangeAspect="1"/>
           </p:cNvPicPr>
@@ -6548,7 +6492,7 @@
       </p:pic>
       <p:sp>
         <p:nvSpPr>
-          <p:cNvPr id="7" name="ins_287"/>
+          <p:cNvPr id="7" name="ins_283"/>
           <p:cNvSpPr/>
           <p:nvPr/>
         </p:nvSpPr>
@@ -6589,7 +6533,7 @@
       </p:sp>
       <p:sp>
         <p:nvSpPr>
-          <p:cNvPr id="8" name="insIT_288"/>
+          <p:cNvPr id="8" name="insIT_284"/>
           <p:cNvSpPr/>
           <p:nvPr/>
         </p:nvSpPr>
@@ -6630,7 +6574,7 @@
       </p:sp>
       <p:sp>
         <p:nvSpPr>
-          <p:cNvPr id="9" name="cmd_289"/>
+          <p:cNvPr id="9" name="cmd_285"/>
           <p:cNvSpPr/>
           <p:nvPr/>
         </p:nvSpPr>
@@ -6661,12 +6605,12 @@
           </a:effectLst>
         </p:spPr>
         <p:txBody>
-          <a:bodyPr wrap="square" lIns="101600" tIns="0" rIns="101600" bIns="0" rtlCol="0" anchor="ctr">
+          <a:bodyPr wrap="square" lIns="76200" tIns="0" rIns="76200" bIns="0" rtlCol="0" anchor="ctr">
             <a:normAutofit/>
           </a:bodyPr>
           <a:lstStyle/>
           <a:p>
-            <a:pPr indent="0" marL="0">
+            <a:pPr algn="ctr" indent="0" marL="0">
               <a:buNone/>
             </a:pPr>
             <a:r>
@@ -6677,7 +6621,7 @@
               </a:rPr>
               <a:t>🔍 </a:t>
             </a:r>
-            <a:pPr indent="0" marL="0">
+            <a:pPr algn="ctr" indent="0" marL="0">
               <a:buNone/>
             </a:pPr>
             <a:r>
@@ -6691,7 +6635,7 @@
               </a:rPr>
               <a:t>FIND</a:t>
             </a:r>
-            <a:pPr indent="0" marL="0">
+            <a:pPr algn="ctr" indent="0" marL="0">
               <a:buNone/>
             </a:pPr>
             <a:r>
@@ -6711,13 +6655,13 @@
       </p:sp>
       <p:sp>
         <p:nvSpPr>
-          <p:cNvPr id="10" name="meta_290"/>
-          <p:cNvSpPr/>
-          <p:nvPr/>
-        </p:nvSpPr>
-        <p:spPr>
-          <a:xfrm>
-            <a:off x="6510528" y="493776"/>
+          <p:cNvPr id="10" name="meta_286"/>
+          <p:cNvSpPr/>
+          <p:nvPr/>
+        </p:nvSpPr>
+        <p:spPr>
+          <a:xfrm>
+            <a:off x="6510528" y="548640"/>
             <a:ext cx="1901952" cy="274320"/>
           </a:xfrm>
           <a:prstGeom prst="roundRect">
@@ -6760,13 +6704,13 @@
       </p:sp>
       <p:sp>
         <p:nvSpPr>
-          <p:cNvPr id="11" name="tag_291"/>
-          <p:cNvSpPr/>
-          <p:nvPr/>
-        </p:nvSpPr>
-        <p:spPr>
-          <a:xfrm>
-            <a:off x="6510528" y="804672"/>
+          <p:cNvPr id="11" name="tag_287"/>
+          <p:cNvSpPr/>
+          <p:nvPr/>
+        </p:nvSpPr>
+        <p:spPr>
+          <a:xfrm>
+            <a:off x="6510528" y="914400"/>
             <a:ext cx="1901952" cy="274320"/>
           </a:xfrm>
           <a:prstGeom prst="roundRect">
@@ -6823,7 +6767,7 @@
       </p:sp>
       <p:pic>
         <p:nvPicPr>
-          <p:cNvPr id="12" name="logo_292" descr="/home/claude/lls-course/v2/img/logo.png">    </p:cNvPr>
+          <p:cNvPr id="12" name="logo_288" descr="/home/claude/lls-course/v2/img/logo.png">    </p:cNvPr>
           <p:cNvPicPr>
             <a:picLocks noChangeAspect="1"/>
           </p:cNvPicPr>
@@ -6847,7 +6791,7 @@
       </p:pic>
       <p:sp>
         <p:nvSpPr>
-          <p:cNvPr id="13" name="foot_293"/>
+          <p:cNvPr id="13" name="foot_289"/>
           <p:cNvSpPr/>
           <p:nvPr/>
         </p:nvSpPr>
@@ -6886,7 +6830,7 @@
       </p:sp>
       <p:sp>
         <p:nvSpPr>
-          <p:cNvPr id="14" name="bd_294"/>
+          <p:cNvPr id="14" name="bd_290"/>
           <p:cNvSpPr/>
           <p:nvPr/>
         </p:nvSpPr>
@@ -6938,7 +6882,7 @@
       </p:sp>
       <p:sp>
         <p:nvSpPr>
-          <p:cNvPr id="15" name="q_295"/>
+          <p:cNvPr id="15" name="q_291"/>
           <p:cNvSpPr/>
           <p:nvPr/>
         </p:nvSpPr>
@@ -6987,7 +6931,7 @@
       </p:sp>
       <p:sp>
         <p:nvSpPr>
-          <p:cNvPr id="16" name="R1_chip296"/>
+          <p:cNvPr id="16" name="R1_chip292"/>
           <p:cNvSpPr/>
           <p:nvPr/>
         </p:nvSpPr>
@@ -7067,7 +7011,7 @@
       </p:sp>
       <p:sp>
         <p:nvSpPr>
-          <p:cNvPr id="17" name="bd_297"/>
+          <p:cNvPr id="17" name="bd_293"/>
           <p:cNvSpPr/>
           <p:nvPr/>
         </p:nvSpPr>
@@ -7119,7 +7063,7 @@
       </p:sp>
       <p:sp>
         <p:nvSpPr>
-          <p:cNvPr id="18" name="q_298"/>
+          <p:cNvPr id="18" name="q_294"/>
           <p:cNvSpPr/>
           <p:nvPr/>
         </p:nvSpPr>
@@ -7168,7 +7112,7 @@
       </p:sp>
       <p:sp>
         <p:nvSpPr>
-          <p:cNvPr id="19" name="R2_chip299"/>
+          <p:cNvPr id="19" name="R2_chip295"/>
           <p:cNvSpPr/>
           <p:nvPr/>
         </p:nvSpPr>
@@ -7248,7 +7192,7 @@
       </p:sp>
       <p:sp>
         <p:nvSpPr>
-          <p:cNvPr id="20" name="bd_300"/>
+          <p:cNvPr id="20" name="bd_296"/>
           <p:cNvSpPr/>
           <p:nvPr/>
         </p:nvSpPr>
@@ -7300,7 +7244,7 @@
       </p:sp>
       <p:sp>
         <p:nvSpPr>
-          <p:cNvPr id="21" name="q_301"/>
+          <p:cNvPr id="21" name="q_297"/>
           <p:cNvSpPr/>
           <p:nvPr/>
         </p:nvSpPr>
@@ -7349,7 +7293,7 @@
       </p:sp>
       <p:sp>
         <p:nvSpPr>
-          <p:cNvPr id="22" name="R3_chip302"/>
+          <p:cNvPr id="22" name="R3_chip298"/>
           <p:cNvSpPr/>
           <p:nvPr/>
         </p:nvSpPr>
@@ -7429,7 +7373,7 @@
       </p:sp>
       <p:sp>
         <p:nvSpPr>
-          <p:cNvPr id="23" name="bd_303"/>
+          <p:cNvPr id="23" name="bd_299"/>
           <p:cNvSpPr/>
           <p:nvPr/>
         </p:nvSpPr>
@@ -7481,7 +7425,7 @@
       </p:sp>
       <p:sp>
         <p:nvSpPr>
-          <p:cNvPr id="24" name="q_304"/>
+          <p:cNvPr id="24" name="q_300"/>
           <p:cNvSpPr/>
           <p:nvPr/>
         </p:nvSpPr>
@@ -7530,7 +7474,7 @@
       </p:sp>
       <p:sp>
         <p:nvSpPr>
-          <p:cNvPr id="25" name="R4_chip305"/>
+          <p:cNvPr id="25" name="R4_chip301"/>
           <p:cNvSpPr/>
           <p:nvPr/>
         </p:nvSpPr>
@@ -7610,7 +7554,7 @@
       </p:sp>
       <p:sp>
         <p:nvSpPr>
-          <p:cNvPr id="26" name="bd_306"/>
+          <p:cNvPr id="26" name="bd_302"/>
           <p:cNvSpPr/>
           <p:nvPr/>
         </p:nvSpPr>
@@ -7662,7 +7606,7 @@
       </p:sp>
       <p:sp>
         <p:nvSpPr>
-          <p:cNvPr id="27" name="q_307"/>
+          <p:cNvPr id="27" name="q_303"/>
           <p:cNvSpPr/>
           <p:nvPr/>
         </p:nvSpPr>
@@ -7711,7 +7655,7 @@
       </p:sp>
       <p:sp>
         <p:nvSpPr>
-          <p:cNvPr id="28" name="R5_chip308"/>
+          <p:cNvPr id="28" name="R5_chip304"/>
           <p:cNvSpPr/>
           <p:nvPr/>
         </p:nvSpPr>
@@ -7791,7 +7735,7 @@
       </p:sp>
       <p:sp>
         <p:nvSpPr>
-          <p:cNvPr id="29" name="bd_309"/>
+          <p:cNvPr id="29" name="bd_305"/>
           <p:cNvSpPr/>
           <p:nvPr/>
         </p:nvSpPr>
@@ -7843,7 +7787,7 @@
       </p:sp>
       <p:sp>
         <p:nvSpPr>
-          <p:cNvPr id="30" name="q_310"/>
+          <p:cNvPr id="30" name="q_306"/>
           <p:cNvSpPr/>
           <p:nvPr/>
         </p:nvSpPr>
@@ -7892,7 +7836,7 @@
       </p:sp>
       <p:sp>
         <p:nvSpPr>
-          <p:cNvPr id="31" name="R6_chip311"/>
+          <p:cNvPr id="31" name="R6_chip307"/>
           <p:cNvSpPr/>
           <p:nvPr/>
         </p:nvSpPr>
@@ -8393,7 +8337,7 @@
       </p:grpSpPr>
       <p:sp>
         <p:nvSpPr>
-          <p:cNvPr id="3" name="bd_312"/>
+          <p:cNvPr id="3" name="bd_308"/>
           <p:cNvSpPr/>
           <p:nvPr/>
         </p:nvSpPr>
@@ -8445,7 +8389,7 @@
       </p:sp>
       <p:pic>
         <p:nvPicPr>
-          <p:cNvPr id="4" name="brY_313" descr="/home/claude/lls-course/v2/assets/brush-yellow.png">    </p:cNvPr>
+          <p:cNvPr id="4" name="brY_309" descr="/home/claude/lls-course/v2/assets/brush-yellow.png">    </p:cNvPr>
           <p:cNvPicPr>
             <a:picLocks noChangeAspect="1"/>
           </p:cNvPicPr>
@@ -8469,7 +8413,7 @@
       </p:pic>
       <p:sp>
         <p:nvSpPr>
-          <p:cNvPr id="5" name="title_314"/>
+          <p:cNvPr id="5" name="title_310"/>
           <p:cNvSpPr/>
           <p:nvPr/>
         </p:nvSpPr>
@@ -8510,7 +8454,7 @@
       </p:sp>
       <p:pic>
         <p:nvPicPr>
-          <p:cNvPr id="6" name="brP_315" descr="/home/claude/lls-course/v2/assets/brush-pink.png">    </p:cNvPr>
+          <p:cNvPr id="6" name="brP_311" descr="/home/claude/lls-course/v2/assets/brush-pink.png">    </p:cNvPr>
           <p:cNvPicPr>
             <a:picLocks noChangeAspect="1"/>
           </p:cNvPicPr>
@@ -8534,7 +8478,7 @@
       </p:pic>
       <p:sp>
         <p:nvSpPr>
-          <p:cNvPr id="7" name="ins_316"/>
+          <p:cNvPr id="7" name="ins_312"/>
           <p:cNvSpPr/>
           <p:nvPr/>
         </p:nvSpPr>
@@ -8575,7 +8519,7 @@
       </p:sp>
       <p:sp>
         <p:nvSpPr>
-          <p:cNvPr id="8" name="insIT_317"/>
+          <p:cNvPr id="8" name="insIT_313"/>
           <p:cNvSpPr/>
           <p:nvPr/>
         </p:nvSpPr>
@@ -8616,7 +8560,7 @@
       </p:sp>
       <p:sp>
         <p:nvSpPr>
-          <p:cNvPr id="9" name="cmd_318"/>
+          <p:cNvPr id="9" name="cmd_314"/>
           <p:cNvSpPr/>
           <p:nvPr/>
         </p:nvSpPr>
@@ -8647,12 +8591,12 @@
           </a:effectLst>
         </p:spPr>
         <p:txBody>
-          <a:bodyPr wrap="square" lIns="101600" tIns="0" rIns="101600" bIns="0" rtlCol="0" anchor="ctr">
+          <a:bodyPr wrap="square" lIns="76200" tIns="0" rIns="76200" bIns="0" rtlCol="0" anchor="ctr">
             <a:normAutofit/>
           </a:bodyPr>
           <a:lstStyle/>
           <a:p>
-            <a:pPr indent="0" marL="0">
+            <a:pPr algn="ctr" indent="0" marL="0">
               <a:buNone/>
             </a:pPr>
             <a:r>
@@ -8663,7 +8607,7 @@
               </a:rPr>
               <a:t>👀 </a:t>
             </a:r>
-            <a:pPr indent="0" marL="0">
+            <a:pPr algn="ctr" indent="0" marL="0">
               <a:buNone/>
             </a:pPr>
             <a:r>
@@ -8677,7 +8621,7 @@
               </a:rPr>
               <a:t>READ</a:t>
             </a:r>
-            <a:pPr indent="0" marL="0">
+            <a:pPr algn="ctr" indent="0" marL="0">
               <a:buNone/>
             </a:pPr>
             <a:r>
@@ -8689,7 +8633,32 @@
                 <a:ea typeface="Segoe UI Semibold" pitchFamily="34" charset="-122"/>
                 <a:cs typeface="Segoe UI Semibold" pitchFamily="34" charset="-120"/>
               </a:rPr>
-              <a:t>  LEGGI</a:t>
+              <a:t>  →  </a:t>
+            </a:r>
+            <a:pPr algn="ctr" indent="0" marL="0">
+              <a:buNone/>
+            </a:pPr>
+            <a:r>
+              <a:rPr lang="en-US" sz="950" dirty="0">
+                <a:solidFill>
+                  <a:srgbClr val="000000"/>
+                </a:solidFill>
+              </a:rPr>
+              <a:t>💡 </a:t>
+            </a:r>
+            <a:pPr algn="ctr" indent="0" marL="0">
+              <a:buNone/>
+            </a:pPr>
+            <a:r>
+              <a:rPr lang="en-US" sz="950" dirty="0">
+                <a:solidFill>
+                  <a:srgbClr val="2F8DE4"/>
+                </a:solidFill>
+                <a:latin typeface="Arial Rounded MT Bold" pitchFamily="34" charset="0"/>
+                <a:ea typeface="Arial Rounded MT Bold" pitchFamily="34" charset="-122"/>
+                <a:cs typeface="Arial Rounded MT Bold" pitchFamily="34" charset="-120"/>
+              </a:rPr>
+              <a:t>THINK</a:t>
             </a:r>
             <a:endParaRPr lang="en-US" sz="950" dirty="0"/>
           </a:p>
@@ -8697,18 +8666,620 @@
       </p:sp>
       <p:sp>
         <p:nvSpPr>
-          <p:cNvPr id="10" name="cmd_319"/>
-          <p:cNvSpPr/>
-          <p:nvPr/>
-        </p:nvSpPr>
-        <p:spPr>
-          <a:xfrm>
-            <a:off x="6510528" y="493776"/>
+          <p:cNvPr id="10" name="meta_315"/>
+          <p:cNvSpPr/>
+          <p:nvPr/>
+        </p:nvSpPr>
+        <p:spPr>
+          <a:xfrm>
+            <a:off x="6510528" y="548640"/>
             <a:ext cx="1901952" cy="274320"/>
           </a:xfrm>
           <a:prstGeom prst="roundRect">
             <a:avLst>
               <a:gd name="adj" fmla="val 50000"/>
+            </a:avLst>
+          </a:prstGeom>
+          <a:solidFill>
+            <a:srgbClr val="FFFFFF"/>
+          </a:solidFill>
+          <a:ln w="28575">
+            <a:solidFill>
+              <a:srgbClr val="A9D3F5"/>
+            </a:solidFill>
+          </a:ln>
+        </p:spPr>
+        <p:txBody>
+          <a:bodyPr wrap="square" lIns="76200" tIns="0" rIns="76200" bIns="0" rtlCol="0" anchor="ctr">
+            <a:normAutofit/>
+          </a:bodyPr>
+          <a:lstStyle/>
+          <a:p>
+            <a:pPr algn="ctr" indent="0" marL="0">
+              <a:buNone/>
+            </a:pPr>
+            <a:r>
+              <a:rPr lang="en-US" sz="950" dirty="0">
+                <a:solidFill>
+                  <a:srgbClr val="1B2559"/>
+                </a:solidFill>
+                <a:latin typeface="Segoe UI Semibold" pitchFamily="34" charset="0"/>
+                <a:ea typeface="Segoe UI Semibold" pitchFamily="34" charset="-122"/>
+                <a:cs typeface="Segoe UI Semibold" pitchFamily="34" charset="-120"/>
+              </a:rPr>
+              <a:t>⏱ 2 min   👨‍👩‍👧 groups</a:t>
+            </a:r>
+            <a:endParaRPr lang="en-US" sz="950" dirty="0"/>
+          </a:p>
+        </p:txBody>
+      </p:sp>
+      <p:sp>
+        <p:nvSpPr>
+          <p:cNvPr id="11" name="tag_316"/>
+          <p:cNvSpPr/>
+          <p:nvPr/>
+        </p:nvSpPr>
+        <p:spPr>
+          <a:xfrm>
+            <a:off x="6510528" y="914400"/>
+            <a:ext cx="1901952" cy="274320"/>
+          </a:xfrm>
+          <a:prstGeom prst="roundRect">
+            <a:avLst>
+              <a:gd name="adj" fmla="val 50000"/>
+            </a:avLst>
+          </a:prstGeom>
+          <a:solidFill>
+            <a:srgbClr val="F3EEFF"/>
+          </a:solidFill>
+          <a:ln w="28575">
+            <a:solidFill>
+              <a:srgbClr val="CDBFF3"/>
+            </a:solidFill>
+          </a:ln>
+        </p:spPr>
+        <p:txBody>
+          <a:bodyPr wrap="square" lIns="76200" tIns="0" rIns="76200" bIns="0" rtlCol="0" anchor="ctr">
+            <a:normAutofit/>
+          </a:bodyPr>
+          <a:lstStyle/>
+          <a:p>
+            <a:pPr algn="ctr" indent="0" marL="0">
+              <a:buNone/>
+            </a:pPr>
+            <a:r>
+              <a:rPr lang="en-US" sz="750" b="1" dirty="0">
+                <a:solidFill>
+                  <a:srgbClr val="1B2559"/>
+                </a:solidFill>
+                <a:latin typeface="Segoe UI Semibold" pitchFamily="34" charset="0"/>
+                <a:ea typeface="Segoe UI Semibold" pitchFamily="34" charset="-122"/>
+                <a:cs typeface="Segoe UI Semibold" pitchFamily="34" charset="-120"/>
+              </a:rPr>
+              <a:t>🎯 Speaking</a:t>
+            </a:r>
+            <a:pPr algn="ctr" indent="0" marL="0">
+              <a:buNone/>
+            </a:pPr>
+            <a:r>
+              <a:rPr lang="en-US" sz="750" dirty="0">
+                <a:solidFill>
+                  <a:srgbClr val="7B5CD6"/>
+                </a:solidFill>
+                <a:latin typeface="Segoe UI Semibold" pitchFamily="34" charset="0"/>
+                <a:ea typeface="Segoe UI Semibold" pitchFamily="34" charset="-122"/>
+                <a:cs typeface="Segoe UI Semibold" pitchFamily="34" charset="-120"/>
+              </a:rPr>
+              <a:t>  ·  Role-play · prepare</a:t>
+            </a:r>
+            <a:endParaRPr lang="en-US" sz="750" dirty="0"/>
+          </a:p>
+        </p:txBody>
+      </p:sp>
+      <p:pic>
+        <p:nvPicPr>
+          <p:cNvPr id="12" name="logo_317" descr="/home/claude/lls-course/v2/img/logo.png">    </p:cNvPr>
+          <p:cNvPicPr>
+            <a:picLocks noChangeAspect="1"/>
+          </p:cNvPicPr>
+          <p:nvPr/>
+        </p:nvPicPr>
+        <p:blipFill>
+          <a:blip r:embed="rId4"/>
+          <a:stretch>
+            <a:fillRect/>
+          </a:stretch>
+        </p:blipFill>
+        <p:spPr>
+          <a:xfrm>
+            <a:off x="8485632" y="128016"/>
+            <a:ext cx="502920" cy="502920"/>
+          </a:xfrm>
+          <a:prstGeom prst="rect">
+            <a:avLst/>
+          </a:prstGeom>
+        </p:spPr>
+      </p:pic>
+      <p:sp>
+        <p:nvSpPr>
+          <p:cNvPr id="13" name="foot_318"/>
+          <p:cNvSpPr/>
+          <p:nvPr/>
+        </p:nvSpPr>
+        <p:spPr>
+          <a:xfrm>
+            <a:off x="274320" y="4873752"/>
+            <a:ext cx="6858000" cy="219456"/>
+          </a:xfrm>
+          <a:prstGeom prst="rect">
+            <a:avLst/>
+          </a:prstGeom>
+          <a:noFill/>
+          <a:ln/>
+        </p:spPr>
+        <p:txBody>
+          <a:bodyPr wrap="square" lIns="0" tIns="0" rIns="0" bIns="0" rtlCol="0" anchor="ctr"/>
+          <a:lstStyle/>
+          <a:p>
+            <a:pPr indent="0" marL="0">
+              <a:buNone/>
+            </a:pPr>
+            <a:r>
+              <a:rPr lang="en-US" sz="800" dirty="0">
+                <a:solidFill>
+                  <a:srgbClr val="5B6785"/>
+                </a:solidFill>
+                <a:latin typeface="Segoe UI Semibold" pitchFamily="34" charset="0"/>
+                <a:ea typeface="Segoe UI Semibold" pitchFamily="34" charset="-122"/>
+                <a:cs typeface="Segoe UI Semibold" pitchFamily="34" charset="-120"/>
+              </a:rPr>
+              <a:t>6B-2 · Speaking · hospital meeting (1): roles   ·   📖 SB p.62–63 · 4f (consensus) · role-play</a:t>
+            </a:r>
+            <a:endParaRPr lang="en-US" sz="800" dirty="0"/>
+          </a:p>
+        </p:txBody>
+      </p:sp>
+      <p:sp>
+        <p:nvSpPr>
+          <p:cNvPr id="14" name="cd_319"/>
+          <p:cNvSpPr/>
+          <p:nvPr/>
+        </p:nvSpPr>
+        <p:spPr>
+          <a:xfrm>
+            <a:off x="320040" y="1417320"/>
+            <a:ext cx="2788920" cy="3150616"/>
+          </a:xfrm>
+          <a:prstGeom prst="roundRect">
+            <a:avLst>
+              <a:gd name="adj" fmla="val 4590"/>
+            </a:avLst>
+          </a:prstGeom>
+          <a:solidFill>
+            <a:srgbClr val="EEE8FB"/>
+          </a:solidFill>
+          <a:ln w="28575">
+            <a:solidFill>
+              <a:srgbClr val="CDBFF3"/>
+            </a:solidFill>
+            <a:prstDash val="solid"/>
+          </a:ln>
+          <a:effectLst>
+            <a:outerShdw sx="100000" sy="100000" kx="0" ky="0" algn="bl" rotWithShape="0" blurRad="88900" dist="31750" dir="5400000">
+              <a:srgbClr val="1B2559">
+                <a:alpha val="12000"/>
+              </a:srgbClr>
+            </a:outerShdw>
+          </a:effectLst>
+        </p:spPr>
+      </p:sp>
+      <p:sp>
+        <p:nvSpPr>
+          <p:cNvPr id="15" name="ii_320"/>
+          <p:cNvSpPr/>
+          <p:nvPr/>
+        </p:nvSpPr>
+        <p:spPr>
+          <a:xfrm>
+            <a:off x="411480" y="1490472"/>
+            <a:ext cx="457200" cy="457200"/>
+          </a:xfrm>
+          <a:prstGeom prst="rect">
+            <a:avLst/>
+          </a:prstGeom>
+          <a:noFill/>
+          <a:ln/>
+        </p:spPr>
+        <p:txBody>
+          <a:bodyPr wrap="square" lIns="0" tIns="0" rIns="0" bIns="0" rtlCol="0" anchor="ctr"/>
+          <a:lstStyle/>
+          <a:p>
+            <a:pPr algn="ctr" indent="0" marL="0">
+              <a:buNone/>
+            </a:pPr>
+            <a:r>
+              <a:rPr lang="en-US" sz="2200" dirty="0">
+                <a:solidFill>
+                  <a:srgbClr val="000000"/>
+                </a:solidFill>
+              </a:rPr>
+              <a:t>📋</a:t>
+            </a:r>
+            <a:endParaRPr lang="en-US" sz="2200" dirty="0"/>
+          </a:p>
+        </p:txBody>
+      </p:sp>
+      <p:sp>
+        <p:nvSpPr>
+          <p:cNvPr id="16" name="ih_321"/>
+          <p:cNvSpPr/>
+          <p:nvPr/>
+        </p:nvSpPr>
+        <p:spPr>
+          <a:xfrm>
+            <a:off x="886968" y="1508760"/>
+            <a:ext cx="2148840" cy="365760"/>
+          </a:xfrm>
+          <a:prstGeom prst="rect">
+            <a:avLst/>
+          </a:prstGeom>
+          <a:noFill/>
+          <a:ln/>
+        </p:spPr>
+        <p:txBody>
+          <a:bodyPr wrap="square" lIns="0" tIns="0" rIns="0" bIns="0" rtlCol="0" anchor="ctr"/>
+          <a:lstStyle/>
+          <a:p>
+            <a:pPr indent="0" marL="0">
+              <a:buNone/>
+            </a:pPr>
+            <a:r>
+              <a:rPr lang="en-US" sz="1300" dirty="0">
+                <a:solidFill>
+                  <a:srgbClr val="1B2559"/>
+                </a:solidFill>
+                <a:latin typeface="Arial Rounded MT Bold" pitchFamily="34" charset="0"/>
+                <a:ea typeface="Arial Rounded MT Bold" pitchFamily="34" charset="-122"/>
+                <a:cs typeface="Arial Rounded MT Bold" pitchFamily="34" charset="-120"/>
+              </a:rPr>
+              <a:t>How it works</a:t>
+            </a:r>
+            <a:endParaRPr lang="en-US" sz="1300" dirty="0"/>
+          </a:p>
+        </p:txBody>
+      </p:sp>
+      <p:sp>
+        <p:nvSpPr>
+          <p:cNvPr id="17" name="il_322"/>
+          <p:cNvSpPr/>
+          <p:nvPr/>
+        </p:nvSpPr>
+        <p:spPr>
+          <a:xfrm>
+            <a:off x="886968" y="1911096"/>
+            <a:ext cx="2130552" cy="2583688"/>
+          </a:xfrm>
+          <a:prstGeom prst="rect">
+            <a:avLst/>
+          </a:prstGeom>
+          <a:noFill/>
+          <a:ln/>
+        </p:spPr>
+        <p:txBody>
+          <a:bodyPr wrap="square" lIns="0" tIns="0" rIns="0" bIns="0" rtlCol="0" anchor="t">
+            <a:normAutofit/>
+          </a:bodyPr>
+          <a:lstStyle/>
+          <a:p>
+            <a:pPr marL="152400" indent="-152400">
+              <a:spcAft>
+                <a:spcPts val="200"/>
+              </a:spcAft>
+              <a:buSzPct val="100000"/>
+              <a:buChar char="•"/>
+            </a:pPr>
+            <a:r>
+              <a:rPr lang="en-US" sz="1100" dirty="0">
+                <a:solidFill>
+                  <a:srgbClr val="1B2559"/>
+                </a:solidFill>
+                <a:latin typeface="Segoe UI Semibold" pitchFamily="34" charset="0"/>
+                <a:ea typeface="Segoe UI Semibold" pitchFamily="34" charset="-122"/>
+                <a:cs typeface="Segoe UI Semibold" pitchFamily="34" charset="-120"/>
+              </a:rPr>
+              <a:t>1 minute: read your role and think of 2 reasons.</a:t>
+            </a:r>
+            <a:endParaRPr lang="en-US" sz="1100" dirty="0"/>
+          </a:p>
+          <a:p>
+            <a:pPr marL="152400" indent="-152400">
+              <a:spcBef>
+                <a:spcPts val="600"/>
+              </a:spcBef>
+              <a:spcAft>
+                <a:spcPts val="200"/>
+              </a:spcAft>
+              <a:buSzPct val="100000"/>
+              <a:buChar char="•"/>
+            </a:pPr>
+            <a:r>
+              <a:rPr lang="en-US" sz="1100" dirty="0">
+                <a:solidFill>
+                  <a:srgbClr val="1B2559"/>
+                </a:solidFill>
+                <a:latin typeface="Segoe UI Semibold" pitchFamily="34" charset="0"/>
+                <a:ea typeface="Segoe UI Semibold" pitchFamily="34" charset="-122"/>
+                <a:cs typeface="Segoe UI Semibold" pitchFamily="34" charset="-120"/>
+              </a:rPr>
+              <a:t>Round 1: each person speaks for 30 seconds. No interrupting!</a:t>
+            </a:r>
+            <a:endParaRPr lang="en-US" sz="1100" dirty="0"/>
+          </a:p>
+          <a:p>
+            <a:pPr marL="152400" indent="-152400">
+              <a:spcBef>
+                <a:spcPts val="600"/>
+              </a:spcBef>
+              <a:spcAft>
+                <a:spcPts val="200"/>
+              </a:spcAft>
+              <a:buSzPct val="100000"/>
+              <a:buChar char="•"/>
+            </a:pPr>
+            <a:r>
+              <a:rPr lang="en-US" sz="1100" dirty="0">
+                <a:solidFill>
+                  <a:srgbClr val="1B2559"/>
+                </a:solidFill>
+                <a:latin typeface="Segoe UI Semibold" pitchFamily="34" charset="0"/>
+                <a:ea typeface="Segoe UI Semibold" pitchFamily="34" charset="-122"/>
+                <a:cs typeface="Segoe UI Semibold" pitchFamily="34" charset="-120"/>
+              </a:rPr>
+              <a:t>Round 2: discuss and answer the others' reasons.</a:t>
+            </a:r>
+            <a:endParaRPr lang="en-US" sz="1100" dirty="0"/>
+          </a:p>
+          <a:p>
+            <a:pPr marL="152400" indent="-152400">
+              <a:spcBef>
+                <a:spcPts val="600"/>
+              </a:spcBef>
+              <a:spcAft>
+                <a:spcPts val="200"/>
+              </a:spcAft>
+              <a:buSzPct val="100000"/>
+              <a:buChar char="•"/>
+            </a:pPr>
+            <a:r>
+              <a:rPr lang="en-US" sz="1100" dirty="0">
+                <a:solidFill>
+                  <a:srgbClr val="1B2559"/>
+                </a:solidFill>
+                <a:latin typeface="Segoe UI Semibold" pitchFamily="34" charset="0"/>
+                <a:ea typeface="Segoe UI Semibold" pitchFamily="34" charset="-122"/>
+                <a:cs typeface="Segoe UI Semibold" pitchFamily="34" charset="-120"/>
+              </a:rPr>
+              <a:t>Vote: music always, sometimes or never?</a:t>
+            </a:r>
+            <a:endParaRPr lang="en-US" sz="1100" dirty="0"/>
+          </a:p>
+          <a:p>
+            <a:pPr marL="152400" indent="-152400">
+              <a:spcBef>
+                <a:spcPts val="600"/>
+              </a:spcBef>
+              <a:spcAft>
+                <a:spcPts val="200"/>
+              </a:spcAft>
+              <a:buSzPct val="100000"/>
+              <a:buChar char="•"/>
+            </a:pPr>
+            <a:r>
+              <a:rPr lang="en-US" sz="1100" dirty="0">
+                <a:solidFill>
+                  <a:srgbClr val="1B2559"/>
+                </a:solidFill>
+                <a:latin typeface="Segoe UI Semibold" pitchFamily="34" charset="0"/>
+                <a:ea typeface="Segoe UI Semibold" pitchFamily="34" charset="-122"/>
+                <a:cs typeface="Segoe UI Semibold" pitchFamily="34" charset="-120"/>
+              </a:rPr>
+              <a:t>Write ONE rule for your hospital.</a:t>
+            </a:r>
+            <a:endParaRPr lang="en-US" sz="1100" dirty="0"/>
+          </a:p>
+        </p:txBody>
+      </p:sp>
+      <p:sp>
+        <p:nvSpPr>
+          <p:cNvPr id="18" name="R1_qb323"/>
+          <p:cNvSpPr/>
+          <p:nvPr/>
+        </p:nvSpPr>
+        <p:spPr>
+          <a:xfrm>
+            <a:off x="3273552" y="1453896"/>
+            <a:ext cx="329184" cy="329184"/>
+          </a:xfrm>
+          <a:prstGeom prst="ellipse">
+            <a:avLst/>
+          </a:prstGeom>
+          <a:solidFill>
+            <a:srgbClr val="E8508F"/>
+          </a:solidFill>
+          <a:ln w="28575">
+            <a:solidFill>
+              <a:srgbClr val="F7A6C4"/>
+            </a:solidFill>
+          </a:ln>
+          <a:effectLst>
+            <a:outerShdw sx="100000" sy="100000" kx="0" ky="0" algn="bl" rotWithShape="0" blurRad="88900" dist="31750" dir="5400000">
+              <a:srgbClr val="1B2559">
+                <a:alpha val="15000"/>
+              </a:srgbClr>
+            </a:outerShdw>
+          </a:effectLst>
+        </p:spPr>
+        <p:txBody>
+          <a:bodyPr wrap="square" lIns="0" tIns="0" rIns="0" bIns="0" rtlCol="0" anchor="ctr"/>
+          <a:lstStyle/>
+          <a:p>
+            <a:pPr algn="ctr" indent="0" marL="0">
+              <a:buNone/>
+            </a:pPr>
+            <a:r>
+              <a:rPr lang="en-US" sz="1100" dirty="0">
+                <a:solidFill>
+                  <a:srgbClr val="FFFFFF"/>
+                </a:solidFill>
+                <a:latin typeface="Arial Rounded MT Bold" pitchFamily="34" charset="0"/>
+                <a:ea typeface="Arial Rounded MT Bold" pitchFamily="34" charset="-122"/>
+                <a:cs typeface="Arial Rounded MT Bold" pitchFamily="34" charset="-120"/>
+              </a:rPr>
+              <a:t>1</a:t>
+            </a:r>
+            <a:endParaRPr lang="en-US" sz="1100" dirty="0"/>
+          </a:p>
+        </p:txBody>
+      </p:sp>
+      <p:sp>
+        <p:nvSpPr>
+          <p:cNvPr id="19" name="R1_sq324"/>
+          <p:cNvSpPr/>
+          <p:nvPr/>
+        </p:nvSpPr>
+        <p:spPr>
+          <a:xfrm>
+            <a:off x="3675888" y="1417320"/>
+            <a:ext cx="5193792" cy="530352"/>
+          </a:xfrm>
+          <a:prstGeom prst="roundRect">
+            <a:avLst>
+              <a:gd name="adj" fmla="val 20690"/>
+            </a:avLst>
+          </a:prstGeom>
+          <a:solidFill>
+            <a:srgbClr val="FFFFFF"/>
+          </a:solidFill>
+          <a:ln w="28575">
+            <a:solidFill>
+              <a:srgbClr val="F7A6C4"/>
+            </a:solidFill>
+          </a:ln>
+          <a:effectLst>
+            <a:outerShdw sx="100000" sy="100000" kx="0" ky="0" algn="bl" rotWithShape="0" blurRad="88900" dist="31750" dir="5400000">
+              <a:srgbClr val="1B2559">
+                <a:alpha val="8000"/>
+              </a:srgbClr>
+            </a:outerShdw>
+          </a:effectLst>
+        </p:spPr>
+        <p:txBody>
+          <a:bodyPr wrap="square" lIns="127000" tIns="25400" rIns="127000" bIns="25400" rtlCol="0" anchor="ctr">
+            <a:normAutofit/>
+          </a:bodyPr>
+          <a:lstStyle/>
+          <a:p>
+            <a:pPr indent="0" marL="0">
+              <a:buNone/>
+            </a:pPr>
+            <a:r>
+              <a:rPr lang="en-US" sz="950" dirty="0">
+                <a:solidFill>
+                  <a:srgbClr val="1B2559"/>
+                </a:solidFill>
+                <a:latin typeface="Segoe UI Semibold" pitchFamily="34" charset="0"/>
+                <a:ea typeface="Segoe UI Semibold" pitchFamily="34" charset="-122"/>
+                <a:cs typeface="Segoe UI Semibold" pitchFamily="34" charset="-120"/>
+              </a:rPr>
+              <a:t>A · Surgeon: you love your playlist. Music keeps the team happy and motivated.</a:t>
+            </a:r>
+            <a:endParaRPr lang="en-US" sz="950" dirty="0"/>
+          </a:p>
+          <a:p>
+            <a:pPr indent="0" marL="0">
+              <a:buNone/>
+            </a:pPr>
+            <a:r>
+              <a:rPr lang="en-US" sz="850" i="1" dirty="0">
+                <a:solidFill>
+                  <a:srgbClr val="5B6785"/>
+                </a:solidFill>
+                <a:latin typeface="Segoe UI Semibold" pitchFamily="34" charset="0"/>
+                <a:ea typeface="Segoe UI Semibold" pitchFamily="34" charset="-122"/>
+                <a:cs typeface="Segoe UI Semibold" pitchFamily="34" charset="-120"/>
+              </a:rPr>
+              <a:t>e.g. 'Last week we finished late – nobody minded, because of the music!'</a:t>
+            </a:r>
+            <a:endParaRPr lang="en-US" sz="950" dirty="0"/>
+          </a:p>
+        </p:txBody>
+      </p:sp>
+      <p:sp>
+        <p:nvSpPr>
+          <p:cNvPr id="20" name="R2_qb325"/>
+          <p:cNvSpPr/>
+          <p:nvPr/>
+        </p:nvSpPr>
+        <p:spPr>
+          <a:xfrm>
+            <a:off x="3273552" y="2057400"/>
+            <a:ext cx="329184" cy="329184"/>
+          </a:xfrm>
+          <a:prstGeom prst="ellipse">
+            <a:avLst/>
+          </a:prstGeom>
+          <a:solidFill>
+            <a:srgbClr val="2F8DE4"/>
+          </a:solidFill>
+          <a:ln w="28575">
+            <a:solidFill>
+              <a:srgbClr val="A9D3F5"/>
+            </a:solidFill>
+          </a:ln>
+          <a:effectLst>
+            <a:outerShdw sx="100000" sy="100000" kx="0" ky="0" algn="bl" rotWithShape="0" blurRad="88900" dist="31750" dir="5400000">
+              <a:srgbClr val="1B2559">
+                <a:alpha val="15000"/>
+              </a:srgbClr>
+            </a:outerShdw>
+          </a:effectLst>
+        </p:spPr>
+        <p:txBody>
+          <a:bodyPr wrap="square" lIns="0" tIns="0" rIns="0" bIns="0" rtlCol="0" anchor="ctr"/>
+          <a:lstStyle/>
+          <a:p>
+            <a:pPr algn="ctr" indent="0" marL="0">
+              <a:buNone/>
+            </a:pPr>
+            <a:r>
+              <a:rPr lang="en-US" sz="1100" dirty="0">
+                <a:solidFill>
+                  <a:srgbClr val="FFFFFF"/>
+                </a:solidFill>
+                <a:latin typeface="Arial Rounded MT Bold" pitchFamily="34" charset="0"/>
+                <a:ea typeface="Arial Rounded MT Bold" pitchFamily="34" charset="-122"/>
+                <a:cs typeface="Arial Rounded MT Bold" pitchFamily="34" charset="-120"/>
+              </a:rPr>
+              <a:t>2</a:t>
+            </a:r>
+            <a:endParaRPr lang="en-US" sz="1100" dirty="0"/>
+          </a:p>
+        </p:txBody>
+      </p:sp>
+      <p:sp>
+        <p:nvSpPr>
+          <p:cNvPr id="21" name="R2_sq326"/>
+          <p:cNvSpPr/>
+          <p:nvPr/>
+        </p:nvSpPr>
+        <p:spPr>
+          <a:xfrm>
+            <a:off x="3675888" y="2020824"/>
+            <a:ext cx="5193792" cy="530352"/>
+          </a:xfrm>
+          <a:prstGeom prst="roundRect">
+            <a:avLst>
+              <a:gd name="adj" fmla="val 20690"/>
             </a:avLst>
           </a:prstGeom>
           <a:solidFill>
@@ -8728,7 +9299,7 @@
           </a:effectLst>
         </p:spPr>
         <p:txBody>
-          <a:bodyPr wrap="square" lIns="101600" tIns="0" rIns="101600" bIns="0" rtlCol="0" anchor="ctr">
+          <a:bodyPr wrap="square" lIns="127000" tIns="25400" rIns="127000" bIns="25400" rtlCol="0" anchor="ctr">
             <a:normAutofit/>
           </a:bodyPr>
           <a:lstStyle/>
@@ -8739,87 +9310,30 @@
             <a:r>
               <a:rPr lang="en-US" sz="950" dirty="0">
                 <a:solidFill>
-                  <a:srgbClr val="000000"/>
-                </a:solidFill>
-              </a:rPr>
-              <a:t>💡 </a:t>
-            </a:r>
-            <a:pPr indent="0" marL="0">
-              <a:buNone/>
-            </a:pPr>
-            <a:r>
-              <a:rPr lang="en-US" sz="950" dirty="0">
-                <a:solidFill>
-                  <a:srgbClr val="2F8DE4"/>
-                </a:solidFill>
-                <a:latin typeface="Arial Rounded MT Bold" pitchFamily="34" charset="0"/>
-                <a:ea typeface="Arial Rounded MT Bold" pitchFamily="34" charset="-122"/>
-                <a:cs typeface="Arial Rounded MT Bold" pitchFamily="34" charset="-120"/>
-              </a:rPr>
-              <a:t>THINK</a:t>
-            </a:r>
-            <a:pPr indent="0" marL="0">
-              <a:buNone/>
-            </a:pPr>
-            <a:r>
-              <a:rPr lang="en-US" sz="950" dirty="0">
-                <a:solidFill>
-                  <a:srgbClr val="5B6785"/>
+                  <a:srgbClr val="1B2559"/>
                 </a:solidFill>
                 <a:latin typeface="Segoe UI Semibold" pitchFamily="34" charset="0"/>
                 <a:ea typeface="Segoe UI Semibold" pitchFamily="34" charset="-122"/>
                 <a:cs typeface="Segoe UI Semibold" pitchFamily="34" charset="-120"/>
               </a:rPr>
-              <a:t>  PENSA</a:t>
+              <a:t>B · Heart surgeon: NO music, ever. A team of 12 must hear each other.</a:t>
             </a:r>
             <a:endParaRPr lang="en-US" sz="950" dirty="0"/>
           </a:p>
-        </p:txBody>
-      </p:sp>
-      <p:sp>
-        <p:nvSpPr>
-          <p:cNvPr id="11" name="meta_320"/>
-          <p:cNvSpPr/>
-          <p:nvPr/>
-        </p:nvSpPr>
-        <p:spPr>
-          <a:xfrm>
-            <a:off x="6510528" y="804672"/>
-            <a:ext cx="1901952" cy="274320"/>
-          </a:xfrm>
-          <a:prstGeom prst="roundRect">
-            <a:avLst>
-              <a:gd name="adj" fmla="val 50000"/>
-            </a:avLst>
-          </a:prstGeom>
-          <a:solidFill>
-            <a:srgbClr val="FFFFFF"/>
-          </a:solidFill>
-          <a:ln w="28575">
-            <a:solidFill>
-              <a:srgbClr val="A9D3F5"/>
-            </a:solidFill>
-          </a:ln>
-        </p:spPr>
-        <p:txBody>
-          <a:bodyPr wrap="square" lIns="76200" tIns="0" rIns="76200" bIns="0" rtlCol="0" anchor="ctr">
-            <a:normAutofit/>
-          </a:bodyPr>
-          <a:lstStyle/>
-          <a:p>
-            <a:pPr algn="ctr" indent="0" marL="0">
-              <a:buNone/>
-            </a:pPr>
-            <a:r>
-              <a:rPr lang="en-US" sz="950" dirty="0">
-                <a:solidFill>
-                  <a:srgbClr val="1B2559"/>
+          <a:p>
+            <a:pPr indent="0" marL="0">
+              <a:buNone/>
+            </a:pPr>
+            <a:r>
+              <a:rPr lang="en-US" sz="850" i="1" dirty="0">
+                <a:solidFill>
+                  <a:srgbClr val="5B6785"/>
                 </a:solidFill>
                 <a:latin typeface="Segoe UI Semibold" pitchFamily="34" charset="0"/>
                 <a:ea typeface="Segoe UI Semibold" pitchFamily="34" charset="-122"/>
                 <a:cs typeface="Segoe UI Semibold" pitchFamily="34" charset="-120"/>
               </a:rPr>
-              <a:t>⏱ 2 min   👨‍👩‍👧 groups</a:t>
+              <a:t>e.g. 'Any extra noise gets in the way. One mistake is too many.'</a:t>
             </a:r>
             <a:endParaRPr lang="en-US" sz="950" dirty="0"/>
           </a:p>
@@ -8827,633 +9341,7 @@
       </p:sp>
       <p:sp>
         <p:nvSpPr>
-          <p:cNvPr id="12" name="tag_321"/>
-          <p:cNvSpPr/>
-          <p:nvPr/>
-        </p:nvSpPr>
-        <p:spPr>
-          <a:xfrm>
-            <a:off x="6510528" y="1115568"/>
-            <a:ext cx="1901952" cy="274320"/>
-          </a:xfrm>
-          <a:prstGeom prst="roundRect">
-            <a:avLst>
-              <a:gd name="adj" fmla="val 50000"/>
-            </a:avLst>
-          </a:prstGeom>
-          <a:solidFill>
-            <a:srgbClr val="F3EEFF"/>
-          </a:solidFill>
-          <a:ln w="28575">
-            <a:solidFill>
-              <a:srgbClr val="CDBFF3"/>
-            </a:solidFill>
-          </a:ln>
-        </p:spPr>
-        <p:txBody>
-          <a:bodyPr wrap="square" lIns="76200" tIns="0" rIns="76200" bIns="0" rtlCol="0" anchor="ctr">
-            <a:normAutofit/>
-          </a:bodyPr>
-          <a:lstStyle/>
-          <a:p>
-            <a:pPr algn="ctr" indent="0" marL="0">
-              <a:buNone/>
-            </a:pPr>
-            <a:r>
-              <a:rPr lang="en-US" sz="750" b="1" dirty="0">
-                <a:solidFill>
-                  <a:srgbClr val="1B2559"/>
-                </a:solidFill>
-                <a:latin typeface="Segoe UI Semibold" pitchFamily="34" charset="0"/>
-                <a:ea typeface="Segoe UI Semibold" pitchFamily="34" charset="-122"/>
-                <a:cs typeface="Segoe UI Semibold" pitchFamily="34" charset="-120"/>
-              </a:rPr>
-              <a:t>🎯 Speaking</a:t>
-            </a:r>
-            <a:pPr algn="ctr" indent="0" marL="0">
-              <a:buNone/>
-            </a:pPr>
-            <a:r>
-              <a:rPr lang="en-US" sz="750" dirty="0">
-                <a:solidFill>
-                  <a:srgbClr val="7B5CD6"/>
-                </a:solidFill>
-                <a:latin typeface="Segoe UI Semibold" pitchFamily="34" charset="0"/>
-                <a:ea typeface="Segoe UI Semibold" pitchFamily="34" charset="-122"/>
-                <a:cs typeface="Segoe UI Semibold" pitchFamily="34" charset="-120"/>
-              </a:rPr>
-              <a:t>  ·  Role-play · prepare</a:t>
-            </a:r>
-            <a:endParaRPr lang="en-US" sz="750" dirty="0"/>
-          </a:p>
-        </p:txBody>
-      </p:sp>
-      <p:pic>
-        <p:nvPicPr>
-          <p:cNvPr id="13" name="logo_322" descr="/home/claude/lls-course/v2/img/logo.png">    </p:cNvPr>
-          <p:cNvPicPr>
-            <a:picLocks noChangeAspect="1"/>
-          </p:cNvPicPr>
-          <p:nvPr/>
-        </p:nvPicPr>
-        <p:blipFill>
-          <a:blip r:embed="rId4"/>
-          <a:stretch>
-            <a:fillRect/>
-          </a:stretch>
-        </p:blipFill>
-        <p:spPr>
-          <a:xfrm>
-            <a:off x="8485632" y="128016"/>
-            <a:ext cx="502920" cy="502920"/>
-          </a:xfrm>
-          <a:prstGeom prst="rect">
-            <a:avLst/>
-          </a:prstGeom>
-        </p:spPr>
-      </p:pic>
-      <p:sp>
-        <p:nvSpPr>
-          <p:cNvPr id="14" name="foot_323"/>
-          <p:cNvSpPr/>
-          <p:nvPr/>
-        </p:nvSpPr>
-        <p:spPr>
-          <a:xfrm>
-            <a:off x="274320" y="4873752"/>
-            <a:ext cx="6858000" cy="219456"/>
-          </a:xfrm>
-          <a:prstGeom prst="rect">
-            <a:avLst/>
-          </a:prstGeom>
-          <a:noFill/>
-          <a:ln/>
-        </p:spPr>
-        <p:txBody>
-          <a:bodyPr wrap="square" lIns="0" tIns="0" rIns="0" bIns="0" rtlCol="0" anchor="ctr"/>
-          <a:lstStyle/>
-          <a:p>
-            <a:pPr indent="0" marL="0">
-              <a:buNone/>
-            </a:pPr>
-            <a:r>
-              <a:rPr lang="en-US" sz="800" dirty="0">
-                <a:solidFill>
-                  <a:srgbClr val="5B6785"/>
-                </a:solidFill>
-                <a:latin typeface="Segoe UI Semibold" pitchFamily="34" charset="0"/>
-                <a:ea typeface="Segoe UI Semibold" pitchFamily="34" charset="-122"/>
-                <a:cs typeface="Segoe UI Semibold" pitchFamily="34" charset="-120"/>
-              </a:rPr>
-              <a:t>6B-2 · Speaking · hospital meeting (1): roles   ·   📖 SB p.62–63 · 4f (consensus) · role-play</a:t>
-            </a:r>
-            <a:endParaRPr lang="en-US" sz="800" dirty="0"/>
-          </a:p>
-        </p:txBody>
-      </p:sp>
-      <p:sp>
-        <p:nvSpPr>
-          <p:cNvPr id="15" name="cd_324"/>
-          <p:cNvSpPr/>
-          <p:nvPr/>
-        </p:nvSpPr>
-        <p:spPr>
-          <a:xfrm>
-            <a:off x="320040" y="1417320"/>
-            <a:ext cx="2788920" cy="3150616"/>
-          </a:xfrm>
-          <a:prstGeom prst="roundRect">
-            <a:avLst>
-              <a:gd name="adj" fmla="val 4590"/>
-            </a:avLst>
-          </a:prstGeom>
-          <a:solidFill>
-            <a:srgbClr val="FFF6CC"/>
-          </a:solidFill>
-          <a:ln w="28575">
-            <a:solidFill>
-              <a:srgbClr val="FFE07A"/>
-            </a:solidFill>
-            <a:prstDash val="solid"/>
-          </a:ln>
-          <a:effectLst>
-            <a:outerShdw sx="100000" sy="100000" kx="0" ky="0" algn="bl" rotWithShape="0" blurRad="88900" dist="31750" dir="5400000">
-              <a:srgbClr val="1B2559">
-                <a:alpha val="12000"/>
-              </a:srgbClr>
-            </a:outerShdw>
-          </a:effectLst>
-        </p:spPr>
-      </p:sp>
-      <p:sp>
-        <p:nvSpPr>
-          <p:cNvPr id="16" name="ii_325"/>
-          <p:cNvSpPr/>
-          <p:nvPr/>
-        </p:nvSpPr>
-        <p:spPr>
-          <a:xfrm>
-            <a:off x="411480" y="1490472"/>
-            <a:ext cx="457200" cy="457200"/>
-          </a:xfrm>
-          <a:prstGeom prst="rect">
-            <a:avLst/>
-          </a:prstGeom>
-          <a:noFill/>
-          <a:ln/>
-        </p:spPr>
-        <p:txBody>
-          <a:bodyPr wrap="square" lIns="0" tIns="0" rIns="0" bIns="0" rtlCol="0" anchor="ctr"/>
-          <a:lstStyle/>
-          <a:p>
-            <a:pPr algn="ctr" indent="0" marL="0">
-              <a:buNone/>
-            </a:pPr>
-            <a:r>
-              <a:rPr lang="en-US" sz="2200" dirty="0">
-                <a:solidFill>
-                  <a:srgbClr val="000000"/>
-                </a:solidFill>
-              </a:rPr>
-              <a:t>📋</a:t>
-            </a:r>
-            <a:endParaRPr lang="en-US" sz="2200" dirty="0"/>
-          </a:p>
-        </p:txBody>
-      </p:sp>
-      <p:sp>
-        <p:nvSpPr>
-          <p:cNvPr id="17" name="ih_326"/>
-          <p:cNvSpPr/>
-          <p:nvPr/>
-        </p:nvSpPr>
-        <p:spPr>
-          <a:xfrm>
-            <a:off x="886968" y="1508760"/>
-            <a:ext cx="2148840" cy="365760"/>
-          </a:xfrm>
-          <a:prstGeom prst="rect">
-            <a:avLst/>
-          </a:prstGeom>
-          <a:noFill/>
-          <a:ln/>
-        </p:spPr>
-        <p:txBody>
-          <a:bodyPr wrap="square" lIns="0" tIns="0" rIns="0" bIns="0" rtlCol="0" anchor="ctr"/>
-          <a:lstStyle/>
-          <a:p>
-            <a:pPr indent="0" marL="0">
-              <a:buNone/>
-            </a:pPr>
-            <a:r>
-              <a:rPr lang="en-US" sz="1300" dirty="0">
-                <a:solidFill>
-                  <a:srgbClr val="1B2559"/>
-                </a:solidFill>
-                <a:latin typeface="Arial Rounded MT Bold" pitchFamily="34" charset="0"/>
-                <a:ea typeface="Arial Rounded MT Bold" pitchFamily="34" charset="-122"/>
-                <a:cs typeface="Arial Rounded MT Bold" pitchFamily="34" charset="-120"/>
-              </a:rPr>
-              <a:t>How it works</a:t>
-            </a:r>
-            <a:endParaRPr lang="en-US" sz="1300" dirty="0"/>
-          </a:p>
-        </p:txBody>
-      </p:sp>
-      <p:sp>
-        <p:nvSpPr>
-          <p:cNvPr id="18" name="il_327"/>
-          <p:cNvSpPr/>
-          <p:nvPr/>
-        </p:nvSpPr>
-        <p:spPr>
-          <a:xfrm>
-            <a:off x="886968" y="1911096"/>
-            <a:ext cx="2130552" cy="2583688"/>
-          </a:xfrm>
-          <a:prstGeom prst="rect">
-            <a:avLst/>
-          </a:prstGeom>
-          <a:noFill/>
-          <a:ln/>
-        </p:spPr>
-        <p:txBody>
-          <a:bodyPr wrap="square" lIns="0" tIns="0" rIns="0" bIns="0" rtlCol="0" anchor="t">
-            <a:normAutofit/>
-          </a:bodyPr>
-          <a:lstStyle/>
-          <a:p>
-            <a:pPr marL="152400" indent="-152400">
-              <a:spcAft>
-                <a:spcPts val="200"/>
-              </a:spcAft>
-              <a:buSzPct val="100000"/>
-              <a:buChar char="•"/>
-            </a:pPr>
-            <a:r>
-              <a:rPr lang="en-US" sz="1100" dirty="0">
-                <a:solidFill>
-                  <a:srgbClr val="1B2559"/>
-                </a:solidFill>
-                <a:latin typeface="Segoe UI Semibold" pitchFamily="34" charset="0"/>
-                <a:ea typeface="Segoe UI Semibold" pitchFamily="34" charset="-122"/>
-                <a:cs typeface="Segoe UI Semibold" pitchFamily="34" charset="-120"/>
-              </a:rPr>
-              <a:t>1 minute: read your role and think of 2 reasons.</a:t>
-            </a:r>
-            <a:endParaRPr lang="en-US" sz="1100" dirty="0"/>
-          </a:p>
-          <a:p>
-            <a:pPr marL="152400" indent="-152400">
-              <a:spcBef>
-                <a:spcPts val="600"/>
-              </a:spcBef>
-              <a:spcAft>
-                <a:spcPts val="200"/>
-              </a:spcAft>
-              <a:buSzPct val="100000"/>
-              <a:buChar char="•"/>
-            </a:pPr>
-            <a:r>
-              <a:rPr lang="en-US" sz="1100" dirty="0">
-                <a:solidFill>
-                  <a:srgbClr val="1B2559"/>
-                </a:solidFill>
-                <a:latin typeface="Segoe UI Semibold" pitchFamily="34" charset="0"/>
-                <a:ea typeface="Segoe UI Semibold" pitchFamily="34" charset="-122"/>
-                <a:cs typeface="Segoe UI Semibold" pitchFamily="34" charset="-120"/>
-              </a:rPr>
-              <a:t>Round 1: each person speaks for 30 seconds. No interrupting!</a:t>
-            </a:r>
-            <a:endParaRPr lang="en-US" sz="1100" dirty="0"/>
-          </a:p>
-          <a:p>
-            <a:pPr marL="152400" indent="-152400">
-              <a:spcBef>
-                <a:spcPts val="600"/>
-              </a:spcBef>
-              <a:spcAft>
-                <a:spcPts val="200"/>
-              </a:spcAft>
-              <a:buSzPct val="100000"/>
-              <a:buChar char="•"/>
-            </a:pPr>
-            <a:r>
-              <a:rPr lang="en-US" sz="1100" dirty="0">
-                <a:solidFill>
-                  <a:srgbClr val="1B2559"/>
-                </a:solidFill>
-                <a:latin typeface="Segoe UI Semibold" pitchFamily="34" charset="0"/>
-                <a:ea typeface="Segoe UI Semibold" pitchFamily="34" charset="-122"/>
-                <a:cs typeface="Segoe UI Semibold" pitchFamily="34" charset="-120"/>
-              </a:rPr>
-              <a:t>Round 2: discuss and answer the others' reasons.</a:t>
-            </a:r>
-            <a:endParaRPr lang="en-US" sz="1100" dirty="0"/>
-          </a:p>
-          <a:p>
-            <a:pPr marL="152400" indent="-152400">
-              <a:spcBef>
-                <a:spcPts val="600"/>
-              </a:spcBef>
-              <a:spcAft>
-                <a:spcPts val="200"/>
-              </a:spcAft>
-              <a:buSzPct val="100000"/>
-              <a:buChar char="•"/>
-            </a:pPr>
-            <a:r>
-              <a:rPr lang="en-US" sz="1100" dirty="0">
-                <a:solidFill>
-                  <a:srgbClr val="1B2559"/>
-                </a:solidFill>
-                <a:latin typeface="Segoe UI Semibold" pitchFamily="34" charset="0"/>
-                <a:ea typeface="Segoe UI Semibold" pitchFamily="34" charset="-122"/>
-                <a:cs typeface="Segoe UI Semibold" pitchFamily="34" charset="-120"/>
-              </a:rPr>
-              <a:t>Vote: music always, sometimes or never?</a:t>
-            </a:r>
-            <a:endParaRPr lang="en-US" sz="1100" dirty="0"/>
-          </a:p>
-          <a:p>
-            <a:pPr marL="152400" indent="-152400">
-              <a:spcBef>
-                <a:spcPts val="600"/>
-              </a:spcBef>
-              <a:spcAft>
-                <a:spcPts val="200"/>
-              </a:spcAft>
-              <a:buSzPct val="100000"/>
-              <a:buChar char="•"/>
-            </a:pPr>
-            <a:r>
-              <a:rPr lang="en-US" sz="1100" dirty="0">
-                <a:solidFill>
-                  <a:srgbClr val="1B2559"/>
-                </a:solidFill>
-                <a:latin typeface="Segoe UI Semibold" pitchFamily="34" charset="0"/>
-                <a:ea typeface="Segoe UI Semibold" pitchFamily="34" charset="-122"/>
-                <a:cs typeface="Segoe UI Semibold" pitchFamily="34" charset="-120"/>
-              </a:rPr>
-              <a:t>Write ONE rule for your hospital.</a:t>
-            </a:r>
-            <a:endParaRPr lang="en-US" sz="1100" dirty="0"/>
-          </a:p>
-        </p:txBody>
-      </p:sp>
-      <p:sp>
-        <p:nvSpPr>
-          <p:cNvPr id="19" name="R1_qb328"/>
-          <p:cNvSpPr/>
-          <p:nvPr/>
-        </p:nvSpPr>
-        <p:spPr>
-          <a:xfrm>
-            <a:off x="3273552" y="1453896"/>
-            <a:ext cx="329184" cy="329184"/>
-          </a:xfrm>
-          <a:prstGeom prst="ellipse">
-            <a:avLst/>
-          </a:prstGeom>
-          <a:solidFill>
-            <a:srgbClr val="E8508F"/>
-          </a:solidFill>
-          <a:ln w="28575">
-            <a:solidFill>
-              <a:srgbClr val="F7A6C4"/>
-            </a:solidFill>
-          </a:ln>
-          <a:effectLst>
-            <a:outerShdw sx="100000" sy="100000" kx="0" ky="0" algn="bl" rotWithShape="0" blurRad="88900" dist="31750" dir="5400000">
-              <a:srgbClr val="1B2559">
-                <a:alpha val="15000"/>
-              </a:srgbClr>
-            </a:outerShdw>
-          </a:effectLst>
-        </p:spPr>
-        <p:txBody>
-          <a:bodyPr wrap="square" lIns="0" tIns="0" rIns="0" bIns="0" rtlCol="0" anchor="ctr"/>
-          <a:lstStyle/>
-          <a:p>
-            <a:pPr algn="ctr" indent="0" marL="0">
-              <a:buNone/>
-            </a:pPr>
-            <a:r>
-              <a:rPr lang="en-US" sz="1100" dirty="0">
-                <a:solidFill>
-                  <a:srgbClr val="FFFFFF"/>
-                </a:solidFill>
-                <a:latin typeface="Arial Rounded MT Bold" pitchFamily="34" charset="0"/>
-                <a:ea typeface="Arial Rounded MT Bold" pitchFamily="34" charset="-122"/>
-                <a:cs typeface="Arial Rounded MT Bold" pitchFamily="34" charset="-120"/>
-              </a:rPr>
-              <a:t>1</a:t>
-            </a:r>
-            <a:endParaRPr lang="en-US" sz="1100" dirty="0"/>
-          </a:p>
-        </p:txBody>
-      </p:sp>
-      <p:sp>
-        <p:nvSpPr>
-          <p:cNvPr id="20" name="R1_sq329"/>
-          <p:cNvSpPr/>
-          <p:nvPr/>
-        </p:nvSpPr>
-        <p:spPr>
-          <a:xfrm>
-            <a:off x="3675888" y="1417320"/>
-            <a:ext cx="5193792" cy="530352"/>
-          </a:xfrm>
-          <a:prstGeom prst="roundRect">
-            <a:avLst>
-              <a:gd name="adj" fmla="val 20690"/>
-            </a:avLst>
-          </a:prstGeom>
-          <a:solidFill>
-            <a:srgbClr val="FFFFFF"/>
-          </a:solidFill>
-          <a:ln w="28575">
-            <a:solidFill>
-              <a:srgbClr val="F7A6C4"/>
-            </a:solidFill>
-          </a:ln>
-          <a:effectLst>
-            <a:outerShdw sx="100000" sy="100000" kx="0" ky="0" algn="bl" rotWithShape="0" blurRad="88900" dist="31750" dir="5400000">
-              <a:srgbClr val="1B2559">
-                <a:alpha val="8000"/>
-              </a:srgbClr>
-            </a:outerShdw>
-          </a:effectLst>
-        </p:spPr>
-        <p:txBody>
-          <a:bodyPr wrap="square" lIns="127000" tIns="25400" rIns="127000" bIns="25400" rtlCol="0" anchor="ctr">
-            <a:normAutofit/>
-          </a:bodyPr>
-          <a:lstStyle/>
-          <a:p>
-            <a:pPr indent="0" marL="0">
-              <a:buNone/>
-            </a:pPr>
-            <a:r>
-              <a:rPr lang="en-US" sz="950" dirty="0">
-                <a:solidFill>
-                  <a:srgbClr val="1B2559"/>
-                </a:solidFill>
-                <a:latin typeface="Segoe UI Semibold" pitchFamily="34" charset="0"/>
-                <a:ea typeface="Segoe UI Semibold" pitchFamily="34" charset="-122"/>
-                <a:cs typeface="Segoe UI Semibold" pitchFamily="34" charset="-120"/>
-              </a:rPr>
-              <a:t>A · Surgeon: you love your playlist. Music keeps the team happy and motivated.</a:t>
-            </a:r>
-            <a:endParaRPr lang="en-US" sz="950" dirty="0"/>
-          </a:p>
-          <a:p>
-            <a:pPr indent="0" marL="0">
-              <a:buNone/>
-            </a:pPr>
-            <a:r>
-              <a:rPr lang="en-US" sz="850" i="1" dirty="0">
-                <a:solidFill>
-                  <a:srgbClr val="5B6785"/>
-                </a:solidFill>
-                <a:latin typeface="Segoe UI Semibold" pitchFamily="34" charset="0"/>
-                <a:ea typeface="Segoe UI Semibold" pitchFamily="34" charset="-122"/>
-                <a:cs typeface="Segoe UI Semibold" pitchFamily="34" charset="-120"/>
-              </a:rPr>
-              <a:t>e.g. 'Last week we finished late – nobody minded, because of the music!'</a:t>
-            </a:r>
-            <a:endParaRPr lang="en-US" sz="950" dirty="0"/>
-          </a:p>
-        </p:txBody>
-      </p:sp>
-      <p:sp>
-        <p:nvSpPr>
-          <p:cNvPr id="21" name="R2_qb330"/>
-          <p:cNvSpPr/>
-          <p:nvPr/>
-        </p:nvSpPr>
-        <p:spPr>
-          <a:xfrm>
-            <a:off x="3273552" y="2057400"/>
-            <a:ext cx="329184" cy="329184"/>
-          </a:xfrm>
-          <a:prstGeom prst="ellipse">
-            <a:avLst/>
-          </a:prstGeom>
-          <a:solidFill>
-            <a:srgbClr val="2F8DE4"/>
-          </a:solidFill>
-          <a:ln w="28575">
-            <a:solidFill>
-              <a:srgbClr val="A9D3F5"/>
-            </a:solidFill>
-          </a:ln>
-          <a:effectLst>
-            <a:outerShdw sx="100000" sy="100000" kx="0" ky="0" algn="bl" rotWithShape="0" blurRad="88900" dist="31750" dir="5400000">
-              <a:srgbClr val="1B2559">
-                <a:alpha val="15000"/>
-              </a:srgbClr>
-            </a:outerShdw>
-          </a:effectLst>
-        </p:spPr>
-        <p:txBody>
-          <a:bodyPr wrap="square" lIns="0" tIns="0" rIns="0" bIns="0" rtlCol="0" anchor="ctr"/>
-          <a:lstStyle/>
-          <a:p>
-            <a:pPr algn="ctr" indent="0" marL="0">
-              <a:buNone/>
-            </a:pPr>
-            <a:r>
-              <a:rPr lang="en-US" sz="1100" dirty="0">
-                <a:solidFill>
-                  <a:srgbClr val="FFFFFF"/>
-                </a:solidFill>
-                <a:latin typeface="Arial Rounded MT Bold" pitchFamily="34" charset="0"/>
-                <a:ea typeface="Arial Rounded MT Bold" pitchFamily="34" charset="-122"/>
-                <a:cs typeface="Arial Rounded MT Bold" pitchFamily="34" charset="-120"/>
-              </a:rPr>
-              <a:t>2</a:t>
-            </a:r>
-            <a:endParaRPr lang="en-US" sz="1100" dirty="0"/>
-          </a:p>
-        </p:txBody>
-      </p:sp>
-      <p:sp>
-        <p:nvSpPr>
-          <p:cNvPr id="22" name="R2_sq331"/>
-          <p:cNvSpPr/>
-          <p:nvPr/>
-        </p:nvSpPr>
-        <p:spPr>
-          <a:xfrm>
-            <a:off x="3675888" y="2020824"/>
-            <a:ext cx="5193792" cy="530352"/>
-          </a:xfrm>
-          <a:prstGeom prst="roundRect">
-            <a:avLst>
-              <a:gd name="adj" fmla="val 20690"/>
-            </a:avLst>
-          </a:prstGeom>
-          <a:solidFill>
-            <a:srgbClr val="FFFFFF"/>
-          </a:solidFill>
-          <a:ln w="28575">
-            <a:solidFill>
-              <a:srgbClr val="A9D3F5"/>
-            </a:solidFill>
-          </a:ln>
-          <a:effectLst>
-            <a:outerShdw sx="100000" sy="100000" kx="0" ky="0" algn="bl" rotWithShape="0" blurRad="88900" dist="31750" dir="5400000">
-              <a:srgbClr val="1B2559">
-                <a:alpha val="8000"/>
-              </a:srgbClr>
-            </a:outerShdw>
-          </a:effectLst>
-        </p:spPr>
-        <p:txBody>
-          <a:bodyPr wrap="square" lIns="127000" tIns="25400" rIns="127000" bIns="25400" rtlCol="0" anchor="ctr">
-            <a:normAutofit/>
-          </a:bodyPr>
-          <a:lstStyle/>
-          <a:p>
-            <a:pPr indent="0" marL="0">
-              <a:buNone/>
-            </a:pPr>
-            <a:r>
-              <a:rPr lang="en-US" sz="950" dirty="0">
-                <a:solidFill>
-                  <a:srgbClr val="1B2559"/>
-                </a:solidFill>
-                <a:latin typeface="Segoe UI Semibold" pitchFamily="34" charset="0"/>
-                <a:ea typeface="Segoe UI Semibold" pitchFamily="34" charset="-122"/>
-                <a:cs typeface="Segoe UI Semibold" pitchFamily="34" charset="-120"/>
-              </a:rPr>
-              <a:t>B · Heart surgeon: NO music, ever. A team of 12 must hear each other.</a:t>
-            </a:r>
-            <a:endParaRPr lang="en-US" sz="950" dirty="0"/>
-          </a:p>
-          <a:p>
-            <a:pPr indent="0" marL="0">
-              <a:buNone/>
-            </a:pPr>
-            <a:r>
-              <a:rPr lang="en-US" sz="850" i="1" dirty="0">
-                <a:solidFill>
-                  <a:srgbClr val="5B6785"/>
-                </a:solidFill>
-                <a:latin typeface="Segoe UI Semibold" pitchFamily="34" charset="0"/>
-                <a:ea typeface="Segoe UI Semibold" pitchFamily="34" charset="-122"/>
-                <a:cs typeface="Segoe UI Semibold" pitchFamily="34" charset="-120"/>
-              </a:rPr>
-              <a:t>e.g. 'Any extra noise gets in the way. One mistake is too many.'</a:t>
-            </a:r>
-            <a:endParaRPr lang="en-US" sz="950" dirty="0"/>
-          </a:p>
-        </p:txBody>
-      </p:sp>
-      <p:sp>
-        <p:nvSpPr>
-          <p:cNvPr id="23" name="R3_qb332"/>
+          <p:cNvPr id="22" name="R3_qb327"/>
           <p:cNvSpPr/>
           <p:nvPr/>
         </p:nvSpPr>
@@ -9505,7 +9393,7 @@
       </p:sp>
       <p:sp>
         <p:nvSpPr>
-          <p:cNvPr id="24" name="R3_sq333"/>
+          <p:cNvPr id="23" name="R3_sq328"/>
           <p:cNvSpPr/>
           <p:nvPr/>
         </p:nvSpPr>
@@ -9578,7 +9466,7 @@
       </p:sp>
       <p:sp>
         <p:nvSpPr>
-          <p:cNvPr id="25" name="R4_qb334"/>
+          <p:cNvPr id="24" name="R4_qb329"/>
           <p:cNvSpPr/>
           <p:nvPr/>
         </p:nvSpPr>
@@ -9630,7 +9518,7 @@
       </p:sp>
       <p:sp>
         <p:nvSpPr>
-          <p:cNvPr id="26" name="R4_sq335"/>
+          <p:cNvPr id="25" name="R4_sq330"/>
           <p:cNvSpPr/>
           <p:nvPr/>
         </p:nvSpPr>
@@ -9743,7 +9631,7 @@
                                           </p:stCondLst>
                                         </p:cTn>
                                         <p:tgtEl>
-                                          <p:spTgt spid="19"/>
+                                          <p:spTgt spid="18"/>
                                         </p:tgtEl>
                                         <p:attrNameLst>
                                           <p:attrName>style.visibility</p:attrName>
@@ -9757,7 +9645,7 @@
                                       <p:cBhvr>
                                         <p:cTn id="7" dur="400"/>
                                         <p:tgtEl>
-                                          <p:spTgt spid="19"/>
+                                          <p:spTgt spid="18"/>
                                         </p:tgtEl>
                                       </p:cBhvr>
                                     </p:animEffect>
@@ -9778,7 +9666,7 @@
                                           </p:stCondLst>
                                         </p:cTn>
                                         <p:tgtEl>
-                                          <p:spTgt spid="20"/>
+                                          <p:spTgt spid="19"/>
                                         </p:tgtEl>
                                         <p:attrNameLst>
                                           <p:attrName>style.visibility</p:attrName>
@@ -9792,7 +9680,7 @@
                                       <p:cBhvr>
                                         <p:cTn id="10" dur="400"/>
                                         <p:tgtEl>
-                                          <p:spTgt spid="20"/>
+                                          <p:spTgt spid="19"/>
                                         </p:tgtEl>
                                       </p:cBhvr>
                                     </p:animEffect>
@@ -9831,7 +9719,7 @@
                                           </p:stCondLst>
                                         </p:cTn>
                                         <p:tgtEl>
-                                          <p:spTgt spid="21"/>
+                                          <p:spTgt spid="20"/>
                                         </p:tgtEl>
                                         <p:attrNameLst>
                                           <p:attrName>style.visibility</p:attrName>
@@ -9845,7 +9733,7 @@
                                       <p:cBhvr>
                                         <p:cTn id="15" dur="400"/>
                                         <p:tgtEl>
-                                          <p:spTgt spid="21"/>
+                                          <p:spTgt spid="20"/>
                                         </p:tgtEl>
                                       </p:cBhvr>
                                     </p:animEffect>
@@ -9866,7 +9754,7 @@
                                           </p:stCondLst>
                                         </p:cTn>
                                         <p:tgtEl>
-                                          <p:spTgt spid="22"/>
+                                          <p:spTgt spid="21"/>
                                         </p:tgtEl>
                                         <p:attrNameLst>
                                           <p:attrName>style.visibility</p:attrName>
@@ -9880,7 +9768,7 @@
                                       <p:cBhvr>
                                         <p:cTn id="18" dur="400"/>
                                         <p:tgtEl>
-                                          <p:spTgt spid="22"/>
+                                          <p:spTgt spid="21"/>
                                         </p:tgtEl>
                                       </p:cBhvr>
                                     </p:animEffect>
@@ -9919,7 +9807,7 @@
                                           </p:stCondLst>
                                         </p:cTn>
                                         <p:tgtEl>
-                                          <p:spTgt spid="23"/>
+                                          <p:spTgt spid="22"/>
                                         </p:tgtEl>
                                         <p:attrNameLst>
                                           <p:attrName>style.visibility</p:attrName>
@@ -9933,7 +9821,7 @@
                                       <p:cBhvr>
                                         <p:cTn id="23" dur="400"/>
                                         <p:tgtEl>
-                                          <p:spTgt spid="23"/>
+                                          <p:spTgt spid="22"/>
                                         </p:tgtEl>
                                       </p:cBhvr>
                                     </p:animEffect>
@@ -9954,7 +9842,7 @@
                                           </p:stCondLst>
                                         </p:cTn>
                                         <p:tgtEl>
-                                          <p:spTgt spid="24"/>
+                                          <p:spTgt spid="23"/>
                                         </p:tgtEl>
                                         <p:attrNameLst>
                                           <p:attrName>style.visibility</p:attrName>
@@ -9968,7 +9856,7 @@
                                       <p:cBhvr>
                                         <p:cTn id="26" dur="400"/>
                                         <p:tgtEl>
-                                          <p:spTgt spid="24"/>
+                                          <p:spTgt spid="23"/>
                                         </p:tgtEl>
                                       </p:cBhvr>
                                     </p:animEffect>
@@ -10007,7 +9895,7 @@
                                           </p:stCondLst>
                                         </p:cTn>
                                         <p:tgtEl>
-                                          <p:spTgt spid="25"/>
+                                          <p:spTgt spid="24"/>
                                         </p:tgtEl>
                                         <p:attrNameLst>
                                           <p:attrName>style.visibility</p:attrName>
@@ -10021,7 +9909,7 @@
                                       <p:cBhvr>
                                         <p:cTn id="31" dur="400"/>
                                         <p:tgtEl>
-                                          <p:spTgt spid="25"/>
+                                          <p:spTgt spid="24"/>
                                         </p:tgtEl>
                                       </p:cBhvr>
                                     </p:animEffect>
@@ -10042,7 +9930,7 @@
                                           </p:stCondLst>
                                         </p:cTn>
                                         <p:tgtEl>
-                                          <p:spTgt spid="26"/>
+                                          <p:spTgt spid="25"/>
                                         </p:tgtEl>
                                         <p:attrNameLst>
                                           <p:attrName>style.visibility</p:attrName>
@@ -10056,7 +9944,7 @@
                                       <p:cBhvr>
                                         <p:cTn id="34" dur="400"/>
                                         <p:tgtEl>
-                                          <p:spTgt spid="26"/>
+                                          <p:spTgt spid="25"/>
                                         </p:tgtEl>
                                       </p:cBhvr>
                                     </p:animEffect>
@@ -10127,7 +10015,7 @@
       </p:grpSpPr>
       <p:sp>
         <p:nvSpPr>
-          <p:cNvPr id="3" name="bd_336"/>
+          <p:cNvPr id="3" name="bd_331"/>
           <p:cNvSpPr/>
           <p:nvPr/>
         </p:nvSpPr>
@@ -10179,7 +10067,7 @@
       </p:sp>
       <p:pic>
         <p:nvPicPr>
-          <p:cNvPr id="4" name="brY_337" descr="/home/claude/lls-course/v2/assets/brush-yellow.png">    </p:cNvPr>
+          <p:cNvPr id="4" name="brY_332" descr="/home/claude/lls-course/v2/assets/brush-yellow.png">    </p:cNvPr>
           <p:cNvPicPr>
             <a:picLocks noChangeAspect="1"/>
           </p:cNvPicPr>
@@ -10203,7 +10091,7 @@
       </p:pic>
       <p:sp>
         <p:nvSpPr>
-          <p:cNvPr id="5" name="title_338"/>
+          <p:cNvPr id="5" name="title_333"/>
           <p:cNvSpPr/>
           <p:nvPr/>
         </p:nvSpPr>
@@ -10244,7 +10132,7 @@
       </p:sp>
       <p:pic>
         <p:nvPicPr>
-          <p:cNvPr id="6" name="brP_339" descr="/home/claude/lls-course/v2/assets/brush-pink.png">    </p:cNvPr>
+          <p:cNvPr id="6" name="brP_334" descr="/home/claude/lls-course/v2/assets/brush-pink.png">    </p:cNvPr>
           <p:cNvPicPr>
             <a:picLocks noChangeAspect="1"/>
           </p:cNvPicPr>
@@ -10268,7 +10156,7 @@
       </p:pic>
       <p:sp>
         <p:nvSpPr>
-          <p:cNvPr id="7" name="ins_340"/>
+          <p:cNvPr id="7" name="ins_335"/>
           <p:cNvSpPr/>
           <p:nvPr/>
         </p:nvSpPr>
@@ -10309,7 +10197,7 @@
       </p:sp>
       <p:sp>
         <p:nvSpPr>
-          <p:cNvPr id="8" name="insIT_341"/>
+          <p:cNvPr id="8" name="insIT_336"/>
           <p:cNvSpPr/>
           <p:nvPr/>
         </p:nvSpPr>
@@ -10350,7 +10238,7 @@
       </p:sp>
       <p:sp>
         <p:nvSpPr>
-          <p:cNvPr id="9" name="cmd_342"/>
+          <p:cNvPr id="9" name="cmd_337"/>
           <p:cNvSpPr/>
           <p:nvPr/>
         </p:nvSpPr>
@@ -10381,12 +10269,12 @@
           </a:effectLst>
         </p:spPr>
         <p:txBody>
-          <a:bodyPr wrap="square" lIns="101600" tIns="0" rIns="101600" bIns="0" rtlCol="0" anchor="ctr">
+          <a:bodyPr wrap="square" lIns="76200" tIns="0" rIns="76200" bIns="0" rtlCol="0" anchor="ctr">
             <a:normAutofit/>
           </a:bodyPr>
           <a:lstStyle/>
           <a:p>
-            <a:pPr indent="0" marL="0">
+            <a:pPr algn="ctr" indent="0" marL="0">
               <a:buNone/>
             </a:pPr>
             <a:r>
@@ -10397,7 +10285,7 @@
               </a:rPr>
               <a:t>💬 </a:t>
             </a:r>
-            <a:pPr indent="0" marL="0">
+            <a:pPr algn="ctr" indent="0" marL="0">
               <a:buNone/>
             </a:pPr>
             <a:r>
@@ -10411,7 +10299,7 @@
               </a:rPr>
               <a:t>TALK</a:t>
             </a:r>
-            <a:pPr indent="0" marL="0">
+            <a:pPr algn="ctr" indent="0" marL="0">
               <a:buNone/>
             </a:pPr>
             <a:r>
@@ -10431,13 +10319,13 @@
       </p:sp>
       <p:sp>
         <p:nvSpPr>
-          <p:cNvPr id="10" name="meta_343"/>
-          <p:cNvSpPr/>
-          <p:nvPr/>
-        </p:nvSpPr>
-        <p:spPr>
-          <a:xfrm>
-            <a:off x="6510528" y="493776"/>
+          <p:cNvPr id="10" name="meta_338"/>
+          <p:cNvSpPr/>
+          <p:nvPr/>
+        </p:nvSpPr>
+        <p:spPr>
+          <a:xfrm>
+            <a:off x="6510528" y="548640"/>
             <a:ext cx="1901952" cy="274320"/>
           </a:xfrm>
           <a:prstGeom prst="roundRect">
@@ -10480,13 +10368,13 @@
       </p:sp>
       <p:sp>
         <p:nvSpPr>
-          <p:cNvPr id="11" name="tag_344"/>
-          <p:cNvSpPr/>
-          <p:nvPr/>
-        </p:nvSpPr>
-        <p:spPr>
-          <a:xfrm>
-            <a:off x="6510528" y="804672"/>
+          <p:cNvPr id="11" name="tag_339"/>
+          <p:cNvSpPr/>
+          <p:nvPr/>
+        </p:nvSpPr>
+        <p:spPr>
+          <a:xfrm>
+            <a:off x="6510528" y="914400"/>
             <a:ext cx="1901952" cy="274320"/>
           </a:xfrm>
           <a:prstGeom prst="roundRect">
@@ -10543,7 +10431,7 @@
       </p:sp>
       <p:pic>
         <p:nvPicPr>
-          <p:cNvPr id="12" name="logo_345" descr="/home/claude/lls-course/v2/img/logo.png">    </p:cNvPr>
+          <p:cNvPr id="12" name="logo_340" descr="/home/claude/lls-course/v2/img/logo.png">    </p:cNvPr>
           <p:cNvPicPr>
             <a:picLocks noChangeAspect="1"/>
           </p:cNvPicPr>
@@ -10567,7 +10455,7 @@
       </p:pic>
       <p:sp>
         <p:nvSpPr>
-          <p:cNvPr id="13" name="foot_346"/>
+          <p:cNvPr id="13" name="foot_341"/>
           <p:cNvSpPr/>
           <p:nvPr/>
         </p:nvSpPr>
@@ -10606,7 +10494,7 @@
       </p:sp>
       <p:sp>
         <p:nvSpPr>
-          <p:cNvPr id="14" name="cd_347"/>
+          <p:cNvPr id="14" name="cd_342"/>
           <p:cNvSpPr/>
           <p:nvPr/>
         </p:nvSpPr>
@@ -10640,7 +10528,7 @@
       </p:sp>
       <p:sp>
         <p:nvSpPr>
-          <p:cNvPr id="15" name="ii_348"/>
+          <p:cNvPr id="15" name="ii_343"/>
           <p:cNvSpPr/>
           <p:nvPr/>
         </p:nvSpPr>
@@ -10676,7 +10564,7 @@
       </p:sp>
       <p:sp>
         <p:nvSpPr>
-          <p:cNvPr id="16" name="ih_349"/>
+          <p:cNvPr id="16" name="ih_344"/>
           <p:cNvSpPr/>
           <p:nvPr/>
         </p:nvSpPr>
@@ -10715,7 +10603,7 @@
       </p:sp>
       <p:sp>
         <p:nvSpPr>
-          <p:cNvPr id="17" name="il_350"/>
+          <p:cNvPr id="17" name="il_345"/>
           <p:cNvSpPr/>
           <p:nvPr/>
         </p:nvSpPr>
@@ -10880,7 +10768,7 @@
       </p:sp>
       <p:sp>
         <p:nvSpPr>
-          <p:cNvPr id="18" name="R1_qb351"/>
+          <p:cNvPr id="18" name="R1_qb346"/>
           <p:cNvSpPr/>
           <p:nvPr/>
         </p:nvSpPr>
@@ -10932,7 +10820,7 @@
       </p:sp>
       <p:sp>
         <p:nvSpPr>
-          <p:cNvPr id="19" name="R1_sq352"/>
+          <p:cNvPr id="19" name="R1_sq347"/>
           <p:cNvSpPr/>
           <p:nvPr/>
         </p:nvSpPr>
@@ -11005,7 +10893,7 @@
       </p:sp>
       <p:sp>
         <p:nvSpPr>
-          <p:cNvPr id="20" name="R2_qb353"/>
+          <p:cNvPr id="20" name="R2_qb348"/>
           <p:cNvSpPr/>
           <p:nvPr/>
         </p:nvSpPr>
@@ -11057,7 +10945,7 @@
       </p:sp>
       <p:sp>
         <p:nvSpPr>
-          <p:cNvPr id="21" name="R2_sq354"/>
+          <p:cNvPr id="21" name="R2_sq349"/>
           <p:cNvSpPr/>
           <p:nvPr/>
         </p:nvSpPr>
@@ -11130,7 +11018,7 @@
       </p:sp>
       <p:sp>
         <p:nvSpPr>
-          <p:cNvPr id="22" name="R3_qb355"/>
+          <p:cNvPr id="22" name="R3_qb350"/>
           <p:cNvSpPr/>
           <p:nvPr/>
         </p:nvSpPr>
@@ -11182,7 +11070,7 @@
       </p:sp>
       <p:sp>
         <p:nvSpPr>
-          <p:cNvPr id="23" name="R3_sq356"/>
+          <p:cNvPr id="23" name="R3_sq351"/>
           <p:cNvSpPr/>
           <p:nvPr/>
         </p:nvSpPr>
@@ -11255,7 +11143,7 @@
       </p:sp>
       <p:sp>
         <p:nvSpPr>
-          <p:cNvPr id="24" name="R4_qb357"/>
+          <p:cNvPr id="24" name="R4_qb352"/>
           <p:cNvSpPr/>
           <p:nvPr/>
         </p:nvSpPr>
@@ -11307,7 +11195,7 @@
       </p:sp>
       <p:sp>
         <p:nvSpPr>
-          <p:cNvPr id="25" name="R4_sq358"/>
+          <p:cNvPr id="25" name="R4_sq353"/>
           <p:cNvSpPr/>
           <p:nvPr/>
         </p:nvSpPr>
@@ -11380,7 +11268,7 @@
       </p:sp>
       <p:sp>
         <p:nvSpPr>
-          <p:cNvPr id="26" name="R5_qb359"/>
+          <p:cNvPr id="26" name="R5_qb354"/>
           <p:cNvSpPr/>
           <p:nvPr/>
         </p:nvSpPr>
@@ -11432,7 +11320,7 @@
       </p:sp>
       <p:sp>
         <p:nvSpPr>
-          <p:cNvPr id="27" name="R5_sq360"/>
+          <p:cNvPr id="27" name="R5_sq355"/>
           <p:cNvSpPr/>
           <p:nvPr/>
         </p:nvSpPr>
@@ -12017,7 +11905,7 @@
       </p:grpSpPr>
       <p:sp>
         <p:nvSpPr>
-          <p:cNvPr id="3" name="bd_361"/>
+          <p:cNvPr id="3" name="bd_356"/>
           <p:cNvSpPr/>
           <p:nvPr/>
         </p:nvSpPr>
@@ -12069,7 +11957,7 @@
       </p:sp>
       <p:pic>
         <p:nvPicPr>
-          <p:cNvPr id="4" name="brY_362" descr="/home/claude/lls-course/v2/assets/brush-yellow.png">    </p:cNvPr>
+          <p:cNvPr id="4" name="brY_357" descr="/home/claude/lls-course/v2/assets/brush-yellow.png">    </p:cNvPr>
           <p:cNvPicPr>
             <a:picLocks noChangeAspect="1"/>
           </p:cNvPicPr>
@@ -12093,7 +11981,7 @@
       </p:pic>
       <p:sp>
         <p:nvSpPr>
-          <p:cNvPr id="5" name="title_363"/>
+          <p:cNvPr id="5" name="title_358"/>
           <p:cNvSpPr/>
           <p:nvPr/>
         </p:nvSpPr>
@@ -12134,7 +12022,7 @@
       </p:sp>
       <p:pic>
         <p:nvPicPr>
-          <p:cNvPr id="6" name="brP_364" descr="/home/claude/lls-course/v2/assets/brush-pink.png">    </p:cNvPr>
+          <p:cNvPr id="6" name="brP_359" descr="/home/claude/lls-course/v2/assets/brush-pink.png">    </p:cNvPr>
           <p:cNvPicPr>
             <a:picLocks noChangeAspect="1"/>
           </p:cNvPicPr>
@@ -12158,7 +12046,7 @@
       </p:pic>
       <p:sp>
         <p:nvSpPr>
-          <p:cNvPr id="7" name="ins_365"/>
+          <p:cNvPr id="7" name="ins_360"/>
           <p:cNvSpPr/>
           <p:nvPr/>
         </p:nvSpPr>
@@ -12199,7 +12087,7 @@
       </p:sp>
       <p:sp>
         <p:nvSpPr>
-          <p:cNvPr id="8" name="insIT_366"/>
+          <p:cNvPr id="8" name="insIT_361"/>
           <p:cNvSpPr/>
           <p:nvPr/>
         </p:nvSpPr>
@@ -12240,7 +12128,7 @@
       </p:sp>
       <p:sp>
         <p:nvSpPr>
-          <p:cNvPr id="9" name="cmd_367"/>
+          <p:cNvPr id="9" name="cmd_362"/>
           <p:cNvSpPr/>
           <p:nvPr/>
         </p:nvSpPr>
@@ -12271,12 +12159,12 @@
           </a:effectLst>
         </p:spPr>
         <p:txBody>
-          <a:bodyPr wrap="square" lIns="101600" tIns="0" rIns="101600" bIns="0" rtlCol="0" anchor="ctr">
+          <a:bodyPr wrap="square" lIns="76200" tIns="0" rIns="76200" bIns="0" rtlCol="0" anchor="ctr">
             <a:normAutofit/>
           </a:bodyPr>
           <a:lstStyle/>
           <a:p>
-            <a:pPr indent="0" marL="0">
+            <a:pPr algn="ctr" indent="0" marL="0">
               <a:buNone/>
             </a:pPr>
             <a:r>
@@ -12287,7 +12175,7 @@
               </a:rPr>
               <a:t>👀 </a:t>
             </a:r>
-            <a:pPr indent="0" marL="0">
+            <a:pPr algn="ctr" indent="0" marL="0">
               <a:buNone/>
             </a:pPr>
             <a:r>
@@ -12301,7 +12189,7 @@
               </a:rPr>
               <a:t>READ</a:t>
             </a:r>
-            <a:pPr indent="0" marL="0">
+            <a:pPr algn="ctr" indent="0" marL="0">
               <a:buNone/>
             </a:pPr>
             <a:r>
@@ -12313,51 +12201,9 @@
                 <a:ea typeface="Segoe UI Semibold" pitchFamily="34" charset="-122"/>
                 <a:cs typeface="Segoe UI Semibold" pitchFamily="34" charset="-120"/>
               </a:rPr>
-              <a:t>  LEGGI</a:t>
-            </a:r>
-            <a:endParaRPr lang="en-US" sz="950" dirty="0"/>
-          </a:p>
-        </p:txBody>
-      </p:sp>
-      <p:sp>
-        <p:nvSpPr>
-          <p:cNvPr id="10" name="cmd_368"/>
-          <p:cNvSpPr/>
-          <p:nvPr/>
-        </p:nvSpPr>
-        <p:spPr>
-          <a:xfrm>
-            <a:off x="6510528" y="493776"/>
-            <a:ext cx="1901952" cy="274320"/>
-          </a:xfrm>
-          <a:prstGeom prst="roundRect">
-            <a:avLst>
-              <a:gd name="adj" fmla="val 50000"/>
-            </a:avLst>
-          </a:prstGeom>
-          <a:solidFill>
-            <a:srgbClr val="FFFFFF"/>
-          </a:solidFill>
-          <a:ln w="28575">
-            <a:solidFill>
-              <a:srgbClr val="F7A6C4"/>
-            </a:solidFill>
-          </a:ln>
-          <a:effectLst>
-            <a:outerShdw sx="100000" sy="100000" kx="0" ky="0" algn="bl" rotWithShape="0" blurRad="88900" dist="31750" dir="5400000">
-              <a:srgbClr val="1B2559">
-                <a:alpha val="8000"/>
-              </a:srgbClr>
-            </a:outerShdw>
-          </a:effectLst>
-        </p:spPr>
-        <p:txBody>
-          <a:bodyPr wrap="square" lIns="101600" tIns="0" rIns="101600" bIns="0" rtlCol="0" anchor="ctr">
-            <a:normAutofit/>
-          </a:bodyPr>
-          <a:lstStyle/>
-          <a:p>
-            <a:pPr indent="0" marL="0">
+              <a:t>  →  </a:t>
+            </a:r>
+            <a:pPr algn="ctr" indent="0" marL="0">
               <a:buNone/>
             </a:pPr>
             <a:r>
@@ -12368,7 +12214,7 @@
               </a:rPr>
               <a:t>💬 </a:t>
             </a:r>
-            <a:pPr indent="0" marL="0">
+            <a:pPr algn="ctr" indent="0" marL="0">
               <a:buNone/>
             </a:pPr>
             <a:r>
@@ -12382,33 +12228,19 @@
               </a:rPr>
               <a:t>TALK</a:t>
             </a:r>
-            <a:pPr indent="0" marL="0">
-              <a:buNone/>
-            </a:pPr>
-            <a:r>
-              <a:rPr lang="en-US" sz="950" dirty="0">
-                <a:solidFill>
-                  <a:srgbClr val="5B6785"/>
-                </a:solidFill>
-                <a:latin typeface="Segoe UI Semibold" pitchFamily="34" charset="0"/>
-                <a:ea typeface="Segoe UI Semibold" pitchFamily="34" charset="-122"/>
-                <a:cs typeface="Segoe UI Semibold" pitchFamily="34" charset="-120"/>
-              </a:rPr>
-              <a:t>  PARLA</a:t>
-            </a:r>
             <a:endParaRPr lang="en-US" sz="950" dirty="0"/>
           </a:p>
         </p:txBody>
       </p:sp>
       <p:sp>
         <p:nvSpPr>
-          <p:cNvPr id="11" name="meta_369"/>
-          <p:cNvSpPr/>
-          <p:nvPr/>
-        </p:nvSpPr>
-        <p:spPr>
-          <a:xfrm>
-            <a:off x="6510528" y="804672"/>
+          <p:cNvPr id="10" name="meta_363"/>
+          <p:cNvSpPr/>
+          <p:nvPr/>
+        </p:nvSpPr>
+        <p:spPr>
+          <a:xfrm>
+            <a:off x="6510528" y="548640"/>
             <a:ext cx="1901952" cy="274320"/>
           </a:xfrm>
           <a:prstGeom prst="roundRect">
@@ -12451,13 +12283,13 @@
       </p:sp>
       <p:sp>
         <p:nvSpPr>
-          <p:cNvPr id="12" name="tag_370"/>
-          <p:cNvSpPr/>
-          <p:nvPr/>
-        </p:nvSpPr>
-        <p:spPr>
-          <a:xfrm>
-            <a:off x="6510528" y="1115568"/>
+          <p:cNvPr id="11" name="tag_364"/>
+          <p:cNvSpPr/>
+          <p:nvPr/>
+        </p:nvSpPr>
+        <p:spPr>
+          <a:xfrm>
+            <a:off x="6510528" y="914400"/>
             <a:ext cx="1901952" cy="274320"/>
           </a:xfrm>
           <a:prstGeom prst="roundRect">
@@ -12514,7 +12346,7 @@
       </p:sp>
       <p:pic>
         <p:nvPicPr>
-          <p:cNvPr id="13" name="logo_371" descr="/home/claude/lls-course/v2/img/logo.png">    </p:cNvPr>
+          <p:cNvPr id="12" name="logo_365" descr="/home/claude/lls-course/v2/img/logo.png">    </p:cNvPr>
           <p:cNvPicPr>
             <a:picLocks noChangeAspect="1"/>
           </p:cNvPicPr>
@@ -12538,7 +12370,7 @@
       </p:pic>
       <p:sp>
         <p:nvSpPr>
-          <p:cNvPr id="14" name="foot_372"/>
+          <p:cNvPr id="13" name="foot_366"/>
           <p:cNvSpPr/>
           <p:nvPr/>
         </p:nvSpPr>
@@ -12577,18 +12409,18 @@
       </p:sp>
       <p:sp>
         <p:nvSpPr>
-          <p:cNvPr id="15" name="pf_373"/>
+          <p:cNvPr id="14" name="pf_367"/>
           <p:cNvSpPr/>
           <p:nvPr/>
         </p:nvSpPr>
         <p:spPr>
           <a:xfrm rot="-90000">
-            <a:off x="411480" y="1417320"/>
-            <a:ext cx="2560320" cy="1280160"/>
+            <a:off x="1089178" y="1417320"/>
+            <a:ext cx="1204925" cy="1280160"/>
           </a:xfrm>
           <a:prstGeom prst="roundRect">
             <a:avLst>
-              <a:gd name="adj" fmla="val 12143"/>
+              <a:gd name="adj" fmla="val 12901"/>
             </a:avLst>
           </a:prstGeom>
           <a:solidFill>
@@ -12611,7 +12443,7 @@
       </p:sp>
       <p:pic>
         <p:nvPicPr>
-          <p:cNvPr id="16" name="ph_374" descr="/home/claude/lls-course/v2/cache/b2_6b2_giulia_jpg_594x286_31.png">    </p:cNvPr>
+          <p:cNvPr id="15" name="ph_368" descr="/home/claude/lls-course/v2/cache/b2_6b2_giulia_jpg_268x286_31.png">    </p:cNvPr>
           <p:cNvPicPr>
             <a:picLocks noChangeAspect="1"/>
           </p:cNvPicPr>
@@ -12625,8 +12457,8 @@
         </p:blipFill>
         <p:spPr>
           <a:xfrm rot="-90000">
-            <a:off x="457200" y="1463040"/>
-            <a:ext cx="2468880" cy="1188720"/>
+            <a:off x="1134898" y="1463040"/>
+            <a:ext cx="1113485" cy="1188720"/>
           </a:xfrm>
           <a:prstGeom prst="rect">
             <a:avLst/>
@@ -12635,7 +12467,7 @@
       </p:pic>
       <p:sp>
         <p:nvSpPr>
-          <p:cNvPr id="17" name="cd_375"/>
+          <p:cNvPr id="16" name="cd_369"/>
           <p:cNvSpPr/>
           <p:nvPr/>
         </p:nvSpPr>
@@ -12650,11 +12482,11 @@
             </a:avLst>
           </a:prstGeom>
           <a:solidFill>
-            <a:srgbClr val="FFF6CC"/>
+            <a:srgbClr val="EEE8FB"/>
           </a:solidFill>
           <a:ln w="28575">
             <a:solidFill>
-              <a:srgbClr val="FFE07A"/>
+              <a:srgbClr val="CDBFF3"/>
             </a:solidFill>
             <a:prstDash val="solid"/>
           </a:ln>
@@ -12669,7 +12501,7 @@
       </p:sp>
       <p:sp>
         <p:nvSpPr>
-          <p:cNvPr id="18" name="ii_376"/>
+          <p:cNvPr id="17" name="ii_370"/>
           <p:cNvSpPr/>
           <p:nvPr/>
         </p:nvSpPr>
@@ -12705,7 +12537,7 @@
       </p:sp>
       <p:sp>
         <p:nvSpPr>
-          <p:cNvPr id="19" name="ih_377"/>
+          <p:cNvPr id="18" name="ih_371"/>
           <p:cNvSpPr/>
           <p:nvPr/>
         </p:nvSpPr>
@@ -12744,7 +12576,7 @@
       </p:sp>
       <p:sp>
         <p:nvSpPr>
-          <p:cNvPr id="20" name="il_378"/>
+          <p:cNvPr id="19" name="il_372"/>
           <p:cNvSpPr/>
           <p:nvPr/>
         </p:nvSpPr>
@@ -12880,7 +12712,7 @@
       </p:sp>
       <p:sp>
         <p:nvSpPr>
-          <p:cNvPr id="21" name="R1_sb379"/>
+          <p:cNvPr id="20" name="R1_sb373"/>
           <p:cNvSpPr/>
           <p:nvPr/>
         </p:nvSpPr>
@@ -12932,7 +12764,7 @@
       </p:sp>
       <p:sp>
         <p:nvSpPr>
-          <p:cNvPr id="22" name="R1_sl380"/>
+          <p:cNvPr id="21" name="R1_sl374"/>
           <p:cNvSpPr/>
           <p:nvPr/>
         </p:nvSpPr>
@@ -13065,7 +12897,7 @@
       </p:sp>
       <p:sp>
         <p:nvSpPr>
-          <p:cNvPr id="23" name="R2_sb381"/>
+          <p:cNvPr id="22" name="R2_sb375"/>
           <p:cNvSpPr/>
           <p:nvPr/>
         </p:nvSpPr>
@@ -13117,7 +12949,7 @@
       </p:sp>
       <p:sp>
         <p:nvSpPr>
-          <p:cNvPr id="24" name="R2_sl382"/>
+          <p:cNvPr id="23" name="R2_sl376"/>
           <p:cNvSpPr/>
           <p:nvPr/>
         </p:nvSpPr>
@@ -13281,7 +13113,7 @@
       </p:sp>
       <p:sp>
         <p:nvSpPr>
-          <p:cNvPr id="25" name="R3_sb383"/>
+          <p:cNvPr id="24" name="R3_sb377"/>
           <p:cNvSpPr/>
           <p:nvPr/>
         </p:nvSpPr>
@@ -13333,7 +13165,7 @@
       </p:sp>
       <p:sp>
         <p:nvSpPr>
-          <p:cNvPr id="26" name="R3_sl384"/>
+          <p:cNvPr id="25" name="R3_sl378"/>
           <p:cNvSpPr/>
           <p:nvPr/>
         </p:nvSpPr>
@@ -13466,7 +13298,7 @@
       </p:sp>
       <p:sp>
         <p:nvSpPr>
-          <p:cNvPr id="27" name="R4_sb385"/>
+          <p:cNvPr id="26" name="R4_sb379"/>
           <p:cNvSpPr/>
           <p:nvPr/>
         </p:nvSpPr>
@@ -13518,7 +13350,7 @@
       </p:sp>
       <p:sp>
         <p:nvSpPr>
-          <p:cNvPr id="28" name="R4_sl386"/>
+          <p:cNvPr id="27" name="R4_sl380"/>
           <p:cNvSpPr/>
           <p:nvPr/>
         </p:nvSpPr>
@@ -13651,7 +13483,7 @@
       </p:sp>
       <p:sp>
         <p:nvSpPr>
-          <p:cNvPr id="29" name="R5_sb387"/>
+          <p:cNvPr id="28" name="R5_sb381"/>
           <p:cNvSpPr/>
           <p:nvPr/>
         </p:nvSpPr>
@@ -13703,7 +13535,7 @@
       </p:sp>
       <p:sp>
         <p:nvSpPr>
-          <p:cNvPr id="30" name="R5_sl388"/>
+          <p:cNvPr id="29" name="R5_sl382"/>
           <p:cNvSpPr/>
           <p:nvPr/>
         </p:nvSpPr>
@@ -13805,7 +13637,7 @@
       </p:sp>
       <p:sp>
         <p:nvSpPr>
-          <p:cNvPr id="31" name="R6_sb389"/>
+          <p:cNvPr id="30" name="R6_sb383"/>
           <p:cNvSpPr/>
           <p:nvPr/>
         </p:nvSpPr>
@@ -13857,7 +13689,7 @@
       </p:sp>
       <p:sp>
         <p:nvSpPr>
-          <p:cNvPr id="32" name="R6_sl390"/>
+          <p:cNvPr id="31" name="R6_sl384"/>
           <p:cNvSpPr/>
           <p:nvPr/>
         </p:nvSpPr>
@@ -13999,7 +13831,7 @@
                                           </p:stCondLst>
                                         </p:cTn>
                                         <p:tgtEl>
-                                          <p:spTgt spid="21"/>
+                                          <p:spTgt spid="20"/>
                                         </p:tgtEl>
                                         <p:attrNameLst>
                                           <p:attrName>style.visibility</p:attrName>
@@ -14013,7 +13845,7 @@
                                       <p:cBhvr>
                                         <p:cTn id="7" dur="400"/>
                                         <p:tgtEl>
-                                          <p:spTgt spid="21"/>
+                                          <p:spTgt spid="20"/>
                                         </p:tgtEl>
                                       </p:cBhvr>
                                     </p:animEffect>
@@ -14034,7 +13866,7 @@
                                           </p:stCondLst>
                                         </p:cTn>
                                         <p:tgtEl>
-                                          <p:spTgt spid="22"/>
+                                          <p:spTgt spid="21"/>
                                         </p:tgtEl>
                                         <p:attrNameLst>
                                           <p:attrName>style.visibility</p:attrName>
@@ -14048,7 +13880,7 @@
                                       <p:cBhvr>
                                         <p:cTn id="10" dur="400"/>
                                         <p:tgtEl>
-                                          <p:spTgt spid="22"/>
+                                          <p:spTgt spid="21"/>
                                         </p:tgtEl>
                                       </p:cBhvr>
                                     </p:animEffect>
@@ -14087,7 +13919,7 @@
                                           </p:stCondLst>
                                         </p:cTn>
                                         <p:tgtEl>
-                                          <p:spTgt spid="23"/>
+                                          <p:spTgt spid="22"/>
                                         </p:tgtEl>
                                         <p:attrNameLst>
                                           <p:attrName>style.visibility</p:attrName>
@@ -14101,7 +13933,7 @@
                                       <p:cBhvr>
                                         <p:cTn id="15" dur="400"/>
                                         <p:tgtEl>
-                                          <p:spTgt spid="23"/>
+                                          <p:spTgt spid="22"/>
                                         </p:tgtEl>
                                       </p:cBhvr>
                                     </p:animEffect>
@@ -14122,7 +13954,7 @@
                                           </p:stCondLst>
                                         </p:cTn>
                                         <p:tgtEl>
-                                          <p:spTgt spid="24"/>
+                                          <p:spTgt spid="23"/>
                                         </p:tgtEl>
                                         <p:attrNameLst>
                                           <p:attrName>style.visibility</p:attrName>
@@ -14136,7 +13968,7 @@
                                       <p:cBhvr>
                                         <p:cTn id="18" dur="400"/>
                                         <p:tgtEl>
-                                          <p:spTgt spid="24"/>
+                                          <p:spTgt spid="23"/>
                                         </p:tgtEl>
                                       </p:cBhvr>
                                     </p:animEffect>
@@ -14175,7 +14007,7 @@
                                           </p:stCondLst>
                                         </p:cTn>
                                         <p:tgtEl>
-                                          <p:spTgt spid="25"/>
+                                          <p:spTgt spid="24"/>
                                         </p:tgtEl>
                                         <p:attrNameLst>
                                           <p:attrName>style.visibility</p:attrName>
@@ -14189,7 +14021,7 @@
                                       <p:cBhvr>
                                         <p:cTn id="23" dur="400"/>
                                         <p:tgtEl>
-                                          <p:spTgt spid="25"/>
+                                          <p:spTgt spid="24"/>
                                         </p:tgtEl>
                                       </p:cBhvr>
                                     </p:animEffect>
@@ -14210,7 +14042,7 @@
                                           </p:stCondLst>
                                         </p:cTn>
                                         <p:tgtEl>
-                                          <p:spTgt spid="26"/>
+                                          <p:spTgt spid="25"/>
                                         </p:tgtEl>
                                         <p:attrNameLst>
                                           <p:attrName>style.visibility</p:attrName>
@@ -14224,7 +14056,7 @@
                                       <p:cBhvr>
                                         <p:cTn id="26" dur="400"/>
                                         <p:tgtEl>
-                                          <p:spTgt spid="26"/>
+                                          <p:spTgt spid="25"/>
                                         </p:tgtEl>
                                       </p:cBhvr>
                                     </p:animEffect>
@@ -14263,7 +14095,7 @@
                                           </p:stCondLst>
                                         </p:cTn>
                                         <p:tgtEl>
-                                          <p:spTgt spid="27"/>
+                                          <p:spTgt spid="26"/>
                                         </p:tgtEl>
                                         <p:attrNameLst>
                                           <p:attrName>style.visibility</p:attrName>
@@ -14277,7 +14109,7 @@
                                       <p:cBhvr>
                                         <p:cTn id="31" dur="400"/>
                                         <p:tgtEl>
-                                          <p:spTgt spid="27"/>
+                                          <p:spTgt spid="26"/>
                                         </p:tgtEl>
                                       </p:cBhvr>
                                     </p:animEffect>
@@ -14298,7 +14130,7 @@
                                           </p:stCondLst>
                                         </p:cTn>
                                         <p:tgtEl>
-                                          <p:spTgt spid="28"/>
+                                          <p:spTgt spid="27"/>
                                         </p:tgtEl>
                                         <p:attrNameLst>
                                           <p:attrName>style.visibility</p:attrName>
@@ -14312,7 +14144,7 @@
                                       <p:cBhvr>
                                         <p:cTn id="34" dur="400"/>
                                         <p:tgtEl>
-                                          <p:spTgt spid="28"/>
+                                          <p:spTgt spid="27"/>
                                         </p:tgtEl>
                                       </p:cBhvr>
                                     </p:animEffect>
@@ -14351,7 +14183,7 @@
                                           </p:stCondLst>
                                         </p:cTn>
                                         <p:tgtEl>
-                                          <p:spTgt spid="29"/>
+                                          <p:spTgt spid="28"/>
                                         </p:tgtEl>
                                         <p:attrNameLst>
                                           <p:attrName>style.visibility</p:attrName>
@@ -14365,7 +14197,7 @@
                                       <p:cBhvr>
                                         <p:cTn id="39" dur="400"/>
                                         <p:tgtEl>
-                                          <p:spTgt spid="29"/>
+                                          <p:spTgt spid="28"/>
                                         </p:tgtEl>
                                       </p:cBhvr>
                                     </p:animEffect>
@@ -14386,7 +14218,7 @@
                                           </p:stCondLst>
                                         </p:cTn>
                                         <p:tgtEl>
-                                          <p:spTgt spid="30"/>
+                                          <p:spTgt spid="29"/>
                                         </p:tgtEl>
                                         <p:attrNameLst>
                                           <p:attrName>style.visibility</p:attrName>
@@ -14400,7 +14232,7 @@
                                       <p:cBhvr>
                                         <p:cTn id="42" dur="400"/>
                                         <p:tgtEl>
-                                          <p:spTgt spid="30"/>
+                                          <p:spTgt spid="29"/>
                                         </p:tgtEl>
                                       </p:cBhvr>
                                     </p:animEffect>
@@ -14439,7 +14271,7 @@
                                           </p:stCondLst>
                                         </p:cTn>
                                         <p:tgtEl>
-                                          <p:spTgt spid="31"/>
+                                          <p:spTgt spid="30"/>
                                         </p:tgtEl>
                                         <p:attrNameLst>
                                           <p:attrName>style.visibility</p:attrName>
@@ -14453,7 +14285,7 @@
                                       <p:cBhvr>
                                         <p:cTn id="47" dur="400"/>
                                         <p:tgtEl>
-                                          <p:spTgt spid="31"/>
+                                          <p:spTgt spid="30"/>
                                         </p:tgtEl>
                                       </p:cBhvr>
                                     </p:animEffect>
@@ -14474,7 +14306,7 @@
                                           </p:stCondLst>
                                         </p:cTn>
                                         <p:tgtEl>
-                                          <p:spTgt spid="32"/>
+                                          <p:spTgt spid="31"/>
                                         </p:tgtEl>
                                         <p:attrNameLst>
                                           <p:attrName>style.visibility</p:attrName>
@@ -14488,7 +14320,7 @@
                                       <p:cBhvr>
                                         <p:cTn id="50" dur="400"/>
                                         <p:tgtEl>
-                                          <p:spTgt spid="32"/>
+                                          <p:spTgt spid="31"/>
                                         </p:tgtEl>
                                       </p:cBhvr>
                                     </p:animEffect>
@@ -14559,7 +14391,7 @@
       </p:grpSpPr>
       <p:sp>
         <p:nvSpPr>
-          <p:cNvPr id="3" name="bd_391"/>
+          <p:cNvPr id="3" name="bd_385"/>
           <p:cNvSpPr/>
           <p:nvPr/>
         </p:nvSpPr>
@@ -14611,7 +14443,7 @@
       </p:sp>
       <p:pic>
         <p:nvPicPr>
-          <p:cNvPr id="4" name="brY_392" descr="/home/claude/lls-course/v2/assets/brush-yellow.png">    </p:cNvPr>
+          <p:cNvPr id="4" name="brY_386" descr="/home/claude/lls-course/v2/assets/brush-yellow.png">    </p:cNvPr>
           <p:cNvPicPr>
             <a:picLocks noChangeAspect="1"/>
           </p:cNvPicPr>
@@ -14635,7 +14467,7 @@
       </p:pic>
       <p:sp>
         <p:nvSpPr>
-          <p:cNvPr id="5" name="title_393"/>
+          <p:cNvPr id="5" name="title_387"/>
           <p:cNvSpPr/>
           <p:nvPr/>
         </p:nvSpPr>
@@ -14676,7 +14508,7 @@
       </p:sp>
       <p:pic>
         <p:nvPicPr>
-          <p:cNvPr id="6" name="brP_394" descr="/home/claude/lls-course/v2/assets/brush-pink.png">    </p:cNvPr>
+          <p:cNvPr id="6" name="brP_388" descr="/home/claude/lls-course/v2/assets/brush-pink.png">    </p:cNvPr>
           <p:cNvPicPr>
             <a:picLocks noChangeAspect="1"/>
           </p:cNvPicPr>
@@ -14700,7 +14532,7 @@
       </p:pic>
       <p:sp>
         <p:nvSpPr>
-          <p:cNvPr id="7" name="ins_395"/>
+          <p:cNvPr id="7" name="ins_389"/>
           <p:cNvSpPr/>
           <p:nvPr/>
         </p:nvSpPr>
@@ -14741,7 +14573,7 @@
       </p:sp>
       <p:sp>
         <p:nvSpPr>
-          <p:cNvPr id="8" name="insIT_396"/>
+          <p:cNvPr id="8" name="insIT_390"/>
           <p:cNvSpPr/>
           <p:nvPr/>
         </p:nvSpPr>
@@ -14782,7 +14614,7 @@
       </p:sp>
       <p:sp>
         <p:nvSpPr>
-          <p:cNvPr id="9" name="cmd_397"/>
+          <p:cNvPr id="9" name="cmd_391"/>
           <p:cNvSpPr/>
           <p:nvPr/>
         </p:nvSpPr>
@@ -14813,12 +14645,12 @@
           </a:effectLst>
         </p:spPr>
         <p:txBody>
-          <a:bodyPr wrap="square" lIns="101600" tIns="0" rIns="101600" bIns="0" rtlCol="0" anchor="ctr">
+          <a:bodyPr wrap="square" lIns="76200" tIns="0" rIns="76200" bIns="0" rtlCol="0" anchor="ctr">
             <a:normAutofit/>
           </a:bodyPr>
           <a:lstStyle/>
           <a:p>
-            <a:pPr indent="0" marL="0">
+            <a:pPr algn="ctr" indent="0" marL="0">
               <a:buNone/>
             </a:pPr>
             <a:r>
@@ -14829,7 +14661,7 @@
               </a:rPr>
               <a:t>💬 </a:t>
             </a:r>
-            <a:pPr indent="0" marL="0">
+            <a:pPr algn="ctr" indent="0" marL="0">
               <a:buNone/>
             </a:pPr>
             <a:r>
@@ -14843,7 +14675,7 @@
               </a:rPr>
               <a:t>TALK</a:t>
             </a:r>
-            <a:pPr indent="0" marL="0">
+            <a:pPr algn="ctr" indent="0" marL="0">
               <a:buNone/>
             </a:pPr>
             <a:r>
@@ -14863,13 +14695,13 @@
       </p:sp>
       <p:sp>
         <p:nvSpPr>
-          <p:cNvPr id="10" name="meta_398"/>
-          <p:cNvSpPr/>
-          <p:nvPr/>
-        </p:nvSpPr>
-        <p:spPr>
-          <a:xfrm>
-            <a:off x="6510528" y="493776"/>
+          <p:cNvPr id="10" name="meta_392"/>
+          <p:cNvSpPr/>
+          <p:nvPr/>
+        </p:nvSpPr>
+        <p:spPr>
+          <a:xfrm>
+            <a:off x="6510528" y="548640"/>
             <a:ext cx="1901952" cy="274320"/>
           </a:xfrm>
           <a:prstGeom prst="roundRect">
@@ -14912,13 +14744,13 @@
       </p:sp>
       <p:sp>
         <p:nvSpPr>
-          <p:cNvPr id="11" name="tag_399"/>
-          <p:cNvSpPr/>
-          <p:nvPr/>
-        </p:nvSpPr>
-        <p:spPr>
-          <a:xfrm>
-            <a:off x="6510528" y="804672"/>
+          <p:cNvPr id="11" name="tag_393"/>
+          <p:cNvSpPr/>
+          <p:nvPr/>
+        </p:nvSpPr>
+        <p:spPr>
+          <a:xfrm>
+            <a:off x="6510528" y="914400"/>
             <a:ext cx="1901952" cy="274320"/>
           </a:xfrm>
           <a:prstGeom prst="roundRect">
@@ -14975,7 +14807,7 @@
       </p:sp>
       <p:pic>
         <p:nvPicPr>
-          <p:cNvPr id="12" name="logo_400" descr="/home/claude/lls-course/v2/img/logo.png">    </p:cNvPr>
+          <p:cNvPr id="12" name="logo_394" descr="/home/claude/lls-course/v2/img/logo.png">    </p:cNvPr>
           <p:cNvPicPr>
             <a:picLocks noChangeAspect="1"/>
           </p:cNvPicPr>
@@ -14999,7 +14831,7 @@
       </p:pic>
       <p:sp>
         <p:nvSpPr>
-          <p:cNvPr id="13" name="foot_401"/>
+          <p:cNvPr id="13" name="foot_395"/>
           <p:cNvSpPr/>
           <p:nvPr/>
         </p:nvSpPr>
@@ -15038,7 +14870,7 @@
       </p:sp>
       <p:sp>
         <p:nvSpPr>
-          <p:cNvPr id="14" name="R1_sb402"/>
+          <p:cNvPr id="14" name="R1_sb396"/>
           <p:cNvSpPr/>
           <p:nvPr/>
         </p:nvSpPr>
@@ -15090,7 +14922,7 @@
       </p:sp>
       <p:sp>
         <p:nvSpPr>
-          <p:cNvPr id="15" name="R1_sl403"/>
+          <p:cNvPr id="15" name="R1_sl397"/>
           <p:cNvSpPr/>
           <p:nvPr/>
         </p:nvSpPr>
@@ -15144,7 +14976,7 @@
       </p:sp>
       <p:sp>
         <p:nvSpPr>
-          <p:cNvPr id="16" name="R2_sb404"/>
+          <p:cNvPr id="16" name="R2_sb398"/>
           <p:cNvSpPr/>
           <p:nvPr/>
         </p:nvSpPr>
@@ -15196,7 +15028,7 @@
       </p:sp>
       <p:sp>
         <p:nvSpPr>
-          <p:cNvPr id="17" name="R2_sl405"/>
+          <p:cNvPr id="17" name="R2_sl399"/>
           <p:cNvSpPr/>
           <p:nvPr/>
         </p:nvSpPr>
@@ -15250,7 +15082,7 @@
       </p:sp>
       <p:sp>
         <p:nvSpPr>
-          <p:cNvPr id="18" name="R3_sb406"/>
+          <p:cNvPr id="18" name="R3_sb400"/>
           <p:cNvSpPr/>
           <p:nvPr/>
         </p:nvSpPr>
@@ -15302,7 +15134,7 @@
       </p:sp>
       <p:sp>
         <p:nvSpPr>
-          <p:cNvPr id="19" name="R3_sl407"/>
+          <p:cNvPr id="19" name="R3_sl401"/>
           <p:cNvSpPr/>
           <p:nvPr/>
         </p:nvSpPr>
@@ -15356,7 +15188,7 @@
       </p:sp>
       <p:sp>
         <p:nvSpPr>
-          <p:cNvPr id="20" name="R4_sb408"/>
+          <p:cNvPr id="20" name="R4_sb402"/>
           <p:cNvSpPr/>
           <p:nvPr/>
         </p:nvSpPr>
@@ -15408,7 +15240,7 @@
       </p:sp>
       <p:sp>
         <p:nvSpPr>
-          <p:cNvPr id="21" name="R4_sl409"/>
+          <p:cNvPr id="21" name="R4_sl403"/>
           <p:cNvSpPr/>
           <p:nvPr/>
         </p:nvSpPr>
@@ -15462,7 +15294,7 @@
       </p:sp>
       <p:sp>
         <p:nvSpPr>
-          <p:cNvPr id="22" name="R5_sb410"/>
+          <p:cNvPr id="22" name="R5_sb404"/>
           <p:cNvSpPr/>
           <p:nvPr/>
         </p:nvSpPr>
@@ -15514,7 +15346,7 @@
       </p:sp>
       <p:sp>
         <p:nvSpPr>
-          <p:cNvPr id="23" name="R5_sl411"/>
+          <p:cNvPr id="23" name="R5_sl405"/>
           <p:cNvSpPr/>
           <p:nvPr/>
         </p:nvSpPr>
@@ -15568,7 +15400,7 @@
       </p:sp>
       <p:sp>
         <p:nvSpPr>
-          <p:cNvPr id="24" name="R6_sb412"/>
+          <p:cNvPr id="24" name="R6_sb406"/>
           <p:cNvSpPr/>
           <p:nvPr/>
         </p:nvSpPr>
@@ -15620,7 +15452,7 @@
       </p:sp>
       <p:sp>
         <p:nvSpPr>
-          <p:cNvPr id="25" name="R6_sl413"/>
+          <p:cNvPr id="25" name="R6_sl407"/>
           <p:cNvSpPr/>
           <p:nvPr/>
         </p:nvSpPr>
@@ -16274,7 +16106,7 @@
       </p:grpSpPr>
       <p:sp>
         <p:nvSpPr>
-          <p:cNvPr id="3" name="bd_414"/>
+          <p:cNvPr id="3" name="bd_408"/>
           <p:cNvSpPr/>
           <p:nvPr/>
         </p:nvSpPr>
@@ -16326,7 +16158,7 @@
       </p:sp>
       <p:pic>
         <p:nvPicPr>
-          <p:cNvPr id="4" name="brY_415" descr="/home/claude/lls-course/v2/assets/brush-yellow.png">    </p:cNvPr>
+          <p:cNvPr id="4" name="brY_409" descr="/home/claude/lls-course/v2/assets/brush-yellow.png">    </p:cNvPr>
           <p:cNvPicPr>
             <a:picLocks noChangeAspect="1"/>
           </p:cNvPicPr>
@@ -16350,7 +16182,7 @@
       </p:pic>
       <p:sp>
         <p:nvSpPr>
-          <p:cNvPr id="5" name="title_416"/>
+          <p:cNvPr id="5" name="title_410"/>
           <p:cNvSpPr/>
           <p:nvPr/>
         </p:nvSpPr>
@@ -16391,7 +16223,7 @@
       </p:sp>
       <p:pic>
         <p:nvPicPr>
-          <p:cNvPr id="6" name="brP_417" descr="/home/claude/lls-course/v2/assets/brush-pink.png">    </p:cNvPr>
+          <p:cNvPr id="6" name="brP_411" descr="/home/claude/lls-course/v2/assets/brush-pink.png">    </p:cNvPr>
           <p:cNvPicPr>
             <a:picLocks noChangeAspect="1"/>
           </p:cNvPicPr>
@@ -16415,7 +16247,7 @@
       </p:pic>
       <p:sp>
         <p:nvSpPr>
-          <p:cNvPr id="7" name="ins_418"/>
+          <p:cNvPr id="7" name="ins_412"/>
           <p:cNvSpPr/>
           <p:nvPr/>
         </p:nvSpPr>
@@ -16456,7 +16288,7 @@
       </p:sp>
       <p:sp>
         <p:nvSpPr>
-          <p:cNvPr id="8" name="insIT_419"/>
+          <p:cNvPr id="8" name="insIT_413"/>
           <p:cNvSpPr/>
           <p:nvPr/>
         </p:nvSpPr>
@@ -16497,7 +16329,7 @@
       </p:sp>
       <p:sp>
         <p:nvSpPr>
-          <p:cNvPr id="9" name="cmd_420"/>
+          <p:cNvPr id="9" name="cmd_414"/>
           <p:cNvSpPr/>
           <p:nvPr/>
         </p:nvSpPr>
@@ -16528,12 +16360,12 @@
           </a:effectLst>
         </p:spPr>
         <p:txBody>
-          <a:bodyPr wrap="square" lIns="101600" tIns="0" rIns="101600" bIns="0" rtlCol="0" anchor="ctr">
+          <a:bodyPr wrap="square" lIns="76200" tIns="0" rIns="76200" bIns="0" rtlCol="0" anchor="ctr">
             <a:normAutofit/>
           </a:bodyPr>
           <a:lstStyle/>
           <a:p>
-            <a:pPr indent="0" marL="0">
+            <a:pPr algn="ctr" indent="0" marL="0">
               <a:buNone/>
             </a:pPr>
             <a:r>
@@ -16544,7 +16376,7 @@
               </a:rPr>
               <a:t>🎲 </a:t>
             </a:r>
-            <a:pPr indent="0" marL="0">
+            <a:pPr algn="ctr" indent="0" marL="0">
               <a:buNone/>
             </a:pPr>
             <a:r>
@@ -16558,7 +16390,7 @@
               </a:rPr>
               <a:t>PLAY</a:t>
             </a:r>
-            <a:pPr indent="0" marL="0">
+            <a:pPr algn="ctr" indent="0" marL="0">
               <a:buNone/>
             </a:pPr>
             <a:r>
@@ -16578,13 +16410,13 @@
       </p:sp>
       <p:sp>
         <p:nvSpPr>
-          <p:cNvPr id="10" name="meta_421"/>
-          <p:cNvSpPr/>
-          <p:nvPr/>
-        </p:nvSpPr>
-        <p:spPr>
-          <a:xfrm>
-            <a:off x="6510528" y="493776"/>
+          <p:cNvPr id="10" name="meta_415"/>
+          <p:cNvSpPr/>
+          <p:nvPr/>
+        </p:nvSpPr>
+        <p:spPr>
+          <a:xfrm>
+            <a:off x="6510528" y="548640"/>
             <a:ext cx="1901952" cy="274320"/>
           </a:xfrm>
           <a:prstGeom prst="roundRect">
@@ -16627,13 +16459,13 @@
       </p:sp>
       <p:sp>
         <p:nvSpPr>
-          <p:cNvPr id="11" name="tag_422"/>
-          <p:cNvSpPr/>
-          <p:nvPr/>
-        </p:nvSpPr>
-        <p:spPr>
-          <a:xfrm>
-            <a:off x="6510528" y="804672"/>
+          <p:cNvPr id="11" name="tag_416"/>
+          <p:cNvSpPr/>
+          <p:nvPr/>
+        </p:nvSpPr>
+        <p:spPr>
+          <a:xfrm>
+            <a:off x="6510528" y="914400"/>
             <a:ext cx="1901952" cy="274320"/>
           </a:xfrm>
           <a:prstGeom prst="roundRect">
@@ -16690,7 +16522,7 @@
       </p:sp>
       <p:pic>
         <p:nvPicPr>
-          <p:cNvPr id="12" name="logo_423" descr="/home/claude/lls-course/v2/img/logo.png">    </p:cNvPr>
+          <p:cNvPr id="12" name="logo_417" descr="/home/claude/lls-course/v2/img/logo.png">    </p:cNvPr>
           <p:cNvPicPr>
             <a:picLocks noChangeAspect="1"/>
           </p:cNvPicPr>
@@ -16714,7 +16546,7 @@
       </p:pic>
       <p:sp>
         <p:nvSpPr>
-          <p:cNvPr id="13" name="foot_424"/>
+          <p:cNvPr id="13" name="foot_418"/>
           <p:cNvSpPr/>
           <p:nvPr/>
         </p:nvSpPr>
@@ -16753,7 +16585,7 @@
       </p:sp>
       <p:sp>
         <p:nvSpPr>
-          <p:cNvPr id="14" name="cd_425"/>
+          <p:cNvPr id="14" name="cd_419"/>
           <p:cNvSpPr/>
           <p:nvPr/>
         </p:nvSpPr>
@@ -16768,11 +16600,11 @@
             </a:avLst>
           </a:prstGeom>
           <a:solidFill>
-            <a:srgbClr val="FFF6CC"/>
+            <a:srgbClr val="EEE8FB"/>
           </a:solidFill>
           <a:ln w="28575">
             <a:solidFill>
-              <a:srgbClr val="FFE07A"/>
+              <a:srgbClr val="CDBFF3"/>
             </a:solidFill>
             <a:prstDash val="solid"/>
           </a:ln>
@@ -16787,7 +16619,7 @@
       </p:sp>
       <p:sp>
         <p:nvSpPr>
-          <p:cNvPr id="15" name="ii_426"/>
+          <p:cNvPr id="15" name="ii_420"/>
           <p:cNvSpPr/>
           <p:nvPr/>
         </p:nvSpPr>
@@ -16823,7 +16655,7 @@
       </p:sp>
       <p:sp>
         <p:nvSpPr>
-          <p:cNvPr id="16" name="ih_427"/>
+          <p:cNvPr id="16" name="ih_421"/>
           <p:cNvSpPr/>
           <p:nvPr/>
         </p:nvSpPr>
@@ -16862,7 +16694,7 @@
       </p:sp>
       <p:sp>
         <p:nvSpPr>
-          <p:cNvPr id="17" name="il_428"/>
+          <p:cNvPr id="17" name="il_422"/>
           <p:cNvSpPr/>
           <p:nvPr/>
         </p:nvSpPr>
@@ -16979,7 +16811,7 @@
       </p:sp>
       <p:sp>
         <p:nvSpPr>
-          <p:cNvPr id="18" name="st_429"/>
+          <p:cNvPr id="18" name="st_423"/>
           <p:cNvSpPr/>
           <p:nvPr/>
         </p:nvSpPr>
@@ -17050,13 +16882,163 @@
       </p:sp>
       <p:sp>
         <p:nvSpPr>
-          <p:cNvPr id="19" name="bd_430"/>
+          <p:cNvPr id="19" name="bd_424"/>
           <p:cNvSpPr/>
           <p:nvPr/>
         </p:nvSpPr>
         <p:spPr>
           <a:xfrm>
             <a:off x="3246120" y="1572768"/>
+            <a:ext cx="329184" cy="329184"/>
+          </a:xfrm>
+          <a:prstGeom prst="ellipse">
+            <a:avLst/>
+          </a:prstGeom>
+          <a:solidFill>
+            <a:srgbClr val="7B5CD6"/>
+          </a:solidFill>
+          <a:ln w="28575">
+            <a:solidFill>
+              <a:srgbClr val="CDBFF3"/>
+            </a:solidFill>
+          </a:ln>
+          <a:effectLst>
+            <a:outerShdw sx="100000" sy="100000" kx="0" ky="0" algn="bl" rotWithShape="0" blurRad="88900" dist="31750" dir="5400000">
+              <a:srgbClr val="1B2559">
+                <a:alpha val="15000"/>
+              </a:srgbClr>
+            </a:outerShdw>
+          </a:effectLst>
+        </p:spPr>
+        <p:txBody>
+          <a:bodyPr wrap="square" lIns="0" tIns="0" rIns="0" bIns="0" rtlCol="0" anchor="ctr"/>
+          <a:lstStyle/>
+          <a:p>
+            <a:pPr algn="ctr" indent="0" marL="0">
+              <a:buNone/>
+            </a:pPr>
+            <a:r>
+              <a:rPr lang="en-US" sz="500" dirty="0">
+                <a:solidFill>
+                  <a:srgbClr val="FFFFFF"/>
+                </a:solidFill>
+                <a:latin typeface="Arial Rounded MT Bold" pitchFamily="34" charset="0"/>
+                <a:ea typeface="Arial Rounded MT Bold" pitchFamily="34" charset="-122"/>
+                <a:cs typeface="Arial Rounded MT Bold" pitchFamily="34" charset="-120"/>
+              </a:rPr>
+              <a:t>e.g.</a:t>
+            </a:r>
+            <a:endParaRPr lang="en-US" sz="500" dirty="0"/>
+          </a:p>
+        </p:txBody>
+      </p:sp>
+      <p:sp>
+        <p:nvSpPr>
+          <p:cNvPr id="20" name="gq_425"/>
+          <p:cNvSpPr/>
+          <p:nvPr/>
+        </p:nvSpPr>
+        <p:spPr>
+          <a:xfrm>
+            <a:off x="3657600" y="1417320"/>
+            <a:ext cx="2514600" cy="640080"/>
+          </a:xfrm>
+          <a:prstGeom prst="roundRect">
+            <a:avLst>
+              <a:gd name="adj" fmla="val 14286"/>
+            </a:avLst>
+          </a:prstGeom>
+          <a:solidFill>
+            <a:srgbClr val="EEE8FB"/>
+          </a:solidFill>
+          <a:ln w="28575">
+            <a:solidFill>
+              <a:srgbClr val="CDBFF3"/>
+            </a:solidFill>
+          </a:ln>
+        </p:spPr>
+        <p:txBody>
+          <a:bodyPr wrap="square" lIns="101600" tIns="0" rIns="101600" bIns="0" rtlCol="0" anchor="ctr">
+            <a:normAutofit/>
+          </a:bodyPr>
+          <a:lstStyle/>
+          <a:p>
+            <a:pPr indent="0" marL="0">
+              <a:buNone/>
+            </a:pPr>
+            <a:r>
+              <a:rPr lang="en-US" sz="1250" dirty="0">
+                <a:solidFill>
+                  <a:srgbClr val="1B2559"/>
+                </a:solidFill>
+                <a:latin typeface="Segoe UI Semibold" pitchFamily="34" charset="0"/>
+                <a:ea typeface="Segoe UI Semibold" pitchFamily="34" charset="-122"/>
+                <a:cs typeface="Segoe UI Semibold" pitchFamily="34" charset="-120"/>
+              </a:rPr>
+              <a:t>Painting your bedroom (a creative task)</a:t>
+            </a:r>
+            <a:endParaRPr lang="en-US" sz="1250" dirty="0"/>
+          </a:p>
+        </p:txBody>
+      </p:sp>
+      <p:sp>
+        <p:nvSpPr>
+          <p:cNvPr id="21" name="chip_426"/>
+          <p:cNvSpPr/>
+          <p:nvPr/>
+        </p:nvSpPr>
+        <p:spPr>
+          <a:xfrm>
+            <a:off x="6263640" y="1417320"/>
+            <a:ext cx="2560320" cy="640080"/>
+          </a:xfrm>
+          <a:prstGeom prst="roundRect">
+            <a:avLst>
+              <a:gd name="adj" fmla="val 14286"/>
+            </a:avLst>
+          </a:prstGeom>
+          <a:solidFill>
+            <a:srgbClr val="EEE8FB"/>
+          </a:solidFill>
+          <a:ln w="28575">
+            <a:solidFill>
+              <a:srgbClr val="CDBFF3"/>
+            </a:solidFill>
+          </a:ln>
+        </p:spPr>
+        <p:txBody>
+          <a:bodyPr wrap="square" lIns="101600" tIns="0" rIns="101600" bIns="0" rtlCol="0" anchor="ctr">
+            <a:normAutofit/>
+          </a:bodyPr>
+          <a:lstStyle/>
+          <a:p>
+            <a:pPr algn="l" indent="0" marL="0">
+              <a:buNone/>
+            </a:pPr>
+            <a:r>
+              <a:rPr lang="en-US" sz="1150" b="1" dirty="0">
+                <a:solidFill>
+                  <a:srgbClr val="1B2559"/>
+                </a:solidFill>
+                <a:latin typeface="Segoe UI Semibold" pitchFamily="34" charset="0"/>
+                <a:ea typeface="Segoe UI Semibold" pitchFamily="34" charset="-122"/>
+                <a:cs typeface="Segoe UI Semibold" pitchFamily="34" charset="-120"/>
+              </a:rPr>
+              <a:t>→ Uplifting pop with lyrics – happy music helps creative thinking.</a:t>
+            </a:r>
+            <a:endParaRPr lang="en-US" sz="1150" dirty="0"/>
+          </a:p>
+        </p:txBody>
+      </p:sp>
+      <p:sp>
+        <p:nvSpPr>
+          <p:cNvPr id="22" name="bd_427"/>
+          <p:cNvSpPr/>
+          <p:nvPr/>
+        </p:nvSpPr>
+        <p:spPr>
+          <a:xfrm>
+            <a:off x="3246120" y="2276856"/>
             <a:ext cx="329184" cy="329184"/>
           </a:xfrm>
           <a:prstGeom prst="ellipse">
@@ -17102,13 +17084,13 @@
       </p:sp>
       <p:sp>
         <p:nvSpPr>
-          <p:cNvPr id="20" name="gq_431"/>
-          <p:cNvSpPr/>
-          <p:nvPr/>
-        </p:nvSpPr>
-        <p:spPr>
-          <a:xfrm>
-            <a:off x="3657600" y="1417320"/>
+          <p:cNvPr id="23" name="gq_428"/>
+          <p:cNvSpPr/>
+          <p:nvPr/>
+        </p:nvSpPr>
+        <p:spPr>
+          <a:xfrm>
+            <a:off x="3657600" y="2121408"/>
             <a:ext cx="2514600" cy="640080"/>
           </a:xfrm>
           <a:prstGeom prst="roundRect">
@@ -17143,7 +17125,7 @@
                 <a:ea typeface="Segoe UI Semibold" pitchFamily="34" charset="-122"/>
                 <a:cs typeface="Segoe UI Semibold" pitchFamily="34" charset="-120"/>
               </a:rPr>
-              <a:t>Painting your bedroom (a creative task)</a:t>
+              <a:t>Revising for a hard maths test tomorrow</a:t>
             </a:r>
             <a:endParaRPr lang="en-US" sz="1250" dirty="0"/>
           </a:p>
@@ -17151,13 +17133,13 @@
       </p:sp>
       <p:sp>
         <p:nvSpPr>
-          <p:cNvPr id="21" name="R1_chip432"/>
-          <p:cNvSpPr/>
-          <p:nvPr/>
-        </p:nvSpPr>
-        <p:spPr>
-          <a:xfrm>
-            <a:off x="6263640" y="1417320"/>
+          <p:cNvPr id="24" name="R1_chip429"/>
+          <p:cNvSpPr/>
+          <p:nvPr/>
+        </p:nvSpPr>
+        <p:spPr>
+          <a:xfrm>
+            <a:off x="6263640" y="2121408"/>
             <a:ext cx="2560320" cy="640080"/>
           </a:xfrm>
           <a:prstGeom prst="roundRect">
@@ -17192,7 +17174,7 @@
                 <a:ea typeface="Segoe UI Semibold" pitchFamily="34" charset="-122"/>
                 <a:cs typeface="Segoe UI Semibold" pitchFamily="34" charset="-120"/>
               </a:rPr>
-              <a:t>→ Uplifting pop with lyrics – happy music helps creative thinking.</a:t>
+              <a:t>→ Silence, or soothing music with no lyrics – you're better off without distractions.</a:t>
             </a:r>
             <a:endParaRPr lang="en-US" sz="1150" dirty="0"/>
           </a:p>
@@ -17200,13 +17182,13 @@
       </p:sp>
       <p:sp>
         <p:nvSpPr>
-          <p:cNvPr id="22" name="bd_433"/>
-          <p:cNvSpPr/>
-          <p:nvPr/>
-        </p:nvSpPr>
-        <p:spPr>
-          <a:xfrm>
-            <a:off x="3246120" y="2276856"/>
+          <p:cNvPr id="25" name="bd_430"/>
+          <p:cNvSpPr/>
+          <p:nvPr/>
+        </p:nvSpPr>
+        <p:spPr>
+          <a:xfrm>
+            <a:off x="3246120" y="2980944"/>
             <a:ext cx="329184" cy="329184"/>
           </a:xfrm>
           <a:prstGeom prst="ellipse">
@@ -17252,13 +17234,13 @@
       </p:sp>
       <p:sp>
         <p:nvSpPr>
-          <p:cNvPr id="23" name="gq_434"/>
-          <p:cNvSpPr/>
-          <p:nvPr/>
-        </p:nvSpPr>
-        <p:spPr>
-          <a:xfrm>
-            <a:off x="3657600" y="2121408"/>
+          <p:cNvPr id="26" name="gq_431"/>
+          <p:cNvSpPr/>
+          <p:nvPr/>
+        </p:nvSpPr>
+        <p:spPr>
+          <a:xfrm>
+            <a:off x="3657600" y="2825496"/>
             <a:ext cx="2514600" cy="640080"/>
           </a:xfrm>
           <a:prstGeom prst="roundRect">
@@ -17293,7 +17275,7 @@
                 <a:ea typeface="Segoe UI Semibold" pitchFamily="34" charset="-122"/>
                 <a:cs typeface="Segoe UI Semibold" pitchFamily="34" charset="-120"/>
               </a:rPr>
-              <a:t>Revising for a hard maths test tomorrow</a:t>
+              <a:t>A 3-hour heart operation (you're the surgeon!)</a:t>
             </a:r>
             <a:endParaRPr lang="en-US" sz="1250" dirty="0"/>
           </a:p>
@@ -17301,13 +17283,13 @@
       </p:sp>
       <p:sp>
         <p:nvSpPr>
-          <p:cNvPr id="24" name="R2_chip435"/>
-          <p:cNvSpPr/>
-          <p:nvPr/>
-        </p:nvSpPr>
-        <p:spPr>
-          <a:xfrm>
-            <a:off x="6263640" y="2121408"/>
+          <p:cNvPr id="27" name="R2_chip432"/>
+          <p:cNvSpPr/>
+          <p:nvPr/>
+        </p:nvSpPr>
+        <p:spPr>
+          <a:xfrm>
+            <a:off x="6263640" y="2825496"/>
             <a:ext cx="2560320" cy="640080"/>
           </a:xfrm>
           <a:prstGeom prst="roundRect">
@@ -17342,7 +17324,7 @@
                 <a:ea typeface="Segoe UI Semibold" pitchFamily="34" charset="-122"/>
                 <a:cs typeface="Segoe UI Semibold" pitchFamily="34" charset="-120"/>
               </a:rPr>
-              <a:t>→ Silence, or soothing music with no lyrics – you're better off without distractions.</a:t>
+              <a:t>→ Silence – like Samer, the team must hear each other.</a:t>
             </a:r>
             <a:endParaRPr lang="en-US" sz="1150" dirty="0"/>
           </a:p>
@@ -17350,13 +17332,13 @@
       </p:sp>
       <p:sp>
         <p:nvSpPr>
-          <p:cNvPr id="25" name="bd_436"/>
-          <p:cNvSpPr/>
-          <p:nvPr/>
-        </p:nvSpPr>
-        <p:spPr>
-          <a:xfrm>
-            <a:off x="3246120" y="2980944"/>
+          <p:cNvPr id="28" name="bd_433"/>
+          <p:cNvSpPr/>
+          <p:nvPr/>
+        </p:nvSpPr>
+        <p:spPr>
+          <a:xfrm>
+            <a:off x="3246120" y="3685032"/>
             <a:ext cx="329184" cy="329184"/>
           </a:xfrm>
           <a:prstGeom prst="ellipse">
@@ -17402,13 +17384,13 @@
       </p:sp>
       <p:sp>
         <p:nvSpPr>
-          <p:cNvPr id="26" name="gq_437"/>
-          <p:cNvSpPr/>
-          <p:nvPr/>
-        </p:nvSpPr>
-        <p:spPr>
-          <a:xfrm>
-            <a:off x="3657600" y="2825496"/>
+          <p:cNvPr id="29" name="gq_434"/>
+          <p:cNvSpPr/>
+          <p:nvPr/>
+        </p:nvSpPr>
+        <p:spPr>
+          <a:xfrm>
+            <a:off x="3657600" y="3529584"/>
             <a:ext cx="2514600" cy="640080"/>
           </a:xfrm>
           <a:prstGeom prst="roundRect">
@@ -17443,7 +17425,7 @@
                 <a:ea typeface="Segoe UI Semibold" pitchFamily="34" charset="-122"/>
                 <a:cs typeface="Segoe UI Semibold" pitchFamily="34" charset="-120"/>
               </a:rPr>
-              <a:t>A 3-hour heart operation (you're the surgeon!)</a:t>
+              <a:t>A 6-hour car journey with your family</a:t>
             </a:r>
             <a:endParaRPr lang="en-US" sz="1250" dirty="0"/>
           </a:p>
@@ -17451,157 +17433,7 @@
       </p:sp>
       <p:sp>
         <p:nvSpPr>
-          <p:cNvPr id="27" name="R3_chip438"/>
-          <p:cNvSpPr/>
-          <p:nvPr/>
-        </p:nvSpPr>
-        <p:spPr>
-          <a:xfrm>
-            <a:off x="6263640" y="2825496"/>
-            <a:ext cx="2560320" cy="640080"/>
-          </a:xfrm>
-          <a:prstGeom prst="roundRect">
-            <a:avLst>
-              <a:gd name="adj" fmla="val 14286"/>
-            </a:avLst>
-          </a:prstGeom>
-          <a:solidFill>
-            <a:srgbClr val="FFE3EE"/>
-          </a:solidFill>
-          <a:ln w="28575">
-            <a:solidFill>
-              <a:srgbClr val="F7A6C4"/>
-            </a:solidFill>
-          </a:ln>
-        </p:spPr>
-        <p:txBody>
-          <a:bodyPr wrap="square" lIns="101600" tIns="0" rIns="101600" bIns="0" rtlCol="0" anchor="ctr">
-            <a:normAutofit/>
-          </a:bodyPr>
-          <a:lstStyle/>
-          <a:p>
-            <a:pPr algn="l" indent="0" marL="0">
-              <a:buNone/>
-            </a:pPr>
-            <a:r>
-              <a:rPr lang="en-US" sz="1150" b="1" dirty="0">
-                <a:solidFill>
-                  <a:srgbClr val="1B2559"/>
-                </a:solidFill>
-                <a:latin typeface="Segoe UI Semibold" pitchFamily="34" charset="0"/>
-                <a:ea typeface="Segoe UI Semibold" pitchFamily="34" charset="-122"/>
-                <a:cs typeface="Segoe UI Semibold" pitchFamily="34" charset="-120"/>
-              </a:rPr>
-              <a:t>→ Silence – like Samer, the team must hear each other.</a:t>
-            </a:r>
-            <a:endParaRPr lang="en-US" sz="1150" dirty="0"/>
-          </a:p>
-        </p:txBody>
-      </p:sp>
-      <p:sp>
-        <p:nvSpPr>
-          <p:cNvPr id="28" name="bd_439"/>
-          <p:cNvSpPr/>
-          <p:nvPr/>
-        </p:nvSpPr>
-        <p:spPr>
-          <a:xfrm>
-            <a:off x="3246120" y="3685032"/>
-            <a:ext cx="329184" cy="329184"/>
-          </a:xfrm>
-          <a:prstGeom prst="ellipse">
-            <a:avLst/>
-          </a:prstGeom>
-          <a:solidFill>
-            <a:srgbClr val="F2B705"/>
-          </a:solidFill>
-          <a:ln w="28575">
-            <a:solidFill>
-              <a:srgbClr val="FFE07A"/>
-            </a:solidFill>
-          </a:ln>
-          <a:effectLst>
-            <a:outerShdw sx="100000" sy="100000" kx="0" ky="0" algn="bl" rotWithShape="0" blurRad="88900" dist="31750" dir="5400000">
-              <a:srgbClr val="1B2559">
-                <a:alpha val="15000"/>
-              </a:srgbClr>
-            </a:outerShdw>
-          </a:effectLst>
-        </p:spPr>
-        <p:txBody>
-          <a:bodyPr wrap="square" lIns="0" tIns="0" rIns="0" bIns="0" rtlCol="0" anchor="ctr"/>
-          <a:lstStyle/>
-          <a:p>
-            <a:pPr algn="ctr" indent="0" marL="0">
-              <a:buNone/>
-            </a:pPr>
-            <a:r>
-              <a:rPr lang="en-US" sz="1100" dirty="0">
-                <a:solidFill>
-                  <a:srgbClr val="FFFFFF"/>
-                </a:solidFill>
-                <a:latin typeface="Arial Rounded MT Bold" pitchFamily="34" charset="0"/>
-                <a:ea typeface="Arial Rounded MT Bold" pitchFamily="34" charset="-122"/>
-                <a:cs typeface="Arial Rounded MT Bold" pitchFamily="34" charset="-120"/>
-              </a:rPr>
-              <a:t>4</a:t>
-            </a:r>
-            <a:endParaRPr lang="en-US" sz="1100" dirty="0"/>
-          </a:p>
-        </p:txBody>
-      </p:sp>
-      <p:sp>
-        <p:nvSpPr>
-          <p:cNvPr id="29" name="gq_440"/>
-          <p:cNvSpPr/>
-          <p:nvPr/>
-        </p:nvSpPr>
-        <p:spPr>
-          <a:xfrm>
-            <a:off x="3657600" y="3529584"/>
-            <a:ext cx="2514600" cy="640080"/>
-          </a:xfrm>
-          <a:prstGeom prst="roundRect">
-            <a:avLst>
-              <a:gd name="adj" fmla="val 14286"/>
-            </a:avLst>
-          </a:prstGeom>
-          <a:solidFill>
-            <a:srgbClr val="FFFFFF"/>
-          </a:solidFill>
-          <a:ln w="28575">
-            <a:solidFill>
-              <a:srgbClr val="FFE07A"/>
-            </a:solidFill>
-          </a:ln>
-        </p:spPr>
-        <p:txBody>
-          <a:bodyPr wrap="square" lIns="101600" tIns="0" rIns="101600" bIns="0" rtlCol="0" anchor="ctr">
-            <a:normAutofit/>
-          </a:bodyPr>
-          <a:lstStyle/>
-          <a:p>
-            <a:pPr indent="0" marL="0">
-              <a:buNone/>
-            </a:pPr>
-            <a:r>
-              <a:rPr lang="en-US" sz="1250" dirty="0">
-                <a:solidFill>
-                  <a:srgbClr val="1B2559"/>
-                </a:solidFill>
-                <a:latin typeface="Segoe UI Semibold" pitchFamily="34" charset="0"/>
-                <a:ea typeface="Segoe UI Semibold" pitchFamily="34" charset="-122"/>
-                <a:cs typeface="Segoe UI Semibold" pitchFamily="34" charset="-120"/>
-              </a:rPr>
-              <a:t>A 6-hour car journey with your family</a:t>
-            </a:r>
-            <a:endParaRPr lang="en-US" sz="1250" dirty="0"/>
-          </a:p>
-        </p:txBody>
-      </p:sp>
-      <p:sp>
-        <p:nvSpPr>
-          <p:cNvPr id="30" name="R4_chip441"/>
+          <p:cNvPr id="30" name="R3_chip435"/>
           <p:cNvSpPr/>
           <p:nvPr/>
         </p:nvSpPr>
@@ -17690,7 +17522,7 @@
                                           </p:stCondLst>
                                         </p:cTn>
                                         <p:tgtEl>
-                                          <p:spTgt spid="21"/>
+                                          <p:spTgt spid="24"/>
                                         </p:tgtEl>
                                         <p:attrNameLst>
                                           <p:attrName>style.visibility</p:attrName>
@@ -17704,7 +17536,7 @@
                                       <p:cBhvr>
                                         <p:cTn id="7" dur="400"/>
                                         <p:tgtEl>
-                                          <p:spTgt spid="21"/>
+                                          <p:spTgt spid="24"/>
                                         </p:tgtEl>
                                       </p:cBhvr>
                                     </p:animEffect>
@@ -17743,7 +17575,7 @@
                                           </p:stCondLst>
                                         </p:cTn>
                                         <p:tgtEl>
-                                          <p:spTgt spid="24"/>
+                                          <p:spTgt spid="27"/>
                                         </p:tgtEl>
                                         <p:attrNameLst>
                                           <p:attrName>style.visibility</p:attrName>
@@ -17757,7 +17589,7 @@
                                       <p:cBhvr>
                                         <p:cTn id="12" dur="400"/>
                                         <p:tgtEl>
-                                          <p:spTgt spid="24"/>
+                                          <p:spTgt spid="27"/>
                                         </p:tgtEl>
                                       </p:cBhvr>
                                     </p:animEffect>
@@ -17796,7 +17628,7 @@
                                           </p:stCondLst>
                                         </p:cTn>
                                         <p:tgtEl>
-                                          <p:spTgt spid="27"/>
+                                          <p:spTgt spid="30"/>
                                         </p:tgtEl>
                                         <p:attrNameLst>
                                           <p:attrName>style.visibility</p:attrName>
@@ -17809,59 +17641,6 @@
                                     <p:animEffect transition="in" filter="fade">
                                       <p:cBhvr>
                                         <p:cTn id="17" dur="400"/>
-                                        <p:tgtEl>
-                                          <p:spTgt spid="27"/>
-                                        </p:tgtEl>
-                                      </p:cBhvr>
-                                    </p:animEffect>
-                                  </p:childTnLst>
-                                </p:cTn>
-                              </p:par>
-                            </p:childTnLst>
-                          </p:cTn>
-                        </p:par>
-                      </p:childTnLst>
-                    </p:cTn>
-                  </p:par>
-                  <p:par>
-                    <p:cTn id="18" fill="hold">
-                      <p:stCondLst>
-                        <p:cond delay="indefinite"/>
-                      </p:stCondLst>
-                      <p:childTnLst>
-                        <p:par>
-                          <p:cTn id="19" fill="hold">
-                            <p:stCondLst>
-                              <p:cond delay="0"/>
-                            </p:stCondLst>
-                            <p:childTnLst>
-                              <p:par>
-                                <p:cTn id="20" presetID="10" presetClass="entr" presetSubtype="0" fill="hold" nodeType="clickEffect">
-                                  <p:stCondLst>
-                                    <p:cond delay="0"/>
-                                  </p:stCondLst>
-                                  <p:childTnLst>
-                                    <p:set>
-                                      <p:cBhvr>
-                                        <p:cTn id="21" dur="1" fill="hold">
-                                          <p:stCondLst>
-                                            <p:cond delay="0"/>
-                                          </p:stCondLst>
-                                        </p:cTn>
-                                        <p:tgtEl>
-                                          <p:spTgt spid="30"/>
-                                        </p:tgtEl>
-                                        <p:attrNameLst>
-                                          <p:attrName>style.visibility</p:attrName>
-                                        </p:attrNameLst>
-                                      </p:cBhvr>
-                                      <p:to>
-                                        <p:strVal val="visible"/>
-                                      </p:to>
-                                    </p:set>
-                                    <p:animEffect transition="in" filter="fade">
-                                      <p:cBhvr>
-                                        <p:cTn id="22" dur="400"/>
                                         <p:tgtEl>
                                           <p:spTgt spid="30"/>
                                         </p:tgtEl>
@@ -17934,7 +17713,7 @@
       </p:grpSpPr>
       <p:sp>
         <p:nvSpPr>
-          <p:cNvPr id="3" name="bd_442"/>
+          <p:cNvPr id="3" name="bd_436"/>
           <p:cNvSpPr/>
           <p:nvPr/>
         </p:nvSpPr>
@@ -17986,7 +17765,7 @@
       </p:sp>
       <p:pic>
         <p:nvPicPr>
-          <p:cNvPr id="4" name="brY_443" descr="/home/claude/lls-course/v2/assets/brush-yellow.png">    </p:cNvPr>
+          <p:cNvPr id="4" name="brY_437" descr="/home/claude/lls-course/v2/assets/brush-yellow.png">    </p:cNvPr>
           <p:cNvPicPr>
             <a:picLocks noChangeAspect="1"/>
           </p:cNvPicPr>
@@ -18010,7 +17789,7 @@
       </p:pic>
       <p:sp>
         <p:nvSpPr>
-          <p:cNvPr id="5" name="title_444"/>
+          <p:cNvPr id="5" name="title_438"/>
           <p:cNvSpPr/>
           <p:nvPr/>
         </p:nvSpPr>
@@ -18051,7 +17830,7 @@
       </p:sp>
       <p:pic>
         <p:nvPicPr>
-          <p:cNvPr id="6" name="brP_445" descr="/home/claude/lls-course/v2/assets/brush-pink.png">    </p:cNvPr>
+          <p:cNvPr id="6" name="brP_439" descr="/home/claude/lls-course/v2/assets/brush-pink.png">    </p:cNvPr>
           <p:cNvPicPr>
             <a:picLocks noChangeAspect="1"/>
           </p:cNvPicPr>
@@ -18075,7 +17854,7 @@
       </p:pic>
       <p:sp>
         <p:nvSpPr>
-          <p:cNvPr id="7" name="ins_446"/>
+          <p:cNvPr id="7" name="ins_440"/>
           <p:cNvSpPr/>
           <p:nvPr/>
         </p:nvSpPr>
@@ -18116,7 +17895,7 @@
       </p:sp>
       <p:sp>
         <p:nvSpPr>
-          <p:cNvPr id="8" name="insIT_447"/>
+          <p:cNvPr id="8" name="insIT_441"/>
           <p:cNvSpPr/>
           <p:nvPr/>
         </p:nvSpPr>
@@ -18157,7 +17936,7 @@
       </p:sp>
       <p:sp>
         <p:nvSpPr>
-          <p:cNvPr id="9" name="meta_448"/>
+          <p:cNvPr id="9" name="meta_442"/>
           <p:cNvSpPr/>
           <p:nvPr/>
         </p:nvSpPr>
@@ -18206,13 +17985,13 @@
       </p:sp>
       <p:sp>
         <p:nvSpPr>
-          <p:cNvPr id="10" name="tag_449"/>
-          <p:cNvSpPr/>
-          <p:nvPr/>
-        </p:nvSpPr>
-        <p:spPr>
-          <a:xfrm>
-            <a:off x="6510528" y="493776"/>
+          <p:cNvPr id="10" name="tag_443"/>
+          <p:cNvSpPr/>
+          <p:nvPr/>
+        </p:nvSpPr>
+        <p:spPr>
+          <a:xfrm>
+            <a:off x="6510528" y="548640"/>
             <a:ext cx="1901952" cy="274320"/>
           </a:xfrm>
           <a:prstGeom prst="roundRect">
@@ -18269,7 +18048,7 @@
       </p:sp>
       <p:pic>
         <p:nvPicPr>
-          <p:cNvPr id="11" name="logo_450" descr="/home/claude/lls-course/v2/img/logo.png">    </p:cNvPr>
+          <p:cNvPr id="11" name="logo_444" descr="/home/claude/lls-course/v2/img/logo.png">    </p:cNvPr>
           <p:cNvPicPr>
             <a:picLocks noChangeAspect="1"/>
           </p:cNvPicPr>
@@ -18293,7 +18072,7 @@
       </p:pic>
       <p:sp>
         <p:nvSpPr>
-          <p:cNvPr id="12" name="foot_451"/>
+          <p:cNvPr id="12" name="foot_445"/>
           <p:cNvSpPr/>
           <p:nvPr/>
         </p:nvSpPr>
@@ -18332,7 +18111,7 @@
       </p:sp>
       <p:sp>
         <p:nvSpPr>
-          <p:cNvPr id="13" name="bd_452"/>
+          <p:cNvPr id="13" name="bd_446"/>
           <p:cNvSpPr/>
           <p:nvPr/>
         </p:nvSpPr>
@@ -18384,7 +18163,7 @@
       </p:sp>
       <p:sp>
         <p:nvSpPr>
-          <p:cNvPr id="14" name="rt_453"/>
+          <p:cNvPr id="14" name="rt_447"/>
           <p:cNvSpPr/>
           <p:nvPr/>
         </p:nvSpPr>
@@ -18440,7 +18219,7 @@
       </p:sp>
       <p:sp>
         <p:nvSpPr>
-          <p:cNvPr id="15" name="bd_454"/>
+          <p:cNvPr id="15" name="bd_448"/>
           <p:cNvSpPr/>
           <p:nvPr/>
         </p:nvSpPr>
@@ -18492,7 +18271,7 @@
       </p:sp>
       <p:sp>
         <p:nvSpPr>
-          <p:cNvPr id="16" name="rt_455"/>
+          <p:cNvPr id="16" name="rt_449"/>
           <p:cNvSpPr/>
           <p:nvPr/>
         </p:nvSpPr>
@@ -18548,7 +18327,7 @@
       </p:sp>
       <p:sp>
         <p:nvSpPr>
-          <p:cNvPr id="17" name="bd_456"/>
+          <p:cNvPr id="17" name="bd_450"/>
           <p:cNvSpPr/>
           <p:nvPr/>
         </p:nvSpPr>
@@ -18600,7 +18379,7 @@
       </p:sp>
       <p:sp>
         <p:nvSpPr>
-          <p:cNvPr id="18" name="rt_457"/>
+          <p:cNvPr id="18" name="rt_451"/>
           <p:cNvSpPr/>
           <p:nvPr/>
         </p:nvSpPr>
@@ -18656,7 +18435,7 @@
       </p:sp>
       <p:sp>
         <p:nvSpPr>
-          <p:cNvPr id="19" name="cd_458"/>
+          <p:cNvPr id="19" name="cd_452"/>
           <p:cNvSpPr/>
           <p:nvPr/>
         </p:nvSpPr>
@@ -18671,11 +18450,11 @@
             </a:avLst>
           </a:prstGeom>
           <a:solidFill>
-            <a:srgbClr val="FFF6CC"/>
+            <a:srgbClr val="EEE8FB"/>
           </a:solidFill>
           <a:ln w="28575">
             <a:solidFill>
-              <a:srgbClr val="FFE07A"/>
+              <a:srgbClr val="CDBFF3"/>
             </a:solidFill>
             <a:prstDash val="solid"/>
           </a:ln>
@@ -18690,7 +18469,7 @@
       </p:sp>
       <p:sp>
         <p:nvSpPr>
-          <p:cNvPr id="20" name="ii_459"/>
+          <p:cNvPr id="20" name="ii_453"/>
           <p:cNvSpPr/>
           <p:nvPr/>
         </p:nvSpPr>
@@ -18726,7 +18505,7 @@
       </p:sp>
       <p:sp>
         <p:nvSpPr>
-          <p:cNvPr id="21" name="ih_460"/>
+          <p:cNvPr id="21" name="ih_454"/>
           <p:cNvSpPr/>
           <p:nvPr/>
         </p:nvSpPr>
@@ -18765,7 +18544,7 @@
       </p:sp>
       <p:sp>
         <p:nvSpPr>
-          <p:cNvPr id="22" name="il_461"/>
+          <p:cNvPr id="22" name="il_455"/>
           <p:cNvSpPr/>
           <p:nvPr/>
         </p:nvSpPr>
@@ -18834,7 +18613,7 @@
       </p:sp>
       <p:sp>
         <p:nvSpPr>
-          <p:cNvPr id="23" name="st_462"/>
+          <p:cNvPr id="23" name="st_456"/>
           <p:cNvSpPr/>
           <p:nvPr/>
         </p:nvSpPr>
@@ -18930,7 +18709,7 @@
       </p:grpSpPr>
       <p:sp>
         <p:nvSpPr>
-          <p:cNvPr id="3" name="bd_463"/>
+          <p:cNvPr id="3" name="bd_457"/>
           <p:cNvSpPr/>
           <p:nvPr/>
         </p:nvSpPr>
@@ -18982,7 +18761,7 @@
       </p:sp>
       <p:pic>
         <p:nvPicPr>
-          <p:cNvPr id="4" name="brY_464" descr="/home/claude/lls-course/v2/assets/brush-yellow.png">    </p:cNvPr>
+          <p:cNvPr id="4" name="brY_458" descr="/home/claude/lls-course/v2/assets/brush-yellow.png">    </p:cNvPr>
           <p:cNvPicPr>
             <a:picLocks noChangeAspect="1"/>
           </p:cNvPicPr>
@@ -19006,7 +18785,7 @@
       </p:pic>
       <p:sp>
         <p:nvSpPr>
-          <p:cNvPr id="5" name="title_465"/>
+          <p:cNvPr id="5" name="title_459"/>
           <p:cNvSpPr/>
           <p:nvPr/>
         </p:nvSpPr>
@@ -19047,7 +18826,7 @@
       </p:sp>
       <p:pic>
         <p:nvPicPr>
-          <p:cNvPr id="6" name="brP_466" descr="/home/claude/lls-course/v2/assets/brush-pink.png">    </p:cNvPr>
+          <p:cNvPr id="6" name="brP_460" descr="/home/claude/lls-course/v2/assets/brush-pink.png">    </p:cNvPr>
           <p:cNvPicPr>
             <a:picLocks noChangeAspect="1"/>
           </p:cNvPicPr>
@@ -19071,7 +18850,7 @@
       </p:pic>
       <p:sp>
         <p:nvSpPr>
-          <p:cNvPr id="7" name="ins_467"/>
+          <p:cNvPr id="7" name="ins_461"/>
           <p:cNvSpPr/>
           <p:nvPr/>
         </p:nvSpPr>
@@ -19112,7 +18891,7 @@
       </p:sp>
       <p:sp>
         <p:nvSpPr>
-          <p:cNvPr id="8" name="insIT_468"/>
+          <p:cNvPr id="8" name="insIT_462"/>
           <p:cNvSpPr/>
           <p:nvPr/>
         </p:nvSpPr>
@@ -19153,7 +18932,7 @@
       </p:sp>
       <p:sp>
         <p:nvSpPr>
-          <p:cNvPr id="9" name="cmd_469"/>
+          <p:cNvPr id="9" name="cmd_463"/>
           <p:cNvSpPr/>
           <p:nvPr/>
         </p:nvSpPr>
@@ -19184,12 +18963,12 @@
           </a:effectLst>
         </p:spPr>
         <p:txBody>
-          <a:bodyPr wrap="square" lIns="101600" tIns="0" rIns="101600" bIns="0" rtlCol="0" anchor="ctr">
+          <a:bodyPr wrap="square" lIns="76200" tIns="0" rIns="76200" bIns="0" rtlCol="0" anchor="ctr">
             <a:normAutofit/>
           </a:bodyPr>
           <a:lstStyle/>
           <a:p>
-            <a:pPr indent="0" marL="0">
+            <a:pPr algn="ctr" indent="0" marL="0">
               <a:buNone/>
             </a:pPr>
             <a:r>
@@ -19200,7 +18979,7 @@
               </a:rPr>
               <a:t>💡 </a:t>
             </a:r>
-            <a:pPr indent="0" marL="0">
+            <a:pPr algn="ctr" indent="0" marL="0">
               <a:buNone/>
             </a:pPr>
             <a:r>
@@ -19214,7 +18993,7 @@
               </a:rPr>
               <a:t>THINK</a:t>
             </a:r>
-            <a:pPr indent="0" marL="0">
+            <a:pPr algn="ctr" indent="0" marL="0">
               <a:buNone/>
             </a:pPr>
             <a:r>
@@ -19234,13 +19013,13 @@
       </p:sp>
       <p:sp>
         <p:nvSpPr>
-          <p:cNvPr id="10" name="meta_470"/>
-          <p:cNvSpPr/>
-          <p:nvPr/>
-        </p:nvSpPr>
-        <p:spPr>
-          <a:xfrm>
-            <a:off x="6510528" y="493776"/>
+          <p:cNvPr id="10" name="meta_464"/>
+          <p:cNvSpPr/>
+          <p:nvPr/>
+        </p:nvSpPr>
+        <p:spPr>
+          <a:xfrm>
+            <a:off x="6510528" y="548640"/>
             <a:ext cx="1901952" cy="274320"/>
           </a:xfrm>
           <a:prstGeom prst="roundRect">
@@ -19283,13 +19062,13 @@
       </p:sp>
       <p:sp>
         <p:nvSpPr>
-          <p:cNvPr id="11" name="tag_471"/>
-          <p:cNvSpPr/>
-          <p:nvPr/>
-        </p:nvSpPr>
-        <p:spPr>
-          <a:xfrm>
-            <a:off x="6510528" y="804672"/>
+          <p:cNvPr id="11" name="tag_465"/>
+          <p:cNvSpPr/>
+          <p:nvPr/>
+        </p:nvSpPr>
+        <p:spPr>
+          <a:xfrm>
+            <a:off x="6510528" y="914400"/>
             <a:ext cx="1901952" cy="274320"/>
           </a:xfrm>
           <a:prstGeom prst="roundRect">
@@ -19346,7 +19125,7 @@
       </p:sp>
       <p:pic>
         <p:nvPicPr>
-          <p:cNvPr id="12" name="logo_472" descr="/home/claude/lls-course/v2/img/logo.png">    </p:cNvPr>
+          <p:cNvPr id="12" name="logo_466" descr="/home/claude/lls-course/v2/img/logo.png">    </p:cNvPr>
           <p:cNvPicPr>
             <a:picLocks noChangeAspect="1"/>
           </p:cNvPicPr>
@@ -19370,7 +19149,7 @@
       </p:pic>
       <p:sp>
         <p:nvSpPr>
-          <p:cNvPr id="13" name="foot_473"/>
+          <p:cNvPr id="13" name="foot_467"/>
           <p:cNvSpPr/>
           <p:nvPr/>
         </p:nvSpPr>
@@ -19409,7 +19188,7 @@
       </p:sp>
       <p:sp>
         <p:nvSpPr>
-          <p:cNvPr id="14" name="cd_474"/>
+          <p:cNvPr id="14" name="cd_468"/>
           <p:cNvSpPr/>
           <p:nvPr/>
         </p:nvSpPr>
@@ -19443,7 +19222,7 @@
       </p:sp>
       <p:sp>
         <p:nvSpPr>
-          <p:cNvPr id="15" name="te_475"/>
+          <p:cNvPr id="15" name="te_469"/>
           <p:cNvSpPr/>
           <p:nvPr/>
         </p:nvSpPr>
@@ -19479,7 +19258,7 @@
       </p:sp>
       <p:sp>
         <p:nvSpPr>
-          <p:cNvPr id="16" name="tt_476"/>
+          <p:cNvPr id="16" name="tt_470"/>
           <p:cNvSpPr/>
           <p:nvPr/>
         </p:nvSpPr>
@@ -19520,7 +19299,7 @@
       </p:sp>
       <p:sp>
         <p:nvSpPr>
-          <p:cNvPr id="17" name="R1_tk477"/>
+          <p:cNvPr id="17" name="R1_tk471"/>
           <p:cNvSpPr/>
           <p:nvPr/>
         </p:nvSpPr>
@@ -19556,7 +19335,7 @@
       </p:sp>
       <p:sp>
         <p:nvSpPr>
-          <p:cNvPr id="18" name="cd_478"/>
+          <p:cNvPr id="18" name="cd_472"/>
           <p:cNvSpPr/>
           <p:nvPr/>
         </p:nvSpPr>
@@ -19590,7 +19369,7 @@
       </p:sp>
       <p:sp>
         <p:nvSpPr>
-          <p:cNvPr id="19" name="te_479"/>
+          <p:cNvPr id="19" name="te_473"/>
           <p:cNvSpPr/>
           <p:nvPr/>
         </p:nvSpPr>
@@ -19626,7 +19405,7 @@
       </p:sp>
       <p:sp>
         <p:nvSpPr>
-          <p:cNvPr id="20" name="tt_480"/>
+          <p:cNvPr id="20" name="tt_474"/>
           <p:cNvSpPr/>
           <p:nvPr/>
         </p:nvSpPr>
@@ -19667,7 +19446,7 @@
       </p:sp>
       <p:sp>
         <p:nvSpPr>
-          <p:cNvPr id="21" name="R2_tk481"/>
+          <p:cNvPr id="21" name="R2_tk475"/>
           <p:cNvSpPr/>
           <p:nvPr/>
         </p:nvSpPr>
@@ -19703,7 +19482,7 @@
       </p:sp>
       <p:sp>
         <p:nvSpPr>
-          <p:cNvPr id="22" name="cd_482"/>
+          <p:cNvPr id="22" name="cd_476"/>
           <p:cNvSpPr/>
           <p:nvPr/>
         </p:nvSpPr>
@@ -19737,7 +19516,7 @@
       </p:sp>
       <p:sp>
         <p:nvSpPr>
-          <p:cNvPr id="23" name="te_483"/>
+          <p:cNvPr id="23" name="te_477"/>
           <p:cNvSpPr/>
           <p:nvPr/>
         </p:nvSpPr>
@@ -19773,7 +19552,7 @@
       </p:sp>
       <p:sp>
         <p:nvSpPr>
-          <p:cNvPr id="24" name="tt_484"/>
+          <p:cNvPr id="24" name="tt_478"/>
           <p:cNvSpPr/>
           <p:nvPr/>
         </p:nvSpPr>
@@ -19814,7 +19593,7 @@
       </p:sp>
       <p:sp>
         <p:nvSpPr>
-          <p:cNvPr id="25" name="R3_tk485"/>
+          <p:cNvPr id="25" name="R3_tk479"/>
           <p:cNvSpPr/>
           <p:nvPr/>
         </p:nvSpPr>
@@ -19850,7 +19629,7 @@
       </p:sp>
       <p:sp>
         <p:nvSpPr>
-          <p:cNvPr id="26" name="cd_486"/>
+          <p:cNvPr id="26" name="cd_480"/>
           <p:cNvSpPr/>
           <p:nvPr/>
         </p:nvSpPr>
@@ -19884,7 +19663,7 @@
       </p:sp>
       <p:sp>
         <p:nvSpPr>
-          <p:cNvPr id="27" name="te_487"/>
+          <p:cNvPr id="27" name="te_481"/>
           <p:cNvSpPr/>
           <p:nvPr/>
         </p:nvSpPr>
@@ -19920,7 +19699,7 @@
       </p:sp>
       <p:sp>
         <p:nvSpPr>
-          <p:cNvPr id="28" name="tt_488"/>
+          <p:cNvPr id="28" name="tt_482"/>
           <p:cNvSpPr/>
           <p:nvPr/>
         </p:nvSpPr>
@@ -19961,7 +19740,7 @@
       </p:sp>
       <p:sp>
         <p:nvSpPr>
-          <p:cNvPr id="29" name="R4_tk489"/>
+          <p:cNvPr id="29" name="R4_tk483"/>
           <p:cNvSpPr/>
           <p:nvPr/>
         </p:nvSpPr>
@@ -19997,7 +19776,7 @@
       </p:sp>
       <p:sp>
         <p:nvSpPr>
-          <p:cNvPr id="30" name="cd_490"/>
+          <p:cNvPr id="30" name="cd_484"/>
           <p:cNvSpPr/>
           <p:nvPr/>
         </p:nvSpPr>
@@ -20031,7 +19810,7 @@
       </p:sp>
       <p:sp>
         <p:nvSpPr>
-          <p:cNvPr id="31" name="te_491"/>
+          <p:cNvPr id="31" name="te_485"/>
           <p:cNvSpPr/>
           <p:nvPr/>
         </p:nvSpPr>
@@ -20067,7 +19846,7 @@
       </p:sp>
       <p:sp>
         <p:nvSpPr>
-          <p:cNvPr id="32" name="tt_492"/>
+          <p:cNvPr id="32" name="tt_486"/>
           <p:cNvSpPr/>
           <p:nvPr/>
         </p:nvSpPr>
@@ -20108,7 +19887,7 @@
       </p:sp>
       <p:sp>
         <p:nvSpPr>
-          <p:cNvPr id="33" name="R5_tk493"/>
+          <p:cNvPr id="33" name="R5_tk487"/>
           <p:cNvSpPr/>
           <p:nvPr/>
         </p:nvSpPr>
@@ -20144,7 +19923,7 @@
       </p:sp>
       <p:sp>
         <p:nvSpPr>
-          <p:cNvPr id="34" name="st_494"/>
+          <p:cNvPr id="34" name="st_488"/>
           <p:cNvSpPr/>
           <p:nvPr/>
         </p:nvSpPr>
@@ -20823,12 +20602,12 @@
           </a:effectLst>
         </p:spPr>
         <p:txBody>
-          <a:bodyPr wrap="square" lIns="101600" tIns="0" rIns="101600" bIns="0" rtlCol="0" anchor="ctr">
+          <a:bodyPr wrap="square" lIns="76200" tIns="0" rIns="76200" bIns="0" rtlCol="0" anchor="ctr">
             <a:normAutofit/>
           </a:bodyPr>
           <a:lstStyle/>
           <a:p>
-            <a:pPr indent="0" marL="0">
+            <a:pPr algn="ctr" indent="0" marL="0">
               <a:buNone/>
             </a:pPr>
             <a:r>
@@ -20839,7 +20618,7 @@
               </a:rPr>
               <a:t>🎲 </a:t>
             </a:r>
-            <a:pPr indent="0" marL="0">
+            <a:pPr algn="ctr" indent="0" marL="0">
               <a:buNone/>
             </a:pPr>
             <a:r>
@@ -20853,7 +20632,7 @@
               </a:rPr>
               <a:t>PLAY</a:t>
             </a:r>
-            <a:pPr indent="0" marL="0">
+            <a:pPr algn="ctr" indent="0" marL="0">
               <a:buNone/>
             </a:pPr>
             <a:r>
@@ -20879,7 +20658,7 @@
         </p:nvSpPr>
         <p:spPr>
           <a:xfrm>
-            <a:off x="6510528" y="493776"/>
+            <a:off x="6510528" y="548640"/>
             <a:ext cx="1901952" cy="274320"/>
           </a:xfrm>
           <a:prstGeom prst="roundRect">
@@ -20928,7 +20707,7 @@
         </p:nvSpPr>
         <p:spPr>
           <a:xfrm>
-            <a:off x="6510528" y="804672"/>
+            <a:off x="6510528" y="914400"/>
             <a:ext cx="1901952" cy="274320"/>
           </a:xfrm>
           <a:prstGeom prst="roundRect">
@@ -21063,11 +20842,11 @@
             </a:avLst>
           </a:prstGeom>
           <a:solidFill>
-            <a:srgbClr val="FFF6CC"/>
+            <a:srgbClr val="EEE8FB"/>
           </a:solidFill>
           <a:ln w="28575">
             <a:solidFill>
-              <a:srgbClr val="FFE07A"/>
+              <a:srgbClr val="CDBFF3"/>
             </a:solidFill>
             <a:prstDash val="solid"/>
           </a:ln>
@@ -21334,6 +21113,156 @@
             <a:avLst/>
           </a:prstGeom>
           <a:solidFill>
+            <a:srgbClr val="7B5CD6"/>
+          </a:solidFill>
+          <a:ln w="28575">
+            <a:solidFill>
+              <a:srgbClr val="CDBFF3"/>
+            </a:solidFill>
+          </a:ln>
+          <a:effectLst>
+            <a:outerShdw sx="100000" sy="100000" kx="0" ky="0" algn="bl" rotWithShape="0" blurRad="88900" dist="31750" dir="5400000">
+              <a:srgbClr val="1B2559">
+                <a:alpha val="15000"/>
+              </a:srgbClr>
+            </a:outerShdw>
+          </a:effectLst>
+        </p:spPr>
+        <p:txBody>
+          <a:bodyPr wrap="square" lIns="0" tIns="0" rIns="0" bIns="0" rtlCol="0" anchor="ctr"/>
+          <a:lstStyle/>
+          <a:p>
+            <a:pPr algn="ctr" indent="0" marL="0">
+              <a:buNone/>
+            </a:pPr>
+            <a:r>
+              <a:rPr lang="en-US" sz="500" dirty="0">
+                <a:solidFill>
+                  <a:srgbClr val="FFFFFF"/>
+                </a:solidFill>
+                <a:latin typeface="Arial Rounded MT Bold" pitchFamily="34" charset="0"/>
+                <a:ea typeface="Arial Rounded MT Bold" pitchFamily="34" charset="-122"/>
+                <a:cs typeface="Arial Rounded MT Bold" pitchFamily="34" charset="-120"/>
+              </a:rPr>
+              <a:t>e.g.</a:t>
+            </a:r>
+            <a:endParaRPr lang="en-US" sz="500" dirty="0"/>
+          </a:p>
+        </p:txBody>
+      </p:sp>
+      <p:sp>
+        <p:nvSpPr>
+          <p:cNvPr id="20" name="gq_34"/>
+          <p:cNvSpPr/>
+          <p:nvPr/>
+        </p:nvSpPr>
+        <p:spPr>
+          <a:xfrm>
+            <a:off x="3657600" y="1417320"/>
+            <a:ext cx="2514600" cy="477012"/>
+          </a:xfrm>
+          <a:prstGeom prst="roundRect">
+            <a:avLst>
+              <a:gd name="adj" fmla="val 19169"/>
+            </a:avLst>
+          </a:prstGeom>
+          <a:solidFill>
+            <a:srgbClr val="EEE8FB"/>
+          </a:solidFill>
+          <a:ln w="28575">
+            <a:solidFill>
+              <a:srgbClr val="CDBFF3"/>
+            </a:solidFill>
+          </a:ln>
+        </p:spPr>
+        <p:txBody>
+          <a:bodyPr wrap="square" lIns="101600" tIns="0" rIns="101600" bIns="0" rtlCol="0" anchor="ctr">
+            <a:normAutofit/>
+          </a:bodyPr>
+          <a:lstStyle/>
+          <a:p>
+            <a:pPr indent="0" marL="0">
+              <a:buNone/>
+            </a:pPr>
+            <a:r>
+              <a:rPr lang="en-US" sz="1250" dirty="0">
+                <a:solidFill>
+                  <a:srgbClr val="1B2559"/>
+                </a:solidFill>
+                <a:latin typeface="Segoe UI Semibold" pitchFamily="34" charset="0"/>
+                <a:ea typeface="Segoe UI Semibold" pitchFamily="34" charset="-122"/>
+                <a:cs typeface="Segoe UI Semibold" pitchFamily="34" charset="-120"/>
+              </a:rPr>
+              <a:t>I'll never forget ___ (see) my favourite band live.</a:t>
+            </a:r>
+            <a:endParaRPr lang="en-US" sz="1250" dirty="0"/>
+          </a:p>
+        </p:txBody>
+      </p:sp>
+      <p:sp>
+        <p:nvSpPr>
+          <p:cNvPr id="21" name="chip_35"/>
+          <p:cNvSpPr/>
+          <p:nvPr/>
+        </p:nvSpPr>
+        <p:spPr>
+          <a:xfrm>
+            <a:off x="6263640" y="1417320"/>
+            <a:ext cx="2560320" cy="477012"/>
+          </a:xfrm>
+          <a:prstGeom prst="roundRect">
+            <a:avLst>
+              <a:gd name="adj" fmla="val 19169"/>
+            </a:avLst>
+          </a:prstGeom>
+          <a:solidFill>
+            <a:srgbClr val="EEE8FB"/>
+          </a:solidFill>
+          <a:ln w="28575">
+            <a:solidFill>
+              <a:srgbClr val="CDBFF3"/>
+            </a:solidFill>
+          </a:ln>
+        </p:spPr>
+        <p:txBody>
+          <a:bodyPr wrap="square" lIns="101600" tIns="0" rIns="101600" bIns="0" rtlCol="0" anchor="ctr">
+            <a:normAutofit/>
+          </a:bodyPr>
+          <a:lstStyle/>
+          <a:p>
+            <a:pPr algn="l" indent="0" marL="0">
+              <a:buNone/>
+            </a:pPr>
+            <a:r>
+              <a:rPr lang="en-US" sz="1200" b="1" dirty="0">
+                <a:solidFill>
+                  <a:srgbClr val="1B2559"/>
+                </a:solidFill>
+                <a:latin typeface="Segoe UI Semibold" pitchFamily="34" charset="0"/>
+                <a:ea typeface="Segoe UI Semibold" pitchFamily="34" charset="-122"/>
+                <a:cs typeface="Segoe UI Semibold" pitchFamily="34" charset="-120"/>
+              </a:rPr>
+              <a:t>→ I'll never forget seeing my favourite band live.</a:t>
+            </a:r>
+            <a:endParaRPr lang="en-US" sz="1200" dirty="0"/>
+          </a:p>
+        </p:txBody>
+      </p:sp>
+      <p:sp>
+        <p:nvSpPr>
+          <p:cNvPr id="22" name="bd_36"/>
+          <p:cNvSpPr/>
+          <p:nvPr/>
+        </p:nvSpPr>
+        <p:spPr>
+          <a:xfrm>
+            <a:off x="3246120" y="2032254"/>
+            <a:ext cx="329184" cy="329184"/>
+          </a:xfrm>
+          <a:prstGeom prst="ellipse">
+            <a:avLst/>
+          </a:prstGeom>
+          <a:solidFill>
             <a:srgbClr val="E8508F"/>
           </a:solidFill>
           <a:ln w="28575">
@@ -21373,13 +21302,13 @@
       </p:sp>
       <p:sp>
         <p:nvSpPr>
-          <p:cNvPr id="20" name="gq_34"/>
-          <p:cNvSpPr/>
-          <p:nvPr/>
-        </p:nvSpPr>
-        <p:spPr>
-          <a:xfrm>
-            <a:off x="3657600" y="1417320"/>
+          <p:cNvPr id="23" name="gq_37"/>
+          <p:cNvSpPr/>
+          <p:nvPr/>
+        </p:nvSpPr>
+        <p:spPr>
+          <a:xfrm>
+            <a:off x="3657600" y="1958340"/>
             <a:ext cx="2514600" cy="477012"/>
           </a:xfrm>
           <a:prstGeom prst="roundRect">
@@ -21406,7 +21335,7 @@
               <a:buNone/>
             </a:pPr>
             <a:r>
-              <a:rPr lang="en-US" sz="1250" dirty="0">
+              <a:rPr lang="en-US" sz="1100" dirty="0">
                 <a:solidFill>
                   <a:srgbClr val="1B2559"/>
                 </a:solidFill>
@@ -21414,21 +21343,21 @@
                 <a:ea typeface="Segoe UI Semibold" pitchFamily="34" charset="-122"/>
                 <a:cs typeface="Segoe UI Semibold" pitchFamily="34" charset="-120"/>
               </a:rPr>
-              <a:t>I'll never forget ___ (see) my favourite band live.</a:t>
-            </a:r>
-            <a:endParaRPr lang="en-US" sz="1250" dirty="0"/>
-          </a:p>
-        </p:txBody>
-      </p:sp>
-      <p:sp>
-        <p:nvSpPr>
-          <p:cNvPr id="21" name="R1_chip35"/>
-          <p:cNvSpPr/>
-          <p:nvPr/>
-        </p:nvSpPr>
-        <p:spPr>
-          <a:xfrm>
-            <a:off x="6263640" y="1417320"/>
+              <a:t>Remember ___ (charge) your phone before the concert!</a:t>
+            </a:r>
+            <a:endParaRPr lang="en-US" sz="1100" dirty="0"/>
+          </a:p>
+        </p:txBody>
+      </p:sp>
+      <p:sp>
+        <p:nvSpPr>
+          <p:cNvPr id="24" name="R1_chip38"/>
+          <p:cNvSpPr/>
+          <p:nvPr/>
+        </p:nvSpPr>
+        <p:spPr>
+          <a:xfrm>
+            <a:off x="6263640" y="1958340"/>
             <a:ext cx="2560320" cy="477012"/>
           </a:xfrm>
           <a:prstGeom prst="roundRect">
@@ -21463,7 +21392,7 @@
                 <a:ea typeface="Segoe UI Semibold" pitchFamily="34" charset="-122"/>
                 <a:cs typeface="Segoe UI Semibold" pitchFamily="34" charset="-120"/>
               </a:rPr>
-              <a:t>→ I'll never forget seeing my favourite band live.</a:t>
+              <a:t>→ Remember to charge your phone before the concert!</a:t>
             </a:r>
             <a:endParaRPr lang="en-US" sz="1200" dirty="0"/>
           </a:p>
@@ -21471,13 +21400,13 @@
       </p:sp>
       <p:sp>
         <p:nvSpPr>
-          <p:cNvPr id="22" name="bd_36"/>
-          <p:cNvSpPr/>
-          <p:nvPr/>
-        </p:nvSpPr>
-        <p:spPr>
-          <a:xfrm>
-            <a:off x="3246120" y="2032254"/>
+          <p:cNvPr id="25" name="bd_39"/>
+          <p:cNvSpPr/>
+          <p:nvPr/>
+        </p:nvSpPr>
+        <p:spPr>
+          <a:xfrm>
+            <a:off x="3246120" y="2573274"/>
             <a:ext cx="329184" cy="329184"/>
           </a:xfrm>
           <a:prstGeom prst="ellipse">
@@ -21523,13 +21452,13 @@
       </p:sp>
       <p:sp>
         <p:nvSpPr>
-          <p:cNvPr id="23" name="gq_37"/>
-          <p:cNvSpPr/>
-          <p:nvPr/>
-        </p:nvSpPr>
-        <p:spPr>
-          <a:xfrm>
-            <a:off x="3657600" y="1958340"/>
+          <p:cNvPr id="26" name="gq_40"/>
+          <p:cNvSpPr/>
+          <p:nvPr/>
+        </p:nvSpPr>
+        <p:spPr>
+          <a:xfrm>
+            <a:off x="3657600" y="2499360"/>
             <a:ext cx="2514600" cy="477012"/>
           </a:xfrm>
           <a:prstGeom prst="roundRect">
@@ -21556,7 +21485,7 @@
               <a:buNone/>
             </a:pPr>
             <a:r>
-              <a:rPr lang="en-US" sz="1100" dirty="0">
+              <a:rPr lang="en-US" sz="1250" dirty="0">
                 <a:solidFill>
                   <a:srgbClr val="1B2559"/>
                 </a:solidFill>
@@ -21564,21 +21493,21 @@
                 <a:ea typeface="Segoe UI Semibold" pitchFamily="34" charset="-122"/>
                 <a:cs typeface="Segoe UI Semibold" pitchFamily="34" charset="-120"/>
               </a:rPr>
-              <a:t>Remember ___ (charge) your phone before the concert!</a:t>
-            </a:r>
-            <a:endParaRPr lang="en-US" sz="1100" dirty="0"/>
-          </a:p>
-        </p:txBody>
-      </p:sp>
-      <p:sp>
-        <p:nvSpPr>
-          <p:cNvPr id="24" name="R2_chip38"/>
-          <p:cNvSpPr/>
-          <p:nvPr/>
-        </p:nvSpPr>
-        <p:spPr>
-          <a:xfrm>
-            <a:off x="6263640" y="1958340"/>
+              <a:t>Can't sleep? Try ___ (listen) to calm music.</a:t>
+            </a:r>
+            <a:endParaRPr lang="en-US" sz="1250" dirty="0"/>
+          </a:p>
+        </p:txBody>
+      </p:sp>
+      <p:sp>
+        <p:nvSpPr>
+          <p:cNvPr id="27" name="R2_chip41"/>
+          <p:cNvSpPr/>
+          <p:nvPr/>
+        </p:nvSpPr>
+        <p:spPr>
+          <a:xfrm>
+            <a:off x="6263640" y="2499360"/>
             <a:ext cx="2560320" cy="477012"/>
           </a:xfrm>
           <a:prstGeom prst="roundRect">
@@ -21613,7 +21542,7 @@
                 <a:ea typeface="Segoe UI Semibold" pitchFamily="34" charset="-122"/>
                 <a:cs typeface="Segoe UI Semibold" pitchFamily="34" charset="-120"/>
               </a:rPr>
-              <a:t>→ Remember to charge your phone before the concert!</a:t>
+              <a:t>→ Can't sleep? Try listening to calm music.</a:t>
             </a:r>
             <a:endParaRPr lang="en-US" sz="1200" dirty="0"/>
           </a:p>
@@ -21621,13 +21550,13 @@
       </p:sp>
       <p:sp>
         <p:nvSpPr>
-          <p:cNvPr id="25" name="bd_39"/>
-          <p:cNvSpPr/>
-          <p:nvPr/>
-        </p:nvSpPr>
-        <p:spPr>
-          <a:xfrm>
-            <a:off x="3246120" y="2573274"/>
+          <p:cNvPr id="28" name="bd_42"/>
+          <p:cNvSpPr/>
+          <p:nvPr/>
+        </p:nvSpPr>
+        <p:spPr>
+          <a:xfrm>
+            <a:off x="3246120" y="3114294"/>
             <a:ext cx="329184" cy="329184"/>
           </a:xfrm>
           <a:prstGeom prst="ellipse">
@@ -21673,13 +21602,13 @@
       </p:sp>
       <p:sp>
         <p:nvSpPr>
-          <p:cNvPr id="26" name="gq_40"/>
-          <p:cNvSpPr/>
-          <p:nvPr/>
-        </p:nvSpPr>
-        <p:spPr>
-          <a:xfrm>
-            <a:off x="3657600" y="2499360"/>
+          <p:cNvPr id="29" name="gq_43"/>
+          <p:cNvSpPr/>
+          <p:nvPr/>
+        </p:nvSpPr>
+        <p:spPr>
+          <a:xfrm>
+            <a:off x="3657600" y="3040380"/>
             <a:ext cx="2514600" cy="477012"/>
           </a:xfrm>
           <a:prstGeom prst="roundRect">
@@ -21714,7 +21643,7 @@
                 <a:ea typeface="Segoe UI Semibold" pitchFamily="34" charset="-122"/>
                 <a:cs typeface="Segoe UI Semibold" pitchFamily="34" charset="-120"/>
               </a:rPr>
-              <a:t>Can't sleep? Try ___ (listen) to calm music.</a:t>
+              <a:t>The band stopped ___ (play) because of the rain.</a:t>
             </a:r>
             <a:endParaRPr lang="en-US" sz="1250" dirty="0"/>
           </a:p>
@@ -21722,13 +21651,13 @@
       </p:sp>
       <p:sp>
         <p:nvSpPr>
-          <p:cNvPr id="27" name="R3_chip41"/>
-          <p:cNvSpPr/>
-          <p:nvPr/>
-        </p:nvSpPr>
-        <p:spPr>
-          <a:xfrm>
-            <a:off x="6263640" y="2499360"/>
+          <p:cNvPr id="30" name="R3_chip44"/>
+          <p:cNvSpPr/>
+          <p:nvPr/>
+        </p:nvSpPr>
+        <p:spPr>
+          <a:xfrm>
+            <a:off x="6263640" y="3040380"/>
             <a:ext cx="2560320" cy="477012"/>
           </a:xfrm>
           <a:prstGeom prst="roundRect">
@@ -21763,7 +21692,7 @@
                 <a:ea typeface="Segoe UI Semibold" pitchFamily="34" charset="-122"/>
                 <a:cs typeface="Segoe UI Semibold" pitchFamily="34" charset="-120"/>
               </a:rPr>
-              <a:t>→ Can't sleep? Try listening to calm music.</a:t>
+              <a:t>→ The band stopped playing because of the rain.</a:t>
             </a:r>
             <a:endParaRPr lang="en-US" sz="1200" dirty="0"/>
           </a:p>
@@ -21771,13 +21700,13 @@
       </p:sp>
       <p:sp>
         <p:nvSpPr>
-          <p:cNvPr id="28" name="bd_42"/>
-          <p:cNvSpPr/>
-          <p:nvPr/>
-        </p:nvSpPr>
-        <p:spPr>
-          <a:xfrm>
-            <a:off x="3246120" y="3114294"/>
+          <p:cNvPr id="31" name="bd_45"/>
+          <p:cNvSpPr/>
+          <p:nvPr/>
+        </p:nvSpPr>
+        <p:spPr>
+          <a:xfrm>
+            <a:off x="3246120" y="3655314"/>
             <a:ext cx="329184" cy="329184"/>
           </a:xfrm>
           <a:prstGeom prst="ellipse">
@@ -21823,13 +21752,13 @@
       </p:sp>
       <p:sp>
         <p:nvSpPr>
-          <p:cNvPr id="29" name="gq_43"/>
-          <p:cNvSpPr/>
-          <p:nvPr/>
-        </p:nvSpPr>
-        <p:spPr>
-          <a:xfrm>
-            <a:off x="3657600" y="3040380"/>
+          <p:cNvPr id="32" name="gq_46"/>
+          <p:cNvSpPr/>
+          <p:nvPr/>
+        </p:nvSpPr>
+        <p:spPr>
+          <a:xfrm>
+            <a:off x="3657600" y="3581400"/>
             <a:ext cx="2514600" cy="477012"/>
           </a:xfrm>
           <a:prstGeom prst="roundRect">
@@ -21864,7 +21793,7 @@
                 <a:ea typeface="Segoe UI Semibold" pitchFamily="34" charset="-122"/>
                 <a:cs typeface="Segoe UI Semibold" pitchFamily="34" charset="-120"/>
               </a:rPr>
-              <a:t>The band stopped ___ (play) because of the rain.</a:t>
+              <a:t>On the way, we stopped ___ (buy) a drink.</a:t>
             </a:r>
             <a:endParaRPr lang="en-US" sz="1250" dirty="0"/>
           </a:p>
@@ -21872,13 +21801,13 @@
       </p:sp>
       <p:sp>
         <p:nvSpPr>
-          <p:cNvPr id="30" name="R4_chip44"/>
-          <p:cNvSpPr/>
-          <p:nvPr/>
-        </p:nvSpPr>
-        <p:spPr>
-          <a:xfrm>
-            <a:off x="6263640" y="3040380"/>
+          <p:cNvPr id="33" name="R4_chip47"/>
+          <p:cNvSpPr/>
+          <p:nvPr/>
+        </p:nvSpPr>
+        <p:spPr>
+          <a:xfrm>
+            <a:off x="6263640" y="3581400"/>
             <a:ext cx="2560320" cy="477012"/>
           </a:xfrm>
           <a:prstGeom prst="roundRect">
@@ -21913,7 +21842,7 @@
                 <a:ea typeface="Segoe UI Semibold" pitchFamily="34" charset="-122"/>
                 <a:cs typeface="Segoe UI Semibold" pitchFamily="34" charset="-120"/>
               </a:rPr>
-              <a:t>→ The band stopped playing because of the rain.</a:t>
+              <a:t>→ On the way, we stopped to buy a drink.</a:t>
             </a:r>
             <a:endParaRPr lang="en-US" sz="1200" dirty="0"/>
           </a:p>
@@ -21921,13 +21850,13 @@
       </p:sp>
       <p:sp>
         <p:nvSpPr>
-          <p:cNvPr id="31" name="bd_45"/>
-          <p:cNvSpPr/>
-          <p:nvPr/>
-        </p:nvSpPr>
-        <p:spPr>
-          <a:xfrm>
-            <a:off x="3246120" y="3655314"/>
+          <p:cNvPr id="34" name="bd_48"/>
+          <p:cNvSpPr/>
+          <p:nvPr/>
+        </p:nvSpPr>
+        <p:spPr>
+          <a:xfrm>
+            <a:off x="3246120" y="4196334"/>
             <a:ext cx="329184" cy="329184"/>
           </a:xfrm>
           <a:prstGeom prst="ellipse">
@@ -21973,13 +21902,13 @@
       </p:sp>
       <p:sp>
         <p:nvSpPr>
-          <p:cNvPr id="32" name="gq_46"/>
-          <p:cNvSpPr/>
-          <p:nvPr/>
-        </p:nvSpPr>
-        <p:spPr>
-          <a:xfrm>
-            <a:off x="3657600" y="3581400"/>
+          <p:cNvPr id="35" name="gq_49"/>
+          <p:cNvSpPr/>
+          <p:nvPr/>
+        </p:nvSpPr>
+        <p:spPr>
+          <a:xfrm>
+            <a:off x="3657600" y="4122420"/>
             <a:ext cx="2514600" cy="477012"/>
           </a:xfrm>
           <a:prstGeom prst="roundRect">
@@ -22014,7 +21943,7 @@
                 <a:ea typeface="Segoe UI Semibold" pitchFamily="34" charset="-122"/>
                 <a:cs typeface="Segoe UI Semibold" pitchFamily="34" charset="-120"/>
               </a:rPr>
-              <a:t>On the way, we stopped ___ (buy) a drink.</a:t>
+              <a:t>My headphones need ___ (fix).</a:t>
             </a:r>
             <a:endParaRPr lang="en-US" sz="1250" dirty="0"/>
           </a:p>
@@ -22022,157 +21951,7 @@
       </p:sp>
       <p:sp>
         <p:nvSpPr>
-          <p:cNvPr id="33" name="R5_chip47"/>
-          <p:cNvSpPr/>
-          <p:nvPr/>
-        </p:nvSpPr>
-        <p:spPr>
-          <a:xfrm>
-            <a:off x="6263640" y="3581400"/>
-            <a:ext cx="2560320" cy="477012"/>
-          </a:xfrm>
-          <a:prstGeom prst="roundRect">
-            <a:avLst>
-              <a:gd name="adj" fmla="val 19169"/>
-            </a:avLst>
-          </a:prstGeom>
-          <a:solidFill>
-            <a:srgbClr val="FFE3EE"/>
-          </a:solidFill>
-          <a:ln w="28575">
-            <a:solidFill>
-              <a:srgbClr val="F7A6C4"/>
-            </a:solidFill>
-          </a:ln>
-        </p:spPr>
-        <p:txBody>
-          <a:bodyPr wrap="square" lIns="101600" tIns="0" rIns="101600" bIns="0" rtlCol="0" anchor="ctr">
-            <a:normAutofit/>
-          </a:bodyPr>
-          <a:lstStyle/>
-          <a:p>
-            <a:pPr algn="l" indent="0" marL="0">
-              <a:buNone/>
-            </a:pPr>
-            <a:r>
-              <a:rPr lang="en-US" sz="1200" b="1" dirty="0">
-                <a:solidFill>
-                  <a:srgbClr val="1B2559"/>
-                </a:solidFill>
-                <a:latin typeface="Segoe UI Semibold" pitchFamily="34" charset="0"/>
-                <a:ea typeface="Segoe UI Semibold" pitchFamily="34" charset="-122"/>
-                <a:cs typeface="Segoe UI Semibold" pitchFamily="34" charset="-120"/>
-              </a:rPr>
-              <a:t>→ On the way, we stopped to buy a drink.</a:t>
-            </a:r>
-            <a:endParaRPr lang="en-US" sz="1200" dirty="0"/>
-          </a:p>
-        </p:txBody>
-      </p:sp>
-      <p:sp>
-        <p:nvSpPr>
-          <p:cNvPr id="34" name="bd_48"/>
-          <p:cNvSpPr/>
-          <p:nvPr/>
-        </p:nvSpPr>
-        <p:spPr>
-          <a:xfrm>
-            <a:off x="3246120" y="4196334"/>
-            <a:ext cx="329184" cy="329184"/>
-          </a:xfrm>
-          <a:prstGeom prst="ellipse">
-            <a:avLst/>
-          </a:prstGeom>
-          <a:solidFill>
-            <a:srgbClr val="2F8DE4"/>
-          </a:solidFill>
-          <a:ln w="28575">
-            <a:solidFill>
-              <a:srgbClr val="A9D3F5"/>
-            </a:solidFill>
-          </a:ln>
-          <a:effectLst>
-            <a:outerShdw sx="100000" sy="100000" kx="0" ky="0" algn="bl" rotWithShape="0" blurRad="88900" dist="31750" dir="5400000">
-              <a:srgbClr val="1B2559">
-                <a:alpha val="15000"/>
-              </a:srgbClr>
-            </a:outerShdw>
-          </a:effectLst>
-        </p:spPr>
-        <p:txBody>
-          <a:bodyPr wrap="square" lIns="0" tIns="0" rIns="0" bIns="0" rtlCol="0" anchor="ctr"/>
-          <a:lstStyle/>
-          <a:p>
-            <a:pPr algn="ctr" indent="0" marL="0">
-              <a:buNone/>
-            </a:pPr>
-            <a:r>
-              <a:rPr lang="en-US" sz="1100" dirty="0">
-                <a:solidFill>
-                  <a:srgbClr val="FFFFFF"/>
-                </a:solidFill>
-                <a:latin typeface="Arial Rounded MT Bold" pitchFamily="34" charset="0"/>
-                <a:ea typeface="Arial Rounded MT Bold" pitchFamily="34" charset="-122"/>
-                <a:cs typeface="Arial Rounded MT Bold" pitchFamily="34" charset="-120"/>
-              </a:rPr>
-              <a:t>6</a:t>
-            </a:r>
-            <a:endParaRPr lang="en-US" sz="1100" dirty="0"/>
-          </a:p>
-        </p:txBody>
-      </p:sp>
-      <p:sp>
-        <p:nvSpPr>
-          <p:cNvPr id="35" name="gq_49"/>
-          <p:cNvSpPr/>
-          <p:nvPr/>
-        </p:nvSpPr>
-        <p:spPr>
-          <a:xfrm>
-            <a:off x="3657600" y="4122420"/>
-            <a:ext cx="2514600" cy="477012"/>
-          </a:xfrm>
-          <a:prstGeom prst="roundRect">
-            <a:avLst>
-              <a:gd name="adj" fmla="val 19169"/>
-            </a:avLst>
-          </a:prstGeom>
-          <a:solidFill>
-            <a:srgbClr val="FFFFFF"/>
-          </a:solidFill>
-          <a:ln w="28575">
-            <a:solidFill>
-              <a:srgbClr val="A9D3F5"/>
-            </a:solidFill>
-          </a:ln>
-        </p:spPr>
-        <p:txBody>
-          <a:bodyPr wrap="square" lIns="101600" tIns="0" rIns="101600" bIns="0" rtlCol="0" anchor="ctr">
-            <a:normAutofit/>
-          </a:bodyPr>
-          <a:lstStyle/>
-          <a:p>
-            <a:pPr indent="0" marL="0">
-              <a:buNone/>
-            </a:pPr>
-            <a:r>
-              <a:rPr lang="en-US" sz="1250" dirty="0">
-                <a:solidFill>
-                  <a:srgbClr val="1B2559"/>
-                </a:solidFill>
-                <a:latin typeface="Segoe UI Semibold" pitchFamily="34" charset="0"/>
-                <a:ea typeface="Segoe UI Semibold" pitchFamily="34" charset="-122"/>
-                <a:cs typeface="Segoe UI Semibold" pitchFamily="34" charset="-120"/>
-              </a:rPr>
-              <a:t>My headphones need ___ (fix).</a:t>
-            </a:r>
-            <a:endParaRPr lang="en-US" sz="1250" dirty="0"/>
-          </a:p>
-        </p:txBody>
-      </p:sp>
-      <p:sp>
-        <p:nvSpPr>
-          <p:cNvPr id="36" name="R6_chip50"/>
+          <p:cNvPr id="36" name="R5_chip50"/>
           <p:cNvSpPr/>
           <p:nvPr/>
         </p:nvSpPr>
@@ -22261,7 +22040,7 @@
                                           </p:stCondLst>
                                         </p:cTn>
                                         <p:tgtEl>
-                                          <p:spTgt spid="21"/>
+                                          <p:spTgt spid="24"/>
                                         </p:tgtEl>
                                         <p:attrNameLst>
                                           <p:attrName>style.visibility</p:attrName>
@@ -22275,7 +22054,7 @@
                                       <p:cBhvr>
                                         <p:cTn id="7" dur="400"/>
                                         <p:tgtEl>
-                                          <p:spTgt spid="21"/>
+                                          <p:spTgt spid="24"/>
                                         </p:tgtEl>
                                       </p:cBhvr>
                                     </p:animEffect>
@@ -22314,7 +22093,7 @@
                                           </p:stCondLst>
                                         </p:cTn>
                                         <p:tgtEl>
-                                          <p:spTgt spid="24"/>
+                                          <p:spTgt spid="27"/>
                                         </p:tgtEl>
                                         <p:attrNameLst>
                                           <p:attrName>style.visibility</p:attrName>
@@ -22328,7 +22107,7 @@
                                       <p:cBhvr>
                                         <p:cTn id="12" dur="400"/>
                                         <p:tgtEl>
-                                          <p:spTgt spid="24"/>
+                                          <p:spTgt spid="27"/>
                                         </p:tgtEl>
                                       </p:cBhvr>
                                     </p:animEffect>
@@ -22367,7 +22146,7 @@
                                           </p:stCondLst>
                                         </p:cTn>
                                         <p:tgtEl>
-                                          <p:spTgt spid="27"/>
+                                          <p:spTgt spid="30"/>
                                         </p:tgtEl>
                                         <p:attrNameLst>
                                           <p:attrName>style.visibility</p:attrName>
@@ -22381,7 +22160,7 @@
                                       <p:cBhvr>
                                         <p:cTn id="17" dur="400"/>
                                         <p:tgtEl>
-                                          <p:spTgt spid="27"/>
+                                          <p:spTgt spid="30"/>
                                         </p:tgtEl>
                                       </p:cBhvr>
                                     </p:animEffect>
@@ -22420,7 +22199,7 @@
                                           </p:stCondLst>
                                         </p:cTn>
                                         <p:tgtEl>
-                                          <p:spTgt spid="30"/>
+                                          <p:spTgt spid="33"/>
                                         </p:tgtEl>
                                         <p:attrNameLst>
                                           <p:attrName>style.visibility</p:attrName>
@@ -22434,7 +22213,7 @@
                                       <p:cBhvr>
                                         <p:cTn id="22" dur="400"/>
                                         <p:tgtEl>
-                                          <p:spTgt spid="30"/>
+                                          <p:spTgt spid="33"/>
                                         </p:tgtEl>
                                       </p:cBhvr>
                                     </p:animEffect>
@@ -22473,7 +22252,7 @@
                                           </p:stCondLst>
                                         </p:cTn>
                                         <p:tgtEl>
-                                          <p:spTgt spid="33"/>
+                                          <p:spTgt spid="36"/>
                                         </p:tgtEl>
                                         <p:attrNameLst>
                                           <p:attrName>style.visibility</p:attrName>
@@ -22486,59 +22265,6 @@
                                     <p:animEffect transition="in" filter="fade">
                                       <p:cBhvr>
                                         <p:cTn id="27" dur="400"/>
-                                        <p:tgtEl>
-                                          <p:spTgt spid="33"/>
-                                        </p:tgtEl>
-                                      </p:cBhvr>
-                                    </p:animEffect>
-                                  </p:childTnLst>
-                                </p:cTn>
-                              </p:par>
-                            </p:childTnLst>
-                          </p:cTn>
-                        </p:par>
-                      </p:childTnLst>
-                    </p:cTn>
-                  </p:par>
-                  <p:par>
-                    <p:cTn id="28" fill="hold">
-                      <p:stCondLst>
-                        <p:cond delay="indefinite"/>
-                      </p:stCondLst>
-                      <p:childTnLst>
-                        <p:par>
-                          <p:cTn id="29" fill="hold">
-                            <p:stCondLst>
-                              <p:cond delay="0"/>
-                            </p:stCondLst>
-                            <p:childTnLst>
-                              <p:par>
-                                <p:cTn id="30" presetID="10" presetClass="entr" presetSubtype="0" fill="hold" nodeType="clickEffect">
-                                  <p:stCondLst>
-                                    <p:cond delay="0"/>
-                                  </p:stCondLst>
-                                  <p:childTnLst>
-                                    <p:set>
-                                      <p:cBhvr>
-                                        <p:cTn id="31" dur="1" fill="hold">
-                                          <p:stCondLst>
-                                            <p:cond delay="0"/>
-                                          </p:stCondLst>
-                                        </p:cTn>
-                                        <p:tgtEl>
-                                          <p:spTgt spid="36"/>
-                                        </p:tgtEl>
-                                        <p:attrNameLst>
-                                          <p:attrName>style.visibility</p:attrName>
-                                        </p:attrNameLst>
-                                      </p:cBhvr>
-                                      <p:to>
-                                        <p:strVal val="visible"/>
-                                      </p:to>
-                                    </p:set>
-                                    <p:animEffect transition="in" filter="fade">
-                                      <p:cBhvr>
-                                        <p:cTn id="32" dur="400"/>
                                         <p:tgtEl>
                                           <p:spTgt spid="36"/>
                                         </p:tgtEl>
@@ -22611,7 +22337,7 @@
       </p:grpSpPr>
       <p:sp>
         <p:nvSpPr>
-          <p:cNvPr id="3" name="bd_495"/>
+          <p:cNvPr id="3" name="bd_489"/>
           <p:cNvSpPr/>
           <p:nvPr/>
         </p:nvSpPr>
@@ -22663,7 +22389,7 @@
       </p:sp>
       <p:pic>
         <p:nvPicPr>
-          <p:cNvPr id="4" name="brY_496" descr="/home/claude/lls-course/v2/assets/brush-yellow.png">    </p:cNvPr>
+          <p:cNvPr id="4" name="brY_490" descr="/home/claude/lls-course/v2/assets/brush-yellow.png">    </p:cNvPr>
           <p:cNvPicPr>
             <a:picLocks noChangeAspect="1"/>
           </p:cNvPicPr>
@@ -22687,7 +22413,7 @@
       </p:pic>
       <p:sp>
         <p:nvSpPr>
-          <p:cNvPr id="5" name="title_497"/>
+          <p:cNvPr id="5" name="title_491"/>
           <p:cNvSpPr/>
           <p:nvPr/>
         </p:nvSpPr>
@@ -22728,7 +22454,7 @@
       </p:sp>
       <p:pic>
         <p:nvPicPr>
-          <p:cNvPr id="6" name="brP_498" descr="/home/claude/lls-course/v2/assets/brush-pink.png">    </p:cNvPr>
+          <p:cNvPr id="6" name="brP_492" descr="/home/claude/lls-course/v2/assets/brush-pink.png">    </p:cNvPr>
           <p:cNvPicPr>
             <a:picLocks noChangeAspect="1"/>
           </p:cNvPicPr>
@@ -22752,7 +22478,7 @@
       </p:pic>
       <p:sp>
         <p:nvSpPr>
-          <p:cNvPr id="7" name="ins_499"/>
+          <p:cNvPr id="7" name="ins_493"/>
           <p:cNvSpPr/>
           <p:nvPr/>
         </p:nvSpPr>
@@ -22793,7 +22519,7 @@
       </p:sp>
       <p:sp>
         <p:nvSpPr>
-          <p:cNvPr id="8" name="insIT_500"/>
+          <p:cNvPr id="8" name="insIT_494"/>
           <p:cNvSpPr/>
           <p:nvPr/>
         </p:nvSpPr>
@@ -22834,7 +22560,7 @@
       </p:sp>
       <p:sp>
         <p:nvSpPr>
-          <p:cNvPr id="9" name="cmd_501"/>
+          <p:cNvPr id="9" name="cmd_495"/>
           <p:cNvSpPr/>
           <p:nvPr/>
         </p:nvSpPr>
@@ -22865,12 +22591,12 @@
           </a:effectLst>
         </p:spPr>
         <p:txBody>
-          <a:bodyPr wrap="square" lIns="101600" tIns="0" rIns="101600" bIns="0" rtlCol="0" anchor="ctr">
+          <a:bodyPr wrap="square" lIns="76200" tIns="0" rIns="76200" bIns="0" rtlCol="0" anchor="ctr">
             <a:normAutofit/>
           </a:bodyPr>
           <a:lstStyle/>
           <a:p>
-            <a:pPr indent="0" marL="0">
+            <a:pPr algn="ctr" indent="0" marL="0">
               <a:buNone/>
             </a:pPr>
             <a:r>
@@ -22881,7 +22607,7 @@
               </a:rPr>
               <a:t>💬 </a:t>
             </a:r>
-            <a:pPr indent="0" marL="0">
+            <a:pPr algn="ctr" indent="0" marL="0">
               <a:buNone/>
             </a:pPr>
             <a:r>
@@ -22895,7 +22621,7 @@
               </a:rPr>
               <a:t>TALK</a:t>
             </a:r>
-            <a:pPr indent="0" marL="0">
+            <a:pPr algn="ctr" indent="0" marL="0">
               <a:buNone/>
             </a:pPr>
             <a:r>
@@ -22915,13 +22641,13 @@
       </p:sp>
       <p:sp>
         <p:nvSpPr>
-          <p:cNvPr id="10" name="meta_502"/>
-          <p:cNvSpPr/>
-          <p:nvPr/>
-        </p:nvSpPr>
-        <p:spPr>
-          <a:xfrm>
-            <a:off x="6510528" y="493776"/>
+          <p:cNvPr id="10" name="meta_496"/>
+          <p:cNvSpPr/>
+          <p:nvPr/>
+        </p:nvSpPr>
+        <p:spPr>
+          <a:xfrm>
+            <a:off x="6510528" y="548640"/>
             <a:ext cx="1901952" cy="274320"/>
           </a:xfrm>
           <a:prstGeom prst="roundRect">
@@ -22964,13 +22690,13 @@
       </p:sp>
       <p:sp>
         <p:nvSpPr>
-          <p:cNvPr id="11" name="tag_503"/>
-          <p:cNvSpPr/>
-          <p:nvPr/>
-        </p:nvSpPr>
-        <p:spPr>
-          <a:xfrm>
-            <a:off x="6510528" y="804672"/>
+          <p:cNvPr id="11" name="tag_497"/>
+          <p:cNvSpPr/>
+          <p:nvPr/>
+        </p:nvSpPr>
+        <p:spPr>
+          <a:xfrm>
+            <a:off x="6510528" y="914400"/>
             <a:ext cx="1901952" cy="274320"/>
           </a:xfrm>
           <a:prstGeom prst="roundRect">
@@ -23027,7 +22753,7 @@
       </p:sp>
       <p:pic>
         <p:nvPicPr>
-          <p:cNvPr id="12" name="logo_504" descr="/home/claude/lls-course/v2/img/logo.png">    </p:cNvPr>
+          <p:cNvPr id="12" name="logo_498" descr="/home/claude/lls-course/v2/img/logo.png">    </p:cNvPr>
           <p:cNvPicPr>
             <a:picLocks noChangeAspect="1"/>
           </p:cNvPicPr>
@@ -23051,7 +22777,7 @@
       </p:pic>
       <p:sp>
         <p:nvSpPr>
-          <p:cNvPr id="13" name="foot_505"/>
+          <p:cNvPr id="13" name="foot_499"/>
           <p:cNvSpPr/>
           <p:nvPr/>
         </p:nvSpPr>
@@ -23090,7 +22816,7 @@
       </p:sp>
       <p:sp>
         <p:nvSpPr>
-          <p:cNvPr id="14" name="st_506"/>
+          <p:cNvPr id="14" name="st_500"/>
           <p:cNvSpPr/>
           <p:nvPr/>
         </p:nvSpPr>
@@ -23144,7 +22870,7 @@
       </p:sp>
       <p:sp>
         <p:nvSpPr>
-          <p:cNvPr id="15" name="cd_507"/>
+          <p:cNvPr id="15" name="cd_501"/>
           <p:cNvSpPr/>
           <p:nvPr/>
         </p:nvSpPr>
@@ -23178,7 +22904,7 @@
       </p:sp>
       <p:sp>
         <p:nvSpPr>
-          <p:cNvPr id="16" name="ii_508"/>
+          <p:cNvPr id="16" name="ii_502"/>
           <p:cNvSpPr/>
           <p:nvPr/>
         </p:nvSpPr>
@@ -23214,7 +22940,7 @@
       </p:sp>
       <p:sp>
         <p:nvSpPr>
-          <p:cNvPr id="17" name="ih_509"/>
+          <p:cNvPr id="17" name="ih_503"/>
           <p:cNvSpPr/>
           <p:nvPr/>
         </p:nvSpPr>
@@ -23253,7 +22979,7 @@
       </p:sp>
       <p:sp>
         <p:nvSpPr>
-          <p:cNvPr id="18" name="il_510"/>
+          <p:cNvPr id="18" name="il_504"/>
           <p:cNvSpPr/>
           <p:nvPr/>
         </p:nvSpPr>
@@ -23370,7 +23096,7 @@
       </p:sp>
       <p:sp>
         <p:nvSpPr>
-          <p:cNvPr id="19" name="R1_qb511"/>
+          <p:cNvPr id="19" name="R1_qb505"/>
           <p:cNvSpPr/>
           <p:nvPr/>
         </p:nvSpPr>
@@ -23422,7 +23148,7 @@
       </p:sp>
       <p:sp>
         <p:nvSpPr>
-          <p:cNvPr id="20" name="R1_sq512"/>
+          <p:cNvPr id="20" name="R1_sq506"/>
           <p:cNvSpPr/>
           <p:nvPr/>
         </p:nvSpPr>
@@ -23495,7 +23221,7 @@
       </p:sp>
       <p:sp>
         <p:nvSpPr>
-          <p:cNvPr id="21" name="R2_qb513"/>
+          <p:cNvPr id="21" name="R2_qb507"/>
           <p:cNvSpPr/>
           <p:nvPr/>
         </p:nvSpPr>
@@ -23547,7 +23273,7 @@
       </p:sp>
       <p:sp>
         <p:nvSpPr>
-          <p:cNvPr id="22" name="R2_sq514"/>
+          <p:cNvPr id="22" name="R2_sq508"/>
           <p:cNvSpPr/>
           <p:nvPr/>
         </p:nvSpPr>
@@ -23620,7 +23346,7 @@
       </p:sp>
       <p:sp>
         <p:nvSpPr>
-          <p:cNvPr id="23" name="R3_qb515"/>
+          <p:cNvPr id="23" name="R3_qb509"/>
           <p:cNvSpPr/>
           <p:nvPr/>
         </p:nvSpPr>
@@ -23672,7 +23398,7 @@
       </p:sp>
       <p:sp>
         <p:nvSpPr>
-          <p:cNvPr id="24" name="R3_sq516"/>
+          <p:cNvPr id="24" name="R3_sq510"/>
           <p:cNvSpPr/>
           <p:nvPr/>
         </p:nvSpPr>
@@ -23745,7 +23471,7 @@
       </p:sp>
       <p:sp>
         <p:nvSpPr>
-          <p:cNvPr id="25" name="R4_qb517"/>
+          <p:cNvPr id="25" name="R4_qb511"/>
           <p:cNvSpPr/>
           <p:nvPr/>
         </p:nvSpPr>
@@ -23797,7 +23523,7 @@
       </p:sp>
       <p:sp>
         <p:nvSpPr>
-          <p:cNvPr id="26" name="R4_sq518"/>
+          <p:cNvPr id="26" name="R4_sq512"/>
           <p:cNvSpPr/>
           <p:nvPr/>
         </p:nvSpPr>
@@ -23870,7 +23596,7 @@
       </p:sp>
       <p:sp>
         <p:nvSpPr>
-          <p:cNvPr id="27" name="R5_qb519"/>
+          <p:cNvPr id="27" name="R5_qb513"/>
           <p:cNvSpPr/>
           <p:nvPr/>
         </p:nvSpPr>
@@ -23922,7 +23648,7 @@
       </p:sp>
       <p:sp>
         <p:nvSpPr>
-          <p:cNvPr id="28" name="R5_sq520"/>
+          <p:cNvPr id="28" name="R5_sq514"/>
           <p:cNvSpPr/>
           <p:nvPr/>
         </p:nvSpPr>
@@ -24761,12 +24487,12 @@
           </a:effectLst>
         </p:spPr>
         <p:txBody>
-          <a:bodyPr wrap="square" lIns="101600" tIns="0" rIns="101600" bIns="0" rtlCol="0" anchor="ctr">
+          <a:bodyPr wrap="square" lIns="76200" tIns="0" rIns="76200" bIns="0" rtlCol="0" anchor="ctr">
             <a:normAutofit/>
           </a:bodyPr>
           <a:lstStyle/>
           <a:p>
-            <a:pPr indent="0" marL="0">
+            <a:pPr algn="ctr" indent="0" marL="0">
               <a:buNone/>
             </a:pPr>
             <a:r>
@@ -24777,7 +24503,7 @@
               </a:rPr>
               <a:t>💬 </a:t>
             </a:r>
-            <a:pPr indent="0" marL="0">
+            <a:pPr algn="ctr" indent="0" marL="0">
               <a:buNone/>
             </a:pPr>
             <a:r>
@@ -24791,7 +24517,7 @@
               </a:rPr>
               <a:t>TALK</a:t>
             </a:r>
-            <a:pPr indent="0" marL="0">
+            <a:pPr algn="ctr" indent="0" marL="0">
               <a:buNone/>
             </a:pPr>
             <a:r>
@@ -24817,7 +24543,7 @@
         </p:nvSpPr>
         <p:spPr>
           <a:xfrm>
-            <a:off x="6510528" y="493776"/>
+            <a:off x="6510528" y="548640"/>
             <a:ext cx="1901952" cy="274320"/>
           </a:xfrm>
           <a:prstGeom prst="roundRect">
@@ -24866,7 +24592,7 @@
         </p:nvSpPr>
         <p:spPr>
           <a:xfrm>
-            <a:off x="6510528" y="804672"/>
+            <a:off x="6510528" y="914400"/>
             <a:ext cx="1901952" cy="274320"/>
           </a:xfrm>
           <a:prstGeom prst="roundRect">
@@ -26414,12 +26140,12 @@
           </a:effectLst>
         </p:spPr>
         <p:txBody>
-          <a:bodyPr wrap="square" lIns="101600" tIns="0" rIns="101600" bIns="0" rtlCol="0" anchor="ctr">
+          <a:bodyPr wrap="square" lIns="76200" tIns="0" rIns="76200" bIns="0" rtlCol="0" anchor="ctr">
             <a:normAutofit/>
           </a:bodyPr>
           <a:lstStyle/>
           <a:p>
-            <a:pPr indent="0" marL="0">
+            <a:pPr algn="ctr" indent="0" marL="0">
               <a:buNone/>
             </a:pPr>
             <a:r>
@@ -26430,7 +26156,7 @@
               </a:rPr>
               <a:t>✅ </a:t>
             </a:r>
-            <a:pPr indent="0" marL="0">
+            <a:pPr algn="ctr" indent="0" marL="0">
               <a:buNone/>
             </a:pPr>
             <a:r>
@@ -26444,7 +26170,7 @@
               </a:rPr>
               <a:t>CHECK</a:t>
             </a:r>
-            <a:pPr indent="0" marL="0">
+            <a:pPr algn="ctr" indent="0" marL="0">
               <a:buNone/>
             </a:pPr>
             <a:r>
@@ -26470,7 +26196,7 @@
         </p:nvSpPr>
         <p:spPr>
           <a:xfrm>
-            <a:off x="6510528" y="493776"/>
+            <a:off x="6510528" y="548640"/>
             <a:ext cx="1901952" cy="274320"/>
           </a:xfrm>
           <a:prstGeom prst="roundRect">
@@ -26519,7 +26245,7 @@
         </p:nvSpPr>
         <p:spPr>
           <a:xfrm>
-            <a:off x="6510528" y="804672"/>
+            <a:off x="6510528" y="914400"/>
             <a:ext cx="1901952" cy="274320"/>
           </a:xfrm>
           <a:prstGeom prst="roundRect">
@@ -29536,12 +29262,12 @@
           </a:effectLst>
         </p:spPr>
         <p:txBody>
-          <a:bodyPr wrap="square" lIns="101600" tIns="0" rIns="101600" bIns="0" rtlCol="0" anchor="ctr">
+          <a:bodyPr wrap="square" lIns="76200" tIns="0" rIns="76200" bIns="0" rtlCol="0" anchor="ctr">
             <a:normAutofit/>
           </a:bodyPr>
           <a:lstStyle/>
           <a:p>
-            <a:pPr indent="0" marL="0">
+            <a:pPr algn="ctr" indent="0" marL="0">
               <a:buNone/>
             </a:pPr>
             <a:r>
@@ -29552,7 +29278,7 @@
               </a:rPr>
               <a:t>👀 </a:t>
             </a:r>
-            <a:pPr indent="0" marL="0">
+            <a:pPr algn="ctr" indent="0" marL="0">
               <a:buNone/>
             </a:pPr>
             <a:r>
@@ -29566,7 +29292,7 @@
               </a:rPr>
               <a:t>READ</a:t>
             </a:r>
-            <a:pPr indent="0" marL="0">
+            <a:pPr algn="ctr" indent="0" marL="0">
               <a:buNone/>
             </a:pPr>
             <a:r>
@@ -29578,51 +29304,9 @@
                 <a:ea typeface="Segoe UI Semibold" pitchFamily="34" charset="-122"/>
                 <a:cs typeface="Segoe UI Semibold" pitchFamily="34" charset="-120"/>
               </a:rPr>
-              <a:t>  LEGGI</a:t>
-            </a:r>
-            <a:endParaRPr lang="en-US" sz="950" dirty="0"/>
-          </a:p>
-        </p:txBody>
-      </p:sp>
-      <p:sp>
-        <p:nvSpPr>
-          <p:cNvPr id="10" name="cmd_134"/>
-          <p:cNvSpPr/>
-          <p:nvPr/>
-        </p:nvSpPr>
-        <p:spPr>
-          <a:xfrm>
-            <a:off x="6510528" y="493776"/>
-            <a:ext cx="1901952" cy="274320"/>
-          </a:xfrm>
-          <a:prstGeom prst="roundRect">
-            <a:avLst>
-              <a:gd name="adj" fmla="val 50000"/>
-            </a:avLst>
-          </a:prstGeom>
-          <a:solidFill>
-            <a:srgbClr val="FFFFFF"/>
-          </a:solidFill>
-          <a:ln w="28575">
-            <a:solidFill>
-              <a:srgbClr val="FFE07A"/>
-            </a:solidFill>
-          </a:ln>
-          <a:effectLst>
-            <a:outerShdw sx="100000" sy="100000" kx="0" ky="0" algn="bl" rotWithShape="0" blurRad="88900" dist="31750" dir="5400000">
-              <a:srgbClr val="1B2559">
-                <a:alpha val="8000"/>
-              </a:srgbClr>
-            </a:outerShdw>
-          </a:effectLst>
-        </p:spPr>
-        <p:txBody>
-          <a:bodyPr wrap="square" lIns="101600" tIns="0" rIns="101600" bIns="0" rtlCol="0" anchor="ctr">
-            <a:normAutofit/>
-          </a:bodyPr>
-          <a:lstStyle/>
-          <a:p>
-            <a:pPr indent="0" marL="0">
+              <a:t>  →  </a:t>
+            </a:r>
+            <a:pPr algn="ctr" indent="0" marL="0">
               <a:buNone/>
             </a:pPr>
             <a:r>
@@ -29633,7 +29317,7 @@
               </a:rPr>
               <a:t>🤔 </a:t>
             </a:r>
-            <a:pPr indent="0" marL="0">
+            <a:pPr algn="ctr" indent="0" marL="0">
               <a:buNone/>
             </a:pPr>
             <a:r>
@@ -29647,33 +29331,19 @@
               </a:rPr>
               <a:t>GUESS</a:t>
             </a:r>
-            <a:pPr indent="0" marL="0">
-              <a:buNone/>
-            </a:pPr>
-            <a:r>
-              <a:rPr lang="en-US" sz="950" dirty="0">
-                <a:solidFill>
-                  <a:srgbClr val="5B6785"/>
-                </a:solidFill>
-                <a:latin typeface="Segoe UI Semibold" pitchFamily="34" charset="0"/>
-                <a:ea typeface="Segoe UI Semibold" pitchFamily="34" charset="-122"/>
-                <a:cs typeface="Segoe UI Semibold" pitchFamily="34" charset="-120"/>
-              </a:rPr>
-              <a:t>  INDOVINA</a:t>
-            </a:r>
             <a:endParaRPr lang="en-US" sz="950" dirty="0"/>
           </a:p>
         </p:txBody>
       </p:sp>
       <p:sp>
         <p:nvSpPr>
-          <p:cNvPr id="11" name="meta_135"/>
-          <p:cNvSpPr/>
-          <p:nvPr/>
-        </p:nvSpPr>
-        <p:spPr>
-          <a:xfrm>
-            <a:off x="6510528" y="804672"/>
+          <p:cNvPr id="10" name="meta_134"/>
+          <p:cNvSpPr/>
+          <p:nvPr/>
+        </p:nvSpPr>
+        <p:spPr>
+          <a:xfrm>
+            <a:off x="6510528" y="548640"/>
             <a:ext cx="1901952" cy="274320"/>
           </a:xfrm>
           <a:prstGeom prst="roundRect">
@@ -29716,13 +29386,13 @@
       </p:sp>
       <p:sp>
         <p:nvSpPr>
-          <p:cNvPr id="12" name="tag_136"/>
-          <p:cNvSpPr/>
-          <p:nvPr/>
-        </p:nvSpPr>
-        <p:spPr>
-          <a:xfrm>
-            <a:off x="6510528" y="1115568"/>
+          <p:cNvPr id="11" name="tag_135"/>
+          <p:cNvSpPr/>
+          <p:nvPr/>
+        </p:nvSpPr>
+        <p:spPr>
+          <a:xfrm>
+            <a:off x="6510528" y="914400"/>
             <a:ext cx="1901952" cy="274320"/>
           </a:xfrm>
           <a:prstGeom prst="roundRect">
@@ -29779,7 +29449,7 @@
       </p:sp>
       <p:pic>
         <p:nvPicPr>
-          <p:cNvPr id="13" name="logo_137" descr="/home/claude/lls-course/v2/img/logo.png">    </p:cNvPr>
+          <p:cNvPr id="12" name="logo_136" descr="/home/claude/lls-course/v2/img/logo.png">    </p:cNvPr>
           <p:cNvPicPr>
             <a:picLocks noChangeAspect="1"/>
           </p:cNvPicPr>
@@ -29803,7 +29473,7 @@
       </p:pic>
       <p:sp>
         <p:nvSpPr>
-          <p:cNvPr id="14" name="foot_138"/>
+          <p:cNvPr id="13" name="foot_137"/>
           <p:cNvSpPr/>
           <p:nvPr/>
         </p:nvSpPr>
@@ -29842,7 +29512,7 @@
       </p:sp>
       <p:sp>
         <p:nvSpPr>
-          <p:cNvPr id="15" name="cd_139"/>
+          <p:cNvPr id="14" name="cd_138"/>
           <p:cNvSpPr/>
           <p:nvPr/>
         </p:nvSpPr>
@@ -29876,7 +29546,7 @@
       </p:sp>
       <p:sp>
         <p:nvSpPr>
-          <p:cNvPr id="16" name="hl_140"/>
+          <p:cNvPr id="15" name="hl_139"/>
           <p:cNvSpPr/>
           <p:nvPr/>
         </p:nvSpPr>
@@ -29915,7 +29585,7 @@
       </p:sp>
       <p:sp>
         <p:nvSpPr>
-          <p:cNvPr id="17" name="nx_141"/>
+          <p:cNvPr id="16" name="nx_140"/>
           <p:cNvSpPr/>
           <p:nvPr/>
         </p:nvSpPr>
@@ -29978,7 +29648,7 @@
       </p:sp>
       <p:sp>
         <p:nvSpPr>
-          <p:cNvPr id="18" name="sf_142"/>
+          <p:cNvPr id="17" name="sf_141"/>
           <p:cNvSpPr/>
           <p:nvPr/>
         </p:nvSpPr>
@@ -30095,7 +29765,7 @@
       </p:grpSpPr>
       <p:sp>
         <p:nvSpPr>
-          <p:cNvPr id="3" name="bd_143"/>
+          <p:cNvPr id="3" name="bd_142"/>
           <p:cNvSpPr/>
           <p:nvPr/>
         </p:nvSpPr>
@@ -30147,7 +29817,7 @@
       </p:sp>
       <p:pic>
         <p:nvPicPr>
-          <p:cNvPr id="4" name="brY_144" descr="/home/claude/lls-course/v2/assets/brush-yellow.png">    </p:cNvPr>
+          <p:cNvPr id="4" name="brY_143" descr="/home/claude/lls-course/v2/assets/brush-yellow.png">    </p:cNvPr>
           <p:cNvPicPr>
             <a:picLocks noChangeAspect="1"/>
           </p:cNvPicPr>
@@ -30171,7 +29841,7 @@
       </p:pic>
       <p:sp>
         <p:nvSpPr>
-          <p:cNvPr id="5" name="title_145"/>
+          <p:cNvPr id="5" name="title_144"/>
           <p:cNvSpPr/>
           <p:nvPr/>
         </p:nvSpPr>
@@ -30212,7 +29882,7 @@
       </p:sp>
       <p:pic>
         <p:nvPicPr>
-          <p:cNvPr id="6" name="brP_146" descr="/home/claude/lls-course/v2/assets/brush-pink.png">    </p:cNvPr>
+          <p:cNvPr id="6" name="brP_145" descr="/home/claude/lls-course/v2/assets/brush-pink.png">    </p:cNvPr>
           <p:cNvPicPr>
             <a:picLocks noChangeAspect="1"/>
           </p:cNvPicPr>
@@ -30236,7 +29906,7 @@
       </p:pic>
       <p:sp>
         <p:nvSpPr>
-          <p:cNvPr id="7" name="ins_147"/>
+          <p:cNvPr id="7" name="ins_146"/>
           <p:cNvSpPr/>
           <p:nvPr/>
         </p:nvSpPr>
@@ -30277,7 +29947,7 @@
       </p:sp>
       <p:sp>
         <p:nvSpPr>
-          <p:cNvPr id="8" name="insIT_148"/>
+          <p:cNvPr id="8" name="insIT_147"/>
           <p:cNvSpPr/>
           <p:nvPr/>
         </p:nvSpPr>
@@ -30318,7 +29988,7 @@
       </p:sp>
       <p:sp>
         <p:nvSpPr>
-          <p:cNvPr id="9" name="cmd_149"/>
+          <p:cNvPr id="9" name="cmd_148"/>
           <p:cNvSpPr/>
           <p:nvPr/>
         </p:nvSpPr>
@@ -30349,12 +30019,12 @@
           </a:effectLst>
         </p:spPr>
         <p:txBody>
-          <a:bodyPr wrap="square" lIns="101600" tIns="0" rIns="101600" bIns="0" rtlCol="0" anchor="ctr">
+          <a:bodyPr wrap="square" lIns="76200" tIns="0" rIns="76200" bIns="0" rtlCol="0" anchor="ctr">
             <a:normAutofit/>
           </a:bodyPr>
           <a:lstStyle/>
           <a:p>
-            <a:pPr indent="0" marL="0">
+            <a:pPr algn="ctr" indent="0" marL="0">
               <a:buNone/>
             </a:pPr>
             <a:r>
@@ -30365,7 +30035,7 @@
               </a:rPr>
               <a:t>👀 </a:t>
             </a:r>
-            <a:pPr indent="0" marL="0">
+            <a:pPr algn="ctr" indent="0" marL="0">
               <a:buNone/>
             </a:pPr>
             <a:r>
@@ -30379,7 +30049,7 @@
               </a:rPr>
               <a:t>READ</a:t>
             </a:r>
-            <a:pPr indent="0" marL="0">
+            <a:pPr algn="ctr" indent="0" marL="0">
               <a:buNone/>
             </a:pPr>
             <a:r>
@@ -30399,13 +30069,13 @@
       </p:sp>
       <p:sp>
         <p:nvSpPr>
-          <p:cNvPr id="10" name="meta_150"/>
-          <p:cNvSpPr/>
-          <p:nvPr/>
-        </p:nvSpPr>
-        <p:spPr>
-          <a:xfrm>
-            <a:off x="6510528" y="493776"/>
+          <p:cNvPr id="10" name="meta_149"/>
+          <p:cNvSpPr/>
+          <p:nvPr/>
+        </p:nvSpPr>
+        <p:spPr>
+          <a:xfrm>
+            <a:off x="6510528" y="548640"/>
             <a:ext cx="1901952" cy="274320"/>
           </a:xfrm>
           <a:prstGeom prst="roundRect">
@@ -30448,13 +30118,13 @@
       </p:sp>
       <p:sp>
         <p:nvSpPr>
-          <p:cNvPr id="11" name="tag_151"/>
-          <p:cNvSpPr/>
-          <p:nvPr/>
-        </p:nvSpPr>
-        <p:spPr>
-          <a:xfrm>
-            <a:off x="6510528" y="804672"/>
+          <p:cNvPr id="11" name="tag_150"/>
+          <p:cNvSpPr/>
+          <p:nvPr/>
+        </p:nvSpPr>
+        <p:spPr>
+          <a:xfrm>
+            <a:off x="6510528" y="914400"/>
             <a:ext cx="1901952" cy="274320"/>
           </a:xfrm>
           <a:prstGeom prst="roundRect">
@@ -30511,7 +30181,7 @@
       </p:sp>
       <p:pic>
         <p:nvPicPr>
-          <p:cNvPr id="12" name="logo_152" descr="/home/claude/lls-course/v2/img/logo.png">    </p:cNvPr>
+          <p:cNvPr id="12" name="logo_151" descr="/home/claude/lls-course/v2/img/logo.png">    </p:cNvPr>
           <p:cNvPicPr>
             <a:picLocks noChangeAspect="1"/>
           </p:cNvPicPr>
@@ -30535,7 +30205,7 @@
       </p:pic>
       <p:sp>
         <p:nvSpPr>
-          <p:cNvPr id="13" name="foot_153"/>
+          <p:cNvPr id="13" name="foot_152"/>
           <p:cNvSpPr/>
           <p:nvPr/>
         </p:nvSpPr>
@@ -30574,7 +30244,7 @@
       </p:sp>
       <p:sp>
         <p:nvSpPr>
-          <p:cNvPr id="14" name="cd_154"/>
+          <p:cNvPr id="14" name="cd_153"/>
           <p:cNvSpPr/>
           <p:nvPr/>
         </p:nvSpPr>
@@ -30608,7 +30278,7 @@
       </p:sp>
       <p:sp>
         <p:nvSpPr>
-          <p:cNvPr id="15" name="rd_155"/>
+          <p:cNvPr id="15" name="rd_154"/>
           <p:cNvSpPr/>
           <p:nvPr/>
         </p:nvSpPr>
@@ -30962,7 +30632,7 @@
       </p:sp>
       <p:sp>
         <p:nvSpPr>
-          <p:cNvPr id="16" name="cd_156"/>
+          <p:cNvPr id="16" name="cd_155"/>
           <p:cNvSpPr/>
           <p:nvPr/>
         </p:nvSpPr>
@@ -30996,7 +30666,7 @@
       </p:sp>
       <p:sp>
         <p:nvSpPr>
-          <p:cNvPr id="17" name="ii_157"/>
+          <p:cNvPr id="17" name="ii_156"/>
           <p:cNvSpPr/>
           <p:nvPr/>
         </p:nvSpPr>
@@ -31032,7 +30702,7 @@
       </p:sp>
       <p:sp>
         <p:nvSpPr>
-          <p:cNvPr id="18" name="ih_158"/>
+          <p:cNvPr id="18" name="ih_157"/>
           <p:cNvSpPr/>
           <p:nvPr/>
         </p:nvSpPr>
@@ -31071,7 +30741,7 @@
       </p:sp>
       <p:sp>
         <p:nvSpPr>
-          <p:cNvPr id="19" name="il_159"/>
+          <p:cNvPr id="19" name="il_158"/>
           <p:cNvSpPr/>
           <p:nvPr/>
         </p:nvSpPr>
@@ -31161,7 +30831,7 @@
       </p:sp>
       <p:sp>
         <p:nvSpPr>
-          <p:cNvPr id="20" name="R1_chip160"/>
+          <p:cNvPr id="20" name="R1_chip159"/>
           <p:cNvSpPr/>
           <p:nvPr/>
         </p:nvSpPr>
@@ -31335,7 +31005,7 @@
       </p:grpSpPr>
       <p:sp>
         <p:nvSpPr>
-          <p:cNvPr id="3" name="bd_161"/>
+          <p:cNvPr id="3" name="bd_160"/>
           <p:cNvSpPr/>
           <p:nvPr/>
         </p:nvSpPr>
@@ -31387,7 +31057,7 @@
       </p:sp>
       <p:pic>
         <p:nvPicPr>
-          <p:cNvPr id="4" name="brY_162" descr="/home/claude/lls-course/v2/assets/brush-yellow.png">    </p:cNvPr>
+          <p:cNvPr id="4" name="brY_161" descr="/home/claude/lls-course/v2/assets/brush-yellow.png">    </p:cNvPr>
           <p:cNvPicPr>
             <a:picLocks noChangeAspect="1"/>
           </p:cNvPicPr>
@@ -31411,7 +31081,7 @@
       </p:pic>
       <p:sp>
         <p:nvSpPr>
-          <p:cNvPr id="5" name="title_163"/>
+          <p:cNvPr id="5" name="title_162"/>
           <p:cNvSpPr/>
           <p:nvPr/>
         </p:nvSpPr>
@@ -31452,7 +31122,7 @@
       </p:sp>
       <p:pic>
         <p:nvPicPr>
-          <p:cNvPr id="6" name="brP_164" descr="/home/claude/lls-course/v2/assets/brush-pink.png">    </p:cNvPr>
+          <p:cNvPr id="6" name="brP_163" descr="/home/claude/lls-course/v2/assets/brush-pink.png">    </p:cNvPr>
           <p:cNvPicPr>
             <a:picLocks noChangeAspect="1"/>
           </p:cNvPicPr>
@@ -31476,7 +31146,7 @@
       </p:pic>
       <p:sp>
         <p:nvSpPr>
-          <p:cNvPr id="7" name="ins_165"/>
+          <p:cNvPr id="7" name="ins_164"/>
           <p:cNvSpPr/>
           <p:nvPr/>
         </p:nvSpPr>
@@ -31517,7 +31187,7 @@
       </p:sp>
       <p:sp>
         <p:nvSpPr>
-          <p:cNvPr id="8" name="insIT_166"/>
+          <p:cNvPr id="8" name="insIT_165"/>
           <p:cNvSpPr/>
           <p:nvPr/>
         </p:nvSpPr>
@@ -31558,7 +31228,7 @@
       </p:sp>
       <p:sp>
         <p:nvSpPr>
-          <p:cNvPr id="9" name="cmd_167"/>
+          <p:cNvPr id="9" name="cmd_166"/>
           <p:cNvSpPr/>
           <p:nvPr/>
         </p:nvSpPr>
@@ -31589,12 +31259,12 @@
           </a:effectLst>
         </p:spPr>
         <p:txBody>
-          <a:bodyPr wrap="square" lIns="101600" tIns="0" rIns="101600" bIns="0" rtlCol="0" anchor="ctr">
+          <a:bodyPr wrap="square" lIns="76200" tIns="0" rIns="76200" bIns="0" rtlCol="0" anchor="ctr">
             <a:normAutofit/>
           </a:bodyPr>
           <a:lstStyle/>
           <a:p>
-            <a:pPr indent="0" marL="0">
+            <a:pPr algn="ctr" indent="0" marL="0">
               <a:buNone/>
             </a:pPr>
             <a:r>
@@ -31605,7 +31275,7 @@
               </a:rPr>
               <a:t>👀 </a:t>
             </a:r>
-            <a:pPr indent="0" marL="0">
+            <a:pPr algn="ctr" indent="0" marL="0">
               <a:buNone/>
             </a:pPr>
             <a:r>
@@ -31619,7 +31289,7 @@
               </a:rPr>
               <a:t>READ</a:t>
             </a:r>
-            <a:pPr indent="0" marL="0">
+            <a:pPr algn="ctr" indent="0" marL="0">
               <a:buNone/>
             </a:pPr>
             <a:r>
@@ -31631,51 +31301,9 @@
                 <a:ea typeface="Segoe UI Semibold" pitchFamily="34" charset="-122"/>
                 <a:cs typeface="Segoe UI Semibold" pitchFamily="34" charset="-120"/>
               </a:rPr>
-              <a:t>  LEGGI</a:t>
-            </a:r>
-            <a:endParaRPr lang="en-US" sz="950" dirty="0"/>
-          </a:p>
-        </p:txBody>
-      </p:sp>
-      <p:sp>
-        <p:nvSpPr>
-          <p:cNvPr id="10" name="cmd_168"/>
-          <p:cNvSpPr/>
-          <p:nvPr/>
-        </p:nvSpPr>
-        <p:spPr>
-          <a:xfrm>
-            <a:off x="6510528" y="493776"/>
-            <a:ext cx="1901952" cy="274320"/>
-          </a:xfrm>
-          <a:prstGeom prst="roundRect">
-            <a:avLst>
-              <a:gd name="adj" fmla="val 50000"/>
-            </a:avLst>
-          </a:prstGeom>
-          <a:solidFill>
-            <a:srgbClr val="FFFFFF"/>
-          </a:solidFill>
-          <a:ln w="28575">
-            <a:solidFill>
-              <a:srgbClr val="FFE07A"/>
-            </a:solidFill>
-          </a:ln>
-          <a:effectLst>
-            <a:outerShdw sx="100000" sy="100000" kx="0" ky="0" algn="bl" rotWithShape="0" blurRad="88900" dist="31750" dir="5400000">
-              <a:srgbClr val="1B2559">
-                <a:alpha val="8000"/>
-              </a:srgbClr>
-            </a:outerShdw>
-          </a:effectLst>
-        </p:spPr>
-        <p:txBody>
-          <a:bodyPr wrap="square" lIns="101600" tIns="0" rIns="101600" bIns="0" rtlCol="0" anchor="ctr">
-            <a:normAutofit/>
-          </a:bodyPr>
-          <a:lstStyle/>
-          <a:p>
-            <a:pPr indent="0" marL="0">
+              <a:t>  →  </a:t>
+            </a:r>
+            <a:pPr algn="ctr" indent="0" marL="0">
               <a:buNone/>
             </a:pPr>
             <a:r>
@@ -31686,7 +31314,7 @@
               </a:rPr>
               <a:t>🔍 </a:t>
             </a:r>
-            <a:pPr indent="0" marL="0">
+            <a:pPr algn="ctr" indent="0" marL="0">
               <a:buNone/>
             </a:pPr>
             <a:r>
@@ -31700,33 +31328,19 @@
               </a:rPr>
               <a:t>FIND</a:t>
             </a:r>
-            <a:pPr indent="0" marL="0">
-              <a:buNone/>
-            </a:pPr>
-            <a:r>
-              <a:rPr lang="en-US" sz="950" dirty="0">
-                <a:solidFill>
-                  <a:srgbClr val="5B6785"/>
-                </a:solidFill>
-                <a:latin typeface="Segoe UI Semibold" pitchFamily="34" charset="0"/>
-                <a:ea typeface="Segoe UI Semibold" pitchFamily="34" charset="-122"/>
-                <a:cs typeface="Segoe UI Semibold" pitchFamily="34" charset="-120"/>
-              </a:rPr>
-              <a:t>  TROVA</a:t>
-            </a:r>
             <a:endParaRPr lang="en-US" sz="950" dirty="0"/>
           </a:p>
         </p:txBody>
       </p:sp>
       <p:sp>
         <p:nvSpPr>
-          <p:cNvPr id="11" name="meta_169"/>
-          <p:cNvSpPr/>
-          <p:nvPr/>
-        </p:nvSpPr>
-        <p:spPr>
-          <a:xfrm>
-            <a:off x="6510528" y="804672"/>
+          <p:cNvPr id="10" name="meta_167"/>
+          <p:cNvSpPr/>
+          <p:nvPr/>
+        </p:nvSpPr>
+        <p:spPr>
+          <a:xfrm>
+            <a:off x="6510528" y="548640"/>
             <a:ext cx="1901952" cy="274320"/>
           </a:xfrm>
           <a:prstGeom prst="roundRect">
@@ -31769,13 +31383,13 @@
       </p:sp>
       <p:sp>
         <p:nvSpPr>
-          <p:cNvPr id="12" name="tag_170"/>
-          <p:cNvSpPr/>
-          <p:nvPr/>
-        </p:nvSpPr>
-        <p:spPr>
-          <a:xfrm>
-            <a:off x="6510528" y="1115568"/>
+          <p:cNvPr id="11" name="tag_168"/>
+          <p:cNvSpPr/>
+          <p:nvPr/>
+        </p:nvSpPr>
+        <p:spPr>
+          <a:xfrm>
+            <a:off x="6510528" y="914400"/>
             <a:ext cx="1901952" cy="274320"/>
           </a:xfrm>
           <a:prstGeom prst="roundRect">
@@ -31832,7 +31446,7 @@
       </p:sp>
       <p:pic>
         <p:nvPicPr>
-          <p:cNvPr id="13" name="logo_171" descr="/home/claude/lls-course/v2/img/logo.png">    </p:cNvPr>
+          <p:cNvPr id="12" name="logo_169" descr="/home/claude/lls-course/v2/img/logo.png">    </p:cNvPr>
           <p:cNvPicPr>
             <a:picLocks noChangeAspect="1"/>
           </p:cNvPicPr>
@@ -31856,7 +31470,7 @@
       </p:pic>
       <p:sp>
         <p:nvSpPr>
-          <p:cNvPr id="14" name="foot_172"/>
+          <p:cNvPr id="13" name="foot_170"/>
           <p:cNvSpPr/>
           <p:nvPr/>
         </p:nvSpPr>
@@ -31895,7 +31509,7 @@
       </p:sp>
       <p:sp>
         <p:nvSpPr>
-          <p:cNvPr id="15" name="cd_173"/>
+          <p:cNvPr id="14" name="cd_171"/>
           <p:cNvSpPr/>
           <p:nvPr/>
         </p:nvSpPr>
@@ -31929,7 +31543,7 @@
       </p:sp>
       <p:sp>
         <p:nvSpPr>
-          <p:cNvPr id="16" name="rd_174"/>
+          <p:cNvPr id="15" name="rd_172"/>
           <p:cNvSpPr/>
           <p:nvPr/>
         </p:nvSpPr>
@@ -32286,7 +31900,7 @@
       </p:sp>
       <p:sp>
         <p:nvSpPr>
-          <p:cNvPr id="17" name="R1_rdA175"/>
+          <p:cNvPr id="16" name="R1_rdA173"/>
           <p:cNvSpPr/>
           <p:nvPr/>
         </p:nvSpPr>
@@ -32648,7 +32262,7 @@
       </p:sp>
       <p:sp>
         <p:nvSpPr>
-          <p:cNvPr id="18" name="R2_rdA176"/>
+          <p:cNvPr id="17" name="R2_rdA174"/>
           <p:cNvSpPr/>
           <p:nvPr/>
         </p:nvSpPr>
@@ -33013,7 +32627,7 @@
       </p:sp>
       <p:sp>
         <p:nvSpPr>
-          <p:cNvPr id="19" name="R3_rdA177"/>
+          <p:cNvPr id="18" name="R3_rdA175"/>
           <p:cNvSpPr/>
           <p:nvPr/>
         </p:nvSpPr>
@@ -33381,7 +32995,7 @@
       </p:sp>
       <p:sp>
         <p:nvSpPr>
-          <p:cNvPr id="20" name="R4_rdA178"/>
+          <p:cNvPr id="19" name="R4_rdA176"/>
           <p:cNvSpPr/>
           <p:nvPr/>
         </p:nvSpPr>
@@ -33752,7 +33366,7 @@
       </p:sp>
       <p:sp>
         <p:nvSpPr>
-          <p:cNvPr id="21" name="R5_rdA179"/>
+          <p:cNvPr id="20" name="R5_rdA177"/>
           <p:cNvSpPr/>
           <p:nvPr/>
         </p:nvSpPr>
@@ -34126,7 +33740,7 @@
       </p:sp>
       <p:sp>
         <p:nvSpPr>
-          <p:cNvPr id="22" name="rbh_180"/>
+          <p:cNvPr id="21" name="rbh_178"/>
           <p:cNvSpPr/>
           <p:nvPr/>
         </p:nvSpPr>
@@ -34165,7 +33779,7 @@
       </p:sp>
       <p:sp>
         <p:nvSpPr>
-          <p:cNvPr id="23" name="bd_181"/>
+          <p:cNvPr id="22" name="bd_179"/>
           <p:cNvSpPr/>
           <p:nvPr/>
         </p:nvSpPr>
@@ -34217,7 +33831,7 @@
       </p:sp>
       <p:sp>
         <p:nvSpPr>
-          <p:cNvPr id="24" name="rb_182"/>
+          <p:cNvPr id="23" name="rb_180"/>
           <p:cNvSpPr/>
           <p:nvPr/>
         </p:nvSpPr>
@@ -34266,7 +33880,7 @@
       </p:sp>
       <p:sp>
         <p:nvSpPr>
-          <p:cNvPr id="25" name="bd_183"/>
+          <p:cNvPr id="24" name="bd_181"/>
           <p:cNvSpPr/>
           <p:nvPr/>
         </p:nvSpPr>
@@ -34318,7 +33932,7 @@
       </p:sp>
       <p:sp>
         <p:nvSpPr>
-          <p:cNvPr id="26" name="rb_184"/>
+          <p:cNvPr id="25" name="rb_182"/>
           <p:cNvSpPr/>
           <p:nvPr/>
         </p:nvSpPr>
@@ -34367,7 +33981,7 @@
       </p:sp>
       <p:sp>
         <p:nvSpPr>
-          <p:cNvPr id="27" name="bd_185"/>
+          <p:cNvPr id="26" name="bd_183"/>
           <p:cNvSpPr/>
           <p:nvPr/>
         </p:nvSpPr>
@@ -34419,7 +34033,7 @@
       </p:sp>
       <p:sp>
         <p:nvSpPr>
-          <p:cNvPr id="28" name="rb_186"/>
+          <p:cNvPr id="27" name="rb_184"/>
           <p:cNvSpPr/>
           <p:nvPr/>
         </p:nvSpPr>
@@ -34468,7 +34082,7 @@
       </p:sp>
       <p:sp>
         <p:nvSpPr>
-          <p:cNvPr id="29" name="bd_187"/>
+          <p:cNvPr id="28" name="bd_185"/>
           <p:cNvSpPr/>
           <p:nvPr/>
         </p:nvSpPr>
@@ -34520,7 +34134,7 @@
       </p:sp>
       <p:sp>
         <p:nvSpPr>
-          <p:cNvPr id="30" name="rb_188"/>
+          <p:cNvPr id="29" name="rb_186"/>
           <p:cNvSpPr/>
           <p:nvPr/>
         </p:nvSpPr>
@@ -34569,7 +34183,7 @@
       </p:sp>
       <p:sp>
         <p:nvSpPr>
-          <p:cNvPr id="31" name="bd_189"/>
+          <p:cNvPr id="30" name="bd_187"/>
           <p:cNvSpPr/>
           <p:nvPr/>
         </p:nvSpPr>
@@ -34621,7 +34235,7 @@
       </p:sp>
       <p:sp>
         <p:nvSpPr>
-          <p:cNvPr id="32" name="rb_190"/>
+          <p:cNvPr id="31" name="rb_188"/>
           <p:cNvSpPr/>
           <p:nvPr/>
         </p:nvSpPr>
@@ -34670,7 +34284,7 @@
       </p:sp>
       <p:sp>
         <p:nvSpPr>
-          <p:cNvPr id="33" name="bd_191"/>
+          <p:cNvPr id="32" name="bd_189"/>
           <p:cNvSpPr/>
           <p:nvPr/>
         </p:nvSpPr>
@@ -34722,7 +34336,7 @@
       </p:sp>
       <p:sp>
         <p:nvSpPr>
-          <p:cNvPr id="34" name="rb_192"/>
+          <p:cNvPr id="33" name="rb_190"/>
           <p:cNvSpPr/>
           <p:nvPr/>
         </p:nvSpPr>
@@ -34811,7 +34425,7 @@
                                           </p:stCondLst>
                                         </p:cTn>
                                         <p:tgtEl>
-                                          <p:spTgt spid="17"/>
+                                          <p:spTgt spid="16"/>
                                         </p:tgtEl>
                                         <p:attrNameLst>
                                           <p:attrName>style.visibility</p:attrName>
@@ -34825,7 +34439,7 @@
                                       <p:cBhvr>
                                         <p:cTn id="7" dur="400"/>
                                         <p:tgtEl>
-                                          <p:spTgt spid="17"/>
+                                          <p:spTgt spid="16"/>
                                         </p:tgtEl>
                                       </p:cBhvr>
                                     </p:animEffect>
@@ -34864,7 +34478,7 @@
                                           </p:stCondLst>
                                         </p:cTn>
                                         <p:tgtEl>
-                                          <p:spTgt spid="18"/>
+                                          <p:spTgt spid="17"/>
                                         </p:tgtEl>
                                         <p:attrNameLst>
                                           <p:attrName>style.visibility</p:attrName>
@@ -34878,7 +34492,7 @@
                                       <p:cBhvr>
                                         <p:cTn id="12" dur="400"/>
                                         <p:tgtEl>
-                                          <p:spTgt spid="18"/>
+                                          <p:spTgt spid="17"/>
                                         </p:tgtEl>
                                       </p:cBhvr>
                                     </p:animEffect>
@@ -34917,7 +34531,7 @@
                                           </p:stCondLst>
                                         </p:cTn>
                                         <p:tgtEl>
-                                          <p:spTgt spid="19"/>
+                                          <p:spTgt spid="18"/>
                                         </p:tgtEl>
                                         <p:attrNameLst>
                                           <p:attrName>style.visibility</p:attrName>
@@ -34931,7 +34545,7 @@
                                       <p:cBhvr>
                                         <p:cTn id="17" dur="400"/>
                                         <p:tgtEl>
-                                          <p:spTgt spid="19"/>
+                                          <p:spTgt spid="18"/>
                                         </p:tgtEl>
                                       </p:cBhvr>
                                     </p:animEffect>
@@ -34970,7 +34584,7 @@
                                           </p:stCondLst>
                                         </p:cTn>
                                         <p:tgtEl>
-                                          <p:spTgt spid="20"/>
+                                          <p:spTgt spid="19"/>
                                         </p:tgtEl>
                                         <p:attrNameLst>
                                           <p:attrName>style.visibility</p:attrName>
@@ -34984,7 +34598,7 @@
                                       <p:cBhvr>
                                         <p:cTn id="22" dur="400"/>
                                         <p:tgtEl>
-                                          <p:spTgt spid="20"/>
+                                          <p:spTgt spid="19"/>
                                         </p:tgtEl>
                                       </p:cBhvr>
                                     </p:animEffect>
@@ -35023,7 +34637,7 @@
                                           </p:stCondLst>
                                         </p:cTn>
                                         <p:tgtEl>
-                                          <p:spTgt spid="21"/>
+                                          <p:spTgt spid="20"/>
                                         </p:tgtEl>
                                         <p:attrNameLst>
                                           <p:attrName>style.visibility</p:attrName>
@@ -35037,7 +34651,7 @@
                                       <p:cBhvr>
                                         <p:cTn id="27" dur="400"/>
                                         <p:tgtEl>
-                                          <p:spTgt spid="21"/>
+                                          <p:spTgt spid="20"/>
                                         </p:tgtEl>
                                       </p:cBhvr>
                                     </p:animEffect>
@@ -35108,7 +34722,7 @@
       </p:grpSpPr>
       <p:sp>
         <p:nvSpPr>
-          <p:cNvPr id="3" name="bd_193"/>
+          <p:cNvPr id="3" name="bd_191"/>
           <p:cNvSpPr/>
           <p:nvPr/>
         </p:nvSpPr>
@@ -35160,7 +34774,7 @@
       </p:sp>
       <p:pic>
         <p:nvPicPr>
-          <p:cNvPr id="4" name="brY_194" descr="/home/claude/lls-course/v2/assets/brush-yellow.png">    </p:cNvPr>
+          <p:cNvPr id="4" name="brY_192" descr="/home/claude/lls-course/v2/assets/brush-yellow.png">    </p:cNvPr>
           <p:cNvPicPr>
             <a:picLocks noChangeAspect="1"/>
           </p:cNvPicPr>
@@ -35184,7 +34798,7 @@
       </p:pic>
       <p:sp>
         <p:nvSpPr>
-          <p:cNvPr id="5" name="title_195"/>
+          <p:cNvPr id="5" name="title_193"/>
           <p:cNvSpPr/>
           <p:nvPr/>
         </p:nvSpPr>
@@ -35225,7 +34839,7 @@
       </p:sp>
       <p:pic>
         <p:nvPicPr>
-          <p:cNvPr id="6" name="brP_196" descr="/home/claude/lls-course/v2/assets/brush-pink.png">    </p:cNvPr>
+          <p:cNvPr id="6" name="brP_194" descr="/home/claude/lls-course/v2/assets/brush-pink.png">    </p:cNvPr>
           <p:cNvPicPr>
             <a:picLocks noChangeAspect="1"/>
           </p:cNvPicPr>
@@ -35249,7 +34863,7 @@
       </p:pic>
       <p:sp>
         <p:nvSpPr>
-          <p:cNvPr id="7" name="ins_197"/>
+          <p:cNvPr id="7" name="ins_195"/>
           <p:cNvSpPr/>
           <p:nvPr/>
         </p:nvSpPr>
@@ -35290,7 +34904,7 @@
       </p:sp>
       <p:sp>
         <p:nvSpPr>
-          <p:cNvPr id="8" name="insIT_198"/>
+          <p:cNvPr id="8" name="insIT_196"/>
           <p:cNvSpPr/>
           <p:nvPr/>
         </p:nvSpPr>
@@ -35331,7 +34945,7 @@
       </p:sp>
       <p:sp>
         <p:nvSpPr>
-          <p:cNvPr id="9" name="cmd_199"/>
+          <p:cNvPr id="9" name="cmd_197"/>
           <p:cNvSpPr/>
           <p:nvPr/>
         </p:nvSpPr>
@@ -35362,12 +34976,12 @@
           </a:effectLst>
         </p:spPr>
         <p:txBody>
-          <a:bodyPr wrap="square" lIns="101600" tIns="0" rIns="101600" bIns="0" rtlCol="0" anchor="ctr">
+          <a:bodyPr wrap="square" lIns="76200" tIns="0" rIns="76200" bIns="0" rtlCol="0" anchor="ctr">
             <a:normAutofit/>
           </a:bodyPr>
           <a:lstStyle/>
           <a:p>
-            <a:pPr indent="0" marL="0">
+            <a:pPr algn="ctr" indent="0" marL="0">
               <a:buNone/>
             </a:pPr>
             <a:r>
@@ -35378,7 +34992,7 @@
               </a:rPr>
               <a:t>💡 </a:t>
             </a:r>
-            <a:pPr indent="0" marL="0">
+            <a:pPr algn="ctr" indent="0" marL="0">
               <a:buNone/>
             </a:pPr>
             <a:r>
@@ -35392,7 +35006,7 @@
               </a:rPr>
               <a:t>THINK</a:t>
             </a:r>
-            <a:pPr indent="0" marL="0">
+            <a:pPr algn="ctr" indent="0" marL="0">
               <a:buNone/>
             </a:pPr>
             <a:r>
@@ -35404,51 +35018,9 @@
                 <a:ea typeface="Segoe UI Semibold" pitchFamily="34" charset="-122"/>
                 <a:cs typeface="Segoe UI Semibold" pitchFamily="34" charset="-120"/>
               </a:rPr>
-              <a:t>  PENSA</a:t>
-            </a:r>
-            <a:endParaRPr lang="en-US" sz="950" dirty="0"/>
-          </a:p>
-        </p:txBody>
-      </p:sp>
-      <p:sp>
-        <p:nvSpPr>
-          <p:cNvPr id="10" name="cmd_200"/>
-          <p:cNvSpPr/>
-          <p:nvPr/>
-        </p:nvSpPr>
-        <p:spPr>
-          <a:xfrm>
-            <a:off x="6510528" y="493776"/>
-            <a:ext cx="1901952" cy="274320"/>
-          </a:xfrm>
-          <a:prstGeom prst="roundRect">
-            <a:avLst>
-              <a:gd name="adj" fmla="val 50000"/>
-            </a:avLst>
-          </a:prstGeom>
-          <a:solidFill>
-            <a:srgbClr val="FFFFFF"/>
-          </a:solidFill>
-          <a:ln w="28575">
-            <a:solidFill>
-              <a:srgbClr val="F7A6C4"/>
-            </a:solidFill>
-          </a:ln>
-          <a:effectLst>
-            <a:outerShdw sx="100000" sy="100000" kx="0" ky="0" algn="bl" rotWithShape="0" blurRad="88900" dist="31750" dir="5400000">
-              <a:srgbClr val="1B2559">
-                <a:alpha val="8000"/>
-              </a:srgbClr>
-            </a:outerShdw>
-          </a:effectLst>
-        </p:spPr>
-        <p:txBody>
-          <a:bodyPr wrap="square" lIns="101600" tIns="0" rIns="101600" bIns="0" rtlCol="0" anchor="ctr">
-            <a:normAutofit/>
-          </a:bodyPr>
-          <a:lstStyle/>
-          <a:p>
-            <a:pPr indent="0" marL="0">
+              <a:t>  →  </a:t>
+            </a:r>
+            <a:pPr algn="ctr" indent="0" marL="0">
               <a:buNone/>
             </a:pPr>
             <a:r>
@@ -35459,7 +35031,7 @@
               </a:rPr>
               <a:t>💬 </a:t>
             </a:r>
-            <a:pPr indent="0" marL="0">
+            <a:pPr algn="ctr" indent="0" marL="0">
               <a:buNone/>
             </a:pPr>
             <a:r>
@@ -35473,33 +35045,19 @@
               </a:rPr>
               <a:t>TALK</a:t>
             </a:r>
-            <a:pPr indent="0" marL="0">
-              <a:buNone/>
-            </a:pPr>
-            <a:r>
-              <a:rPr lang="en-US" sz="950" dirty="0">
-                <a:solidFill>
-                  <a:srgbClr val="5B6785"/>
-                </a:solidFill>
-                <a:latin typeface="Segoe UI Semibold" pitchFamily="34" charset="0"/>
-                <a:ea typeface="Segoe UI Semibold" pitchFamily="34" charset="-122"/>
-                <a:cs typeface="Segoe UI Semibold" pitchFamily="34" charset="-120"/>
-              </a:rPr>
-              <a:t>  PARLA</a:t>
-            </a:r>
             <a:endParaRPr lang="en-US" sz="950" dirty="0"/>
           </a:p>
         </p:txBody>
       </p:sp>
       <p:sp>
         <p:nvSpPr>
-          <p:cNvPr id="11" name="meta_201"/>
-          <p:cNvSpPr/>
-          <p:nvPr/>
-        </p:nvSpPr>
-        <p:spPr>
-          <a:xfrm>
-            <a:off x="6510528" y="804672"/>
+          <p:cNvPr id="10" name="meta_198"/>
+          <p:cNvSpPr/>
+          <p:nvPr/>
+        </p:nvSpPr>
+        <p:spPr>
+          <a:xfrm>
+            <a:off x="6510528" y="548640"/>
             <a:ext cx="1901952" cy="274320"/>
           </a:xfrm>
           <a:prstGeom prst="roundRect">
@@ -35542,13 +35100,13 @@
       </p:sp>
       <p:sp>
         <p:nvSpPr>
-          <p:cNvPr id="12" name="tag_202"/>
-          <p:cNvSpPr/>
-          <p:nvPr/>
-        </p:nvSpPr>
-        <p:spPr>
-          <a:xfrm>
-            <a:off x="6510528" y="1115568"/>
+          <p:cNvPr id="11" name="tag_199"/>
+          <p:cNvSpPr/>
+          <p:nvPr/>
+        </p:nvSpPr>
+        <p:spPr>
+          <a:xfrm>
+            <a:off x="6510528" y="914400"/>
             <a:ext cx="1901952" cy="274320"/>
           </a:xfrm>
           <a:prstGeom prst="roundRect">
@@ -35605,7 +35163,7 @@
       </p:sp>
       <p:pic>
         <p:nvPicPr>
-          <p:cNvPr id="13" name="logo_203" descr="/home/claude/lls-course/v2/img/logo.png">    </p:cNvPr>
+          <p:cNvPr id="12" name="logo_200" descr="/home/claude/lls-course/v2/img/logo.png">    </p:cNvPr>
           <p:cNvPicPr>
             <a:picLocks noChangeAspect="1"/>
           </p:cNvPicPr>
@@ -35629,7 +35187,7 @@
       </p:pic>
       <p:sp>
         <p:nvSpPr>
-          <p:cNvPr id="14" name="foot_204"/>
+          <p:cNvPr id="13" name="foot_201"/>
           <p:cNvSpPr/>
           <p:nvPr/>
         </p:nvSpPr>
@@ -35668,14 +35226,14 @@
       </p:sp>
       <p:sp>
         <p:nvSpPr>
-          <p:cNvPr id="15" name="pf_205"/>
+          <p:cNvPr id="14" name="pf_202"/>
           <p:cNvSpPr/>
           <p:nvPr/>
         </p:nvSpPr>
         <p:spPr>
           <a:xfrm rot="-120000">
-            <a:off x="320040" y="1371600"/>
-            <a:ext cx="2788920" cy="1325880"/>
+            <a:off x="651627" y="1371600"/>
+            <a:ext cx="2125747" cy="1325880"/>
           </a:xfrm>
           <a:prstGeom prst="roundRect">
             <a:avLst>
@@ -35702,7 +35260,7 @@
       </p:sp>
       <p:pic>
         <p:nvPicPr>
-          <p:cNvPr id="16" name="ph_206" descr="/home/claude/lls-course/v2/cache/b2_6b2_theatre_jpg_649x297_31.png">    </p:cNvPr>
+          <p:cNvPr id="15" name="ph_203" descr="/home/claude/lls-course/v2/cache/b2_6b2_theatre_jpg_489x297_31.png">    </p:cNvPr>
           <p:cNvPicPr>
             <a:picLocks noChangeAspect="1"/>
           </p:cNvPicPr>
@@ -35716,8 +35274,8 @@
         </p:blipFill>
         <p:spPr>
           <a:xfrm rot="-120000">
-            <a:off x="365760" y="1417320"/>
-            <a:ext cx="2697480" cy="1234440"/>
+            <a:off x="697347" y="1417320"/>
+            <a:ext cx="2034307" cy="1234440"/>
           </a:xfrm>
           <a:prstGeom prst="rect">
             <a:avLst/>
@@ -35726,7 +35284,7 @@
       </p:pic>
       <p:sp>
         <p:nvSpPr>
-          <p:cNvPr id="17" name="cd_207"/>
+          <p:cNvPr id="16" name="cd_204"/>
           <p:cNvSpPr/>
           <p:nvPr/>
         </p:nvSpPr>
@@ -35760,7 +35318,7 @@
       </p:sp>
       <p:sp>
         <p:nvSpPr>
-          <p:cNvPr id="18" name="ii_208"/>
+          <p:cNvPr id="17" name="ii_205"/>
           <p:cNvSpPr/>
           <p:nvPr/>
         </p:nvSpPr>
@@ -35796,7 +35354,7 @@
       </p:sp>
       <p:sp>
         <p:nvSpPr>
-          <p:cNvPr id="19" name="ih_209"/>
+          <p:cNvPr id="18" name="ih_206"/>
           <p:cNvSpPr/>
           <p:nvPr/>
         </p:nvSpPr>
@@ -35835,7 +35393,7 @@
       </p:sp>
       <p:sp>
         <p:nvSpPr>
-          <p:cNvPr id="20" name="il_210"/>
+          <p:cNvPr id="19" name="il_207"/>
           <p:cNvSpPr/>
           <p:nvPr/>
         </p:nvSpPr>
@@ -35952,7 +35510,7 @@
       </p:sp>
       <p:sp>
         <p:nvSpPr>
-          <p:cNvPr id="21" name="R1_qb211"/>
+          <p:cNvPr id="20" name="R1_qb208"/>
           <p:cNvSpPr/>
           <p:nvPr/>
         </p:nvSpPr>
@@ -36004,7 +35562,7 @@
       </p:sp>
       <p:sp>
         <p:nvSpPr>
-          <p:cNvPr id="22" name="R1_sq212"/>
+          <p:cNvPr id="21" name="R1_sq209"/>
           <p:cNvSpPr/>
           <p:nvPr/>
         </p:nvSpPr>
@@ -36077,7 +35635,7 @@
       </p:sp>
       <p:sp>
         <p:nvSpPr>
-          <p:cNvPr id="23" name="R2_qb213"/>
+          <p:cNvPr id="22" name="R2_qb210"/>
           <p:cNvSpPr/>
           <p:nvPr/>
         </p:nvSpPr>
@@ -36129,7 +35687,7 @@
       </p:sp>
       <p:sp>
         <p:nvSpPr>
-          <p:cNvPr id="24" name="R2_sq214"/>
+          <p:cNvPr id="23" name="R2_sq211"/>
           <p:cNvSpPr/>
           <p:nvPr/>
         </p:nvSpPr>
@@ -36202,7 +35760,7 @@
       </p:sp>
       <p:sp>
         <p:nvSpPr>
-          <p:cNvPr id="25" name="R3_qb215"/>
+          <p:cNvPr id="24" name="R3_qb212"/>
           <p:cNvSpPr/>
           <p:nvPr/>
         </p:nvSpPr>
@@ -36254,7 +35812,7 @@
       </p:sp>
       <p:sp>
         <p:nvSpPr>
-          <p:cNvPr id="26" name="R3_sq216"/>
+          <p:cNvPr id="25" name="R3_sq213"/>
           <p:cNvSpPr/>
           <p:nvPr/>
         </p:nvSpPr>
@@ -36367,7 +35925,7 @@
                                           </p:stCondLst>
                                         </p:cTn>
                                         <p:tgtEl>
-                                          <p:spTgt spid="21"/>
+                                          <p:spTgt spid="20"/>
                                         </p:tgtEl>
                                         <p:attrNameLst>
                                           <p:attrName>style.visibility</p:attrName>
@@ -36381,7 +35939,7 @@
                                       <p:cBhvr>
                                         <p:cTn id="7" dur="400"/>
                                         <p:tgtEl>
-                                          <p:spTgt spid="21"/>
+                                          <p:spTgt spid="20"/>
                                         </p:tgtEl>
                                       </p:cBhvr>
                                     </p:animEffect>
@@ -36402,7 +35960,7 @@
                                           </p:stCondLst>
                                         </p:cTn>
                                         <p:tgtEl>
-                                          <p:spTgt spid="22"/>
+                                          <p:spTgt spid="21"/>
                                         </p:tgtEl>
                                         <p:attrNameLst>
                                           <p:attrName>style.visibility</p:attrName>
@@ -36416,7 +35974,7 @@
                                       <p:cBhvr>
                                         <p:cTn id="10" dur="400"/>
                                         <p:tgtEl>
-                                          <p:spTgt spid="22"/>
+                                          <p:spTgt spid="21"/>
                                         </p:tgtEl>
                                       </p:cBhvr>
                                     </p:animEffect>
@@ -36455,7 +36013,7 @@
                                           </p:stCondLst>
                                         </p:cTn>
                                         <p:tgtEl>
-                                          <p:spTgt spid="23"/>
+                                          <p:spTgt spid="22"/>
                                         </p:tgtEl>
                                         <p:attrNameLst>
                                           <p:attrName>style.visibility</p:attrName>
@@ -36469,7 +36027,7 @@
                                       <p:cBhvr>
                                         <p:cTn id="15" dur="400"/>
                                         <p:tgtEl>
-                                          <p:spTgt spid="23"/>
+                                          <p:spTgt spid="22"/>
                                         </p:tgtEl>
                                       </p:cBhvr>
                                     </p:animEffect>
@@ -36490,7 +36048,7 @@
                                           </p:stCondLst>
                                         </p:cTn>
                                         <p:tgtEl>
-                                          <p:spTgt spid="24"/>
+                                          <p:spTgt spid="23"/>
                                         </p:tgtEl>
                                         <p:attrNameLst>
                                           <p:attrName>style.visibility</p:attrName>
@@ -36504,7 +36062,7 @@
                                       <p:cBhvr>
                                         <p:cTn id="18" dur="400"/>
                                         <p:tgtEl>
-                                          <p:spTgt spid="24"/>
+                                          <p:spTgt spid="23"/>
                                         </p:tgtEl>
                                       </p:cBhvr>
                                     </p:animEffect>
@@ -36543,7 +36101,7 @@
                                           </p:stCondLst>
                                         </p:cTn>
                                         <p:tgtEl>
-                                          <p:spTgt spid="25"/>
+                                          <p:spTgt spid="24"/>
                                         </p:tgtEl>
                                         <p:attrNameLst>
                                           <p:attrName>style.visibility</p:attrName>
@@ -36557,7 +36115,7 @@
                                       <p:cBhvr>
                                         <p:cTn id="23" dur="400"/>
                                         <p:tgtEl>
-                                          <p:spTgt spid="25"/>
+                                          <p:spTgt spid="24"/>
                                         </p:tgtEl>
                                       </p:cBhvr>
                                     </p:animEffect>
@@ -36578,7 +36136,7 @@
                                           </p:stCondLst>
                                         </p:cTn>
                                         <p:tgtEl>
-                                          <p:spTgt spid="26"/>
+                                          <p:spTgt spid="25"/>
                                         </p:tgtEl>
                                         <p:attrNameLst>
                                           <p:attrName>style.visibility</p:attrName>
@@ -36592,7 +36150,7 @@
                                       <p:cBhvr>
                                         <p:cTn id="26" dur="400"/>
                                         <p:tgtEl>
-                                          <p:spTgt spid="26"/>
+                                          <p:spTgt spid="25"/>
                                         </p:tgtEl>
                                       </p:cBhvr>
                                     </p:animEffect>
@@ -36663,7 +36221,7 @@
       </p:grpSpPr>
       <p:sp>
         <p:nvSpPr>
-          <p:cNvPr id="3" name="bd_217"/>
+          <p:cNvPr id="3" name="bd_214"/>
           <p:cNvSpPr/>
           <p:nvPr/>
         </p:nvSpPr>
@@ -36715,7 +36273,7 @@
       </p:sp>
       <p:pic>
         <p:nvPicPr>
-          <p:cNvPr id="4" name="brY_218" descr="/home/claude/lls-course/v2/assets/brush-yellow.png">    </p:cNvPr>
+          <p:cNvPr id="4" name="brY_215" descr="/home/claude/lls-course/v2/assets/brush-yellow.png">    </p:cNvPr>
           <p:cNvPicPr>
             <a:picLocks noChangeAspect="1"/>
           </p:cNvPicPr>
@@ -36739,7 +36297,7 @@
       </p:pic>
       <p:sp>
         <p:nvSpPr>
-          <p:cNvPr id="5" name="title_219"/>
+          <p:cNvPr id="5" name="title_216"/>
           <p:cNvSpPr/>
           <p:nvPr/>
         </p:nvSpPr>
@@ -36780,7 +36338,7 @@
       </p:sp>
       <p:pic>
         <p:nvPicPr>
-          <p:cNvPr id="6" name="brP_220" descr="/home/claude/lls-course/v2/assets/brush-pink.png">    </p:cNvPr>
+          <p:cNvPr id="6" name="brP_217" descr="/home/claude/lls-course/v2/assets/brush-pink.png">    </p:cNvPr>
           <p:cNvPicPr>
             <a:picLocks noChangeAspect="1"/>
           </p:cNvPicPr>
@@ -36804,7 +36362,7 @@
       </p:pic>
       <p:sp>
         <p:nvSpPr>
-          <p:cNvPr id="7" name="ins_221"/>
+          <p:cNvPr id="7" name="ins_218"/>
           <p:cNvSpPr/>
           <p:nvPr/>
         </p:nvSpPr>
@@ -36845,7 +36403,7 @@
       </p:sp>
       <p:sp>
         <p:nvSpPr>
-          <p:cNvPr id="8" name="insIT_222"/>
+          <p:cNvPr id="8" name="insIT_219"/>
           <p:cNvSpPr/>
           <p:nvPr/>
         </p:nvSpPr>
@@ -36886,7 +36444,7 @@
       </p:sp>
       <p:sp>
         <p:nvSpPr>
-          <p:cNvPr id="9" name="cmd_223"/>
+          <p:cNvPr id="9" name="cmd_220"/>
           <p:cNvSpPr/>
           <p:nvPr/>
         </p:nvSpPr>
@@ -36917,12 +36475,12 @@
           </a:effectLst>
         </p:spPr>
         <p:txBody>
-          <a:bodyPr wrap="square" lIns="101600" tIns="0" rIns="101600" bIns="0" rtlCol="0" anchor="ctr">
+          <a:bodyPr wrap="square" lIns="76200" tIns="0" rIns="76200" bIns="0" rtlCol="0" anchor="ctr">
             <a:normAutofit/>
           </a:bodyPr>
           <a:lstStyle/>
           <a:p>
-            <a:pPr indent="0" marL="0">
+            <a:pPr algn="ctr" indent="0" marL="0">
               <a:buNone/>
             </a:pPr>
             <a:r>
@@ -36933,7 +36491,7 @@
               </a:rPr>
               <a:t>👀 </a:t>
             </a:r>
-            <a:pPr indent="0" marL="0">
+            <a:pPr algn="ctr" indent="0" marL="0">
               <a:buNone/>
             </a:pPr>
             <a:r>
@@ -36947,7 +36505,7 @@
               </a:rPr>
               <a:t>READ</a:t>
             </a:r>
-            <a:pPr indent="0" marL="0">
+            <a:pPr algn="ctr" indent="0" marL="0">
               <a:buNone/>
             </a:pPr>
             <a:r>
@@ -36967,13 +36525,13 @@
       </p:sp>
       <p:sp>
         <p:nvSpPr>
-          <p:cNvPr id="10" name="meta_224"/>
-          <p:cNvSpPr/>
-          <p:nvPr/>
-        </p:nvSpPr>
-        <p:spPr>
-          <a:xfrm>
-            <a:off x="6510528" y="493776"/>
+          <p:cNvPr id="10" name="meta_221"/>
+          <p:cNvSpPr/>
+          <p:nvPr/>
+        </p:nvSpPr>
+        <p:spPr>
+          <a:xfrm>
+            <a:off x="6510528" y="548640"/>
             <a:ext cx="1901952" cy="274320"/>
           </a:xfrm>
           <a:prstGeom prst="roundRect">
@@ -37016,13 +36574,13 @@
       </p:sp>
       <p:sp>
         <p:nvSpPr>
-          <p:cNvPr id="11" name="tag_225"/>
-          <p:cNvSpPr/>
-          <p:nvPr/>
-        </p:nvSpPr>
-        <p:spPr>
-          <a:xfrm>
-            <a:off x="6510528" y="804672"/>
+          <p:cNvPr id="11" name="tag_222"/>
+          <p:cNvSpPr/>
+          <p:nvPr/>
+        </p:nvSpPr>
+        <p:spPr>
+          <a:xfrm>
+            <a:off x="6510528" y="914400"/>
             <a:ext cx="1901952" cy="274320"/>
           </a:xfrm>
           <a:prstGeom prst="roundRect">
@@ -37079,7 +36637,7 @@
       </p:sp>
       <p:pic>
         <p:nvPicPr>
-          <p:cNvPr id="12" name="logo_226" descr="/home/claude/lls-course/v2/img/logo.png">    </p:cNvPr>
+          <p:cNvPr id="12" name="logo_223" descr="/home/claude/lls-course/v2/img/logo.png">    </p:cNvPr>
           <p:cNvPicPr>
             <a:picLocks noChangeAspect="1"/>
           </p:cNvPicPr>
@@ -37103,7 +36661,7 @@
       </p:pic>
       <p:sp>
         <p:nvSpPr>
-          <p:cNvPr id="13" name="foot_227"/>
+          <p:cNvPr id="13" name="foot_224"/>
           <p:cNvSpPr/>
           <p:nvPr/>
         </p:nvSpPr>
@@ -37142,7 +36700,7 @@
       </p:sp>
       <p:sp>
         <p:nvSpPr>
-          <p:cNvPr id="14" name="cd_228"/>
+          <p:cNvPr id="14" name="cd_225"/>
           <p:cNvSpPr/>
           <p:nvPr/>
         </p:nvSpPr>
@@ -37176,7 +36734,7 @@
       </p:sp>
       <p:sp>
         <p:nvSpPr>
-          <p:cNvPr id="15" name="rd_229"/>
+          <p:cNvPr id="15" name="rd_226"/>
           <p:cNvSpPr/>
           <p:nvPr/>
         </p:nvSpPr>
@@ -37244,7 +36802,7 @@
       </p:sp>
       <p:sp>
         <p:nvSpPr>
-          <p:cNvPr id="16" name="rd_230"/>
+          <p:cNvPr id="16" name="rd_227"/>
           <p:cNvSpPr/>
           <p:nvPr/>
         </p:nvSpPr>
@@ -37312,7 +36870,7 @@
       </p:sp>
       <p:sp>
         <p:nvSpPr>
-          <p:cNvPr id="17" name="rdl_231"/>
+          <p:cNvPr id="17" name="rdl_228"/>
           <p:cNvSpPr/>
           <p:nvPr/>
         </p:nvSpPr>

--- a/materials/B2/B2_6B-2_Music_to_my_ears.pptx
+++ b/materials/B2/B2_6B-2_Music_to_my_ears.pptx
@@ -25,9 +25,10 @@
     <p:sldId id="273" r:id="rId19"/>
     <p:sldId id="274" r:id="rId20"/>
     <p:sldId id="275" r:id="rId21"/>
+    <p:sldId id="276" r:id="rId22"/>
   </p:sldIdLst>
   <p:notesMasterIdLst>
-    <p:notesMasterId r:id="rId22"/>
+    <p:notesMasterId r:id="rId23"/>
   </p:notesMasterIdLst>
   <p:sldSz cx="9144000" cy="5143500"/>
   <p:notesSz cx="5143500" cy="9144000"/>
@@ -1589,8 +1590,8 @@
           <a:p>
             <a:r>
               <a:rPr lang="en-US" dirty="0"/>
-              <a:t>20. Speaking · debate statements (5 min)
-EXTRA (5 min). SB 5. Statements one per click. Each group discusses; then one student must argue the OPPOSITE of what they think ('devil's advocate'). VIDEO 6 (Isata Kanneh-Mason): the video is not in our files – if you have English File Online Practice / the DVD, SB 6a–c work well here (key in SB key 6).</a:t>
+              <a:t>20. OPTIONAL EXTENSIONS
+The lesson ended on the previous slide ("Today you…"). Use the next slides only if there is time left, or keep them for a quick start next lesson.</a:t>
             </a:r>
             <a:endParaRPr lang="en-US" dirty="0"/>
           </a:p>
@@ -1614,6 +1615,95 @@
             <a:fld id="{F7021451-1387-4CA6-816F-3879F97B5CBC}" type="slidenum">
               <a:rPr lang="en-US"/>
               <a:t>20</a:t>
+            </a:fld>
+            <a:endParaRPr lang="en-US"/>
+          </a:p>
+        </p:txBody>
+      </p:sp>
+    </p:spTree>
+    <p:extLst>
+      <p:ext uri="{BB962C8B-B14F-4D97-AF65-F5344CB8AC3E}">
+        <p14:creationId xmlns:p14="http://schemas.microsoft.com/office/powerpoint/2010/main" val="1024086991"/>
+      </p:ext>
+    </p:extLst>
+  </p:cSld>
+  <p:clrMapOvr>
+    <a:masterClrMapping/>
+  </p:clrMapOvr>
+</p:notes>
+</file>
+
+<file path=ppt/notesSlides/notesSlide21.xml><?xml version="1.0" encoding="utf-8"?>
+<p:notes xmlns:a="http://schemas.openxmlformats.org/drawingml/2006/main" xmlns:r="http://schemas.openxmlformats.org/officeDocument/2006/relationships" xmlns:p="http://schemas.openxmlformats.org/presentationml/2006/main">
+  <p:cSld>
+    <p:spTree>
+      <p:nvGrpSpPr>
+        <p:cNvPr id="1" name=""/>
+        <p:cNvGrpSpPr/>
+        <p:nvPr/>
+      </p:nvGrpSpPr>
+      <p:grpSpPr>
+        <a:xfrm>
+          <a:off x="0" y="0"/>
+          <a:ext cx="0" cy="0"/>
+          <a:chOff x="0" y="0"/>
+          <a:chExt cx="0" cy="0"/>
+        </a:xfrm>
+      </p:grpSpPr>
+      <p:sp>
+        <p:nvSpPr>
+          <p:cNvPr id="2" name="Slide Image Placeholder 1"/>
+          <p:cNvSpPr>
+            <a:spLocks noGrp="1" noRot="1" noChangeAspect="1"/>
+          </p:cNvSpPr>
+          <p:nvPr>
+            <p:ph type="sldImg"/>
+          </p:nvPr>
+        </p:nvSpPr>
+        <p:spPr/>
+      </p:sp>
+      <p:sp>
+        <p:nvSpPr>
+          <p:cNvPr id="3" name="Notes Placeholder 2"/>
+          <p:cNvSpPr>
+            <a:spLocks noGrp="1"/>
+          </p:cNvSpPr>
+          <p:nvPr>
+            <p:ph type="body" idx="1"/>
+          </p:nvPr>
+        </p:nvSpPr>
+        <p:spPr/>
+        <p:txBody>
+          <a:bodyPr/>
+          <a:lstStyle/>
+          <a:p>
+            <a:r>
+              <a:rPr lang="en-US" dirty="0"/>
+              <a:t>21. Speaking · debate statements (5 min)
+EXTRA (5 min). SB 5. Statements one per click. Each group discusses; then one student must argue the OPPOSITE of what they think ('devil's advocate'). VIDEO 6 (Isata Kanneh-Mason): the video is not in our files – if you have English File Online Practice / the DVD, SB 6a–c work well here (key in SB key 6).</a:t>
+            </a:r>
+            <a:endParaRPr lang="en-US" dirty="0"/>
+          </a:p>
+        </p:txBody>
+      </p:sp>
+      <p:sp>
+        <p:nvSpPr>
+          <p:cNvPr id="4" name="Slide Number Placeholder 3"/>
+          <p:cNvSpPr>
+            <a:spLocks noGrp="1"/>
+          </p:cNvSpPr>
+          <p:nvPr>
+            <p:ph type="sldNum" sz="quarter" idx="10"/>
+          </p:nvPr>
+        </p:nvSpPr>
+        <p:spPr/>
+        <p:txBody>
+          <a:bodyPr/>
+          <a:lstStyle/>
+          <a:p>
+            <a:fld id="{F7021451-1387-4CA6-816F-3879F97B5CBC}" type="slidenum">
+              <a:rPr lang="en-US"/>
+              <a:t>21</a:t>
             </a:fld>
             <a:endParaRPr lang="en-US"/>
           </a:p>
@@ -22337,7 +22427,187 @@
       </p:grpSpPr>
       <p:sp>
         <p:nvSpPr>
-          <p:cNvPr id="3" name="bd_489"/>
+          <p:cNvPr id="3" name="dv_489"/>
+          <p:cNvSpPr/>
+          <p:nvPr/>
+        </p:nvSpPr>
+        <p:spPr>
+          <a:xfrm>
+            <a:off x="4023360" y="914400"/>
+            <a:ext cx="1097280" cy="914400"/>
+          </a:xfrm>
+          <a:prstGeom prst="rect">
+            <a:avLst/>
+          </a:prstGeom>
+          <a:noFill/>
+          <a:ln/>
+        </p:spPr>
+        <p:txBody>
+          <a:bodyPr wrap="square" lIns="0" tIns="0" rIns="0" bIns="0" rtlCol="0" anchor="ctr"/>
+          <a:lstStyle/>
+          <a:p>
+            <a:pPr algn="ctr" indent="0" marL="0">
+              <a:buNone/>
+            </a:pPr>
+            <a:r>
+              <a:rPr lang="en-US" sz="5400" dirty="0">
+                <a:solidFill>
+                  <a:srgbClr val="000000"/>
+                </a:solidFill>
+              </a:rPr>
+              <a:t>⭐</a:t>
+            </a:r>
+            <a:endParaRPr lang="en-US" sz="5400" dirty="0"/>
+          </a:p>
+        </p:txBody>
+      </p:sp>
+      <p:sp>
+        <p:nvSpPr>
+          <p:cNvPr id="4" name="dvt_490"/>
+          <p:cNvSpPr/>
+          <p:nvPr/>
+        </p:nvSpPr>
+        <p:spPr>
+          <a:xfrm>
+            <a:off x="914400" y="1828800"/>
+            <a:ext cx="7315200" cy="731520"/>
+          </a:xfrm>
+          <a:prstGeom prst="rect">
+            <a:avLst/>
+          </a:prstGeom>
+          <a:noFill/>
+          <a:ln/>
+        </p:spPr>
+        <p:txBody>
+          <a:bodyPr wrap="square" lIns="0" tIns="0" rIns="0" bIns="0" rtlCol="0" anchor="ctr"/>
+          <a:lstStyle/>
+          <a:p>
+            <a:pPr algn="ctr" indent="0" marL="0">
+              <a:buNone/>
+            </a:pPr>
+            <a:r>
+              <a:rPr lang="en-US" sz="3400" dirty="0">
+                <a:solidFill>
+                  <a:srgbClr val="1B2559"/>
+                </a:solidFill>
+                <a:latin typeface="Arial Rounded MT Bold" pitchFamily="34" charset="0"/>
+                <a:ea typeface="Arial Rounded MT Bold" pitchFamily="34" charset="-122"/>
+                <a:cs typeface="Arial Rounded MT Bold" pitchFamily="34" charset="-120"/>
+              </a:rPr>
+              <a:t>Optional extensions</a:t>
+            </a:r>
+            <a:endParaRPr lang="en-US" sz="3400" dirty="0"/>
+          </a:p>
+        </p:txBody>
+      </p:sp>
+      <p:sp>
+        <p:nvSpPr>
+          <p:cNvPr id="5" name="dvs_491"/>
+          <p:cNvSpPr/>
+          <p:nvPr/>
+        </p:nvSpPr>
+        <p:spPr>
+          <a:xfrm>
+            <a:off x="914400" y="2606040"/>
+            <a:ext cx="7315200" cy="457200"/>
+          </a:xfrm>
+          <a:prstGeom prst="rect">
+            <a:avLst/>
+          </a:prstGeom>
+          <a:noFill/>
+          <a:ln/>
+        </p:spPr>
+        <p:txBody>
+          <a:bodyPr wrap="square" lIns="0" tIns="0" rIns="0" bIns="0" rtlCol="0" anchor="ctr"/>
+          <a:lstStyle/>
+          <a:p>
+            <a:pPr algn="ctr" indent="0" marL="0">
+              <a:buNone/>
+            </a:pPr>
+            <a:r>
+              <a:rPr lang="en-US" sz="1250" i="1" dirty="0">
+                <a:solidFill>
+                  <a:srgbClr val="5B6785"/>
+                </a:solidFill>
+                <a:latin typeface="Segoe UI Semibold" pitchFamily="34" charset="0"/>
+                <a:ea typeface="Segoe UI Semibold" pitchFamily="34" charset="-122"/>
+                <a:cs typeface="Segoe UI Semibold" pitchFamily="34" charset="-120"/>
+              </a:rPr>
+              <a:t>Only if there's time – the lesson is finished. · Solo se c'è tempo – la lezione è finita.</a:t>
+            </a:r>
+            <a:endParaRPr lang="en-US" sz="1250" dirty="0"/>
+          </a:p>
+        </p:txBody>
+      </p:sp>
+      <p:pic>
+        <p:nvPicPr>
+          <p:cNvPr id="6" name="logo_492" descr="/home/claude/lls-course/v2/img/logo.png">    </p:cNvPr>
+          <p:cNvPicPr>
+            <a:picLocks noChangeAspect="1"/>
+          </p:cNvPicPr>
+          <p:nvPr/>
+        </p:nvPicPr>
+        <p:blipFill>
+          <a:blip r:embed="rId2"/>
+          <a:stretch>
+            <a:fillRect/>
+          </a:stretch>
+        </p:blipFill>
+        <p:spPr>
+          <a:xfrm>
+            <a:off x="8485632" y="4526280"/>
+            <a:ext cx="502920" cy="502920"/>
+          </a:xfrm>
+          <a:prstGeom prst="rect">
+            <a:avLst/>
+          </a:prstGeom>
+        </p:spPr>
+      </p:pic>
+    </p:spTree>
+  </p:cSld>
+  <p:clrMapOvr>
+    <a:masterClrMapping/>
+  </p:clrMapOvr>
+  <p:transition spd="med">
+    <p:push dir="l"/>
+  </p:transition>
+</p:sld>
+</file>
+
+<file path=ppt/slides/slide21.xml><?xml version="1.0" encoding="utf-8"?>
+<p:sld xmlns:a="http://schemas.openxmlformats.org/drawingml/2006/main" xmlns:r="http://schemas.openxmlformats.org/officeDocument/2006/relationships" xmlns:p="http://schemas.openxmlformats.org/presentationml/2006/main">
+  <p:cSld name="Slide 21">
+    <p:bg>
+      <p:bgPr>
+        <a:blipFill dpi="0" rotWithShape="1">
+          <a:blip r:embed="rId1">
+            <a:lum/>
+          </a:blip>
+          <a:srcRect/>
+          <a:stretch>
+            <a:fillRect/>
+          </a:stretch>
+        </a:blipFill>
+        <a:effectLst/>
+      </p:bgPr>
+    </p:bg>
+    <p:spTree>
+      <p:nvGrpSpPr>
+        <p:cNvPr id="2" name=""/>
+        <p:cNvGrpSpPr/>
+        <p:nvPr/>
+      </p:nvGrpSpPr>
+      <p:grpSpPr>
+        <a:xfrm>
+          <a:off x="0" y="0"/>
+          <a:ext cx="0" cy="0"/>
+          <a:chOff x="0" y="0"/>
+          <a:chExt cx="0" cy="0"/>
+        </a:xfrm>
+      </p:grpSpPr>
+      <p:sp>
+        <p:nvSpPr>
+          <p:cNvPr id="3" name="bd_493"/>
           <p:cNvSpPr/>
           <p:nvPr/>
         </p:nvSpPr>
@@ -22381,7 +22651,7 @@
                 <a:ea typeface="Arial Rounded MT Bold" pitchFamily="34" charset="-122"/>
                 <a:cs typeface="Arial Rounded MT Bold" pitchFamily="34" charset="-120"/>
               </a:rPr>
-              <a:t>20</a:t>
+              <a:t>21</a:t>
             </a:r>
             <a:endParaRPr lang="en-US" sz="2200" dirty="0"/>
           </a:p>
@@ -22389,7 +22659,7 @@
       </p:sp>
       <p:pic>
         <p:nvPicPr>
-          <p:cNvPr id="4" name="brY_490" descr="/home/claude/lls-course/v2/assets/brush-yellow.png">    </p:cNvPr>
+          <p:cNvPr id="4" name="brY_494" descr="/home/claude/lls-course/v2/assets/brush-yellow.png">    </p:cNvPr>
           <p:cNvPicPr>
             <a:picLocks noChangeAspect="1"/>
           </p:cNvPicPr>
@@ -22413,7 +22683,7 @@
       </p:pic>
       <p:sp>
         <p:nvSpPr>
-          <p:cNvPr id="5" name="title_491"/>
+          <p:cNvPr id="5" name="title_495"/>
           <p:cNvSpPr/>
           <p:nvPr/>
         </p:nvSpPr>
@@ -22454,7 +22724,7 @@
       </p:sp>
       <p:pic>
         <p:nvPicPr>
-          <p:cNvPr id="6" name="brP_492" descr="/home/claude/lls-course/v2/assets/brush-pink.png">    </p:cNvPr>
+          <p:cNvPr id="6" name="brP_496" descr="/home/claude/lls-course/v2/assets/brush-pink.png">    </p:cNvPr>
           <p:cNvPicPr>
             <a:picLocks noChangeAspect="1"/>
           </p:cNvPicPr>
@@ -22478,7 +22748,7 @@
       </p:pic>
       <p:sp>
         <p:nvSpPr>
-          <p:cNvPr id="7" name="ins_493"/>
+          <p:cNvPr id="7" name="ins_497"/>
           <p:cNvSpPr/>
           <p:nvPr/>
         </p:nvSpPr>
@@ -22519,7 +22789,7 @@
       </p:sp>
       <p:sp>
         <p:nvSpPr>
-          <p:cNvPr id="8" name="insIT_494"/>
+          <p:cNvPr id="8" name="insIT_498"/>
           <p:cNvSpPr/>
           <p:nvPr/>
         </p:nvSpPr>
@@ -22560,7 +22830,7 @@
       </p:sp>
       <p:sp>
         <p:nvSpPr>
-          <p:cNvPr id="9" name="cmd_495"/>
+          <p:cNvPr id="9" name="cmd_499"/>
           <p:cNvSpPr/>
           <p:nvPr/>
         </p:nvSpPr>
@@ -22641,7 +22911,7 @@
       </p:sp>
       <p:sp>
         <p:nvSpPr>
-          <p:cNvPr id="10" name="meta_496"/>
+          <p:cNvPr id="10" name="meta_500"/>
           <p:cNvSpPr/>
           <p:nvPr/>
         </p:nvSpPr>
@@ -22690,7 +22960,7 @@
       </p:sp>
       <p:sp>
         <p:nvSpPr>
-          <p:cNvPr id="11" name="tag_497"/>
+          <p:cNvPr id="11" name="tag_501"/>
           <p:cNvSpPr/>
           <p:nvPr/>
         </p:nvSpPr>
@@ -22753,7 +23023,7 @@
       </p:sp>
       <p:pic>
         <p:nvPicPr>
-          <p:cNvPr id="12" name="logo_498" descr="/home/claude/lls-course/v2/img/logo.png">    </p:cNvPr>
+          <p:cNvPr id="12" name="logo_502" descr="/home/claude/lls-course/v2/img/logo.png">    </p:cNvPr>
           <p:cNvPicPr>
             <a:picLocks noChangeAspect="1"/>
           </p:cNvPicPr>
@@ -22777,7 +23047,7 @@
       </p:pic>
       <p:sp>
         <p:nvSpPr>
-          <p:cNvPr id="13" name="foot_499"/>
+          <p:cNvPr id="13" name="foot_503"/>
           <p:cNvSpPr/>
           <p:nvPr/>
         </p:nvSpPr>
@@ -22816,61 +23086,54 @@
       </p:sp>
       <p:sp>
         <p:nvSpPr>
-          <p:cNvPr id="14" name="st_500"/>
-          <p:cNvSpPr/>
-          <p:nvPr/>
-        </p:nvSpPr>
-        <p:spPr>
-          <a:xfrm rot="-180000">
-            <a:off x="7315200" y="4773168"/>
-            <a:ext cx="1600200" cy="292608"/>
-          </a:xfrm>
-          <a:prstGeom prst="rect">
-            <a:avLst/>
+          <p:cNvPr id="14" name="ext_504"/>
+          <p:cNvSpPr/>
+          <p:nvPr/>
+        </p:nvSpPr>
+        <p:spPr>
+          <a:xfrm>
+            <a:off x="5120640" y="4727448"/>
+            <a:ext cx="3291840" cy="310896"/>
+          </a:xfrm>
+          <a:prstGeom prst="roundRect">
+            <a:avLst>
+              <a:gd name="adj" fmla="val 50000"/>
+            </a:avLst>
           </a:prstGeom>
           <a:solidFill>
-            <a:srgbClr val="FFE07A"/>
+            <a:srgbClr val="EEE8FB"/>
           </a:solidFill>
-          <a:ln>
+          <a:ln w="28575">
             <a:solidFill>
-              <a:srgbClr val="FFE07A"/>
+              <a:srgbClr val="CDBFF3"/>
             </a:solidFill>
           </a:ln>
-          <a:effectLst>
-            <a:outerShdw sx="100000" sy="100000" kx="0" ky="0" algn="bl" rotWithShape="0" blurRad="88900" dist="31750" dir="5400000">
-              <a:srgbClr val="1B2559">
-                <a:alpha val="15000"/>
-              </a:srgbClr>
-            </a:outerShdw>
-          </a:effectLst>
-        </p:spPr>
-        <p:txBody>
-          <a:bodyPr wrap="square" lIns="50800" tIns="50800" rIns="50800" bIns="50800" rtlCol="0" anchor="ctr">
-            <a:normAutofit/>
-          </a:bodyPr>
+        </p:spPr>
+        <p:txBody>
+          <a:bodyPr wrap="square" lIns="0" tIns="0" rIns="0" bIns="0" rtlCol="0" anchor="ctr"/>
           <a:lstStyle/>
           <a:p>
             <a:pPr algn="ctr" indent="0" marL="0">
               <a:buNone/>
             </a:pPr>
             <a:r>
-              <a:rPr lang="en-US" sz="900" dirty="0">
-                <a:solidFill>
-                  <a:srgbClr val="1B2559"/>
+              <a:rPr lang="en-US" sz="1050" dirty="0">
+                <a:solidFill>
+                  <a:srgbClr val="7B5CD6"/>
                 </a:solidFill>
                 <a:latin typeface="Arial Rounded MT Bold" pitchFamily="34" charset="0"/>
                 <a:ea typeface="Arial Rounded MT Bold" pitchFamily="34" charset="-122"/>
                 <a:cs typeface="Arial Rounded MT Bold" pitchFamily="34" charset="-120"/>
               </a:rPr>
-              <a:t>EXTRA · if there's time</a:t>
-            </a:r>
-            <a:endParaRPr lang="en-US" sz="900" dirty="0"/>
-          </a:p>
-        </p:txBody>
-      </p:sp>
-      <p:sp>
-        <p:nvSpPr>
-          <p:cNvPr id="15" name="cd_501"/>
+              <a:t>⭐ OPTIONAL EXTENSION · only if there's time</a:t>
+            </a:r>
+            <a:endParaRPr lang="en-US" sz="1050" dirty="0"/>
+          </a:p>
+        </p:txBody>
+      </p:sp>
+      <p:sp>
+        <p:nvSpPr>
+          <p:cNvPr id="15" name="cd_505"/>
           <p:cNvSpPr/>
           <p:nvPr/>
         </p:nvSpPr>
@@ -22904,7 +23167,7 @@
       </p:sp>
       <p:sp>
         <p:nvSpPr>
-          <p:cNvPr id="16" name="ii_502"/>
+          <p:cNvPr id="16" name="ii_506"/>
           <p:cNvSpPr/>
           <p:nvPr/>
         </p:nvSpPr>
@@ -22940,7 +23203,7 @@
       </p:sp>
       <p:sp>
         <p:nvSpPr>
-          <p:cNvPr id="17" name="ih_503"/>
+          <p:cNvPr id="17" name="ih_507"/>
           <p:cNvSpPr/>
           <p:nvPr/>
         </p:nvSpPr>
@@ -22979,7 +23242,7 @@
       </p:sp>
       <p:sp>
         <p:nvSpPr>
-          <p:cNvPr id="18" name="il_504"/>
+          <p:cNvPr id="18" name="il_508"/>
           <p:cNvSpPr/>
           <p:nvPr/>
         </p:nvSpPr>
@@ -23096,7 +23359,7 @@
       </p:sp>
       <p:sp>
         <p:nvSpPr>
-          <p:cNvPr id="19" name="R1_qb505"/>
+          <p:cNvPr id="19" name="R1_qb509"/>
           <p:cNvSpPr/>
           <p:nvPr/>
         </p:nvSpPr>
@@ -23148,7 +23411,7 @@
       </p:sp>
       <p:sp>
         <p:nvSpPr>
-          <p:cNvPr id="20" name="R1_sq506"/>
+          <p:cNvPr id="20" name="R1_sq510"/>
           <p:cNvSpPr/>
           <p:nvPr/>
         </p:nvSpPr>
@@ -23221,7 +23484,7 @@
       </p:sp>
       <p:sp>
         <p:nvSpPr>
-          <p:cNvPr id="21" name="R2_qb507"/>
+          <p:cNvPr id="21" name="R2_qb511"/>
           <p:cNvSpPr/>
           <p:nvPr/>
         </p:nvSpPr>
@@ -23273,7 +23536,7 @@
       </p:sp>
       <p:sp>
         <p:nvSpPr>
-          <p:cNvPr id="22" name="R2_sq508"/>
+          <p:cNvPr id="22" name="R2_sq512"/>
           <p:cNvSpPr/>
           <p:nvPr/>
         </p:nvSpPr>
@@ -23346,7 +23609,7 @@
       </p:sp>
       <p:sp>
         <p:nvSpPr>
-          <p:cNvPr id="23" name="R3_qb509"/>
+          <p:cNvPr id="23" name="R3_qb513"/>
           <p:cNvSpPr/>
           <p:nvPr/>
         </p:nvSpPr>
@@ -23398,7 +23661,7 @@
       </p:sp>
       <p:sp>
         <p:nvSpPr>
-          <p:cNvPr id="24" name="R3_sq510"/>
+          <p:cNvPr id="24" name="R3_sq514"/>
           <p:cNvSpPr/>
           <p:nvPr/>
         </p:nvSpPr>
@@ -23471,7 +23734,7 @@
       </p:sp>
       <p:sp>
         <p:nvSpPr>
-          <p:cNvPr id="25" name="R4_qb511"/>
+          <p:cNvPr id="25" name="R4_qb515"/>
           <p:cNvSpPr/>
           <p:nvPr/>
         </p:nvSpPr>
@@ -23523,7 +23786,7 @@
       </p:sp>
       <p:sp>
         <p:nvSpPr>
-          <p:cNvPr id="26" name="R4_sq512"/>
+          <p:cNvPr id="26" name="R4_sq516"/>
           <p:cNvSpPr/>
           <p:nvPr/>
         </p:nvSpPr>
@@ -23596,7 +23859,7 @@
       </p:sp>
       <p:sp>
         <p:nvSpPr>
-          <p:cNvPr id="27" name="R5_qb513"/>
+          <p:cNvPr id="27" name="R5_qb517"/>
           <p:cNvSpPr/>
           <p:nvPr/>
         </p:nvSpPr>
@@ -23648,7 +23911,7 @@
       </p:sp>
       <p:sp>
         <p:nvSpPr>
-          <p:cNvPr id="28" name="R5_sq514"/>
+          <p:cNvPr id="28" name="R5_sq518"/>
           <p:cNvSpPr/>
           <p:nvPr/>
         </p:nvSpPr>

--- a/materials/B2/B2_6B-2_Music_to_my_ears.pptx
+++ b/materials/B2/B2_6B-2_Music_to_my_ears.pptx
@@ -8938,11 +8938,11 @@
         <p:spPr>
           <a:xfrm>
             <a:off x="320040" y="1417320"/>
-            <a:ext cx="2788920" cy="3150616"/>
+            <a:ext cx="2788920" cy="2700528"/>
           </a:xfrm>
           <a:prstGeom prst="roundRect">
             <a:avLst>
-              <a:gd name="adj" fmla="val 4590"/>
+              <a:gd name="adj" fmla="val 4740"/>
             </a:avLst>
           </a:prstGeom>
           <a:solidFill>
@@ -9047,7 +9047,7 @@
         <p:spPr>
           <a:xfrm>
             <a:off x="886968" y="1911096"/>
-            <a:ext cx="2130552" cy="2583688"/>
+            <a:ext cx="2130552" cy="2133600"/>
           </a:xfrm>
           <a:prstGeom prst="rect">
             <a:avLst/>
@@ -9062,30 +9062,6 @@
           <a:lstStyle/>
           <a:p>
             <a:pPr marL="152400" indent="-152400">
-              <a:spcAft>
-                <a:spcPts val="200"/>
-              </a:spcAft>
-              <a:buSzPct val="100000"/>
-              <a:buChar char="•"/>
-            </a:pPr>
-            <a:r>
-              <a:rPr lang="en-US" sz="1100" dirty="0">
-                <a:solidFill>
-                  <a:srgbClr val="1B2559"/>
-                </a:solidFill>
-                <a:latin typeface="Segoe UI Semibold" pitchFamily="34" charset="0"/>
-                <a:ea typeface="Segoe UI Semibold" pitchFamily="34" charset="-122"/>
-                <a:cs typeface="Segoe UI Semibold" pitchFamily="34" charset="-120"/>
-              </a:rPr>
-              <a:t>1 minute: read your role and think of 2 reasons.</a:t>
-            </a:r>
-            <a:endParaRPr lang="en-US" sz="1100" dirty="0"/>
-          </a:p>
-          <a:p>
-            <a:pPr marL="152400" indent="-152400">
-              <a:spcBef>
-                <a:spcPts val="600"/>
-              </a:spcBef>
               <a:spcAft>
                 <a:spcPts val="200"/>
               </a:spcAft>

--- a/materials/B2/B2_6B-2_Music_to_my_ears.pptx
+++ b/materials/B2/B2_6B-2_Music_to_my_ears.pptx
@@ -3527,7 +3527,7 @@
       </p:grpSpPr>
       <p:sp>
         <p:nvSpPr>
-          <p:cNvPr id="3" name="bd_229"/>
+          <p:cNvPr id="3" name="bd_230"/>
           <p:cNvSpPr/>
           <p:nvPr/>
         </p:nvSpPr>
@@ -3579,7 +3579,7 @@
       </p:sp>
       <p:pic>
         <p:nvPicPr>
-          <p:cNvPr id="4" name="brY_230" descr="/home/claude/lls-course/v2/assets/brush-yellow.png">    </p:cNvPr>
+          <p:cNvPr id="4" name="brY_231" descr="/home/claude/lls-course/v2/assets/brush-yellow.png">    </p:cNvPr>
           <p:cNvPicPr>
             <a:picLocks noChangeAspect="1"/>
           </p:cNvPicPr>
@@ -3603,7 +3603,7 @@
       </p:pic>
       <p:sp>
         <p:nvSpPr>
-          <p:cNvPr id="5" name="title_231"/>
+          <p:cNvPr id="5" name="title_232"/>
           <p:cNvSpPr/>
           <p:nvPr/>
         </p:nvSpPr>
@@ -3644,7 +3644,7 @@
       </p:sp>
       <p:pic>
         <p:nvPicPr>
-          <p:cNvPr id="6" name="brP_232" descr="/home/claude/lls-course/v2/assets/brush-pink.png">    </p:cNvPr>
+          <p:cNvPr id="6" name="brP_233" descr="/home/claude/lls-course/v2/assets/brush-pink.png">    </p:cNvPr>
           <p:cNvPicPr>
             <a:picLocks noChangeAspect="1"/>
           </p:cNvPicPr>
@@ -3668,7 +3668,7 @@
       </p:pic>
       <p:sp>
         <p:nvSpPr>
-          <p:cNvPr id="7" name="ins_233"/>
+          <p:cNvPr id="7" name="ins_234"/>
           <p:cNvSpPr/>
           <p:nvPr/>
         </p:nvSpPr>
@@ -3709,7 +3709,7 @@
       </p:sp>
       <p:sp>
         <p:nvSpPr>
-          <p:cNvPr id="8" name="insIT_234"/>
+          <p:cNvPr id="8" name="insIT_235"/>
           <p:cNvSpPr/>
           <p:nvPr/>
         </p:nvSpPr>
@@ -3750,7 +3750,7 @@
       </p:sp>
       <p:sp>
         <p:nvSpPr>
-          <p:cNvPr id="9" name="cmd_235"/>
+          <p:cNvPr id="9" name="cmd_236"/>
           <p:cNvSpPr/>
           <p:nvPr/>
         </p:nvSpPr>
@@ -3831,7 +3831,7 @@
       </p:sp>
       <p:sp>
         <p:nvSpPr>
-          <p:cNvPr id="10" name="meta_236"/>
+          <p:cNvPr id="10" name="meta_237"/>
           <p:cNvSpPr/>
           <p:nvPr/>
         </p:nvSpPr>
@@ -3880,7 +3880,7 @@
       </p:sp>
       <p:sp>
         <p:nvSpPr>
-          <p:cNvPr id="11" name="tag_237"/>
+          <p:cNvPr id="11" name="tag_238"/>
           <p:cNvSpPr/>
           <p:nvPr/>
         </p:nvSpPr>
@@ -3943,7 +3943,7 @@
       </p:sp>
       <p:pic>
         <p:nvPicPr>
-          <p:cNvPr id="12" name="logo_238" descr="/home/claude/lls-course/v2/img/logo.png">    </p:cNvPr>
+          <p:cNvPr id="12" name="logo_239" descr="/home/claude/lls-course/v2/img/logo.png">    </p:cNvPr>
           <p:cNvPicPr>
             <a:picLocks noChangeAspect="1"/>
           </p:cNvPicPr>
@@ -3967,7 +3967,7 @@
       </p:pic>
       <p:sp>
         <p:nvSpPr>
-          <p:cNvPr id="13" name="foot_239"/>
+          <p:cNvPr id="13" name="foot_240"/>
           <p:cNvSpPr/>
           <p:nvPr/>
         </p:nvSpPr>
@@ -4006,7 +4006,7 @@
       </p:sp>
       <p:sp>
         <p:nvSpPr>
-          <p:cNvPr id="14" name="cd_240"/>
+          <p:cNvPr id="14" name="cd_241"/>
           <p:cNvSpPr/>
           <p:nvPr/>
         </p:nvSpPr>
@@ -4040,7 +4040,7 @@
       </p:sp>
       <p:sp>
         <p:nvSpPr>
-          <p:cNvPr id="15" name="rd_241"/>
+          <p:cNvPr id="15" name="rd_242"/>
           <p:cNvSpPr/>
           <p:nvPr/>
         </p:nvSpPr>
@@ -4108,7 +4108,7 @@
       </p:sp>
       <p:sp>
         <p:nvSpPr>
-          <p:cNvPr id="16" name="rd_242"/>
+          <p:cNvPr id="16" name="rd_243"/>
           <p:cNvSpPr/>
           <p:nvPr/>
         </p:nvSpPr>
@@ -4176,7 +4176,7 @@
       </p:sp>
       <p:sp>
         <p:nvSpPr>
-          <p:cNvPr id="17" name="rdl_243"/>
+          <p:cNvPr id="17" name="rdl_244"/>
           <p:cNvSpPr/>
           <p:nvPr/>
         </p:nvSpPr>
@@ -4241,7 +4241,7 @@
       </p:grpSpPr>
       <p:sp>
         <p:nvSpPr>
-          <p:cNvPr id="3" name="bd_244"/>
+          <p:cNvPr id="3" name="bd_245"/>
           <p:cNvSpPr/>
           <p:nvPr/>
         </p:nvSpPr>
@@ -4293,7 +4293,7 @@
       </p:sp>
       <p:pic>
         <p:nvPicPr>
-          <p:cNvPr id="4" name="brY_245" descr="/home/claude/lls-course/v2/assets/brush-yellow.png">    </p:cNvPr>
+          <p:cNvPr id="4" name="brY_246" descr="/home/claude/lls-course/v2/assets/brush-yellow.png">    </p:cNvPr>
           <p:cNvPicPr>
             <a:picLocks noChangeAspect="1"/>
           </p:cNvPicPr>
@@ -4317,7 +4317,7 @@
       </p:pic>
       <p:sp>
         <p:nvSpPr>
-          <p:cNvPr id="5" name="title_246"/>
+          <p:cNvPr id="5" name="title_247"/>
           <p:cNvSpPr/>
           <p:nvPr/>
         </p:nvSpPr>
@@ -4358,7 +4358,7 @@
       </p:sp>
       <p:pic>
         <p:nvPicPr>
-          <p:cNvPr id="6" name="brP_247" descr="/home/claude/lls-course/v2/assets/brush-pink.png">    </p:cNvPr>
+          <p:cNvPr id="6" name="brP_248" descr="/home/claude/lls-course/v2/assets/brush-pink.png">    </p:cNvPr>
           <p:cNvPicPr>
             <a:picLocks noChangeAspect="1"/>
           </p:cNvPicPr>
@@ -4382,7 +4382,7 @@
       </p:pic>
       <p:sp>
         <p:nvSpPr>
-          <p:cNvPr id="7" name="ins_248"/>
+          <p:cNvPr id="7" name="ins_249"/>
           <p:cNvSpPr/>
           <p:nvPr/>
         </p:nvSpPr>
@@ -4423,7 +4423,7 @@
       </p:sp>
       <p:sp>
         <p:nvSpPr>
-          <p:cNvPr id="8" name="insIT_249"/>
+          <p:cNvPr id="8" name="insIT_250"/>
           <p:cNvSpPr/>
           <p:nvPr/>
         </p:nvSpPr>
@@ -4464,7 +4464,7 @@
       </p:sp>
       <p:sp>
         <p:nvSpPr>
-          <p:cNvPr id="9" name="cmd_250"/>
+          <p:cNvPr id="9" name="cmd_251"/>
           <p:cNvSpPr/>
           <p:nvPr/>
         </p:nvSpPr>
@@ -4570,7 +4570,7 @@
       </p:sp>
       <p:sp>
         <p:nvSpPr>
-          <p:cNvPr id="10" name="meta_251"/>
+          <p:cNvPr id="10" name="meta_252"/>
           <p:cNvSpPr/>
           <p:nvPr/>
         </p:nvSpPr>
@@ -4619,7 +4619,7 @@
       </p:sp>
       <p:sp>
         <p:nvSpPr>
-          <p:cNvPr id="11" name="tag_252"/>
+          <p:cNvPr id="11" name="tag_253"/>
           <p:cNvSpPr/>
           <p:nvPr/>
         </p:nvSpPr>
@@ -4682,7 +4682,7 @@
       </p:sp>
       <p:pic>
         <p:nvPicPr>
-          <p:cNvPr id="12" name="logo_253" descr="/home/claude/lls-course/v2/img/logo.png">    </p:cNvPr>
+          <p:cNvPr id="12" name="logo_254" descr="/home/claude/lls-course/v2/img/logo.png">    </p:cNvPr>
           <p:cNvPicPr>
             <a:picLocks noChangeAspect="1"/>
           </p:cNvPicPr>
@@ -4706,7 +4706,7 @@
       </p:pic>
       <p:sp>
         <p:nvSpPr>
-          <p:cNvPr id="13" name="foot_254"/>
+          <p:cNvPr id="13" name="foot_255"/>
           <p:cNvSpPr/>
           <p:nvPr/>
         </p:nvSpPr>
@@ -4745,7 +4745,7 @@
       </p:sp>
       <p:sp>
         <p:nvSpPr>
-          <p:cNvPr id="14" name="bd_255"/>
+          <p:cNvPr id="14" name="bd_256"/>
           <p:cNvSpPr/>
           <p:nvPr/>
         </p:nvSpPr>
@@ -4797,7 +4797,7 @@
       </p:sp>
       <p:sp>
         <p:nvSpPr>
-          <p:cNvPr id="15" name="q_256"/>
+          <p:cNvPr id="15" name="q_257"/>
           <p:cNvSpPr/>
           <p:nvPr/>
         </p:nvSpPr>
@@ -4846,7 +4846,7 @@
       </p:sp>
       <p:sp>
         <p:nvSpPr>
-          <p:cNvPr id="16" name="R1_chip257"/>
+          <p:cNvPr id="16" name="R1_chip258"/>
           <p:cNvSpPr/>
           <p:nvPr/>
         </p:nvSpPr>
@@ -4895,7 +4895,7 @@
       </p:sp>
       <p:sp>
         <p:nvSpPr>
-          <p:cNvPr id="17" name="bd_258"/>
+          <p:cNvPr id="17" name="bd_259"/>
           <p:cNvSpPr/>
           <p:nvPr/>
         </p:nvSpPr>
@@ -4947,7 +4947,7 @@
       </p:sp>
       <p:sp>
         <p:nvSpPr>
-          <p:cNvPr id="18" name="q_259"/>
+          <p:cNvPr id="18" name="q_260"/>
           <p:cNvSpPr/>
           <p:nvPr/>
         </p:nvSpPr>
@@ -4996,7 +4996,7 @@
       </p:sp>
       <p:sp>
         <p:nvSpPr>
-          <p:cNvPr id="19" name="R2_chip260"/>
+          <p:cNvPr id="19" name="R2_chip261"/>
           <p:cNvSpPr/>
           <p:nvPr/>
         </p:nvSpPr>
@@ -5045,7 +5045,7 @@
       </p:sp>
       <p:sp>
         <p:nvSpPr>
-          <p:cNvPr id="20" name="bd_261"/>
+          <p:cNvPr id="20" name="bd_262"/>
           <p:cNvSpPr/>
           <p:nvPr/>
         </p:nvSpPr>
@@ -5097,7 +5097,7 @@
       </p:sp>
       <p:sp>
         <p:nvSpPr>
-          <p:cNvPr id="21" name="q_262"/>
+          <p:cNvPr id="21" name="q_263"/>
           <p:cNvSpPr/>
           <p:nvPr/>
         </p:nvSpPr>
@@ -5146,7 +5146,7 @@
       </p:sp>
       <p:sp>
         <p:nvSpPr>
-          <p:cNvPr id="22" name="R3_chip263"/>
+          <p:cNvPr id="22" name="R3_chip264"/>
           <p:cNvSpPr/>
           <p:nvPr/>
         </p:nvSpPr>
@@ -5195,7 +5195,7 @@
       </p:sp>
       <p:sp>
         <p:nvSpPr>
-          <p:cNvPr id="23" name="bd_264"/>
+          <p:cNvPr id="23" name="bd_265"/>
           <p:cNvSpPr/>
           <p:nvPr/>
         </p:nvSpPr>
@@ -5247,7 +5247,7 @@
       </p:sp>
       <p:sp>
         <p:nvSpPr>
-          <p:cNvPr id="24" name="q_265"/>
+          <p:cNvPr id="24" name="q_266"/>
           <p:cNvSpPr/>
           <p:nvPr/>
         </p:nvSpPr>
@@ -5296,7 +5296,7 @@
       </p:sp>
       <p:sp>
         <p:nvSpPr>
-          <p:cNvPr id="25" name="R4_chip266"/>
+          <p:cNvPr id="25" name="R4_chip267"/>
           <p:cNvSpPr/>
           <p:nvPr/>
         </p:nvSpPr>
@@ -5345,7 +5345,7 @@
       </p:sp>
       <p:sp>
         <p:nvSpPr>
-          <p:cNvPr id="26" name="bd_267"/>
+          <p:cNvPr id="26" name="bd_268"/>
           <p:cNvSpPr/>
           <p:nvPr/>
         </p:nvSpPr>
@@ -5397,7 +5397,7 @@
       </p:sp>
       <p:sp>
         <p:nvSpPr>
-          <p:cNvPr id="27" name="q_268"/>
+          <p:cNvPr id="27" name="q_269"/>
           <p:cNvSpPr/>
           <p:nvPr/>
         </p:nvSpPr>
@@ -5446,7 +5446,7 @@
       </p:sp>
       <p:sp>
         <p:nvSpPr>
-          <p:cNvPr id="28" name="R5_chip269"/>
+          <p:cNvPr id="28" name="R5_chip270"/>
           <p:cNvSpPr/>
           <p:nvPr/>
         </p:nvSpPr>
@@ -5495,7 +5495,7 @@
       </p:sp>
       <p:sp>
         <p:nvSpPr>
-          <p:cNvPr id="29" name="bd_270"/>
+          <p:cNvPr id="29" name="bd_271"/>
           <p:cNvSpPr/>
           <p:nvPr/>
         </p:nvSpPr>
@@ -5547,7 +5547,7 @@
       </p:sp>
       <p:sp>
         <p:nvSpPr>
-          <p:cNvPr id="30" name="q_271"/>
+          <p:cNvPr id="30" name="q_272"/>
           <p:cNvSpPr/>
           <p:nvPr/>
         </p:nvSpPr>
@@ -5596,7 +5596,7 @@
       </p:sp>
       <p:sp>
         <p:nvSpPr>
-          <p:cNvPr id="31" name="R6_chip272"/>
+          <p:cNvPr id="31" name="R6_chip273"/>
           <p:cNvSpPr/>
           <p:nvPr/>
         </p:nvSpPr>
@@ -5645,7 +5645,7 @@
       </p:sp>
       <p:sp>
         <p:nvSpPr>
-          <p:cNvPr id="32" name="bd_273"/>
+          <p:cNvPr id="32" name="bd_274"/>
           <p:cNvSpPr/>
           <p:nvPr/>
         </p:nvSpPr>
@@ -5697,7 +5697,7 @@
       </p:sp>
       <p:sp>
         <p:nvSpPr>
-          <p:cNvPr id="33" name="q_274"/>
+          <p:cNvPr id="33" name="q_275"/>
           <p:cNvSpPr/>
           <p:nvPr/>
         </p:nvSpPr>
@@ -5746,7 +5746,7 @@
       </p:sp>
       <p:sp>
         <p:nvSpPr>
-          <p:cNvPr id="34" name="R7_chip275"/>
+          <p:cNvPr id="34" name="R7_chip276"/>
           <p:cNvSpPr/>
           <p:nvPr/>
         </p:nvSpPr>
@@ -5795,7 +5795,7 @@
       </p:sp>
       <p:sp>
         <p:nvSpPr>
-          <p:cNvPr id="35" name="bd_276"/>
+          <p:cNvPr id="35" name="bd_277"/>
           <p:cNvSpPr/>
           <p:nvPr/>
         </p:nvSpPr>
@@ -5847,7 +5847,7 @@
       </p:sp>
       <p:sp>
         <p:nvSpPr>
-          <p:cNvPr id="36" name="q_277"/>
+          <p:cNvPr id="36" name="q_278"/>
           <p:cNvSpPr/>
           <p:nvPr/>
         </p:nvSpPr>
@@ -5896,7 +5896,7 @@
       </p:sp>
       <p:sp>
         <p:nvSpPr>
-          <p:cNvPr id="37" name="R8_chip278"/>
+          <p:cNvPr id="37" name="R8_chip279"/>
           <p:cNvSpPr/>
           <p:nvPr/>
         </p:nvSpPr>
@@ -6441,7 +6441,7 @@
       </p:grpSpPr>
       <p:sp>
         <p:nvSpPr>
-          <p:cNvPr id="3" name="bd_279"/>
+          <p:cNvPr id="3" name="bd_280"/>
           <p:cNvSpPr/>
           <p:nvPr/>
         </p:nvSpPr>
@@ -6493,7 +6493,7 @@
       </p:sp>
       <p:pic>
         <p:nvPicPr>
-          <p:cNvPr id="4" name="brY_280" descr="/home/claude/lls-course/v2/assets/brush-yellow.png">    </p:cNvPr>
+          <p:cNvPr id="4" name="brY_281" descr="/home/claude/lls-course/v2/assets/brush-yellow.png">    </p:cNvPr>
           <p:cNvPicPr>
             <a:picLocks noChangeAspect="1"/>
           </p:cNvPicPr>
@@ -6517,7 +6517,7 @@
       </p:pic>
       <p:sp>
         <p:nvSpPr>
-          <p:cNvPr id="5" name="title_281"/>
+          <p:cNvPr id="5" name="title_282"/>
           <p:cNvSpPr/>
           <p:nvPr/>
         </p:nvSpPr>
@@ -6558,7 +6558,7 @@
       </p:sp>
       <p:pic>
         <p:nvPicPr>
-          <p:cNvPr id="6" name="brP_282" descr="/home/claude/lls-course/v2/assets/brush-pink.png">    </p:cNvPr>
+          <p:cNvPr id="6" name="brP_283" descr="/home/claude/lls-course/v2/assets/brush-pink.png">    </p:cNvPr>
           <p:cNvPicPr>
             <a:picLocks noChangeAspect="1"/>
           </p:cNvPicPr>
@@ -6582,7 +6582,7 @@
       </p:pic>
       <p:sp>
         <p:nvSpPr>
-          <p:cNvPr id="7" name="ins_283"/>
+          <p:cNvPr id="7" name="ins_284"/>
           <p:cNvSpPr/>
           <p:nvPr/>
         </p:nvSpPr>
@@ -6623,7 +6623,7 @@
       </p:sp>
       <p:sp>
         <p:nvSpPr>
-          <p:cNvPr id="8" name="insIT_284"/>
+          <p:cNvPr id="8" name="insIT_285"/>
           <p:cNvSpPr/>
           <p:nvPr/>
         </p:nvSpPr>
@@ -6664,7 +6664,7 @@
       </p:sp>
       <p:sp>
         <p:nvSpPr>
-          <p:cNvPr id="9" name="cmd_285"/>
+          <p:cNvPr id="9" name="cmd_286"/>
           <p:cNvSpPr/>
           <p:nvPr/>
         </p:nvSpPr>
@@ -6745,7 +6745,7 @@
       </p:sp>
       <p:sp>
         <p:nvSpPr>
-          <p:cNvPr id="10" name="meta_286"/>
+          <p:cNvPr id="10" name="meta_287"/>
           <p:cNvSpPr/>
           <p:nvPr/>
         </p:nvSpPr>
@@ -6794,7 +6794,7 @@
       </p:sp>
       <p:sp>
         <p:nvSpPr>
-          <p:cNvPr id="11" name="tag_287"/>
+          <p:cNvPr id="11" name="tag_288"/>
           <p:cNvSpPr/>
           <p:nvPr/>
         </p:nvSpPr>
@@ -6857,7 +6857,7 @@
       </p:sp>
       <p:pic>
         <p:nvPicPr>
-          <p:cNvPr id="12" name="logo_288" descr="/home/claude/lls-course/v2/img/logo.png">    </p:cNvPr>
+          <p:cNvPr id="12" name="logo_289" descr="/home/claude/lls-course/v2/img/logo.png">    </p:cNvPr>
           <p:cNvPicPr>
             <a:picLocks noChangeAspect="1"/>
           </p:cNvPicPr>
@@ -6881,7 +6881,7 @@
       </p:pic>
       <p:sp>
         <p:nvSpPr>
-          <p:cNvPr id="13" name="foot_289"/>
+          <p:cNvPr id="13" name="foot_290"/>
           <p:cNvSpPr/>
           <p:nvPr/>
         </p:nvSpPr>
@@ -6920,7 +6920,7 @@
       </p:sp>
       <p:sp>
         <p:nvSpPr>
-          <p:cNvPr id="14" name="bd_290"/>
+          <p:cNvPr id="14" name="bd_291"/>
           <p:cNvSpPr/>
           <p:nvPr/>
         </p:nvSpPr>
@@ -6972,7 +6972,7 @@
       </p:sp>
       <p:sp>
         <p:nvSpPr>
-          <p:cNvPr id="15" name="q_291"/>
+          <p:cNvPr id="15" name="q_292"/>
           <p:cNvSpPr/>
           <p:nvPr/>
         </p:nvSpPr>
@@ -7021,7 +7021,7 @@
       </p:sp>
       <p:sp>
         <p:nvSpPr>
-          <p:cNvPr id="16" name="R1_chip292"/>
+          <p:cNvPr id="16" name="R1_chip293"/>
           <p:cNvSpPr/>
           <p:nvPr/>
         </p:nvSpPr>
@@ -7101,7 +7101,7 @@
       </p:sp>
       <p:sp>
         <p:nvSpPr>
-          <p:cNvPr id="17" name="bd_293"/>
+          <p:cNvPr id="17" name="bd_294"/>
           <p:cNvSpPr/>
           <p:nvPr/>
         </p:nvSpPr>
@@ -7153,7 +7153,7 @@
       </p:sp>
       <p:sp>
         <p:nvSpPr>
-          <p:cNvPr id="18" name="q_294"/>
+          <p:cNvPr id="18" name="q_295"/>
           <p:cNvSpPr/>
           <p:nvPr/>
         </p:nvSpPr>
@@ -7202,7 +7202,7 @@
       </p:sp>
       <p:sp>
         <p:nvSpPr>
-          <p:cNvPr id="19" name="R2_chip295"/>
+          <p:cNvPr id="19" name="R2_chip296"/>
           <p:cNvSpPr/>
           <p:nvPr/>
         </p:nvSpPr>
@@ -7282,7 +7282,7 @@
       </p:sp>
       <p:sp>
         <p:nvSpPr>
-          <p:cNvPr id="20" name="bd_296"/>
+          <p:cNvPr id="20" name="bd_297"/>
           <p:cNvSpPr/>
           <p:nvPr/>
         </p:nvSpPr>
@@ -7334,7 +7334,7 @@
       </p:sp>
       <p:sp>
         <p:nvSpPr>
-          <p:cNvPr id="21" name="q_297"/>
+          <p:cNvPr id="21" name="q_298"/>
           <p:cNvSpPr/>
           <p:nvPr/>
         </p:nvSpPr>
@@ -7383,7 +7383,7 @@
       </p:sp>
       <p:sp>
         <p:nvSpPr>
-          <p:cNvPr id="22" name="R3_chip298"/>
+          <p:cNvPr id="22" name="R3_chip299"/>
           <p:cNvSpPr/>
           <p:nvPr/>
         </p:nvSpPr>
@@ -7463,7 +7463,7 @@
       </p:sp>
       <p:sp>
         <p:nvSpPr>
-          <p:cNvPr id="23" name="bd_299"/>
+          <p:cNvPr id="23" name="bd_300"/>
           <p:cNvSpPr/>
           <p:nvPr/>
         </p:nvSpPr>
@@ -7515,7 +7515,7 @@
       </p:sp>
       <p:sp>
         <p:nvSpPr>
-          <p:cNvPr id="24" name="q_300"/>
+          <p:cNvPr id="24" name="q_301"/>
           <p:cNvSpPr/>
           <p:nvPr/>
         </p:nvSpPr>
@@ -7564,7 +7564,7 @@
       </p:sp>
       <p:sp>
         <p:nvSpPr>
-          <p:cNvPr id="25" name="R4_chip301"/>
+          <p:cNvPr id="25" name="R4_chip302"/>
           <p:cNvSpPr/>
           <p:nvPr/>
         </p:nvSpPr>
@@ -7644,7 +7644,7 @@
       </p:sp>
       <p:sp>
         <p:nvSpPr>
-          <p:cNvPr id="26" name="bd_302"/>
+          <p:cNvPr id="26" name="bd_303"/>
           <p:cNvSpPr/>
           <p:nvPr/>
         </p:nvSpPr>
@@ -7696,7 +7696,7 @@
       </p:sp>
       <p:sp>
         <p:nvSpPr>
-          <p:cNvPr id="27" name="q_303"/>
+          <p:cNvPr id="27" name="q_304"/>
           <p:cNvSpPr/>
           <p:nvPr/>
         </p:nvSpPr>
@@ -7745,7 +7745,7 @@
       </p:sp>
       <p:sp>
         <p:nvSpPr>
-          <p:cNvPr id="28" name="R5_chip304"/>
+          <p:cNvPr id="28" name="R5_chip305"/>
           <p:cNvSpPr/>
           <p:nvPr/>
         </p:nvSpPr>
@@ -7825,7 +7825,7 @@
       </p:sp>
       <p:sp>
         <p:nvSpPr>
-          <p:cNvPr id="29" name="bd_305"/>
+          <p:cNvPr id="29" name="bd_306"/>
           <p:cNvSpPr/>
           <p:nvPr/>
         </p:nvSpPr>
@@ -7877,7 +7877,7 @@
       </p:sp>
       <p:sp>
         <p:nvSpPr>
-          <p:cNvPr id="30" name="q_306"/>
+          <p:cNvPr id="30" name="q_307"/>
           <p:cNvSpPr/>
           <p:nvPr/>
         </p:nvSpPr>
@@ -7926,7 +7926,7 @@
       </p:sp>
       <p:sp>
         <p:nvSpPr>
-          <p:cNvPr id="31" name="R6_chip307"/>
+          <p:cNvPr id="31" name="R6_chip308"/>
           <p:cNvSpPr/>
           <p:nvPr/>
         </p:nvSpPr>
@@ -8427,7 +8427,7 @@
       </p:grpSpPr>
       <p:sp>
         <p:nvSpPr>
-          <p:cNvPr id="3" name="bd_308"/>
+          <p:cNvPr id="3" name="bd_309"/>
           <p:cNvSpPr/>
           <p:nvPr/>
         </p:nvSpPr>
@@ -8479,7 +8479,7 @@
       </p:sp>
       <p:pic>
         <p:nvPicPr>
-          <p:cNvPr id="4" name="brY_309" descr="/home/claude/lls-course/v2/assets/brush-yellow.png">    </p:cNvPr>
+          <p:cNvPr id="4" name="brY_310" descr="/home/claude/lls-course/v2/assets/brush-yellow.png">    </p:cNvPr>
           <p:cNvPicPr>
             <a:picLocks noChangeAspect="1"/>
           </p:cNvPicPr>
@@ -8503,7 +8503,7 @@
       </p:pic>
       <p:sp>
         <p:nvSpPr>
-          <p:cNvPr id="5" name="title_310"/>
+          <p:cNvPr id="5" name="title_311"/>
           <p:cNvSpPr/>
           <p:nvPr/>
         </p:nvSpPr>
@@ -8544,7 +8544,7 @@
       </p:sp>
       <p:pic>
         <p:nvPicPr>
-          <p:cNvPr id="6" name="brP_311" descr="/home/claude/lls-course/v2/assets/brush-pink.png">    </p:cNvPr>
+          <p:cNvPr id="6" name="brP_312" descr="/home/claude/lls-course/v2/assets/brush-pink.png">    </p:cNvPr>
           <p:cNvPicPr>
             <a:picLocks noChangeAspect="1"/>
           </p:cNvPicPr>
@@ -8568,7 +8568,7 @@
       </p:pic>
       <p:sp>
         <p:nvSpPr>
-          <p:cNvPr id="7" name="ins_312"/>
+          <p:cNvPr id="7" name="ins_313"/>
           <p:cNvSpPr/>
           <p:nvPr/>
         </p:nvSpPr>
@@ -8609,7 +8609,7 @@
       </p:sp>
       <p:sp>
         <p:nvSpPr>
-          <p:cNvPr id="8" name="insIT_313"/>
+          <p:cNvPr id="8" name="insIT_314"/>
           <p:cNvSpPr/>
           <p:nvPr/>
         </p:nvSpPr>
@@ -8650,7 +8650,7 @@
       </p:sp>
       <p:sp>
         <p:nvSpPr>
-          <p:cNvPr id="9" name="cmd_314"/>
+          <p:cNvPr id="9" name="cmd_315"/>
           <p:cNvSpPr/>
           <p:nvPr/>
         </p:nvSpPr>
@@ -8756,7 +8756,7 @@
       </p:sp>
       <p:sp>
         <p:nvSpPr>
-          <p:cNvPr id="10" name="meta_315"/>
+          <p:cNvPr id="10" name="meta_316"/>
           <p:cNvSpPr/>
           <p:nvPr/>
         </p:nvSpPr>
@@ -8805,7 +8805,7 @@
       </p:sp>
       <p:sp>
         <p:nvSpPr>
-          <p:cNvPr id="11" name="tag_316"/>
+          <p:cNvPr id="11" name="tag_317"/>
           <p:cNvSpPr/>
           <p:nvPr/>
         </p:nvSpPr>
@@ -8868,7 +8868,7 @@
       </p:sp>
       <p:pic>
         <p:nvPicPr>
-          <p:cNvPr id="12" name="logo_317" descr="/home/claude/lls-course/v2/img/logo.png">    </p:cNvPr>
+          <p:cNvPr id="12" name="logo_318" descr="/home/claude/lls-course/v2/img/logo.png">    </p:cNvPr>
           <p:cNvPicPr>
             <a:picLocks noChangeAspect="1"/>
           </p:cNvPicPr>
@@ -8892,7 +8892,7 @@
       </p:pic>
       <p:sp>
         <p:nvSpPr>
-          <p:cNvPr id="13" name="foot_318"/>
+          <p:cNvPr id="13" name="foot_319"/>
           <p:cNvSpPr/>
           <p:nvPr/>
         </p:nvSpPr>
@@ -8931,7 +8931,7 @@
       </p:sp>
       <p:sp>
         <p:nvSpPr>
-          <p:cNvPr id="14" name="cd_319"/>
+          <p:cNvPr id="14" name="cd_320"/>
           <p:cNvSpPr/>
           <p:nvPr/>
         </p:nvSpPr>
@@ -8965,7 +8965,7 @@
       </p:sp>
       <p:sp>
         <p:nvSpPr>
-          <p:cNvPr id="15" name="ii_320"/>
+          <p:cNvPr id="15" name="ii_321"/>
           <p:cNvSpPr/>
           <p:nvPr/>
         </p:nvSpPr>
@@ -9001,7 +9001,7 @@
       </p:sp>
       <p:sp>
         <p:nvSpPr>
-          <p:cNvPr id="16" name="ih_321"/>
+          <p:cNvPr id="16" name="ih_322"/>
           <p:cNvSpPr/>
           <p:nvPr/>
         </p:nvSpPr>
@@ -9040,7 +9040,7 @@
       </p:sp>
       <p:sp>
         <p:nvSpPr>
-          <p:cNvPr id="17" name="il_322"/>
+          <p:cNvPr id="17" name="il_323"/>
           <p:cNvSpPr/>
           <p:nvPr/>
         </p:nvSpPr>
@@ -9157,7 +9157,7 @@
       </p:sp>
       <p:sp>
         <p:nvSpPr>
-          <p:cNvPr id="18" name="R1_qb323"/>
+          <p:cNvPr id="18" name="R1_qb324"/>
           <p:cNvSpPr/>
           <p:nvPr/>
         </p:nvSpPr>
@@ -9209,7 +9209,7 @@
       </p:sp>
       <p:sp>
         <p:nvSpPr>
-          <p:cNvPr id="19" name="R1_sq324"/>
+          <p:cNvPr id="19" name="R1_sq325"/>
           <p:cNvSpPr/>
           <p:nvPr/>
         </p:nvSpPr>
@@ -9282,7 +9282,7 @@
       </p:sp>
       <p:sp>
         <p:nvSpPr>
-          <p:cNvPr id="20" name="R2_qb325"/>
+          <p:cNvPr id="20" name="R2_qb326"/>
           <p:cNvSpPr/>
           <p:nvPr/>
         </p:nvSpPr>
@@ -9334,7 +9334,7 @@
       </p:sp>
       <p:sp>
         <p:nvSpPr>
-          <p:cNvPr id="21" name="R2_sq326"/>
+          <p:cNvPr id="21" name="R2_sq327"/>
           <p:cNvSpPr/>
           <p:nvPr/>
         </p:nvSpPr>
@@ -9407,7 +9407,7 @@
       </p:sp>
       <p:sp>
         <p:nvSpPr>
-          <p:cNvPr id="22" name="R3_qb327"/>
+          <p:cNvPr id="22" name="R3_qb328"/>
           <p:cNvSpPr/>
           <p:nvPr/>
         </p:nvSpPr>
@@ -9459,7 +9459,7 @@
       </p:sp>
       <p:sp>
         <p:nvSpPr>
-          <p:cNvPr id="23" name="R3_sq328"/>
+          <p:cNvPr id="23" name="R3_sq329"/>
           <p:cNvSpPr/>
           <p:nvPr/>
         </p:nvSpPr>
@@ -9532,7 +9532,7 @@
       </p:sp>
       <p:sp>
         <p:nvSpPr>
-          <p:cNvPr id="24" name="R4_qb329"/>
+          <p:cNvPr id="24" name="R4_qb330"/>
           <p:cNvSpPr/>
           <p:nvPr/>
         </p:nvSpPr>
@@ -9584,7 +9584,7 @@
       </p:sp>
       <p:sp>
         <p:nvSpPr>
-          <p:cNvPr id="25" name="R4_sq330"/>
+          <p:cNvPr id="25" name="R4_sq331"/>
           <p:cNvSpPr/>
           <p:nvPr/>
         </p:nvSpPr>
@@ -10081,7 +10081,7 @@
       </p:grpSpPr>
       <p:sp>
         <p:nvSpPr>
-          <p:cNvPr id="3" name="bd_331"/>
+          <p:cNvPr id="3" name="bd_332"/>
           <p:cNvSpPr/>
           <p:nvPr/>
         </p:nvSpPr>
@@ -10133,7 +10133,7 @@
       </p:sp>
       <p:pic>
         <p:nvPicPr>
-          <p:cNvPr id="4" name="brY_332" descr="/home/claude/lls-course/v2/assets/brush-yellow.png">    </p:cNvPr>
+          <p:cNvPr id="4" name="brY_333" descr="/home/claude/lls-course/v2/assets/brush-yellow.png">    </p:cNvPr>
           <p:cNvPicPr>
             <a:picLocks noChangeAspect="1"/>
           </p:cNvPicPr>
@@ -10157,7 +10157,7 @@
       </p:pic>
       <p:sp>
         <p:nvSpPr>
-          <p:cNvPr id="5" name="title_333"/>
+          <p:cNvPr id="5" name="title_334"/>
           <p:cNvSpPr/>
           <p:nvPr/>
         </p:nvSpPr>
@@ -10198,7 +10198,7 @@
       </p:sp>
       <p:pic>
         <p:nvPicPr>
-          <p:cNvPr id="6" name="brP_334" descr="/home/claude/lls-course/v2/assets/brush-pink.png">    </p:cNvPr>
+          <p:cNvPr id="6" name="brP_335" descr="/home/claude/lls-course/v2/assets/brush-pink.png">    </p:cNvPr>
           <p:cNvPicPr>
             <a:picLocks noChangeAspect="1"/>
           </p:cNvPicPr>
@@ -10222,7 +10222,7 @@
       </p:pic>
       <p:sp>
         <p:nvSpPr>
-          <p:cNvPr id="7" name="ins_335"/>
+          <p:cNvPr id="7" name="ins_336"/>
           <p:cNvSpPr/>
           <p:nvPr/>
         </p:nvSpPr>
@@ -10263,7 +10263,7 @@
       </p:sp>
       <p:sp>
         <p:nvSpPr>
-          <p:cNvPr id="8" name="insIT_336"/>
+          <p:cNvPr id="8" name="insIT_337"/>
           <p:cNvSpPr/>
           <p:nvPr/>
         </p:nvSpPr>
@@ -10304,7 +10304,7 @@
       </p:sp>
       <p:sp>
         <p:nvSpPr>
-          <p:cNvPr id="9" name="cmd_337"/>
+          <p:cNvPr id="9" name="cmd_338"/>
           <p:cNvSpPr/>
           <p:nvPr/>
         </p:nvSpPr>
@@ -10385,7 +10385,7 @@
       </p:sp>
       <p:sp>
         <p:nvSpPr>
-          <p:cNvPr id="10" name="meta_338"/>
+          <p:cNvPr id="10" name="meta_339"/>
           <p:cNvSpPr/>
           <p:nvPr/>
         </p:nvSpPr>
@@ -10434,7 +10434,7 @@
       </p:sp>
       <p:sp>
         <p:nvSpPr>
-          <p:cNvPr id="11" name="tag_339"/>
+          <p:cNvPr id="11" name="tag_340"/>
           <p:cNvSpPr/>
           <p:nvPr/>
         </p:nvSpPr>
@@ -10497,7 +10497,7 @@
       </p:sp>
       <p:pic>
         <p:nvPicPr>
-          <p:cNvPr id="12" name="logo_340" descr="/home/claude/lls-course/v2/img/logo.png">    </p:cNvPr>
+          <p:cNvPr id="12" name="logo_341" descr="/home/claude/lls-course/v2/img/logo.png">    </p:cNvPr>
           <p:cNvPicPr>
             <a:picLocks noChangeAspect="1"/>
           </p:cNvPicPr>
@@ -10521,7 +10521,7 @@
       </p:pic>
       <p:sp>
         <p:nvSpPr>
-          <p:cNvPr id="13" name="foot_341"/>
+          <p:cNvPr id="13" name="foot_342"/>
           <p:cNvSpPr/>
           <p:nvPr/>
         </p:nvSpPr>
@@ -10560,7 +10560,7 @@
       </p:sp>
       <p:sp>
         <p:nvSpPr>
-          <p:cNvPr id="14" name="cd_342"/>
+          <p:cNvPr id="14" name="cd_343"/>
           <p:cNvSpPr/>
           <p:nvPr/>
         </p:nvSpPr>
@@ -10594,7 +10594,7 @@
       </p:sp>
       <p:sp>
         <p:nvSpPr>
-          <p:cNvPr id="15" name="ii_343"/>
+          <p:cNvPr id="15" name="ii_344"/>
           <p:cNvSpPr/>
           <p:nvPr/>
         </p:nvSpPr>
@@ -10630,7 +10630,7 @@
       </p:sp>
       <p:sp>
         <p:nvSpPr>
-          <p:cNvPr id="16" name="ih_344"/>
+          <p:cNvPr id="16" name="ih_345"/>
           <p:cNvSpPr/>
           <p:nvPr/>
         </p:nvSpPr>
@@ -10669,7 +10669,7 @@
       </p:sp>
       <p:sp>
         <p:nvSpPr>
-          <p:cNvPr id="17" name="il_345"/>
+          <p:cNvPr id="17" name="il_346"/>
           <p:cNvSpPr/>
           <p:nvPr/>
         </p:nvSpPr>
@@ -10834,7 +10834,7 @@
       </p:sp>
       <p:sp>
         <p:nvSpPr>
-          <p:cNvPr id="18" name="R1_qb346"/>
+          <p:cNvPr id="18" name="R1_qb347"/>
           <p:cNvSpPr/>
           <p:nvPr/>
         </p:nvSpPr>
@@ -10886,7 +10886,7 @@
       </p:sp>
       <p:sp>
         <p:nvSpPr>
-          <p:cNvPr id="19" name="R1_sq347"/>
+          <p:cNvPr id="19" name="R1_sq348"/>
           <p:cNvSpPr/>
           <p:nvPr/>
         </p:nvSpPr>
@@ -10959,7 +10959,7 @@
       </p:sp>
       <p:sp>
         <p:nvSpPr>
-          <p:cNvPr id="20" name="R2_qb348"/>
+          <p:cNvPr id="20" name="R2_qb349"/>
           <p:cNvSpPr/>
           <p:nvPr/>
         </p:nvSpPr>
@@ -11011,7 +11011,7 @@
       </p:sp>
       <p:sp>
         <p:nvSpPr>
-          <p:cNvPr id="21" name="R2_sq349"/>
+          <p:cNvPr id="21" name="R2_sq350"/>
           <p:cNvSpPr/>
           <p:nvPr/>
         </p:nvSpPr>
@@ -11084,7 +11084,7 @@
       </p:sp>
       <p:sp>
         <p:nvSpPr>
-          <p:cNvPr id="22" name="R3_qb350"/>
+          <p:cNvPr id="22" name="R3_qb351"/>
           <p:cNvSpPr/>
           <p:nvPr/>
         </p:nvSpPr>
@@ -11136,7 +11136,7 @@
       </p:sp>
       <p:sp>
         <p:nvSpPr>
-          <p:cNvPr id="23" name="R3_sq351"/>
+          <p:cNvPr id="23" name="R3_sq352"/>
           <p:cNvSpPr/>
           <p:nvPr/>
         </p:nvSpPr>
@@ -11209,7 +11209,7 @@
       </p:sp>
       <p:sp>
         <p:nvSpPr>
-          <p:cNvPr id="24" name="R4_qb352"/>
+          <p:cNvPr id="24" name="R4_qb353"/>
           <p:cNvSpPr/>
           <p:nvPr/>
         </p:nvSpPr>
@@ -11261,7 +11261,7 @@
       </p:sp>
       <p:sp>
         <p:nvSpPr>
-          <p:cNvPr id="25" name="R4_sq353"/>
+          <p:cNvPr id="25" name="R4_sq354"/>
           <p:cNvSpPr/>
           <p:nvPr/>
         </p:nvSpPr>
@@ -11334,7 +11334,7 @@
       </p:sp>
       <p:sp>
         <p:nvSpPr>
-          <p:cNvPr id="26" name="R5_qb354"/>
+          <p:cNvPr id="26" name="R5_qb355"/>
           <p:cNvSpPr/>
           <p:nvPr/>
         </p:nvSpPr>
@@ -11386,7 +11386,7 @@
       </p:sp>
       <p:sp>
         <p:nvSpPr>
-          <p:cNvPr id="27" name="R5_sq355"/>
+          <p:cNvPr id="27" name="R5_sq356"/>
           <p:cNvSpPr/>
           <p:nvPr/>
         </p:nvSpPr>
@@ -11971,7 +11971,7 @@
       </p:grpSpPr>
       <p:sp>
         <p:nvSpPr>
-          <p:cNvPr id="3" name="bd_356"/>
+          <p:cNvPr id="3" name="bd_357"/>
           <p:cNvSpPr/>
           <p:nvPr/>
         </p:nvSpPr>
@@ -12023,7 +12023,7 @@
       </p:sp>
       <p:pic>
         <p:nvPicPr>
-          <p:cNvPr id="4" name="brY_357" descr="/home/claude/lls-course/v2/assets/brush-yellow.png">    </p:cNvPr>
+          <p:cNvPr id="4" name="brY_358" descr="/home/claude/lls-course/v2/assets/brush-yellow.png">    </p:cNvPr>
           <p:cNvPicPr>
             <a:picLocks noChangeAspect="1"/>
           </p:cNvPicPr>
@@ -12047,7 +12047,7 @@
       </p:pic>
       <p:sp>
         <p:nvSpPr>
-          <p:cNvPr id="5" name="title_358"/>
+          <p:cNvPr id="5" name="title_359"/>
           <p:cNvSpPr/>
           <p:nvPr/>
         </p:nvSpPr>
@@ -12088,7 +12088,7 @@
       </p:sp>
       <p:pic>
         <p:nvPicPr>
-          <p:cNvPr id="6" name="brP_359" descr="/home/claude/lls-course/v2/assets/brush-pink.png">    </p:cNvPr>
+          <p:cNvPr id="6" name="brP_360" descr="/home/claude/lls-course/v2/assets/brush-pink.png">    </p:cNvPr>
           <p:cNvPicPr>
             <a:picLocks noChangeAspect="1"/>
           </p:cNvPicPr>
@@ -12112,7 +12112,7 @@
       </p:pic>
       <p:sp>
         <p:nvSpPr>
-          <p:cNvPr id="7" name="ins_360"/>
+          <p:cNvPr id="7" name="ins_361"/>
           <p:cNvSpPr/>
           <p:nvPr/>
         </p:nvSpPr>
@@ -12153,7 +12153,7 @@
       </p:sp>
       <p:sp>
         <p:nvSpPr>
-          <p:cNvPr id="8" name="insIT_361"/>
+          <p:cNvPr id="8" name="insIT_362"/>
           <p:cNvSpPr/>
           <p:nvPr/>
         </p:nvSpPr>
@@ -12194,7 +12194,7 @@
       </p:sp>
       <p:sp>
         <p:nvSpPr>
-          <p:cNvPr id="9" name="cmd_362"/>
+          <p:cNvPr id="9" name="cmd_363"/>
           <p:cNvSpPr/>
           <p:nvPr/>
         </p:nvSpPr>
@@ -12300,7 +12300,7 @@
       </p:sp>
       <p:sp>
         <p:nvSpPr>
-          <p:cNvPr id="10" name="meta_363"/>
+          <p:cNvPr id="10" name="meta_364"/>
           <p:cNvSpPr/>
           <p:nvPr/>
         </p:nvSpPr>
@@ -12349,7 +12349,7 @@
       </p:sp>
       <p:sp>
         <p:nvSpPr>
-          <p:cNvPr id="11" name="tag_364"/>
+          <p:cNvPr id="11" name="tag_365"/>
           <p:cNvSpPr/>
           <p:nvPr/>
         </p:nvSpPr>
@@ -12412,7 +12412,7 @@
       </p:sp>
       <p:pic>
         <p:nvPicPr>
-          <p:cNvPr id="12" name="logo_365" descr="/home/claude/lls-course/v2/img/logo.png">    </p:cNvPr>
+          <p:cNvPr id="12" name="logo_366" descr="/home/claude/lls-course/v2/img/logo.png">    </p:cNvPr>
           <p:cNvPicPr>
             <a:picLocks noChangeAspect="1"/>
           </p:cNvPicPr>
@@ -12436,7 +12436,7 @@
       </p:pic>
       <p:sp>
         <p:nvSpPr>
-          <p:cNvPr id="13" name="foot_366"/>
+          <p:cNvPr id="13" name="foot_367"/>
           <p:cNvSpPr/>
           <p:nvPr/>
         </p:nvSpPr>
@@ -12475,7 +12475,7 @@
       </p:sp>
       <p:sp>
         <p:nvSpPr>
-          <p:cNvPr id="14" name="pf_367"/>
+          <p:cNvPr id="14" name="pf_368"/>
           <p:cNvSpPr/>
           <p:nvPr/>
         </p:nvSpPr>
@@ -12509,7 +12509,7 @@
       </p:sp>
       <p:pic>
         <p:nvPicPr>
-          <p:cNvPr id="15" name="ph_368" descr="/home/claude/lls-course/v2/cache/b2_6b2_giulia_jpg_268x286_31.png">    </p:cNvPr>
+          <p:cNvPr id="15" name="ph_369" descr="/home/claude/lls-course/v2/cache/b2_6b2_giulia_jpg_268x286_31.png">    </p:cNvPr>
           <p:cNvPicPr>
             <a:picLocks noChangeAspect="1"/>
           </p:cNvPicPr>
@@ -12533,7 +12533,7 @@
       </p:pic>
       <p:sp>
         <p:nvSpPr>
-          <p:cNvPr id="16" name="cd_369"/>
+          <p:cNvPr id="16" name="cd_370"/>
           <p:cNvSpPr/>
           <p:nvPr/>
         </p:nvSpPr>
@@ -12567,7 +12567,7 @@
       </p:sp>
       <p:sp>
         <p:nvSpPr>
-          <p:cNvPr id="17" name="ii_370"/>
+          <p:cNvPr id="17" name="ii_371"/>
           <p:cNvSpPr/>
           <p:nvPr/>
         </p:nvSpPr>
@@ -12603,7 +12603,7 @@
       </p:sp>
       <p:sp>
         <p:nvSpPr>
-          <p:cNvPr id="18" name="ih_371"/>
+          <p:cNvPr id="18" name="ih_372"/>
           <p:cNvSpPr/>
           <p:nvPr/>
         </p:nvSpPr>
@@ -12642,7 +12642,7 @@
       </p:sp>
       <p:sp>
         <p:nvSpPr>
-          <p:cNvPr id="19" name="il_372"/>
+          <p:cNvPr id="19" name="il_373"/>
           <p:cNvSpPr/>
           <p:nvPr/>
         </p:nvSpPr>
@@ -12778,7 +12778,7 @@
       </p:sp>
       <p:sp>
         <p:nvSpPr>
-          <p:cNvPr id="20" name="R1_sb373"/>
+          <p:cNvPr id="20" name="R1_sb374"/>
           <p:cNvSpPr/>
           <p:nvPr/>
         </p:nvSpPr>
@@ -12830,7 +12830,7 @@
       </p:sp>
       <p:sp>
         <p:nvSpPr>
-          <p:cNvPr id="21" name="R1_sl374"/>
+          <p:cNvPr id="21" name="R1_sl375"/>
           <p:cNvSpPr/>
           <p:nvPr/>
         </p:nvSpPr>
@@ -12963,7 +12963,7 @@
       </p:sp>
       <p:sp>
         <p:nvSpPr>
-          <p:cNvPr id="22" name="R2_sb375"/>
+          <p:cNvPr id="22" name="R2_sb376"/>
           <p:cNvSpPr/>
           <p:nvPr/>
         </p:nvSpPr>
@@ -13015,7 +13015,7 @@
       </p:sp>
       <p:sp>
         <p:nvSpPr>
-          <p:cNvPr id="23" name="R2_sl376"/>
+          <p:cNvPr id="23" name="R2_sl377"/>
           <p:cNvSpPr/>
           <p:nvPr/>
         </p:nvSpPr>
@@ -13179,7 +13179,7 @@
       </p:sp>
       <p:sp>
         <p:nvSpPr>
-          <p:cNvPr id="24" name="R3_sb377"/>
+          <p:cNvPr id="24" name="R3_sb378"/>
           <p:cNvSpPr/>
           <p:nvPr/>
         </p:nvSpPr>
@@ -13231,7 +13231,7 @@
       </p:sp>
       <p:sp>
         <p:nvSpPr>
-          <p:cNvPr id="25" name="R3_sl378"/>
+          <p:cNvPr id="25" name="R3_sl379"/>
           <p:cNvSpPr/>
           <p:nvPr/>
         </p:nvSpPr>
@@ -13364,7 +13364,7 @@
       </p:sp>
       <p:sp>
         <p:nvSpPr>
-          <p:cNvPr id="26" name="R4_sb379"/>
+          <p:cNvPr id="26" name="R4_sb380"/>
           <p:cNvSpPr/>
           <p:nvPr/>
         </p:nvSpPr>
@@ -13416,7 +13416,7 @@
       </p:sp>
       <p:sp>
         <p:nvSpPr>
-          <p:cNvPr id="27" name="R4_sl380"/>
+          <p:cNvPr id="27" name="R4_sl381"/>
           <p:cNvSpPr/>
           <p:nvPr/>
         </p:nvSpPr>
@@ -13549,7 +13549,7 @@
       </p:sp>
       <p:sp>
         <p:nvSpPr>
-          <p:cNvPr id="28" name="R5_sb381"/>
+          <p:cNvPr id="28" name="R5_sb382"/>
           <p:cNvSpPr/>
           <p:nvPr/>
         </p:nvSpPr>
@@ -13601,7 +13601,7 @@
       </p:sp>
       <p:sp>
         <p:nvSpPr>
-          <p:cNvPr id="29" name="R5_sl382"/>
+          <p:cNvPr id="29" name="R5_sl383"/>
           <p:cNvSpPr/>
           <p:nvPr/>
         </p:nvSpPr>
@@ -13703,7 +13703,7 @@
       </p:sp>
       <p:sp>
         <p:nvSpPr>
-          <p:cNvPr id="30" name="R6_sb383"/>
+          <p:cNvPr id="30" name="R6_sb384"/>
           <p:cNvSpPr/>
           <p:nvPr/>
         </p:nvSpPr>
@@ -13755,7 +13755,7 @@
       </p:sp>
       <p:sp>
         <p:nvSpPr>
-          <p:cNvPr id="31" name="R6_sl384"/>
+          <p:cNvPr id="31" name="R6_sl385"/>
           <p:cNvSpPr/>
           <p:nvPr/>
         </p:nvSpPr>
@@ -14457,7 +14457,7 @@
       </p:grpSpPr>
       <p:sp>
         <p:nvSpPr>
-          <p:cNvPr id="3" name="bd_385"/>
+          <p:cNvPr id="3" name="bd_386"/>
           <p:cNvSpPr/>
           <p:nvPr/>
         </p:nvSpPr>
@@ -14509,7 +14509,7 @@
       </p:sp>
       <p:pic>
         <p:nvPicPr>
-          <p:cNvPr id="4" name="brY_386" descr="/home/claude/lls-course/v2/assets/brush-yellow.png">    </p:cNvPr>
+          <p:cNvPr id="4" name="brY_387" descr="/home/claude/lls-course/v2/assets/brush-yellow.png">    </p:cNvPr>
           <p:cNvPicPr>
             <a:picLocks noChangeAspect="1"/>
           </p:cNvPicPr>
@@ -14533,7 +14533,7 @@
       </p:pic>
       <p:sp>
         <p:nvSpPr>
-          <p:cNvPr id="5" name="title_387"/>
+          <p:cNvPr id="5" name="title_388"/>
           <p:cNvSpPr/>
           <p:nvPr/>
         </p:nvSpPr>
@@ -14574,7 +14574,7 @@
       </p:sp>
       <p:pic>
         <p:nvPicPr>
-          <p:cNvPr id="6" name="brP_388" descr="/home/claude/lls-course/v2/assets/brush-pink.png">    </p:cNvPr>
+          <p:cNvPr id="6" name="brP_389" descr="/home/claude/lls-course/v2/assets/brush-pink.png">    </p:cNvPr>
           <p:cNvPicPr>
             <a:picLocks noChangeAspect="1"/>
           </p:cNvPicPr>
@@ -14598,7 +14598,7 @@
       </p:pic>
       <p:sp>
         <p:nvSpPr>
-          <p:cNvPr id="7" name="ins_389"/>
+          <p:cNvPr id="7" name="ins_390"/>
           <p:cNvSpPr/>
           <p:nvPr/>
         </p:nvSpPr>
@@ -14639,7 +14639,7 @@
       </p:sp>
       <p:sp>
         <p:nvSpPr>
-          <p:cNvPr id="8" name="insIT_390"/>
+          <p:cNvPr id="8" name="insIT_391"/>
           <p:cNvSpPr/>
           <p:nvPr/>
         </p:nvSpPr>
@@ -14680,7 +14680,7 @@
       </p:sp>
       <p:sp>
         <p:nvSpPr>
-          <p:cNvPr id="9" name="cmd_391"/>
+          <p:cNvPr id="9" name="cmd_392"/>
           <p:cNvSpPr/>
           <p:nvPr/>
         </p:nvSpPr>
@@ -14761,7 +14761,7 @@
       </p:sp>
       <p:sp>
         <p:nvSpPr>
-          <p:cNvPr id="10" name="meta_392"/>
+          <p:cNvPr id="10" name="meta_393"/>
           <p:cNvSpPr/>
           <p:nvPr/>
         </p:nvSpPr>
@@ -14810,7 +14810,7 @@
       </p:sp>
       <p:sp>
         <p:nvSpPr>
-          <p:cNvPr id="11" name="tag_393"/>
+          <p:cNvPr id="11" name="tag_394"/>
           <p:cNvSpPr/>
           <p:nvPr/>
         </p:nvSpPr>
@@ -14873,7 +14873,7 @@
       </p:sp>
       <p:pic>
         <p:nvPicPr>
-          <p:cNvPr id="12" name="logo_394" descr="/home/claude/lls-course/v2/img/logo.png">    </p:cNvPr>
+          <p:cNvPr id="12" name="logo_395" descr="/home/claude/lls-course/v2/img/logo.png">    </p:cNvPr>
           <p:cNvPicPr>
             <a:picLocks noChangeAspect="1"/>
           </p:cNvPicPr>
@@ -14897,7 +14897,7 @@
       </p:pic>
       <p:sp>
         <p:nvSpPr>
-          <p:cNvPr id="13" name="foot_395"/>
+          <p:cNvPr id="13" name="foot_396"/>
           <p:cNvSpPr/>
           <p:nvPr/>
         </p:nvSpPr>
@@ -14936,7 +14936,7 @@
       </p:sp>
       <p:sp>
         <p:nvSpPr>
-          <p:cNvPr id="14" name="R1_sb396"/>
+          <p:cNvPr id="14" name="R1_sb397"/>
           <p:cNvSpPr/>
           <p:nvPr/>
         </p:nvSpPr>
@@ -14988,7 +14988,7 @@
       </p:sp>
       <p:sp>
         <p:nvSpPr>
-          <p:cNvPr id="15" name="R1_sl397"/>
+          <p:cNvPr id="15" name="R1_sl398"/>
           <p:cNvSpPr/>
           <p:nvPr/>
         </p:nvSpPr>
@@ -15042,7 +15042,7 @@
       </p:sp>
       <p:sp>
         <p:nvSpPr>
-          <p:cNvPr id="16" name="R2_sb398"/>
+          <p:cNvPr id="16" name="R2_sb399"/>
           <p:cNvSpPr/>
           <p:nvPr/>
         </p:nvSpPr>
@@ -15094,7 +15094,7 @@
       </p:sp>
       <p:sp>
         <p:nvSpPr>
-          <p:cNvPr id="17" name="R2_sl399"/>
+          <p:cNvPr id="17" name="R2_sl400"/>
           <p:cNvSpPr/>
           <p:nvPr/>
         </p:nvSpPr>
@@ -15148,7 +15148,7 @@
       </p:sp>
       <p:sp>
         <p:nvSpPr>
-          <p:cNvPr id="18" name="R3_sb400"/>
+          <p:cNvPr id="18" name="R3_sb401"/>
           <p:cNvSpPr/>
           <p:nvPr/>
         </p:nvSpPr>
@@ -15200,7 +15200,7 @@
       </p:sp>
       <p:sp>
         <p:nvSpPr>
-          <p:cNvPr id="19" name="R3_sl401"/>
+          <p:cNvPr id="19" name="R3_sl402"/>
           <p:cNvSpPr/>
           <p:nvPr/>
         </p:nvSpPr>
@@ -15254,7 +15254,7 @@
       </p:sp>
       <p:sp>
         <p:nvSpPr>
-          <p:cNvPr id="20" name="R4_sb402"/>
+          <p:cNvPr id="20" name="R4_sb403"/>
           <p:cNvSpPr/>
           <p:nvPr/>
         </p:nvSpPr>
@@ -15306,7 +15306,7 @@
       </p:sp>
       <p:sp>
         <p:nvSpPr>
-          <p:cNvPr id="21" name="R4_sl403"/>
+          <p:cNvPr id="21" name="R4_sl404"/>
           <p:cNvSpPr/>
           <p:nvPr/>
         </p:nvSpPr>
@@ -15360,7 +15360,7 @@
       </p:sp>
       <p:sp>
         <p:nvSpPr>
-          <p:cNvPr id="22" name="R5_sb404"/>
+          <p:cNvPr id="22" name="R5_sb405"/>
           <p:cNvSpPr/>
           <p:nvPr/>
         </p:nvSpPr>
@@ -15412,7 +15412,7 @@
       </p:sp>
       <p:sp>
         <p:nvSpPr>
-          <p:cNvPr id="23" name="R5_sl405"/>
+          <p:cNvPr id="23" name="R5_sl406"/>
           <p:cNvSpPr/>
           <p:nvPr/>
         </p:nvSpPr>
@@ -15466,7 +15466,7 @@
       </p:sp>
       <p:sp>
         <p:nvSpPr>
-          <p:cNvPr id="24" name="R6_sb406"/>
+          <p:cNvPr id="24" name="R6_sb407"/>
           <p:cNvSpPr/>
           <p:nvPr/>
         </p:nvSpPr>
@@ -15518,7 +15518,7 @@
       </p:sp>
       <p:sp>
         <p:nvSpPr>
-          <p:cNvPr id="25" name="R6_sl407"/>
+          <p:cNvPr id="25" name="R6_sl408"/>
           <p:cNvSpPr/>
           <p:nvPr/>
         </p:nvSpPr>
@@ -16172,7 +16172,7 @@
       </p:grpSpPr>
       <p:sp>
         <p:nvSpPr>
-          <p:cNvPr id="3" name="bd_408"/>
+          <p:cNvPr id="3" name="bd_409"/>
           <p:cNvSpPr/>
           <p:nvPr/>
         </p:nvSpPr>
@@ -16224,7 +16224,7 @@
       </p:sp>
       <p:pic>
         <p:nvPicPr>
-          <p:cNvPr id="4" name="brY_409" descr="/home/claude/lls-course/v2/assets/brush-yellow.png">    </p:cNvPr>
+          <p:cNvPr id="4" name="brY_410" descr="/home/claude/lls-course/v2/assets/brush-yellow.png">    </p:cNvPr>
           <p:cNvPicPr>
             <a:picLocks noChangeAspect="1"/>
           </p:cNvPicPr>
@@ -16248,7 +16248,7 @@
       </p:pic>
       <p:sp>
         <p:nvSpPr>
-          <p:cNvPr id="5" name="title_410"/>
+          <p:cNvPr id="5" name="title_411"/>
           <p:cNvSpPr/>
           <p:nvPr/>
         </p:nvSpPr>
@@ -16289,7 +16289,7 @@
       </p:sp>
       <p:pic>
         <p:nvPicPr>
-          <p:cNvPr id="6" name="brP_411" descr="/home/claude/lls-course/v2/assets/brush-pink.png">    </p:cNvPr>
+          <p:cNvPr id="6" name="brP_412" descr="/home/claude/lls-course/v2/assets/brush-pink.png">    </p:cNvPr>
           <p:cNvPicPr>
             <a:picLocks noChangeAspect="1"/>
           </p:cNvPicPr>
@@ -16313,7 +16313,7 @@
       </p:pic>
       <p:sp>
         <p:nvSpPr>
-          <p:cNvPr id="7" name="ins_412"/>
+          <p:cNvPr id="7" name="ins_413"/>
           <p:cNvSpPr/>
           <p:nvPr/>
         </p:nvSpPr>
@@ -16354,7 +16354,7 @@
       </p:sp>
       <p:sp>
         <p:nvSpPr>
-          <p:cNvPr id="8" name="insIT_413"/>
+          <p:cNvPr id="8" name="insIT_414"/>
           <p:cNvSpPr/>
           <p:nvPr/>
         </p:nvSpPr>
@@ -16395,7 +16395,7 @@
       </p:sp>
       <p:sp>
         <p:nvSpPr>
-          <p:cNvPr id="9" name="cmd_414"/>
+          <p:cNvPr id="9" name="cmd_415"/>
           <p:cNvSpPr/>
           <p:nvPr/>
         </p:nvSpPr>
@@ -16476,7 +16476,7 @@
       </p:sp>
       <p:sp>
         <p:nvSpPr>
-          <p:cNvPr id="10" name="meta_415"/>
+          <p:cNvPr id="10" name="meta_416"/>
           <p:cNvSpPr/>
           <p:nvPr/>
         </p:nvSpPr>
@@ -16525,7 +16525,7 @@
       </p:sp>
       <p:sp>
         <p:nvSpPr>
-          <p:cNvPr id="11" name="tag_416"/>
+          <p:cNvPr id="11" name="tag_417"/>
           <p:cNvSpPr/>
           <p:nvPr/>
         </p:nvSpPr>
@@ -16588,7 +16588,7 @@
       </p:sp>
       <p:pic>
         <p:nvPicPr>
-          <p:cNvPr id="12" name="logo_417" descr="/home/claude/lls-course/v2/img/logo.png">    </p:cNvPr>
+          <p:cNvPr id="12" name="logo_418" descr="/home/claude/lls-course/v2/img/logo.png">    </p:cNvPr>
           <p:cNvPicPr>
             <a:picLocks noChangeAspect="1"/>
           </p:cNvPicPr>
@@ -16612,7 +16612,7 @@
       </p:pic>
       <p:sp>
         <p:nvSpPr>
-          <p:cNvPr id="13" name="foot_418"/>
+          <p:cNvPr id="13" name="foot_419"/>
           <p:cNvSpPr/>
           <p:nvPr/>
         </p:nvSpPr>
@@ -16651,7 +16651,7 @@
       </p:sp>
       <p:sp>
         <p:nvSpPr>
-          <p:cNvPr id="14" name="cd_419"/>
+          <p:cNvPr id="14" name="cd_420"/>
           <p:cNvSpPr/>
           <p:nvPr/>
         </p:nvSpPr>
@@ -16685,7 +16685,7 @@
       </p:sp>
       <p:sp>
         <p:nvSpPr>
-          <p:cNvPr id="15" name="ii_420"/>
+          <p:cNvPr id="15" name="ii_421"/>
           <p:cNvSpPr/>
           <p:nvPr/>
         </p:nvSpPr>
@@ -16721,7 +16721,7 @@
       </p:sp>
       <p:sp>
         <p:nvSpPr>
-          <p:cNvPr id="16" name="ih_421"/>
+          <p:cNvPr id="16" name="ih_422"/>
           <p:cNvSpPr/>
           <p:nvPr/>
         </p:nvSpPr>
@@ -16760,7 +16760,7 @@
       </p:sp>
       <p:sp>
         <p:nvSpPr>
-          <p:cNvPr id="17" name="il_422"/>
+          <p:cNvPr id="17" name="il_423"/>
           <p:cNvSpPr/>
           <p:nvPr/>
         </p:nvSpPr>
@@ -16877,7 +16877,7 @@
       </p:sp>
       <p:sp>
         <p:nvSpPr>
-          <p:cNvPr id="18" name="st_423"/>
+          <p:cNvPr id="18" name="st_424"/>
           <p:cNvSpPr/>
           <p:nvPr/>
         </p:nvSpPr>
@@ -16948,7 +16948,7 @@
       </p:sp>
       <p:sp>
         <p:nvSpPr>
-          <p:cNvPr id="19" name="bd_424"/>
+          <p:cNvPr id="19" name="bd_425"/>
           <p:cNvSpPr/>
           <p:nvPr/>
         </p:nvSpPr>
@@ -17000,7 +17000,7 @@
       </p:sp>
       <p:sp>
         <p:nvSpPr>
-          <p:cNvPr id="20" name="gq_425"/>
+          <p:cNvPr id="20" name="gq_426"/>
           <p:cNvSpPr/>
           <p:nvPr/>
         </p:nvSpPr>
@@ -17049,7 +17049,7 @@
       </p:sp>
       <p:sp>
         <p:nvSpPr>
-          <p:cNvPr id="21" name="chip_426"/>
+          <p:cNvPr id="21" name="chip_427"/>
           <p:cNvSpPr/>
           <p:nvPr/>
         </p:nvSpPr>
@@ -17098,7 +17098,7 @@
       </p:sp>
       <p:sp>
         <p:nvSpPr>
-          <p:cNvPr id="22" name="bd_427"/>
+          <p:cNvPr id="22" name="bd_428"/>
           <p:cNvSpPr/>
           <p:nvPr/>
         </p:nvSpPr>
@@ -17150,7 +17150,7 @@
       </p:sp>
       <p:sp>
         <p:nvSpPr>
-          <p:cNvPr id="23" name="gq_428"/>
+          <p:cNvPr id="23" name="gq_429"/>
           <p:cNvSpPr/>
           <p:nvPr/>
         </p:nvSpPr>
@@ -17199,7 +17199,7 @@
       </p:sp>
       <p:sp>
         <p:nvSpPr>
-          <p:cNvPr id="24" name="R1_chip429"/>
+          <p:cNvPr id="24" name="R1_chip430"/>
           <p:cNvSpPr/>
           <p:nvPr/>
         </p:nvSpPr>
@@ -17248,7 +17248,7 @@
       </p:sp>
       <p:sp>
         <p:nvSpPr>
-          <p:cNvPr id="25" name="bd_430"/>
+          <p:cNvPr id="25" name="bd_431"/>
           <p:cNvSpPr/>
           <p:nvPr/>
         </p:nvSpPr>
@@ -17300,7 +17300,7 @@
       </p:sp>
       <p:sp>
         <p:nvSpPr>
-          <p:cNvPr id="26" name="gq_431"/>
+          <p:cNvPr id="26" name="gq_432"/>
           <p:cNvSpPr/>
           <p:nvPr/>
         </p:nvSpPr>
@@ -17349,7 +17349,7 @@
       </p:sp>
       <p:sp>
         <p:nvSpPr>
-          <p:cNvPr id="27" name="R2_chip432"/>
+          <p:cNvPr id="27" name="R2_chip433"/>
           <p:cNvSpPr/>
           <p:nvPr/>
         </p:nvSpPr>
@@ -17398,7 +17398,7 @@
       </p:sp>
       <p:sp>
         <p:nvSpPr>
-          <p:cNvPr id="28" name="bd_433"/>
+          <p:cNvPr id="28" name="bd_434"/>
           <p:cNvSpPr/>
           <p:nvPr/>
         </p:nvSpPr>
@@ -17450,7 +17450,7 @@
       </p:sp>
       <p:sp>
         <p:nvSpPr>
-          <p:cNvPr id="29" name="gq_434"/>
+          <p:cNvPr id="29" name="gq_435"/>
           <p:cNvSpPr/>
           <p:nvPr/>
         </p:nvSpPr>
@@ -17499,7 +17499,7 @@
       </p:sp>
       <p:sp>
         <p:nvSpPr>
-          <p:cNvPr id="30" name="R3_chip435"/>
+          <p:cNvPr id="30" name="R3_chip436"/>
           <p:cNvSpPr/>
           <p:nvPr/>
         </p:nvSpPr>
@@ -17779,7 +17779,7 @@
       </p:grpSpPr>
       <p:sp>
         <p:nvSpPr>
-          <p:cNvPr id="3" name="bd_436"/>
+          <p:cNvPr id="3" name="bd_437"/>
           <p:cNvSpPr/>
           <p:nvPr/>
         </p:nvSpPr>
@@ -17831,7 +17831,7 @@
       </p:sp>
       <p:pic>
         <p:nvPicPr>
-          <p:cNvPr id="4" name="brY_437" descr="/home/claude/lls-course/v2/assets/brush-yellow.png">    </p:cNvPr>
+          <p:cNvPr id="4" name="brY_438" descr="/home/claude/lls-course/v2/assets/brush-yellow.png">    </p:cNvPr>
           <p:cNvPicPr>
             <a:picLocks noChangeAspect="1"/>
           </p:cNvPicPr>
@@ -17855,7 +17855,7 @@
       </p:pic>
       <p:sp>
         <p:nvSpPr>
-          <p:cNvPr id="5" name="title_438"/>
+          <p:cNvPr id="5" name="title_439"/>
           <p:cNvSpPr/>
           <p:nvPr/>
         </p:nvSpPr>
@@ -17896,7 +17896,7 @@
       </p:sp>
       <p:pic>
         <p:nvPicPr>
-          <p:cNvPr id="6" name="brP_439" descr="/home/claude/lls-course/v2/assets/brush-pink.png">    </p:cNvPr>
+          <p:cNvPr id="6" name="brP_440" descr="/home/claude/lls-course/v2/assets/brush-pink.png">    </p:cNvPr>
           <p:cNvPicPr>
             <a:picLocks noChangeAspect="1"/>
           </p:cNvPicPr>
@@ -17920,7 +17920,7 @@
       </p:pic>
       <p:sp>
         <p:nvSpPr>
-          <p:cNvPr id="7" name="ins_440"/>
+          <p:cNvPr id="7" name="ins_441"/>
           <p:cNvSpPr/>
           <p:nvPr/>
         </p:nvSpPr>
@@ -17961,7 +17961,7 @@
       </p:sp>
       <p:sp>
         <p:nvSpPr>
-          <p:cNvPr id="8" name="insIT_441"/>
+          <p:cNvPr id="8" name="insIT_442"/>
           <p:cNvSpPr/>
           <p:nvPr/>
         </p:nvSpPr>
@@ -18002,7 +18002,7 @@
       </p:sp>
       <p:sp>
         <p:nvSpPr>
-          <p:cNvPr id="9" name="meta_442"/>
+          <p:cNvPr id="9" name="meta_443"/>
           <p:cNvSpPr/>
           <p:nvPr/>
         </p:nvSpPr>
@@ -18051,7 +18051,7 @@
       </p:sp>
       <p:sp>
         <p:nvSpPr>
-          <p:cNvPr id="10" name="tag_443"/>
+          <p:cNvPr id="10" name="tag_444"/>
           <p:cNvSpPr/>
           <p:nvPr/>
         </p:nvSpPr>
@@ -18114,7 +18114,7 @@
       </p:sp>
       <p:pic>
         <p:nvPicPr>
-          <p:cNvPr id="11" name="logo_444" descr="/home/claude/lls-course/v2/img/logo.png">    </p:cNvPr>
+          <p:cNvPr id="11" name="logo_445" descr="/home/claude/lls-course/v2/img/logo.png">    </p:cNvPr>
           <p:cNvPicPr>
             <a:picLocks noChangeAspect="1"/>
           </p:cNvPicPr>
@@ -18138,7 +18138,7 @@
       </p:pic>
       <p:sp>
         <p:nvSpPr>
-          <p:cNvPr id="12" name="foot_445"/>
+          <p:cNvPr id="12" name="foot_446"/>
           <p:cNvSpPr/>
           <p:nvPr/>
         </p:nvSpPr>
@@ -18177,7 +18177,7 @@
       </p:sp>
       <p:sp>
         <p:nvSpPr>
-          <p:cNvPr id="13" name="bd_446"/>
+          <p:cNvPr id="13" name="bd_447"/>
           <p:cNvSpPr/>
           <p:nvPr/>
         </p:nvSpPr>
@@ -18229,7 +18229,7 @@
       </p:sp>
       <p:sp>
         <p:nvSpPr>
-          <p:cNvPr id="14" name="rt_447"/>
+          <p:cNvPr id="14" name="rt_448"/>
           <p:cNvSpPr/>
           <p:nvPr/>
         </p:nvSpPr>
@@ -18285,7 +18285,7 @@
       </p:sp>
       <p:sp>
         <p:nvSpPr>
-          <p:cNvPr id="15" name="bd_448"/>
+          <p:cNvPr id="15" name="bd_449"/>
           <p:cNvSpPr/>
           <p:nvPr/>
         </p:nvSpPr>
@@ -18337,7 +18337,7 @@
       </p:sp>
       <p:sp>
         <p:nvSpPr>
-          <p:cNvPr id="16" name="rt_449"/>
+          <p:cNvPr id="16" name="rt_450"/>
           <p:cNvSpPr/>
           <p:nvPr/>
         </p:nvSpPr>
@@ -18393,7 +18393,7 @@
       </p:sp>
       <p:sp>
         <p:nvSpPr>
-          <p:cNvPr id="17" name="bd_450"/>
+          <p:cNvPr id="17" name="bd_451"/>
           <p:cNvSpPr/>
           <p:nvPr/>
         </p:nvSpPr>
@@ -18445,7 +18445,7 @@
       </p:sp>
       <p:sp>
         <p:nvSpPr>
-          <p:cNvPr id="18" name="rt_451"/>
+          <p:cNvPr id="18" name="rt_452"/>
           <p:cNvSpPr/>
           <p:nvPr/>
         </p:nvSpPr>
@@ -18501,7 +18501,7 @@
       </p:sp>
       <p:sp>
         <p:nvSpPr>
-          <p:cNvPr id="19" name="cd_452"/>
+          <p:cNvPr id="19" name="cd_453"/>
           <p:cNvSpPr/>
           <p:nvPr/>
         </p:nvSpPr>
@@ -18535,7 +18535,7 @@
       </p:sp>
       <p:sp>
         <p:nvSpPr>
-          <p:cNvPr id="20" name="ii_453"/>
+          <p:cNvPr id="20" name="ii_454"/>
           <p:cNvSpPr/>
           <p:nvPr/>
         </p:nvSpPr>
@@ -18571,7 +18571,7 @@
       </p:sp>
       <p:sp>
         <p:nvSpPr>
-          <p:cNvPr id="21" name="ih_454"/>
+          <p:cNvPr id="21" name="ih_455"/>
           <p:cNvSpPr/>
           <p:nvPr/>
         </p:nvSpPr>
@@ -18610,7 +18610,7 @@
       </p:sp>
       <p:sp>
         <p:nvSpPr>
-          <p:cNvPr id="22" name="il_455"/>
+          <p:cNvPr id="22" name="il_456"/>
           <p:cNvSpPr/>
           <p:nvPr/>
         </p:nvSpPr>
@@ -18679,7 +18679,7 @@
       </p:sp>
       <p:sp>
         <p:nvSpPr>
-          <p:cNvPr id="23" name="st_456"/>
+          <p:cNvPr id="23" name="st_457"/>
           <p:cNvSpPr/>
           <p:nvPr/>
         </p:nvSpPr>
@@ -18775,7 +18775,7 @@
       </p:grpSpPr>
       <p:sp>
         <p:nvSpPr>
-          <p:cNvPr id="3" name="bd_457"/>
+          <p:cNvPr id="3" name="bd_458"/>
           <p:cNvSpPr/>
           <p:nvPr/>
         </p:nvSpPr>
@@ -18827,7 +18827,7 @@
       </p:sp>
       <p:pic>
         <p:nvPicPr>
-          <p:cNvPr id="4" name="brY_458" descr="/home/claude/lls-course/v2/assets/brush-yellow.png">    </p:cNvPr>
+          <p:cNvPr id="4" name="brY_459" descr="/home/claude/lls-course/v2/assets/brush-yellow.png">    </p:cNvPr>
           <p:cNvPicPr>
             <a:picLocks noChangeAspect="1"/>
           </p:cNvPicPr>
@@ -18851,7 +18851,7 @@
       </p:pic>
       <p:sp>
         <p:nvSpPr>
-          <p:cNvPr id="5" name="title_459"/>
+          <p:cNvPr id="5" name="title_460"/>
           <p:cNvSpPr/>
           <p:nvPr/>
         </p:nvSpPr>
@@ -18892,7 +18892,7 @@
       </p:sp>
       <p:pic>
         <p:nvPicPr>
-          <p:cNvPr id="6" name="brP_460" descr="/home/claude/lls-course/v2/assets/brush-pink.png">    </p:cNvPr>
+          <p:cNvPr id="6" name="brP_461" descr="/home/claude/lls-course/v2/assets/brush-pink.png">    </p:cNvPr>
           <p:cNvPicPr>
             <a:picLocks noChangeAspect="1"/>
           </p:cNvPicPr>
@@ -18916,7 +18916,7 @@
       </p:pic>
       <p:sp>
         <p:nvSpPr>
-          <p:cNvPr id="7" name="ins_461"/>
+          <p:cNvPr id="7" name="ins_462"/>
           <p:cNvSpPr/>
           <p:nvPr/>
         </p:nvSpPr>
@@ -18957,7 +18957,7 @@
       </p:sp>
       <p:sp>
         <p:nvSpPr>
-          <p:cNvPr id="8" name="insIT_462"/>
+          <p:cNvPr id="8" name="insIT_463"/>
           <p:cNvSpPr/>
           <p:nvPr/>
         </p:nvSpPr>
@@ -18998,7 +18998,7 @@
       </p:sp>
       <p:sp>
         <p:nvSpPr>
-          <p:cNvPr id="9" name="cmd_463"/>
+          <p:cNvPr id="9" name="cmd_464"/>
           <p:cNvSpPr/>
           <p:nvPr/>
         </p:nvSpPr>
@@ -19079,7 +19079,7 @@
       </p:sp>
       <p:sp>
         <p:nvSpPr>
-          <p:cNvPr id="10" name="meta_464"/>
+          <p:cNvPr id="10" name="meta_465"/>
           <p:cNvSpPr/>
           <p:nvPr/>
         </p:nvSpPr>
@@ -19128,7 +19128,7 @@
       </p:sp>
       <p:sp>
         <p:nvSpPr>
-          <p:cNvPr id="11" name="tag_465"/>
+          <p:cNvPr id="11" name="tag_466"/>
           <p:cNvSpPr/>
           <p:nvPr/>
         </p:nvSpPr>
@@ -19191,7 +19191,7 @@
       </p:sp>
       <p:pic>
         <p:nvPicPr>
-          <p:cNvPr id="12" name="logo_466" descr="/home/claude/lls-course/v2/img/logo.png">    </p:cNvPr>
+          <p:cNvPr id="12" name="logo_467" descr="/home/claude/lls-course/v2/img/logo.png">    </p:cNvPr>
           <p:cNvPicPr>
             <a:picLocks noChangeAspect="1"/>
           </p:cNvPicPr>
@@ -19215,7 +19215,7 @@
       </p:pic>
       <p:sp>
         <p:nvSpPr>
-          <p:cNvPr id="13" name="foot_467"/>
+          <p:cNvPr id="13" name="foot_468"/>
           <p:cNvSpPr/>
           <p:nvPr/>
         </p:nvSpPr>
@@ -19254,7 +19254,7 @@
       </p:sp>
       <p:sp>
         <p:nvSpPr>
-          <p:cNvPr id="14" name="cd_468"/>
+          <p:cNvPr id="14" name="cd_469"/>
           <p:cNvSpPr/>
           <p:nvPr/>
         </p:nvSpPr>
@@ -19288,7 +19288,7 @@
       </p:sp>
       <p:sp>
         <p:nvSpPr>
-          <p:cNvPr id="15" name="te_469"/>
+          <p:cNvPr id="15" name="te_470"/>
           <p:cNvSpPr/>
           <p:nvPr/>
         </p:nvSpPr>
@@ -19324,7 +19324,7 @@
       </p:sp>
       <p:sp>
         <p:nvSpPr>
-          <p:cNvPr id="16" name="tt_470"/>
+          <p:cNvPr id="16" name="tt_471"/>
           <p:cNvSpPr/>
           <p:nvPr/>
         </p:nvSpPr>
@@ -19365,7 +19365,7 @@
       </p:sp>
       <p:sp>
         <p:nvSpPr>
-          <p:cNvPr id="17" name="R1_tk471"/>
+          <p:cNvPr id="17" name="R1_tk472"/>
           <p:cNvSpPr/>
           <p:nvPr/>
         </p:nvSpPr>
@@ -19401,7 +19401,7 @@
       </p:sp>
       <p:sp>
         <p:nvSpPr>
-          <p:cNvPr id="18" name="cd_472"/>
+          <p:cNvPr id="18" name="cd_473"/>
           <p:cNvSpPr/>
           <p:nvPr/>
         </p:nvSpPr>
@@ -19435,7 +19435,7 @@
       </p:sp>
       <p:sp>
         <p:nvSpPr>
-          <p:cNvPr id="19" name="te_473"/>
+          <p:cNvPr id="19" name="te_474"/>
           <p:cNvSpPr/>
           <p:nvPr/>
         </p:nvSpPr>
@@ -19471,7 +19471,7 @@
       </p:sp>
       <p:sp>
         <p:nvSpPr>
-          <p:cNvPr id="20" name="tt_474"/>
+          <p:cNvPr id="20" name="tt_475"/>
           <p:cNvSpPr/>
           <p:nvPr/>
         </p:nvSpPr>
@@ -19512,7 +19512,7 @@
       </p:sp>
       <p:sp>
         <p:nvSpPr>
-          <p:cNvPr id="21" name="R2_tk475"/>
+          <p:cNvPr id="21" name="R2_tk476"/>
           <p:cNvSpPr/>
           <p:nvPr/>
         </p:nvSpPr>
@@ -19548,7 +19548,7 @@
       </p:sp>
       <p:sp>
         <p:nvSpPr>
-          <p:cNvPr id="22" name="cd_476"/>
+          <p:cNvPr id="22" name="cd_477"/>
           <p:cNvSpPr/>
           <p:nvPr/>
         </p:nvSpPr>
@@ -19582,7 +19582,7 @@
       </p:sp>
       <p:sp>
         <p:nvSpPr>
-          <p:cNvPr id="23" name="te_477"/>
+          <p:cNvPr id="23" name="te_478"/>
           <p:cNvSpPr/>
           <p:nvPr/>
         </p:nvSpPr>
@@ -19618,7 +19618,7 @@
       </p:sp>
       <p:sp>
         <p:nvSpPr>
-          <p:cNvPr id="24" name="tt_478"/>
+          <p:cNvPr id="24" name="tt_479"/>
           <p:cNvSpPr/>
           <p:nvPr/>
         </p:nvSpPr>
@@ -19659,7 +19659,7 @@
       </p:sp>
       <p:sp>
         <p:nvSpPr>
-          <p:cNvPr id="25" name="R3_tk479"/>
+          <p:cNvPr id="25" name="R3_tk480"/>
           <p:cNvSpPr/>
           <p:nvPr/>
         </p:nvSpPr>
@@ -19695,7 +19695,7 @@
       </p:sp>
       <p:sp>
         <p:nvSpPr>
-          <p:cNvPr id="26" name="cd_480"/>
+          <p:cNvPr id="26" name="cd_481"/>
           <p:cNvSpPr/>
           <p:nvPr/>
         </p:nvSpPr>
@@ -19729,7 +19729,7 @@
       </p:sp>
       <p:sp>
         <p:nvSpPr>
-          <p:cNvPr id="27" name="te_481"/>
+          <p:cNvPr id="27" name="te_482"/>
           <p:cNvSpPr/>
           <p:nvPr/>
         </p:nvSpPr>
@@ -19765,7 +19765,7 @@
       </p:sp>
       <p:sp>
         <p:nvSpPr>
-          <p:cNvPr id="28" name="tt_482"/>
+          <p:cNvPr id="28" name="tt_483"/>
           <p:cNvSpPr/>
           <p:nvPr/>
         </p:nvSpPr>
@@ -19806,7 +19806,7 @@
       </p:sp>
       <p:sp>
         <p:nvSpPr>
-          <p:cNvPr id="29" name="R4_tk483"/>
+          <p:cNvPr id="29" name="R4_tk484"/>
           <p:cNvSpPr/>
           <p:nvPr/>
         </p:nvSpPr>
@@ -19842,7 +19842,7 @@
       </p:sp>
       <p:sp>
         <p:nvSpPr>
-          <p:cNvPr id="30" name="cd_484"/>
+          <p:cNvPr id="30" name="cd_485"/>
           <p:cNvSpPr/>
           <p:nvPr/>
         </p:nvSpPr>
@@ -19876,7 +19876,7 @@
       </p:sp>
       <p:sp>
         <p:nvSpPr>
-          <p:cNvPr id="31" name="te_485"/>
+          <p:cNvPr id="31" name="te_486"/>
           <p:cNvSpPr/>
           <p:nvPr/>
         </p:nvSpPr>
@@ -19912,7 +19912,7 @@
       </p:sp>
       <p:sp>
         <p:nvSpPr>
-          <p:cNvPr id="32" name="tt_486"/>
+          <p:cNvPr id="32" name="tt_487"/>
           <p:cNvSpPr/>
           <p:nvPr/>
         </p:nvSpPr>
@@ -19953,7 +19953,7 @@
       </p:sp>
       <p:sp>
         <p:nvSpPr>
-          <p:cNvPr id="33" name="R5_tk487"/>
+          <p:cNvPr id="33" name="R5_tk488"/>
           <p:cNvSpPr/>
           <p:nvPr/>
         </p:nvSpPr>
@@ -19989,7 +19989,7 @@
       </p:sp>
       <p:sp>
         <p:nvSpPr>
-          <p:cNvPr id="34" name="st_488"/>
+          <p:cNvPr id="34" name="st_489"/>
           <p:cNvSpPr/>
           <p:nvPr/>
         </p:nvSpPr>
@@ -22403,7 +22403,7 @@
       </p:grpSpPr>
       <p:sp>
         <p:nvSpPr>
-          <p:cNvPr id="3" name="dv_489"/>
+          <p:cNvPr id="3" name="dv_490"/>
           <p:cNvSpPr/>
           <p:nvPr/>
         </p:nvSpPr>
@@ -22439,7 +22439,7 @@
       </p:sp>
       <p:sp>
         <p:nvSpPr>
-          <p:cNvPr id="4" name="dvt_490"/>
+          <p:cNvPr id="4" name="dvt_491"/>
           <p:cNvSpPr/>
           <p:nvPr/>
         </p:nvSpPr>
@@ -22478,7 +22478,7 @@
       </p:sp>
       <p:sp>
         <p:nvSpPr>
-          <p:cNvPr id="5" name="dvs_491"/>
+          <p:cNvPr id="5" name="dvs_492"/>
           <p:cNvSpPr/>
           <p:nvPr/>
         </p:nvSpPr>
@@ -22517,7 +22517,7 @@
       </p:sp>
       <p:pic>
         <p:nvPicPr>
-          <p:cNvPr id="6" name="logo_492" descr="/home/claude/lls-course/v2/img/logo.png">    </p:cNvPr>
+          <p:cNvPr id="6" name="logo_493" descr="/home/claude/lls-course/v2/img/logo.png">    </p:cNvPr>
           <p:cNvPicPr>
             <a:picLocks noChangeAspect="1"/>
           </p:cNvPicPr>
@@ -22583,7 +22583,7 @@
       </p:grpSpPr>
       <p:sp>
         <p:nvSpPr>
-          <p:cNvPr id="3" name="bd_493"/>
+          <p:cNvPr id="3" name="bd_494"/>
           <p:cNvSpPr/>
           <p:nvPr/>
         </p:nvSpPr>
@@ -22635,7 +22635,7 @@
       </p:sp>
       <p:pic>
         <p:nvPicPr>
-          <p:cNvPr id="4" name="brY_494" descr="/home/claude/lls-course/v2/assets/brush-yellow.png">    </p:cNvPr>
+          <p:cNvPr id="4" name="brY_495" descr="/home/claude/lls-course/v2/assets/brush-yellow.png">    </p:cNvPr>
           <p:cNvPicPr>
             <a:picLocks noChangeAspect="1"/>
           </p:cNvPicPr>
@@ -22659,7 +22659,7 @@
       </p:pic>
       <p:sp>
         <p:nvSpPr>
-          <p:cNvPr id="5" name="title_495"/>
+          <p:cNvPr id="5" name="title_496"/>
           <p:cNvSpPr/>
           <p:nvPr/>
         </p:nvSpPr>
@@ -22700,7 +22700,7 @@
       </p:sp>
       <p:pic>
         <p:nvPicPr>
-          <p:cNvPr id="6" name="brP_496" descr="/home/claude/lls-course/v2/assets/brush-pink.png">    </p:cNvPr>
+          <p:cNvPr id="6" name="brP_497" descr="/home/claude/lls-course/v2/assets/brush-pink.png">    </p:cNvPr>
           <p:cNvPicPr>
             <a:picLocks noChangeAspect="1"/>
           </p:cNvPicPr>
@@ -22724,7 +22724,7 @@
       </p:pic>
       <p:sp>
         <p:nvSpPr>
-          <p:cNvPr id="7" name="ins_497"/>
+          <p:cNvPr id="7" name="ins_498"/>
           <p:cNvSpPr/>
           <p:nvPr/>
         </p:nvSpPr>
@@ -22765,7 +22765,7 @@
       </p:sp>
       <p:sp>
         <p:nvSpPr>
-          <p:cNvPr id="8" name="insIT_498"/>
+          <p:cNvPr id="8" name="insIT_499"/>
           <p:cNvSpPr/>
           <p:nvPr/>
         </p:nvSpPr>
@@ -22806,7 +22806,7 @@
       </p:sp>
       <p:sp>
         <p:nvSpPr>
-          <p:cNvPr id="9" name="cmd_499"/>
+          <p:cNvPr id="9" name="cmd_500"/>
           <p:cNvSpPr/>
           <p:nvPr/>
         </p:nvSpPr>
@@ -22887,7 +22887,7 @@
       </p:sp>
       <p:sp>
         <p:nvSpPr>
-          <p:cNvPr id="10" name="meta_500"/>
+          <p:cNvPr id="10" name="meta_501"/>
           <p:cNvSpPr/>
           <p:nvPr/>
         </p:nvSpPr>
@@ -22936,7 +22936,7 @@
       </p:sp>
       <p:sp>
         <p:nvSpPr>
-          <p:cNvPr id="11" name="tag_501"/>
+          <p:cNvPr id="11" name="tag_502"/>
           <p:cNvSpPr/>
           <p:nvPr/>
         </p:nvSpPr>
@@ -22999,7 +22999,7 @@
       </p:sp>
       <p:pic>
         <p:nvPicPr>
-          <p:cNvPr id="12" name="logo_502" descr="/home/claude/lls-course/v2/img/logo.png">    </p:cNvPr>
+          <p:cNvPr id="12" name="logo_503" descr="/home/claude/lls-course/v2/img/logo.png">    </p:cNvPr>
           <p:cNvPicPr>
             <a:picLocks noChangeAspect="1"/>
           </p:cNvPicPr>
@@ -23023,7 +23023,7 @@
       </p:pic>
       <p:sp>
         <p:nvSpPr>
-          <p:cNvPr id="13" name="foot_503"/>
+          <p:cNvPr id="13" name="foot_504"/>
           <p:cNvSpPr/>
           <p:nvPr/>
         </p:nvSpPr>
@@ -23062,7 +23062,7 @@
       </p:sp>
       <p:sp>
         <p:nvSpPr>
-          <p:cNvPr id="14" name="ext_504"/>
+          <p:cNvPr id="14" name="ext_505"/>
           <p:cNvSpPr/>
           <p:nvPr/>
         </p:nvSpPr>
@@ -23109,7 +23109,7 @@
       </p:sp>
       <p:sp>
         <p:nvSpPr>
-          <p:cNvPr id="15" name="cd_505"/>
+          <p:cNvPr id="15" name="cd_506"/>
           <p:cNvSpPr/>
           <p:nvPr/>
         </p:nvSpPr>
@@ -23143,7 +23143,7 @@
       </p:sp>
       <p:sp>
         <p:nvSpPr>
-          <p:cNvPr id="16" name="ii_506"/>
+          <p:cNvPr id="16" name="ii_507"/>
           <p:cNvSpPr/>
           <p:nvPr/>
         </p:nvSpPr>
@@ -23179,7 +23179,7 @@
       </p:sp>
       <p:sp>
         <p:nvSpPr>
-          <p:cNvPr id="17" name="ih_507"/>
+          <p:cNvPr id="17" name="ih_508"/>
           <p:cNvSpPr/>
           <p:nvPr/>
         </p:nvSpPr>
@@ -23218,7 +23218,7 @@
       </p:sp>
       <p:sp>
         <p:nvSpPr>
-          <p:cNvPr id="18" name="il_508"/>
+          <p:cNvPr id="18" name="il_509"/>
           <p:cNvSpPr/>
           <p:nvPr/>
         </p:nvSpPr>
@@ -23335,7 +23335,7 @@
       </p:sp>
       <p:sp>
         <p:nvSpPr>
-          <p:cNvPr id="19" name="R1_qb509"/>
+          <p:cNvPr id="19" name="R1_qb510"/>
           <p:cNvSpPr/>
           <p:nvPr/>
         </p:nvSpPr>
@@ -23387,7 +23387,7 @@
       </p:sp>
       <p:sp>
         <p:nvSpPr>
-          <p:cNvPr id="20" name="R1_sq510"/>
+          <p:cNvPr id="20" name="R1_sq511"/>
           <p:cNvSpPr/>
           <p:nvPr/>
         </p:nvSpPr>
@@ -23460,7 +23460,7 @@
       </p:sp>
       <p:sp>
         <p:nvSpPr>
-          <p:cNvPr id="21" name="R2_qb511"/>
+          <p:cNvPr id="21" name="R2_qb512"/>
           <p:cNvSpPr/>
           <p:nvPr/>
         </p:nvSpPr>
@@ -23512,7 +23512,7 @@
       </p:sp>
       <p:sp>
         <p:nvSpPr>
-          <p:cNvPr id="22" name="R2_sq512"/>
+          <p:cNvPr id="22" name="R2_sq513"/>
           <p:cNvSpPr/>
           <p:nvPr/>
         </p:nvSpPr>
@@ -23585,7 +23585,7 @@
       </p:sp>
       <p:sp>
         <p:nvSpPr>
-          <p:cNvPr id="23" name="R3_qb513"/>
+          <p:cNvPr id="23" name="R3_qb514"/>
           <p:cNvSpPr/>
           <p:nvPr/>
         </p:nvSpPr>
@@ -23637,7 +23637,7 @@
       </p:sp>
       <p:sp>
         <p:nvSpPr>
-          <p:cNvPr id="24" name="R3_sq514"/>
+          <p:cNvPr id="24" name="R3_sq515"/>
           <p:cNvSpPr/>
           <p:nvPr/>
         </p:nvSpPr>
@@ -23710,7 +23710,7 @@
       </p:sp>
       <p:sp>
         <p:nvSpPr>
-          <p:cNvPr id="25" name="R4_qb515"/>
+          <p:cNvPr id="25" name="R4_qb516"/>
           <p:cNvSpPr/>
           <p:nvPr/>
         </p:nvSpPr>
@@ -23762,7 +23762,7 @@
       </p:sp>
       <p:sp>
         <p:nvSpPr>
-          <p:cNvPr id="26" name="R4_sq516"/>
+          <p:cNvPr id="26" name="R4_sq517"/>
           <p:cNvSpPr/>
           <p:nvPr/>
         </p:nvSpPr>
@@ -23835,7 +23835,7 @@
       </p:sp>
       <p:sp>
         <p:nvSpPr>
-          <p:cNvPr id="27" name="R5_qb517"/>
+          <p:cNvPr id="27" name="R5_qb518"/>
           <p:cNvSpPr/>
           <p:nvPr/>
         </p:nvSpPr>
@@ -23887,7 +23887,7 @@
       </p:sp>
       <p:sp>
         <p:nvSpPr>
-          <p:cNvPr id="28" name="R5_sq518"/>
+          <p:cNvPr id="28" name="R5_sq519"/>
           <p:cNvSpPr/>
           <p:nvPr/>
         </p:nvSpPr>
@@ -30871,7 +30871,472 @@
       </p:sp>
       <p:sp>
         <p:nvSpPr>
-          <p:cNvPr id="16" name="cd_155"/>
+          <p:cNvPr id="16" name="R1_rdE155"/>
+          <p:cNvSpPr/>
+          <p:nvPr/>
+        </p:nvSpPr>
+        <p:spPr>
+          <a:xfrm>
+            <a:off x="457200" y="1527048"/>
+            <a:ext cx="5486400" cy="3090672"/>
+          </a:xfrm>
+          <a:prstGeom prst="rect">
+            <a:avLst/>
+          </a:prstGeom>
+          <a:solidFill>
+            <a:srgbClr val="FFFFFF"/>
+          </a:solidFill>
+          <a:ln/>
+        </p:spPr>
+        <p:txBody>
+          <a:bodyPr wrap="square" lIns="0" tIns="0" rIns="0" bIns="0" rtlCol="0" anchor="t"/>
+          <a:lstStyle/>
+          <a:p>
+            <a:pPr indent="0" marL="0">
+              <a:lnSpc>
+                <a:spcPct val="105000"/>
+              </a:lnSpc>
+              <a:spcAft>
+                <a:spcPts val="400"/>
+              </a:spcAft>
+              <a:buNone/>
+            </a:pPr>
+            <a:r>
+              <a:rPr lang="en-US" sz="1500" b="1" dirty="0">
+                <a:solidFill>
+                  <a:srgbClr val="1F6F43"/>
+                </a:solidFill>
+                <a:latin typeface="Georgia" pitchFamily="34" charset="0"/>
+                <a:ea typeface="Georgia" pitchFamily="34" charset="-122"/>
+                <a:cs typeface="Georgia" pitchFamily="34" charset="-120"/>
+              </a:rPr>
+              <a:t>Music while you work?</a:t>
+            </a:r>
+            <a:endParaRPr lang="en-US" sz="1000" dirty="0"/>
+          </a:p>
+          <a:p>
+            <a:pPr indent="0" marL="0">
+              <a:lnSpc>
+                <a:spcPct val="105000"/>
+              </a:lnSpc>
+              <a:spcAft>
+                <a:spcPts val="700"/>
+              </a:spcAft>
+              <a:buNone/>
+            </a:pPr>
+            <a:r>
+              <a:rPr lang="en-US" sz="1000" dirty="0">
+                <a:solidFill>
+                  <a:srgbClr val="1B2559"/>
+                </a:solidFill>
+                <a:latin typeface="Georgia" pitchFamily="34" charset="0"/>
+                <a:ea typeface="Georgia" pitchFamily="34" charset="-122"/>
+                <a:cs typeface="Georgia" pitchFamily="34" charset="-120"/>
+              </a:rPr>
+              <a:t>Some prefer to work in silence. Others find playing their favourite tunes loudly helps them to be productive. Up till now, it has been a matter of personal preference. But recently, scientific research has uncovered that listening to music while you work</a:t>
+            </a:r>
+            <a:pPr indent="0" marL="0">
+              <a:lnSpc>
+                <a:spcPct val="105000"/>
+              </a:lnSpc>
+              <a:spcAft>
+                <a:spcPts val="700"/>
+              </a:spcAft>
+              <a:buNone/>
+            </a:pPr>
+            <a:r>
+              <a:rPr lang="en-US" sz="1000" b="1" dirty="0">
+                <a:solidFill>
+                  <a:srgbClr val="2EB872"/>
+                </a:solidFill>
+                <a:latin typeface="Georgia" pitchFamily="34" charset="0"/>
+                <a:ea typeface="Georgia" pitchFamily="34" charset="-122"/>
+                <a:cs typeface="Georgia" pitchFamily="34" charset="-120"/>
+              </a:rPr>
+              <a:t> (1) ________ </a:t>
+            </a:r>
+            <a:pPr indent="0" marL="0">
+              <a:lnSpc>
+                <a:spcPct val="105000"/>
+              </a:lnSpc>
+              <a:spcAft>
+                <a:spcPts val="700"/>
+              </a:spcAft>
+              <a:buNone/>
+            </a:pPr>
+            <a:r>
+              <a:rPr lang="en-US" sz="1000" dirty="0">
+                <a:solidFill>
+                  <a:srgbClr val="1B2559"/>
+                </a:solidFill>
+                <a:latin typeface="Georgia" pitchFamily="34" charset="0"/>
+                <a:ea typeface="Georgia" pitchFamily="34" charset="-122"/>
+                <a:cs typeface="Georgia" pitchFamily="34" charset="-120"/>
+              </a:rPr>
+              <a:t>– although, </a:t>
+            </a:r>
+            <a:pPr indent="0" marL="0">
+              <a:lnSpc>
+                <a:spcPct val="105000"/>
+              </a:lnSpc>
+              <a:spcAft>
+                <a:spcPts val="700"/>
+              </a:spcAft>
+              <a:buNone/>
+            </a:pPr>
+            <a:r>
+              <a:rPr lang="en-US" sz="1000" b="1" dirty="0">
+                <a:solidFill>
+                  <a:srgbClr val="1B2559"/>
+                </a:solidFill>
+                <a:highlight>
+                  <a:srgbClr val="FFE066"/>
+                </a:highlight>
+                <a:latin typeface="Georgia" pitchFamily="34" charset="0"/>
+                <a:ea typeface="Georgia" pitchFamily="34" charset="-122"/>
+                <a:cs typeface="Georgia" pitchFamily="34" charset="-120"/>
+              </a:rPr>
+              <a:t>it depends on</a:t>
+            </a:r>
+            <a:pPr indent="0" marL="0">
+              <a:lnSpc>
+                <a:spcPct val="105000"/>
+              </a:lnSpc>
+              <a:spcAft>
+                <a:spcPts val="700"/>
+              </a:spcAft>
+              <a:buNone/>
+            </a:pPr>
+            <a:r>
+              <a:rPr lang="en-US" sz="1000" b="1" dirty="0">
+                <a:solidFill>
+                  <a:srgbClr val="2EB872"/>
+                </a:solidFill>
+                <a:latin typeface="Georgia" pitchFamily="34" charset="0"/>
+                <a:ea typeface="Georgia" pitchFamily="34" charset="-122"/>
+                <a:cs typeface="Georgia" pitchFamily="34" charset="-120"/>
+              </a:rPr>
+              <a:t> (2) ________ </a:t>
+            </a:r>
+            <a:pPr indent="0" marL="0">
+              <a:lnSpc>
+                <a:spcPct val="105000"/>
+              </a:lnSpc>
+              <a:spcAft>
+                <a:spcPts val="700"/>
+              </a:spcAft>
+              <a:buNone/>
+            </a:pPr>
+            <a:r>
+              <a:rPr lang="en-US" sz="1000" dirty="0">
+                <a:solidFill>
+                  <a:srgbClr val="1B2559"/>
+                </a:solidFill>
+                <a:latin typeface="Georgia" pitchFamily="34" charset="0"/>
+                <a:ea typeface="Georgia" pitchFamily="34" charset="-122"/>
+                <a:cs typeface="Georgia" pitchFamily="34" charset="-120"/>
+              </a:rPr>
+              <a:t>.</a:t>
+            </a:r>
+            <a:endParaRPr lang="en-US" sz="1000" dirty="0"/>
+          </a:p>
+          <a:p>
+            <a:pPr indent="0" marL="0">
+              <a:lnSpc>
+                <a:spcPct val="105000"/>
+              </a:lnSpc>
+              <a:spcAft>
+                <a:spcPts val="700"/>
+              </a:spcAft>
+              <a:buNone/>
+            </a:pPr>
+            <a:r>
+              <a:rPr lang="en-US" sz="1000" dirty="0">
+                <a:solidFill>
+                  <a:srgbClr val="1B2559"/>
+                </a:solidFill>
+                <a:latin typeface="Georgia" pitchFamily="34" charset="0"/>
+                <a:ea typeface="Georgia" pitchFamily="34" charset="-122"/>
+                <a:cs typeface="Georgia" pitchFamily="34" charset="-120"/>
+              </a:rPr>
+              <a:t>A study by Simone Ritter, at Radboud University in the Netherlands, and Sam Ferguson, at the University of Technology in Sydney, Australia, looked at how</a:t>
+            </a:r>
+            <a:pPr indent="0" marL="0">
+              <a:lnSpc>
+                <a:spcPct val="105000"/>
+              </a:lnSpc>
+              <a:spcAft>
+                <a:spcPts val="700"/>
+              </a:spcAft>
+              <a:buNone/>
+            </a:pPr>
+            <a:r>
+              <a:rPr lang="en-US" sz="1000" b="1" dirty="0">
+                <a:solidFill>
+                  <a:srgbClr val="2EB872"/>
+                </a:solidFill>
+                <a:latin typeface="Georgia" pitchFamily="34" charset="0"/>
+                <a:ea typeface="Georgia" pitchFamily="34" charset="-122"/>
+                <a:cs typeface="Georgia" pitchFamily="34" charset="-120"/>
+              </a:rPr>
+              <a:t> (3) ________ </a:t>
+            </a:r>
+            <a:pPr indent="0" marL="0">
+              <a:lnSpc>
+                <a:spcPct val="105000"/>
+              </a:lnSpc>
+              <a:spcAft>
+                <a:spcPts val="700"/>
+              </a:spcAft>
+              <a:buNone/>
+            </a:pPr>
+            <a:r>
+              <a:rPr lang="en-US" sz="1000" dirty="0">
+                <a:solidFill>
+                  <a:srgbClr val="1B2559"/>
+                </a:solidFill>
+                <a:latin typeface="Georgia" pitchFamily="34" charset="0"/>
+                <a:ea typeface="Georgia" pitchFamily="34" charset="-122"/>
+                <a:cs typeface="Georgia" pitchFamily="34" charset="-120"/>
+              </a:rPr>
+              <a:t>compared to working in silence. In their study, Ritter and Ferguson divided 155 volunteers into five groups, which were then given tasks to complete. Four of the groups did so while</a:t>
+            </a:r>
+            <a:pPr indent="0" marL="0">
+              <a:lnSpc>
+                <a:spcPct val="105000"/>
+              </a:lnSpc>
+              <a:spcAft>
+                <a:spcPts val="700"/>
+              </a:spcAft>
+              <a:buNone/>
+            </a:pPr>
+            <a:r>
+              <a:rPr lang="en-US" sz="1000" b="1" dirty="0">
+                <a:solidFill>
+                  <a:srgbClr val="2EB872"/>
+                </a:solidFill>
+                <a:latin typeface="Georgia" pitchFamily="34" charset="0"/>
+                <a:ea typeface="Georgia" pitchFamily="34" charset="-122"/>
+                <a:cs typeface="Georgia" pitchFamily="34" charset="-120"/>
+              </a:rPr>
+              <a:t> (4) ________ </a:t>
+            </a:r>
+            <a:pPr indent="0" marL="0">
+              <a:lnSpc>
+                <a:spcPct val="105000"/>
+              </a:lnSpc>
+              <a:spcAft>
+                <a:spcPts val="700"/>
+              </a:spcAft>
+              <a:buNone/>
+            </a:pPr>
+            <a:r>
+              <a:rPr lang="en-US" sz="1000" dirty="0">
+                <a:solidFill>
+                  <a:srgbClr val="1B2559"/>
+                </a:solidFill>
+                <a:latin typeface="Georgia" pitchFamily="34" charset="0"/>
+                <a:ea typeface="Georgia" pitchFamily="34" charset="-122"/>
+                <a:cs typeface="Georgia" pitchFamily="34" charset="-120"/>
+              </a:rPr>
+              <a:t>, such as Holst's Mars and Vivaldi's Spring. The fifth group worked in silence.</a:t>
+            </a:r>
+            <a:endParaRPr lang="en-US" sz="1000" dirty="0"/>
+          </a:p>
+          <a:p>
+            <a:pPr indent="0" marL="0">
+              <a:lnSpc>
+                <a:spcPct val="105000"/>
+              </a:lnSpc>
+              <a:spcAft>
+                <a:spcPts val="700"/>
+              </a:spcAft>
+              <a:buNone/>
+            </a:pPr>
+            <a:r>
+              <a:rPr lang="en-US" sz="1000" dirty="0">
+                <a:solidFill>
+                  <a:srgbClr val="1B2559"/>
+                </a:solidFill>
+                <a:latin typeface="Georgia" pitchFamily="34" charset="0"/>
+                <a:ea typeface="Georgia" pitchFamily="34" charset="-122"/>
+                <a:cs typeface="Georgia" pitchFamily="34" charset="-120"/>
+              </a:rPr>
+              <a:t>Their study found that </a:t>
+            </a:r>
+            <a:pPr indent="0" marL="0">
+              <a:lnSpc>
+                <a:spcPct val="105000"/>
+              </a:lnSpc>
+              <a:spcAft>
+                <a:spcPts val="700"/>
+              </a:spcAft>
+              <a:buNone/>
+            </a:pPr>
+            <a:r>
+              <a:rPr lang="en-US" sz="1000" b="1" dirty="0">
+                <a:solidFill>
+                  <a:srgbClr val="1B2559"/>
+                </a:solidFill>
+                <a:highlight>
+                  <a:srgbClr val="FFE066"/>
+                </a:highlight>
+                <a:latin typeface="Georgia" pitchFamily="34" charset="0"/>
+                <a:ea typeface="Georgia" pitchFamily="34" charset="-122"/>
+                <a:cs typeface="Georgia" pitchFamily="34" charset="-120"/>
+              </a:rPr>
+              <a:t>happy music improved 'divergent thinking'</a:t>
+            </a:r>
+            <a:pPr indent="0" marL="0">
+              <a:lnSpc>
+                <a:spcPct val="105000"/>
+              </a:lnSpc>
+              <a:spcAft>
+                <a:spcPts val="700"/>
+              </a:spcAft>
+              <a:buNone/>
+            </a:pPr>
+            <a:r>
+              <a:rPr lang="en-US" sz="1000" dirty="0">
+                <a:solidFill>
+                  <a:srgbClr val="1B2559"/>
+                </a:solidFill>
+                <a:latin typeface="Georgia" pitchFamily="34" charset="0"/>
+                <a:ea typeface="Georgia" pitchFamily="34" charset="-122"/>
+                <a:cs typeface="Georgia" pitchFamily="34" charset="-120"/>
+              </a:rPr>
+              <a:t>, which is all about creativity. However, they found that </a:t>
+            </a:r>
+            <a:pPr indent="0" marL="0">
+              <a:lnSpc>
+                <a:spcPct val="105000"/>
+              </a:lnSpc>
+              <a:spcAft>
+                <a:spcPts val="700"/>
+              </a:spcAft>
+              <a:buNone/>
+            </a:pPr>
+            <a:r>
+              <a:rPr lang="en-US" sz="1000" b="1" dirty="0">
+                <a:solidFill>
+                  <a:srgbClr val="1B2559"/>
+                </a:solidFill>
+                <a:highlight>
+                  <a:srgbClr val="FFE066"/>
+                </a:highlight>
+                <a:latin typeface="Georgia" pitchFamily="34" charset="0"/>
+                <a:ea typeface="Georgia" pitchFamily="34" charset="-122"/>
+                <a:cs typeface="Georgia" pitchFamily="34" charset="-120"/>
+              </a:rPr>
+              <a:t>it had no impact on 'convergent thinking'</a:t>
+            </a:r>
+            <a:pPr indent="0" marL="0">
+              <a:lnSpc>
+                <a:spcPct val="105000"/>
+              </a:lnSpc>
+              <a:spcAft>
+                <a:spcPts val="700"/>
+              </a:spcAft>
+              <a:buNone/>
+            </a:pPr>
+            <a:r>
+              <a:rPr lang="en-US" sz="1000" dirty="0">
+                <a:solidFill>
+                  <a:srgbClr val="1B2559"/>
+                </a:solidFill>
+                <a:latin typeface="Georgia" pitchFamily="34" charset="0"/>
+                <a:ea typeface="Georgia" pitchFamily="34" charset="-122"/>
+                <a:cs typeface="Georgia" pitchFamily="34" charset="-120"/>
+              </a:rPr>
+              <a:t>, which is all about problem solving. So, if you need to be creative with your work, then you should</a:t>
+            </a:r>
+            <a:pPr indent="0" marL="0">
+              <a:lnSpc>
+                <a:spcPct val="105000"/>
+              </a:lnSpc>
+              <a:spcAft>
+                <a:spcPts val="700"/>
+              </a:spcAft>
+              <a:buNone/>
+            </a:pPr>
+            <a:r>
+              <a:rPr lang="en-US" sz="1000" b="1" dirty="0">
+                <a:solidFill>
+                  <a:srgbClr val="2EB872"/>
+                </a:solidFill>
+                <a:latin typeface="Georgia" pitchFamily="34" charset="0"/>
+                <a:ea typeface="Georgia" pitchFamily="34" charset="-122"/>
+                <a:cs typeface="Georgia" pitchFamily="34" charset="-120"/>
+              </a:rPr>
+              <a:t> (5) ________ </a:t>
+            </a:r>
+            <a:pPr indent="0" marL="0">
+              <a:lnSpc>
+                <a:spcPct val="105000"/>
+              </a:lnSpc>
+              <a:spcAft>
+                <a:spcPts val="700"/>
+              </a:spcAft>
+              <a:buNone/>
+            </a:pPr>
+            <a:r>
+              <a:rPr lang="en-US" sz="1000" dirty="0">
+                <a:solidFill>
+                  <a:srgbClr val="1B2559"/>
+                </a:solidFill>
+                <a:latin typeface="Georgia" pitchFamily="34" charset="0"/>
+                <a:ea typeface="Georgia" pitchFamily="34" charset="-122"/>
+                <a:cs typeface="Georgia" pitchFamily="34" charset="-120"/>
+              </a:rPr>
+              <a:t>. But if you're trying to solve a problem, you're better off</a:t>
+            </a:r>
+            <a:pPr indent="0" marL="0">
+              <a:lnSpc>
+                <a:spcPct val="105000"/>
+              </a:lnSpc>
+              <a:spcAft>
+                <a:spcPts val="700"/>
+              </a:spcAft>
+              <a:buNone/>
+            </a:pPr>
+            <a:r>
+              <a:rPr lang="en-US" sz="1000" b="1" dirty="0">
+                <a:solidFill>
+                  <a:srgbClr val="2EB872"/>
+                </a:solidFill>
+                <a:latin typeface="Georgia" pitchFamily="34" charset="0"/>
+                <a:ea typeface="Georgia" pitchFamily="34" charset="-122"/>
+                <a:cs typeface="Georgia" pitchFamily="34" charset="-120"/>
+              </a:rPr>
+              <a:t> (6) ________ </a:t>
+            </a:r>
+            <a:pPr indent="0" marL="0">
+              <a:lnSpc>
+                <a:spcPct val="105000"/>
+              </a:lnSpc>
+              <a:spcAft>
+                <a:spcPts val="700"/>
+              </a:spcAft>
+              <a:buNone/>
+            </a:pPr>
+            <a:r>
+              <a:rPr lang="en-US" sz="1000" dirty="0">
+                <a:solidFill>
+                  <a:srgbClr val="1B2559"/>
+                </a:solidFill>
+                <a:latin typeface="Georgia" pitchFamily="34" charset="0"/>
+                <a:ea typeface="Georgia" pitchFamily="34" charset="-122"/>
+                <a:cs typeface="Georgia" pitchFamily="34" charset="-120"/>
+              </a:rPr>
+              <a:t>.</a:t>
+            </a:r>
+            <a:endParaRPr lang="en-US" sz="1000" dirty="0"/>
+          </a:p>
+        </p:txBody>
+      </p:sp>
+      <p:sp>
+        <p:nvSpPr>
+          <p:cNvPr id="17" name="cd_156"/>
           <p:cNvSpPr/>
           <p:nvPr/>
         </p:nvSpPr>
@@ -30905,7 +31370,7 @@
       </p:sp>
       <p:sp>
         <p:nvSpPr>
-          <p:cNvPr id="17" name="ii_156"/>
+          <p:cNvPr id="18" name="ii_157"/>
           <p:cNvSpPr/>
           <p:nvPr/>
         </p:nvSpPr>
@@ -30941,7 +31406,7 @@
       </p:sp>
       <p:sp>
         <p:nvSpPr>
-          <p:cNvPr id="18" name="ih_157"/>
+          <p:cNvPr id="19" name="ih_158"/>
           <p:cNvSpPr/>
           <p:nvPr/>
         </p:nvSpPr>
@@ -30980,7 +31445,7 @@
       </p:sp>
       <p:sp>
         <p:nvSpPr>
-          <p:cNvPr id="19" name="il_158"/>
+          <p:cNvPr id="20" name="il_159"/>
           <p:cNvSpPr/>
           <p:nvPr/>
         </p:nvSpPr>
@@ -31070,7 +31535,7 @@
       </p:sp>
       <p:sp>
         <p:nvSpPr>
-          <p:cNvPr id="20" name="R1_chip159"/>
+          <p:cNvPr id="21" name="R1_chip160"/>
           <p:cNvSpPr/>
           <p:nvPr/>
         </p:nvSpPr>
@@ -31159,7 +31624,7 @@
                                           </p:stCondLst>
                                         </p:cTn>
                                         <p:tgtEl>
-                                          <p:spTgt spid="20"/>
+                                          <p:spTgt spid="16"/>
                                         </p:tgtEl>
                                         <p:attrNameLst>
                                           <p:attrName>style.visibility</p:attrName>
@@ -31173,7 +31638,42 @@
                                       <p:cBhvr>
                                         <p:cTn id="7" dur="400"/>
                                         <p:tgtEl>
-                                          <p:spTgt spid="20"/>
+                                          <p:spTgt spid="16"/>
+                                        </p:tgtEl>
+                                      </p:cBhvr>
+                                    </p:animEffect>
+                                  </p:childTnLst>
+                                </p:cTn>
+                              </p:par>
+                              <p:par>
+                                <p:cTn id="8" presetID="10" presetClass="entr" presetSubtype="0" fill="hold" nodeType="withEffect">
+                                  <p:stCondLst>
+                                    <p:cond delay="0"/>
+                                  </p:stCondLst>
+                                  <p:childTnLst>
+                                    <p:set>
+                                      <p:cBhvr>
+                                        <p:cTn id="9" dur="1" fill="hold">
+                                          <p:stCondLst>
+                                            <p:cond delay="0"/>
+                                          </p:stCondLst>
+                                        </p:cTn>
+                                        <p:tgtEl>
+                                          <p:spTgt spid="21"/>
+                                        </p:tgtEl>
+                                        <p:attrNameLst>
+                                          <p:attrName>style.visibility</p:attrName>
+                                        </p:attrNameLst>
+                                      </p:cBhvr>
+                                      <p:to>
+                                        <p:strVal val="visible"/>
+                                      </p:to>
+                                    </p:set>
+                                    <p:animEffect transition="in" filter="fade">
+                                      <p:cBhvr>
+                                        <p:cTn id="10" dur="400"/>
+                                        <p:tgtEl>
+                                          <p:spTgt spid="21"/>
                                         </p:tgtEl>
                                       </p:cBhvr>
                                     </p:animEffect>
@@ -31244,7 +31744,7 @@
       </p:grpSpPr>
       <p:sp>
         <p:nvSpPr>
-          <p:cNvPr id="3" name="bd_160"/>
+          <p:cNvPr id="3" name="bd_161"/>
           <p:cNvSpPr/>
           <p:nvPr/>
         </p:nvSpPr>
@@ -31296,7 +31796,7 @@
       </p:sp>
       <p:pic>
         <p:nvPicPr>
-          <p:cNvPr id="4" name="brY_161" descr="/home/claude/lls-course/v2/assets/brush-yellow.png">    </p:cNvPr>
+          <p:cNvPr id="4" name="brY_162" descr="/home/claude/lls-course/v2/assets/brush-yellow.png">    </p:cNvPr>
           <p:cNvPicPr>
             <a:picLocks noChangeAspect="1"/>
           </p:cNvPicPr>
@@ -31320,7 +31820,7 @@
       </p:pic>
       <p:sp>
         <p:nvSpPr>
-          <p:cNvPr id="5" name="title_162"/>
+          <p:cNvPr id="5" name="title_163"/>
           <p:cNvSpPr/>
           <p:nvPr/>
         </p:nvSpPr>
@@ -31361,7 +31861,7 @@
       </p:sp>
       <p:pic>
         <p:nvPicPr>
-          <p:cNvPr id="6" name="brP_163" descr="/home/claude/lls-course/v2/assets/brush-pink.png">    </p:cNvPr>
+          <p:cNvPr id="6" name="brP_164" descr="/home/claude/lls-course/v2/assets/brush-pink.png">    </p:cNvPr>
           <p:cNvPicPr>
             <a:picLocks noChangeAspect="1"/>
           </p:cNvPicPr>
@@ -31385,7 +31885,7 @@
       </p:pic>
       <p:sp>
         <p:nvSpPr>
-          <p:cNvPr id="7" name="ins_164"/>
+          <p:cNvPr id="7" name="ins_165"/>
           <p:cNvSpPr/>
           <p:nvPr/>
         </p:nvSpPr>
@@ -31426,7 +31926,7 @@
       </p:sp>
       <p:sp>
         <p:nvSpPr>
-          <p:cNvPr id="8" name="insIT_165"/>
+          <p:cNvPr id="8" name="insIT_166"/>
           <p:cNvSpPr/>
           <p:nvPr/>
         </p:nvSpPr>
@@ -31467,7 +31967,7 @@
       </p:sp>
       <p:sp>
         <p:nvSpPr>
-          <p:cNvPr id="9" name="cmd_166"/>
+          <p:cNvPr id="9" name="cmd_167"/>
           <p:cNvSpPr/>
           <p:nvPr/>
         </p:nvSpPr>
@@ -31573,7 +32073,7 @@
       </p:sp>
       <p:sp>
         <p:nvSpPr>
-          <p:cNvPr id="10" name="meta_167"/>
+          <p:cNvPr id="10" name="meta_168"/>
           <p:cNvSpPr/>
           <p:nvPr/>
         </p:nvSpPr>
@@ -31622,7 +32122,7 @@
       </p:sp>
       <p:sp>
         <p:nvSpPr>
-          <p:cNvPr id="11" name="tag_168"/>
+          <p:cNvPr id="11" name="tag_169"/>
           <p:cNvSpPr/>
           <p:nvPr/>
         </p:nvSpPr>
@@ -31685,7 +32185,7 @@
       </p:sp>
       <p:pic>
         <p:nvPicPr>
-          <p:cNvPr id="12" name="logo_169" descr="/home/claude/lls-course/v2/img/logo.png">    </p:cNvPr>
+          <p:cNvPr id="12" name="logo_170" descr="/home/claude/lls-course/v2/img/logo.png">    </p:cNvPr>
           <p:cNvPicPr>
             <a:picLocks noChangeAspect="1"/>
           </p:cNvPicPr>
@@ -31709,7 +32209,7 @@
       </p:pic>
       <p:sp>
         <p:nvSpPr>
-          <p:cNvPr id="13" name="foot_170"/>
+          <p:cNvPr id="13" name="foot_171"/>
           <p:cNvSpPr/>
           <p:nvPr/>
         </p:nvSpPr>
@@ -31748,7 +32248,7 @@
       </p:sp>
       <p:sp>
         <p:nvSpPr>
-          <p:cNvPr id="14" name="cd_171"/>
+          <p:cNvPr id="14" name="cd_172"/>
           <p:cNvSpPr/>
           <p:nvPr/>
         </p:nvSpPr>
@@ -31782,7 +32282,7 @@
       </p:sp>
       <p:sp>
         <p:nvSpPr>
-          <p:cNvPr id="15" name="rd_172"/>
+          <p:cNvPr id="15" name="rd_173"/>
           <p:cNvSpPr/>
           <p:nvPr/>
         </p:nvSpPr>
@@ -32139,7 +32639,7 @@
       </p:sp>
       <p:sp>
         <p:nvSpPr>
-          <p:cNvPr id="16" name="R1_rdA173"/>
+          <p:cNvPr id="16" name="R1_rdA174"/>
           <p:cNvSpPr/>
           <p:nvPr/>
         </p:nvSpPr>
@@ -32501,7 +33001,7 @@
       </p:sp>
       <p:sp>
         <p:nvSpPr>
-          <p:cNvPr id="17" name="R2_rdA174"/>
+          <p:cNvPr id="17" name="R2_rdA175"/>
           <p:cNvSpPr/>
           <p:nvPr/>
         </p:nvSpPr>
@@ -32866,7 +33366,7 @@
       </p:sp>
       <p:sp>
         <p:nvSpPr>
-          <p:cNvPr id="18" name="R3_rdA175"/>
+          <p:cNvPr id="18" name="R3_rdA176"/>
           <p:cNvSpPr/>
           <p:nvPr/>
         </p:nvSpPr>
@@ -33234,7 +33734,7 @@
       </p:sp>
       <p:sp>
         <p:nvSpPr>
-          <p:cNvPr id="19" name="R4_rdA176"/>
+          <p:cNvPr id="19" name="R4_rdA177"/>
           <p:cNvSpPr/>
           <p:nvPr/>
         </p:nvSpPr>
@@ -33605,7 +34105,7 @@
       </p:sp>
       <p:sp>
         <p:nvSpPr>
-          <p:cNvPr id="20" name="R5_rdA177"/>
+          <p:cNvPr id="20" name="R5_rdA178"/>
           <p:cNvSpPr/>
           <p:nvPr/>
         </p:nvSpPr>
@@ -33979,7 +34479,7 @@
       </p:sp>
       <p:sp>
         <p:nvSpPr>
-          <p:cNvPr id="21" name="rbh_178"/>
+          <p:cNvPr id="21" name="rbh_179"/>
           <p:cNvSpPr/>
           <p:nvPr/>
         </p:nvSpPr>
@@ -34018,7 +34518,7 @@
       </p:sp>
       <p:sp>
         <p:nvSpPr>
-          <p:cNvPr id="22" name="bd_179"/>
+          <p:cNvPr id="22" name="bd_180"/>
           <p:cNvSpPr/>
           <p:nvPr/>
         </p:nvSpPr>
@@ -34070,7 +34570,7 @@
       </p:sp>
       <p:sp>
         <p:nvSpPr>
-          <p:cNvPr id="23" name="rb_180"/>
+          <p:cNvPr id="23" name="rb_181"/>
           <p:cNvSpPr/>
           <p:nvPr/>
         </p:nvSpPr>
@@ -34119,7 +34619,7 @@
       </p:sp>
       <p:sp>
         <p:nvSpPr>
-          <p:cNvPr id="24" name="bd_181"/>
+          <p:cNvPr id="24" name="bd_182"/>
           <p:cNvSpPr/>
           <p:nvPr/>
         </p:nvSpPr>
@@ -34171,7 +34671,7 @@
       </p:sp>
       <p:sp>
         <p:nvSpPr>
-          <p:cNvPr id="25" name="rb_182"/>
+          <p:cNvPr id="25" name="rb_183"/>
           <p:cNvSpPr/>
           <p:nvPr/>
         </p:nvSpPr>
@@ -34220,7 +34720,7 @@
       </p:sp>
       <p:sp>
         <p:nvSpPr>
-          <p:cNvPr id="26" name="bd_183"/>
+          <p:cNvPr id="26" name="bd_184"/>
           <p:cNvSpPr/>
           <p:nvPr/>
         </p:nvSpPr>
@@ -34272,7 +34772,7 @@
       </p:sp>
       <p:sp>
         <p:nvSpPr>
-          <p:cNvPr id="27" name="rb_184"/>
+          <p:cNvPr id="27" name="rb_185"/>
           <p:cNvSpPr/>
           <p:nvPr/>
         </p:nvSpPr>
@@ -34321,7 +34821,7 @@
       </p:sp>
       <p:sp>
         <p:nvSpPr>
-          <p:cNvPr id="28" name="bd_185"/>
+          <p:cNvPr id="28" name="bd_186"/>
           <p:cNvSpPr/>
           <p:nvPr/>
         </p:nvSpPr>
@@ -34373,7 +34873,7 @@
       </p:sp>
       <p:sp>
         <p:nvSpPr>
-          <p:cNvPr id="29" name="rb_186"/>
+          <p:cNvPr id="29" name="rb_187"/>
           <p:cNvSpPr/>
           <p:nvPr/>
         </p:nvSpPr>
@@ -34422,7 +34922,7 @@
       </p:sp>
       <p:sp>
         <p:nvSpPr>
-          <p:cNvPr id="30" name="bd_187"/>
+          <p:cNvPr id="30" name="bd_188"/>
           <p:cNvSpPr/>
           <p:nvPr/>
         </p:nvSpPr>
@@ -34474,7 +34974,7 @@
       </p:sp>
       <p:sp>
         <p:nvSpPr>
-          <p:cNvPr id="31" name="rb_188"/>
+          <p:cNvPr id="31" name="rb_189"/>
           <p:cNvSpPr/>
           <p:nvPr/>
         </p:nvSpPr>
@@ -34523,7 +35023,7 @@
       </p:sp>
       <p:sp>
         <p:nvSpPr>
-          <p:cNvPr id="32" name="bd_189"/>
+          <p:cNvPr id="32" name="bd_190"/>
           <p:cNvSpPr/>
           <p:nvPr/>
         </p:nvSpPr>
@@ -34575,7 +35075,7 @@
       </p:sp>
       <p:sp>
         <p:nvSpPr>
-          <p:cNvPr id="33" name="rb_190"/>
+          <p:cNvPr id="33" name="rb_191"/>
           <p:cNvSpPr/>
           <p:nvPr/>
         </p:nvSpPr>
@@ -34961,7 +35461,7 @@
       </p:grpSpPr>
       <p:sp>
         <p:nvSpPr>
-          <p:cNvPr id="3" name="bd_191"/>
+          <p:cNvPr id="3" name="bd_192"/>
           <p:cNvSpPr/>
           <p:nvPr/>
         </p:nvSpPr>
@@ -35013,7 +35513,7 @@
       </p:sp>
       <p:pic>
         <p:nvPicPr>
-          <p:cNvPr id="4" name="brY_192" descr="/home/claude/lls-course/v2/assets/brush-yellow.png">    </p:cNvPr>
+          <p:cNvPr id="4" name="brY_193" descr="/home/claude/lls-course/v2/assets/brush-yellow.png">    </p:cNvPr>
           <p:cNvPicPr>
             <a:picLocks noChangeAspect="1"/>
           </p:cNvPicPr>
@@ -35037,7 +35537,7 @@
       </p:pic>
       <p:sp>
         <p:nvSpPr>
-          <p:cNvPr id="5" name="title_193"/>
+          <p:cNvPr id="5" name="title_194"/>
           <p:cNvSpPr/>
           <p:nvPr/>
         </p:nvSpPr>
@@ -35078,7 +35578,7 @@
       </p:sp>
       <p:pic>
         <p:nvPicPr>
-          <p:cNvPr id="6" name="brP_194" descr="/home/claude/lls-course/v2/assets/brush-pink.png">    </p:cNvPr>
+          <p:cNvPr id="6" name="brP_195" descr="/home/claude/lls-course/v2/assets/brush-pink.png">    </p:cNvPr>
           <p:cNvPicPr>
             <a:picLocks noChangeAspect="1"/>
           </p:cNvPicPr>
@@ -35102,7 +35602,7 @@
       </p:pic>
       <p:sp>
         <p:nvSpPr>
-          <p:cNvPr id="7" name="ins_195"/>
+          <p:cNvPr id="7" name="ins_196"/>
           <p:cNvSpPr/>
           <p:nvPr/>
         </p:nvSpPr>
@@ -35143,7 +35643,7 @@
       </p:sp>
       <p:sp>
         <p:nvSpPr>
-          <p:cNvPr id="8" name="insIT_196"/>
+          <p:cNvPr id="8" name="insIT_197"/>
           <p:cNvSpPr/>
           <p:nvPr/>
         </p:nvSpPr>
@@ -35184,7 +35684,7 @@
       </p:sp>
       <p:sp>
         <p:nvSpPr>
-          <p:cNvPr id="9" name="cmd_197"/>
+          <p:cNvPr id="9" name="cmd_198"/>
           <p:cNvSpPr/>
           <p:nvPr/>
         </p:nvSpPr>
@@ -35290,7 +35790,7 @@
       </p:sp>
       <p:sp>
         <p:nvSpPr>
-          <p:cNvPr id="10" name="meta_198"/>
+          <p:cNvPr id="10" name="meta_199"/>
           <p:cNvSpPr/>
           <p:nvPr/>
         </p:nvSpPr>
@@ -35339,7 +35839,7 @@
       </p:sp>
       <p:sp>
         <p:nvSpPr>
-          <p:cNvPr id="11" name="tag_199"/>
+          <p:cNvPr id="11" name="tag_200"/>
           <p:cNvSpPr/>
           <p:nvPr/>
         </p:nvSpPr>
@@ -35402,7 +35902,7 @@
       </p:sp>
       <p:pic>
         <p:nvPicPr>
-          <p:cNvPr id="12" name="logo_200" descr="/home/claude/lls-course/v2/img/logo.png">    </p:cNvPr>
+          <p:cNvPr id="12" name="logo_201" descr="/home/claude/lls-course/v2/img/logo.png">    </p:cNvPr>
           <p:cNvPicPr>
             <a:picLocks noChangeAspect="1"/>
           </p:cNvPicPr>
@@ -35426,7 +35926,7 @@
       </p:pic>
       <p:sp>
         <p:nvSpPr>
-          <p:cNvPr id="13" name="foot_201"/>
+          <p:cNvPr id="13" name="foot_202"/>
           <p:cNvSpPr/>
           <p:nvPr/>
         </p:nvSpPr>
@@ -35465,7 +35965,7 @@
       </p:sp>
       <p:sp>
         <p:nvSpPr>
-          <p:cNvPr id="14" name="pf_202"/>
+          <p:cNvPr id="14" name="pf_203"/>
           <p:cNvSpPr/>
           <p:nvPr/>
         </p:nvSpPr>
@@ -35499,7 +35999,7 @@
       </p:sp>
       <p:pic>
         <p:nvPicPr>
-          <p:cNvPr id="15" name="ph_203" descr="/home/claude/lls-course/v2/cache/b2_6b2_theatre_jpg_489x297_31.png">    </p:cNvPr>
+          <p:cNvPr id="15" name="ph_204" descr="/home/claude/lls-course/v2/cache/b2_6b2_theatre_jpg_489x297_31.png">    </p:cNvPr>
           <p:cNvPicPr>
             <a:picLocks noChangeAspect="1"/>
           </p:cNvPicPr>
@@ -35523,7 +36023,7 @@
       </p:pic>
       <p:sp>
         <p:nvSpPr>
-          <p:cNvPr id="16" name="cd_204"/>
+          <p:cNvPr id="16" name="cd_205"/>
           <p:cNvSpPr/>
           <p:nvPr/>
         </p:nvSpPr>
@@ -35557,7 +36057,7 @@
       </p:sp>
       <p:sp>
         <p:nvSpPr>
-          <p:cNvPr id="17" name="ii_205"/>
+          <p:cNvPr id="17" name="ii_206"/>
           <p:cNvSpPr/>
           <p:nvPr/>
         </p:nvSpPr>
@@ -35593,7 +36093,7 @@
       </p:sp>
       <p:sp>
         <p:nvSpPr>
-          <p:cNvPr id="18" name="ih_206"/>
+          <p:cNvPr id="18" name="ih_207"/>
           <p:cNvSpPr/>
           <p:nvPr/>
         </p:nvSpPr>
@@ -35632,7 +36132,7 @@
       </p:sp>
       <p:sp>
         <p:nvSpPr>
-          <p:cNvPr id="19" name="il_207"/>
+          <p:cNvPr id="19" name="il_208"/>
           <p:cNvSpPr/>
           <p:nvPr/>
         </p:nvSpPr>
@@ -35749,7 +36249,7 @@
       </p:sp>
       <p:sp>
         <p:nvSpPr>
-          <p:cNvPr id="20" name="R1_qb208"/>
+          <p:cNvPr id="20" name="R1_qb209"/>
           <p:cNvSpPr/>
           <p:nvPr/>
         </p:nvSpPr>
@@ -35801,7 +36301,7 @@
       </p:sp>
       <p:sp>
         <p:nvSpPr>
-          <p:cNvPr id="21" name="R1_sq209"/>
+          <p:cNvPr id="21" name="R1_sq210"/>
           <p:cNvSpPr/>
           <p:nvPr/>
         </p:nvSpPr>
@@ -35874,7 +36374,7 @@
       </p:sp>
       <p:sp>
         <p:nvSpPr>
-          <p:cNvPr id="22" name="R2_qb210"/>
+          <p:cNvPr id="22" name="R2_qb211"/>
           <p:cNvSpPr/>
           <p:nvPr/>
         </p:nvSpPr>
@@ -35926,7 +36426,7 @@
       </p:sp>
       <p:sp>
         <p:nvSpPr>
-          <p:cNvPr id="23" name="R2_sq211"/>
+          <p:cNvPr id="23" name="R2_sq212"/>
           <p:cNvSpPr/>
           <p:nvPr/>
         </p:nvSpPr>
@@ -35999,7 +36499,7 @@
       </p:sp>
       <p:sp>
         <p:nvSpPr>
-          <p:cNvPr id="24" name="R3_qb212"/>
+          <p:cNvPr id="24" name="R3_qb213"/>
           <p:cNvSpPr/>
           <p:nvPr/>
         </p:nvSpPr>
@@ -36051,7 +36551,7 @@
       </p:sp>
       <p:sp>
         <p:nvSpPr>
-          <p:cNvPr id="25" name="R3_sq213"/>
+          <p:cNvPr id="25" name="R3_sq214"/>
           <p:cNvSpPr/>
           <p:nvPr/>
         </p:nvSpPr>
@@ -36460,7 +36960,7 @@
       </p:grpSpPr>
       <p:sp>
         <p:nvSpPr>
-          <p:cNvPr id="3" name="bd_214"/>
+          <p:cNvPr id="3" name="bd_215"/>
           <p:cNvSpPr/>
           <p:nvPr/>
         </p:nvSpPr>
@@ -36512,7 +37012,7 @@
       </p:sp>
       <p:pic>
         <p:nvPicPr>
-          <p:cNvPr id="4" name="brY_215" descr="/home/claude/lls-course/v2/assets/brush-yellow.png">    </p:cNvPr>
+          <p:cNvPr id="4" name="brY_216" descr="/home/claude/lls-course/v2/assets/brush-yellow.png">    </p:cNvPr>
           <p:cNvPicPr>
             <a:picLocks noChangeAspect="1"/>
           </p:cNvPicPr>
@@ -36536,7 +37036,7 @@
       </p:pic>
       <p:sp>
         <p:nvSpPr>
-          <p:cNvPr id="5" name="title_216"/>
+          <p:cNvPr id="5" name="title_217"/>
           <p:cNvSpPr/>
           <p:nvPr/>
         </p:nvSpPr>
@@ -36577,7 +37077,7 @@
       </p:sp>
       <p:pic>
         <p:nvPicPr>
-          <p:cNvPr id="6" name="brP_217" descr="/home/claude/lls-course/v2/assets/brush-pink.png">    </p:cNvPr>
+          <p:cNvPr id="6" name="brP_218" descr="/home/claude/lls-course/v2/assets/brush-pink.png">    </p:cNvPr>
           <p:cNvPicPr>
             <a:picLocks noChangeAspect="1"/>
           </p:cNvPicPr>
@@ -36601,7 +37101,7 @@
       </p:pic>
       <p:sp>
         <p:nvSpPr>
-          <p:cNvPr id="7" name="ins_218"/>
+          <p:cNvPr id="7" name="ins_219"/>
           <p:cNvSpPr/>
           <p:nvPr/>
         </p:nvSpPr>
@@ -36642,7 +37142,7 @@
       </p:sp>
       <p:sp>
         <p:nvSpPr>
-          <p:cNvPr id="8" name="insIT_219"/>
+          <p:cNvPr id="8" name="insIT_220"/>
           <p:cNvSpPr/>
           <p:nvPr/>
         </p:nvSpPr>
@@ -36683,7 +37183,7 @@
       </p:sp>
       <p:sp>
         <p:nvSpPr>
-          <p:cNvPr id="9" name="cmd_220"/>
+          <p:cNvPr id="9" name="cmd_221"/>
           <p:cNvSpPr/>
           <p:nvPr/>
         </p:nvSpPr>
@@ -36764,7 +37264,7 @@
       </p:sp>
       <p:sp>
         <p:nvSpPr>
-          <p:cNvPr id="10" name="meta_221"/>
+          <p:cNvPr id="10" name="meta_222"/>
           <p:cNvSpPr/>
           <p:nvPr/>
         </p:nvSpPr>
@@ -36813,7 +37313,7 @@
       </p:sp>
       <p:sp>
         <p:nvSpPr>
-          <p:cNvPr id="11" name="tag_222"/>
+          <p:cNvPr id="11" name="tag_223"/>
           <p:cNvSpPr/>
           <p:nvPr/>
         </p:nvSpPr>
@@ -36876,7 +37376,7 @@
       </p:sp>
       <p:pic>
         <p:nvPicPr>
-          <p:cNvPr id="12" name="logo_223" descr="/home/claude/lls-course/v2/img/logo.png">    </p:cNvPr>
+          <p:cNvPr id="12" name="logo_224" descr="/home/claude/lls-course/v2/img/logo.png">    </p:cNvPr>
           <p:cNvPicPr>
             <a:picLocks noChangeAspect="1"/>
           </p:cNvPicPr>
@@ -36900,7 +37400,7 @@
       </p:pic>
       <p:sp>
         <p:nvSpPr>
-          <p:cNvPr id="13" name="foot_224"/>
+          <p:cNvPr id="13" name="foot_225"/>
           <p:cNvSpPr/>
           <p:nvPr/>
         </p:nvSpPr>
@@ -36939,7 +37439,7 @@
       </p:sp>
       <p:sp>
         <p:nvSpPr>
-          <p:cNvPr id="14" name="cd_225"/>
+          <p:cNvPr id="14" name="cd_226"/>
           <p:cNvSpPr/>
           <p:nvPr/>
         </p:nvSpPr>
@@ -36973,7 +37473,7 @@
       </p:sp>
       <p:sp>
         <p:nvSpPr>
-          <p:cNvPr id="15" name="rd_226"/>
+          <p:cNvPr id="15" name="rd_227"/>
           <p:cNvSpPr/>
           <p:nvPr/>
         </p:nvSpPr>
@@ -37041,7 +37541,7 @@
       </p:sp>
       <p:sp>
         <p:nvSpPr>
-          <p:cNvPr id="16" name="rd_227"/>
+          <p:cNvPr id="16" name="rd_228"/>
           <p:cNvSpPr/>
           <p:nvPr/>
         </p:nvSpPr>
@@ -37109,7 +37609,7 @@
       </p:sp>
       <p:sp>
         <p:nvSpPr>
-          <p:cNvPr id="17" name="rdl_228"/>
+          <p:cNvPr id="17" name="rdl_229"/>
           <p:cNvSpPr/>
           <p:nvPr/>
         </p:nvSpPr>
